--- a/_implementation-notes/evening-series/FotH Evening Session 6 Slides DRAFT v1.pptx
+++ b/_implementation-notes/evening-series/FotH Evening Session 6 Slides DRAFT v1.pptx
@@ -10,6 +10,7 @@
   <p:sldIdLst>
     <p:sldId id="256" r:id="rId2"/>
     <p:sldId id="273" r:id="rId72"/>
+    <p:sldId id="550" r:id="rId25"/>
     <p:sldId id="274" r:id="rId73"/>
     <p:sldId id="371" r:id="rId74"/>
     <p:sldId id="372" r:id="rId75"/>
@@ -19,7 +20,8 @@
     <p:sldId id="376" r:id="rId79"/>
     <p:sldId id="377" r:id="rId80"/>
     <p:sldId id="378" r:id="rId81"/>
-    <p:sldId id="529" r:id="rId82"/>
+    <p:sldId id="551" r:id="rId26"/>
+    <p:sldId id="552" r:id="rId27"/>
     <p:sldId id="549" r:id="rId83"/>
     <p:sldId id="379" r:id="rId84"/>
     <p:sldId id="380" r:id="rId85"/>
@@ -753,6 +755,214 @@
 </p:notes>
 </file>
 
+<file path=ppt/notesSlides/notesSlide17.xml><?xml version="1.0" encoding="utf-8"?>
+<p:notes xmlns:a="http://schemas.openxmlformats.org/drawingml/2006/main" xmlns:p="http://schemas.openxmlformats.org/presentationml/2006/main" xmlns:r="http://schemas.openxmlformats.org/officeDocument/2006/relationships">
+  <p:cSld>
+    <p:spTree>
+      <p:nvGrpSpPr>
+        <p:cNvPr id="1" name=""/>
+        <p:cNvGrpSpPr/>
+        <p:nvPr/>
+      </p:nvGrpSpPr>
+      <p:grpSpPr>
+        <a:xfrm>
+          <a:off x="0" y="0"/>
+          <a:ext cx="0" cy="0"/>
+          <a:chOff x="0" y="0"/>
+          <a:chExt cx="0" cy="0"/>
+        </a:xfrm>
+      </p:grpSpPr>
+      <p:sp>
+        <p:nvSpPr>
+          <p:cNvPr id="2" name="Notes Placeholder 1"/>
+          <p:cNvSpPr>
+            <a:spLocks noGrp="1"/>
+          </p:cNvSpPr>
+          <p:nvPr>
+            <p:ph type="body" idx="1"/>
+          </p:nvPr>
+        </p:nvSpPr>
+        <p:spPr/>
+        <p:txBody>
+          <a:bodyPr/>
+          <a:lstStyle/>
+          <a:p>
+            <a:r>
+              <a:t>S6 · WELCOME · LEAD: CONTAINER HOLDER · GROUNDING — every session opens on this map</a:t>
+            </a:r>
+          </a:p>
+          <a:p>
+            <a:r>
+              <a:t>BEATS:</a:t>
+            </a:r>
+          </a:p>
+          <a:p>
+            <a:r>
+              <a:t>1. Locate tonight on the map, plainly: Session 6 stands deeper in the second box — Connect with Others. Each connection makes the next one real (Matt. 22:37–40).</a:t>
+            </a:r>
+          </a:p>
+          <a:p>
+            <a:r>
+              <a:t>2. The four boxes are one journey — each connection makes the next one real — rooted in the two great commandments: love God, love neighbor (Matt 22:37–40).</a:t>
+            </a:r>
+          </a:p>
+          <a:p>
+            <a:r>
+              <a:t>3. This is also the 'where we are on the map' minute the welcome owes any newcomer.</a:t>
+            </a:r>
+          </a:p>
+          <a:p>
+            <a:r>
+              <a:t>CUES: Two minutes at most; then tonight's road.</a:t>
+            </a:r>
+          </a:p>
+        </p:txBody>
+      </p:sp>
+    </p:spTree>
+  </p:cSld>
+  <p:clrMapOvr>
+    <a:masterClrMapping/>
+  </p:clrMapOvr>
+</p:notes>
+</file>
+
+<file path=ppt/notesSlides/notesSlide18.xml><?xml version="1.0" encoding="utf-8"?>
+<p:notes xmlns:a="http://schemas.openxmlformats.org/drawingml/2006/main" xmlns:p="http://schemas.openxmlformats.org/presentationml/2006/main" xmlns:r="http://schemas.openxmlformats.org/officeDocument/2006/relationships">
+  <p:cSld>
+    <p:spTree>
+      <p:nvGrpSpPr>
+        <p:cNvPr id="1" name=""/>
+        <p:cNvGrpSpPr/>
+        <p:nvPr/>
+      </p:nvGrpSpPr>
+      <p:grpSpPr>
+        <a:xfrm>
+          <a:off x="0" y="0"/>
+          <a:ext cx="0" cy="0"/>
+          <a:chOff x="0" y="0"/>
+          <a:chExt cx="0" cy="0"/>
+        </a:xfrm>
+      </p:grpSpPr>
+      <p:sp>
+        <p:nvSpPr>
+          <p:cNvPr id="2" name="Notes Placeholder 1"/>
+          <p:cNvSpPr>
+            <a:spLocks noGrp="1"/>
+          </p:cNvSpPr>
+          <p:nvPr>
+            <p:ph type="body" idx="1"/>
+          </p:nvPr>
+        </p:nvSpPr>
+        <p:spPr/>
+        <p:txBody>
+          <a:bodyPr/>
+          <a:lstStyle/>
+          <a:p>
+            <a:r>
+              <a:t>S6 · COMMISSIONING · LEAD: CONTENT PRESENTER</a:t>
+            </a:r>
+          </a:p>
+          <a:p>
+            <a:r>
+              <a:t>BEATS:</a:t>
+            </a:r>
+          </a:p>
+          <a:p>
+            <a:r>
+              <a:t>1. The sheet on the screen is the sheet in their hands — walk it, don't read it.</a:t>
+            </a:r>
+          </a:p>
+          <a:p>
+            <a:r>
+              <a:t>2. The standing rhythm first: the morning question, the evening journal line — one box per day on the week-grids.</a:t>
+            </a:r>
+          </a:p>
+          <a:p>
+            <a:r>
+              <a:t>3. A missed box is never a failure — it is an invitation to return.</a:t>
+            </a:r>
+          </a:p>
+          <a:p>
+            <a:r>
+              <a:t>CUES: The four parts are the next slide.</a:t>
+            </a:r>
+          </a:p>
+        </p:txBody>
+      </p:sp>
+    </p:spTree>
+  </p:cSld>
+  <p:clrMapOvr>
+    <a:masterClrMapping/>
+  </p:clrMapOvr>
+</p:notes>
+</file>
+
+<file path=ppt/notesSlides/notesSlide19.xml><?xml version="1.0" encoding="utf-8"?>
+<p:notes xmlns:a="http://schemas.openxmlformats.org/drawingml/2006/main" xmlns:p="http://schemas.openxmlformats.org/presentationml/2006/main" xmlns:r="http://schemas.openxmlformats.org/officeDocument/2006/relationships">
+  <p:cSld>
+    <p:spTree>
+      <p:nvGrpSpPr>
+        <p:cNvPr id="1" name=""/>
+        <p:cNvGrpSpPr/>
+        <p:nvPr/>
+      </p:nvGrpSpPr>
+      <p:grpSpPr>
+        <a:xfrm>
+          <a:off x="0" y="0"/>
+          <a:ext cx="0" cy="0"/>
+          <a:chOff x="0" y="0"/>
+          <a:chExt cx="0" cy="0"/>
+        </a:xfrm>
+      </p:grpSpPr>
+      <p:sp>
+        <p:nvSpPr>
+          <p:cNvPr id="2" name="Notes Placeholder 1"/>
+          <p:cNvSpPr>
+            <a:spLocks noGrp="1"/>
+          </p:cNvSpPr>
+          <p:nvPr>
+            <p:ph type="body" idx="1"/>
+          </p:nvPr>
+        </p:nvSpPr>
+        <p:spPr/>
+        <p:txBody>
+          <a:bodyPr/>
+          <a:lstStyle/>
+          <a:p>
+            <a:r>
+              <a:t>S6 · COMMISSIONING · LEAD: CONTENT PRESENTER</a:t>
+            </a:r>
+          </a:p>
+          <a:p>
+            <a:r>
+              <a:t>BEATS:</a:t>
+            </a:r>
+          </a:p>
+          <a:p>
+            <a:r>
+              <a:t>1. The four parts, in order: the homework practice, week one; the end-of-week-one check-in; the homework practice, week two; one sentence of preparation.</a:t>
+            </a:r>
+          </a:p>
+          <a:p>
+            <a:r>
+              <a:t>2. Check-in partners are named aloud before leaving this slide — the sheet has the line to write the name.</a:t>
+            </a:r>
+          </a:p>
+          <a:p>
+            <a:r>
+              <a:t>GUARD: The sheet-walk, not a re-teach.</a:t>
+            </a:r>
+          </a:p>
+        </p:txBody>
+      </p:sp>
+    </p:spTree>
+  </p:cSld>
+  <p:clrMapOvr>
+    <a:masterClrMapping/>
+  </p:clrMapOvr>
+</p:notes>
+</file>
+
 <file path=ppt/notesSlides/notesSlide70.xml><?xml version="1.0" encoding="utf-8"?>
 <p:notes xmlns:a="http://schemas.openxmlformats.org/drawingml/2006/main" xmlns:r="http://schemas.openxmlformats.org/officeDocument/2006/relationships" xmlns:p="http://schemas.openxmlformats.org/presentationml/2006/main">
   <p:cSld>
@@ -916,38 +1126,37 @@
           <a:lstStyle/>
           <a:p>
             <a:r>
-              <a:rPr lang="en-US" sz="1200"/>
               <a:t>S6 · 7:00–7:08 · LEAD: CONTAINER HOLDER</a:t>
             </a:r>
           </a:p>
           <a:p>
             <a:r>
-              <a:rPr lang="en-US" sz="1200"/>
               <a:t>BEATS:</a:t>
             </a:r>
           </a:p>
           <a:p>
             <a:r>
-              <a:rPr lang="en-US" sz="1200"/>
               <a:t>1. Blessing; container reminder; nothing is required.</a:t>
             </a:r>
           </a:p>
           <a:p>
             <a:r>
-              <a:rPr lang="en-US" sz="1200"/>
               <a:t>2. Say what today is NOT: we will not confess specific sins to each other in detail — scripture does not ask it, and neither do we.</a:t>
             </a:r>
           </a:p>
           <a:p>
             <a:r>
-              <a:rPr lang="en-US" sz="1200"/>
               <a:t>3. Say what it IS: each of us names one place where we want to walk in greater honesty; the circle speaks a blessing of restoration; about three minutes per person; parents first, on purpose.</a:t>
             </a:r>
           </a:p>
           <a:p>
             <a:r>
-              <a:rPr lang="en-US" sz="1200"/>
               <a:t>4. 'Teens, you choose your depth, and the pass is always real. The Spirit does the work; we hold the space.'</a:t>
+            </a:r>
+          </a:p>
+          <a:p>
+            <a:r>
+              <a:t>PAIR LEAD: name the leading pair in the welcome — two leaders hold tonight, and the room will see the evening handed back and forth between them; that is the design. The pair practices the session together beforehand.</a:t>
             </a:r>
           </a:p>
         </p:txBody>
@@ -1224,32 +1433,32 @@
           <a:lstStyle/>
           <a:p>
             <a:r>
-              <a:rPr lang="en-US" sz="1200"/>
               <a:t>S6 · 7:39–7:40 · LEAD: CONTENT PRESENTER · TRANSITION</a:t>
             </a:r>
           </a:p>
           <a:p>
             <a:r>
-              <a:rPr lang="en-US" sz="1200"/>
               <a:t>BEATS:</a:t>
             </a:r>
           </a:p>
           <a:p>
             <a:r>
-              <a:rPr lang="en-US" sz="1200"/>
               <a:t>1. Three things: the prompts are scaffolding — use or ignore; the blessing card has the form — specific, short, witnessed; the container holds — nothing leaves the pair, especially this week.</a:t>
             </a:r>
           </a:p>
           <a:p>
             <a:r>
-              <a:rPr lang="en-US" sz="1200"/>
               <a:t>2. Restate the order: Companion first, then the parents, then the teens — teens' depth is theirs; pass always allowed.</a:t>
             </a:r>
           </a:p>
           <a:p>
             <a:r>
-              <a:rPr lang="en-US" sz="1200"/>
               <a:t>3. Pray and send. Ten or fewer: 'We're staying right here — one circle, same order, same rules.'</a:t>
+            </a:r>
+          </a:p>
+          <a:p>
+            <a:r>
+              <a:t>SMALL ROOM: the split is only necessary if the room is large enough to need it. With six or so, stay one circle — or quick pair work in place, knee to knee. Pair work is also the standing time-recovery lever: a full split-and-merge costs about five minutes.</a:t>
             </a:r>
           </a:p>
         </p:txBody>
@@ -1475,77 +1684,6 @@
             <a:r>
               <a:rPr lang="en-US" sz="1200"/>
               <a:t>3. Quarterly Pulse (H6.3) goes home today: three questions, five minutes, signed or anonymous — back in the bin at the Week 7 door.</a:t>
-            </a:r>
-          </a:p>
-        </p:txBody>
-      </p:sp>
-    </p:spTree>
-  </p:cSld>
-  <p:clrMapOvr>
-    <a:masterClrMapping/>
-  </p:clrMapOvr>
-</p:notes>
-</file>
-
-<file path=ppt/notesSlides/notesSlide80.xml><?xml version="1.0" encoding="utf-8"?>
-<p:notes xmlns:a="http://schemas.openxmlformats.org/drawingml/2006/main" xmlns:r="http://schemas.openxmlformats.org/officeDocument/2006/relationships" xmlns:p="http://schemas.openxmlformats.org/presentationml/2006/main">
-  <p:cSld>
-    <p:spTree>
-      <p:nvGrpSpPr>
-        <p:cNvPr id="1" name=""/>
-        <p:cNvGrpSpPr/>
-        <p:nvPr/>
-      </p:nvGrpSpPr>
-      <p:grpSpPr>
-        <a:xfrm>
-          <a:off x="0" y="0"/>
-          <a:ext cx="0" cy="0"/>
-          <a:chOff x="0" y="0"/>
-          <a:chExt cx="0" cy="0"/>
-        </a:xfrm>
-      </p:grpSpPr>
-      <p:sp>
-        <p:nvSpPr>
-          <p:cNvPr id="2" name="Notes Placeholder 1"/>
-          <p:cNvSpPr>
-            <a:spLocks noGrp="1"/>
-          </p:cNvSpPr>
-          <p:nvPr>
-            <p:ph type="body" idx="1"/>
-          </p:nvPr>
-        </p:nvSpPr>
-        <p:spPr/>
-        <p:txBody>
-          <a:bodyPr/>
-          <a:lstStyle/>
-          <a:p>
-            <a:r>
-              <a:rPr lang="en-US" sz="1200"/>
-              <a:t>S6 · 8:20–8:24 · LEAD: CONTENT PRESENTER</a:t>
-            </a:r>
-          </a:p>
-          <a:p>
-            <a:r>
-              <a:rPr lang="en-US" sz="1200"/>
-              <a:t>BEATS:</a:t>
-            </a:r>
-          </a:p>
-          <a:p>
-            <a:r>
-              <a:rPr lang="en-US" sz="1200"/>
-              <a:t>1. Check-off card (H6.4): morning question, evening note, nightly Examen; one-time box for the Pulse.</a:t>
-            </a:r>
-          </a:p>
-          <a:p>
-            <a:r>
-              <a:rPr lang="en-US" sz="1200"/>
-              <a:t>2. 'Filled or half-filled, bring yourself back when we gather again.'</a:t>
-            </a:r>
-          </a:p>
-          <a:p>
-            <a:r>
-              <a:rPr lang="en-US" sz="1200"/>
-              <a:t>CUES: Rides inside the practice block — make sure every family leaves with a Pulse page.</a:t>
             </a:r>
           </a:p>
         </p:txBody>
@@ -5029,7 +5167,2349 @@
 </p:sld>
 </file>
 
-<file path=ppt/slides/slide71.xml><?xml version="1.0" encoding="utf-8"?>
+<file path=ppt/slides/slide10.xml><?xml version="1.0" encoding="utf-8"?>
+<p:sld xmlns:a="http://schemas.openxmlformats.org/drawingml/2006/main" xmlns:r="http://schemas.openxmlformats.org/officeDocument/2006/relationships" xmlns:p="http://schemas.openxmlformats.org/presentationml/2006/main">
+  <p:cSld>
+    <p:spTree>
+      <p:nvGrpSpPr>
+        <p:cNvPr id="1" name=""/>
+        <p:cNvGrpSpPr/>
+        <p:nvPr/>
+      </p:nvGrpSpPr>
+      <p:grpSpPr>
+        <a:xfrm>
+          <a:off x="0" y="0"/>
+          <a:ext cx="0" cy="0"/>
+          <a:chOff x="0" y="0"/>
+          <a:chExt cx="0" cy="0"/>
+        </a:xfrm>
+      </p:grpSpPr>
+      <p:sp>
+        <p:nvSpPr>
+          <p:cNvPr id="2" name="Rectangle 1"/>
+          <p:cNvSpPr/>
+          <p:nvPr/>
+        </p:nvSpPr>
+        <p:spPr>
+          <a:xfrm>
+            <a:off x="0" y="0"/>
+            <a:ext cx="12191695" cy="6858000"/>
+          </a:xfrm>
+          <a:prstGeom prst="rect">
+            <a:avLst/>
+          </a:prstGeom>
+          <a:solidFill>
+            <a:srgbClr val="FFFFFF"/>
+          </a:solidFill>
+          <a:ln>
+            <a:noFill/>
+          </a:ln>
+        </p:spPr>
+        <p:txBody>
+          <a:bodyPr/>
+          <a:lstStyle/>
+          <a:p>
+            <a:endParaRPr/>
+          </a:p>
+        </p:txBody>
+      </p:sp>
+      <p:sp>
+        <p:nvSpPr>
+          <p:cNvPr id="3" name="TextBox 2"/>
+          <p:cNvSpPr txBox="1"/>
+          <p:nvPr/>
+        </p:nvSpPr>
+        <p:spPr>
+          <a:xfrm>
+            <a:off x="822960" y="502920"/>
+            <a:ext cx="10515600" cy="822960"/>
+          </a:xfrm>
+          <a:prstGeom prst="rect">
+            <a:avLst/>
+          </a:prstGeom>
+          <a:noFill/>
+        </p:spPr>
+        <p:txBody>
+          <a:bodyPr wrap="square">
+            <a:spAutoFit/>
+          </a:bodyPr>
+          <a:lstStyle/>
+          <a:p>
+            <a:pPr algn="l">
+              <a:spcAft>
+                <a:spcPts val="600"/>
+              </a:spcAft>
+            </a:pPr>
+            <a:r>
+              <a:rPr sz="2800" b="1" i="0">
+                <a:solidFill>
+                  <a:srgbClr val="2C5F2D"/>
+                </a:solidFill>
+                <a:latin typeface="Cambria"/>
+              </a:rPr>
+              <a:t>Merge and Shared Blessing</a:t>
+            </a:r>
+          </a:p>
+        </p:txBody>
+      </p:sp>
+      <p:sp>
+        <p:nvSpPr>
+          <p:cNvPr id="4" name="TextBox 4"/>
+          <p:cNvSpPr txBox="1"/>
+          <p:nvPr/>
+        </p:nvSpPr>
+        <p:spPr>
+          <a:xfrm>
+            <a:off x="822960" y="1554480"/>
+            <a:ext cx="10515600" cy="4892040"/>
+          </a:xfrm>
+          <a:prstGeom prst="rect">
+            <a:avLst/>
+          </a:prstGeom>
+          <a:noFill/>
+        </p:spPr>
+        <p:txBody>
+          <a:bodyPr wrap="square" lIns="91440" tIns="91440" rIns="91440" bIns="91440"/>
+          <a:lstStyle/>
+          <a:p>
+            <a:pPr marL="274320" indent="-274320">
+              <a:spcAft>
+                <a:spcPts val="900"/>
+              </a:spcAft>
+            </a:pPr>
+            <a:r>
+              <a:rPr sz="2800" b="1" i="0">
+                <a:solidFill>
+                  <a:srgbClr val="97BC62"/>
+                </a:solidFill>
+                <a:latin typeface="Calibri"/>
+              </a:rPr>
+              <a:t>•  </a:t>
+            </a:r>
+            <a:r>
+              <a:rPr sz="2800" b="0" i="0">
+                <a:solidFill>
+                  <a:srgbClr val="222B22"/>
+                </a:solidFill>
+                <a:latin typeface="Calibri"/>
+              </a:rPr>
+              <a:t>What happened in your pair stays in your pair</a:t>
+            </a:r>
+          </a:p>
+          <a:p>
+            <a:pPr marL="274320" indent="-274320">
+              <a:spcAft>
+                <a:spcPts val="900"/>
+              </a:spcAft>
+            </a:pPr>
+            <a:r>
+              <a:rPr sz="2800" b="1" i="0">
+                <a:solidFill>
+                  <a:srgbClr val="97BC62"/>
+                </a:solidFill>
+                <a:latin typeface="Calibri"/>
+              </a:rPr>
+              <a:t>•  </a:t>
+            </a:r>
+            <a:r>
+              <a:rPr sz="2800" b="0" i="0">
+                <a:solidFill>
+                  <a:srgbClr val="222B22"/>
+                </a:solidFill>
+                <a:latin typeface="Calibri"/>
+              </a:rPr>
+              <a:t>“One word about what tonight was like in your body. ‘Heavy.’ ‘Lighter.’ ‘Held.’ ‘Tender.’ ‘Surprised.’” — an arranged parent starts</a:t>
+            </a:r>
+          </a:p>
+          <a:p>
+            <a:pPr marL="274320" indent="-274320">
+              <a:spcAft>
+                <a:spcPts val="900"/>
+              </a:spcAft>
+            </a:pPr>
+            <a:r>
+              <a:rPr sz="2800" b="1" i="0">
+                <a:solidFill>
+                  <a:srgbClr val="97BC62"/>
+                </a:solidFill>
+                <a:latin typeface="Calibri"/>
+              </a:rPr>
+              <a:t>•  </a:t>
+            </a:r>
+            <a:r>
+              <a:rPr sz="2800" b="0" i="0">
+                <a:solidFill>
+                  <a:srgbClr val="222B22"/>
+                </a:solidFill>
+                <a:latin typeface="Calibri"/>
+              </a:rPr>
+              <a:t>Then one shared blessing of restoration over the whole room — “Hands up if you want”</a:t>
+            </a:r>
+          </a:p>
+          <a:p>
+            <a:pPr marL="274320" indent="-274320">
+              <a:spcAft>
+                <a:spcPts val="900"/>
+              </a:spcAft>
+            </a:pPr>
+            <a:r>
+              <a:rPr sz="2800" b="1" i="0">
+                <a:solidFill>
+                  <a:srgbClr val="97BC62"/>
+                </a:solidFill>
+                <a:latin typeface="Calibri"/>
+              </a:rPr>
+              <a:t>•  </a:t>
+            </a:r>
+            <a:r>
+              <a:rPr sz="2800" b="0" i="0">
+                <a:solidFill>
+                  <a:srgbClr val="222B22"/>
+                </a:solidFill>
+                <a:latin typeface="Calibri"/>
+              </a:rPr>
+              <a:t>“We pray restoration into every place that was named... Holy Spirit, walk these brothers and sisters home.”</a:t>
+            </a:r>
+          </a:p>
+        </p:txBody>
+      </p:sp>
+      <p:sp>
+        <p:nvSpPr>
+          <p:cNvPr id="90" name="SlideNum"/>
+          <p:cNvSpPr txBox="1"/>
+          <p:nvPr/>
+        </p:nvSpPr>
+        <p:spPr>
+          <a:xfrm>
+            <a:off x="11384280" y="6446520"/>
+            <a:ext cx="640080" cy="292608"/>
+          </a:xfrm>
+          <a:prstGeom prst="rect">
+            <a:avLst/>
+          </a:prstGeom>
+          <a:noFill/>
+        </p:spPr>
+        <p:txBody>
+          <a:bodyPr wrap="none" lIns="0" tIns="0" rIns="45720" bIns="0" anchor="ctr"/>
+          <a:lstStyle/>
+          <a:p>
+            <a:pPr algn="r"/>
+            <a:r>
+              <a:t>79</a:t>
+            </a:r>
+            <a:endParaRPr sz="1000" b="1">
+              <a:solidFill>
+                <a:srgbClr val="7A8A6E"/>
+              </a:solidFill>
+              <a:latin typeface="Calibri"/>
+            </a:endParaRPr>
+          </a:p>
+        </p:txBody>
+      </p:sp>
+    </p:spTree>
+  </p:cSld>
+  <p:clrMapOvr>
+    <a:masterClrMapping/>
+  </p:clrMapOvr>
+</p:sld>
+</file>
+
+<file path=ppt/slides/slide11.xml><?xml version="1.0" encoding="utf-8"?>
+<p:sld xmlns:a="http://schemas.openxmlformats.org/drawingml/2006/main" xmlns:r="http://schemas.openxmlformats.org/officeDocument/2006/relationships" xmlns:p="http://schemas.openxmlformats.org/presentationml/2006/main">
+  <p:cSld>
+    <p:spTree>
+      <p:nvGrpSpPr>
+        <p:cNvPr id="1" name=""/>
+        <p:cNvGrpSpPr/>
+        <p:nvPr/>
+      </p:nvGrpSpPr>
+      <p:grpSpPr>
+        <a:xfrm>
+          <a:off x="0" y="0"/>
+          <a:ext cx="0" cy="0"/>
+          <a:chOff x="0" y="0"/>
+          <a:chExt cx="0" cy="0"/>
+        </a:xfrm>
+      </p:grpSpPr>
+      <p:sp>
+        <p:nvSpPr>
+          <p:cNvPr id="2" name="Rectangle 1"/>
+          <p:cNvSpPr/>
+          <p:nvPr/>
+        </p:nvSpPr>
+        <p:spPr>
+          <a:xfrm>
+            <a:off x="0" y="0"/>
+            <a:ext cx="12191695" cy="6858000"/>
+          </a:xfrm>
+          <a:prstGeom prst="rect">
+            <a:avLst/>
+          </a:prstGeom>
+          <a:solidFill>
+            <a:srgbClr val="FFFFFF"/>
+          </a:solidFill>
+          <a:ln>
+            <a:noFill/>
+          </a:ln>
+        </p:spPr>
+        <p:txBody>
+          <a:bodyPr/>
+          <a:lstStyle/>
+          <a:p>
+            <a:endParaRPr/>
+          </a:p>
+        </p:txBody>
+      </p:sp>
+      <p:sp>
+        <p:nvSpPr>
+          <p:cNvPr id="3" name="TextBox 2"/>
+          <p:cNvSpPr txBox="1"/>
+          <p:nvPr/>
+        </p:nvSpPr>
+        <p:spPr>
+          <a:xfrm>
+            <a:off x="822960" y="502920"/>
+            <a:ext cx="10515600" cy="822960"/>
+          </a:xfrm>
+          <a:prstGeom prst="rect">
+            <a:avLst/>
+          </a:prstGeom>
+          <a:noFill/>
+        </p:spPr>
+        <p:txBody>
+          <a:bodyPr wrap="square">
+            <a:spAutoFit/>
+          </a:bodyPr>
+          <a:lstStyle/>
+          <a:p>
+            <a:pPr algn="l">
+              <a:spcAft>
+                <a:spcPts val="600"/>
+              </a:spcAft>
+            </a:pPr>
+            <a:r>
+              <a:rPr sz="2800" b="1" i="0">
+                <a:solidFill>
+                  <a:srgbClr val="2C5F2D"/>
+                </a:solidFill>
+                <a:latin typeface="Cambria"/>
+              </a:rPr>
+              <a:t>Homework — Two Weeks, Four Parts — the Five-Minute Examen</a:t>
+            </a:r>
+          </a:p>
+        </p:txBody>
+      </p:sp>
+      <p:sp>
+        <p:nvSpPr>
+          <p:cNvPr id="4" name="TextBox 4"/>
+          <p:cNvSpPr txBox="1"/>
+          <p:nvPr/>
+        </p:nvSpPr>
+        <p:spPr>
+          <a:xfrm>
+            <a:off x="822960" y="1554480"/>
+            <a:ext cx="6675120" cy="4892040"/>
+          </a:xfrm>
+          <a:prstGeom prst="rect">
+            <a:avLst/>
+          </a:prstGeom>
+          <a:noFill/>
+        </p:spPr>
+        <p:txBody>
+          <a:bodyPr wrap="square" lIns="91440" tIns="91440" rIns="91440" bIns="91440"/>
+          <a:lstStyle/>
+          <a:p>
+            <a:pPr marL="274320" indent="-274320">
+              <a:spcAft>
+                <a:spcPts val="750"/>
+              </a:spcAft>
+            </a:pPr>
+            <a:r>
+              <a:rPr sz="2200" b="1" i="0">
+                <a:solidFill>
+                  <a:srgbClr val="97BC62"/>
+                </a:solidFill>
+                <a:latin typeface="Calibri"/>
+              </a:rPr>
+              <a:t>•  </a:t>
+            </a:r>
+            <a:r>
+              <a:rPr sz="2200" b="0" i="0">
+                <a:solidFill>
+                  <a:srgbClr val="222B22"/>
+                </a:solidFill>
+                <a:latin typeface="Calibri"/>
+              </a:rPr>
+              <a:t>The Five-Minute Examen — five minutes with God each evening, before bed, carried through the quarter break</a:t>
+            </a:r>
+          </a:p>
+          <a:p>
+            <a:pPr marL="342900" indent="-342900">
+              <a:spcAft>
+                <a:spcPts val="750"/>
+              </a:spcAft>
+            </a:pPr>
+            <a:r>
+              <a:rPr sz="2200" b="1" i="0">
+                <a:solidFill>
+                  <a:srgbClr val="97BC62"/>
+                </a:solidFill>
+                <a:latin typeface="Calibri"/>
+              </a:rPr>
+              <a:t>1   </a:t>
+            </a:r>
+            <a:r>
+              <a:rPr sz="2200" b="0" i="0">
+                <a:solidFill>
+                  <a:srgbClr val="222B22"/>
+                </a:solidFill>
+                <a:latin typeface="Calibri"/>
+              </a:rPr>
+              <a:t>Thank Him for one specific thing from the day</a:t>
+            </a:r>
+          </a:p>
+          <a:p>
+            <a:pPr marL="342900" indent="-342900">
+              <a:spcAft>
+                <a:spcPts val="750"/>
+              </a:spcAft>
+            </a:pPr>
+            <a:r>
+              <a:rPr sz="2200" b="1" i="0">
+                <a:solidFill>
+                  <a:srgbClr val="97BC62"/>
+                </a:solidFill>
+                <a:latin typeface="Calibri"/>
+              </a:rPr>
+              <a:t>2   </a:t>
+            </a:r>
+            <a:r>
+              <a:rPr sz="2200" b="0" i="0">
+                <a:solidFill>
+                  <a:srgbClr val="222B22"/>
+                </a:solidFill>
+                <a:latin typeface="Calibri"/>
+              </a:rPr>
+              <a:t>Notice one place where you saw God moving</a:t>
+            </a:r>
+          </a:p>
+          <a:p>
+            <a:pPr marL="342900" indent="-342900">
+              <a:spcAft>
+                <a:spcPts val="750"/>
+              </a:spcAft>
+            </a:pPr>
+            <a:r>
+              <a:rPr sz="2200" b="1" i="0">
+                <a:solidFill>
+                  <a:srgbClr val="97BC62"/>
+                </a:solidFill>
+                <a:latin typeface="Calibri"/>
+              </a:rPr>
+              <a:t>3   </a:t>
+            </a:r>
+            <a:r>
+              <a:rPr sz="2200" b="0" i="0">
+                <a:solidFill>
+                  <a:srgbClr val="222B22"/>
+                </a:solidFill>
+                <a:latin typeface="Calibri"/>
+              </a:rPr>
+              <a:t>Ask Him about one place where you walked in less honesty than you wanted to today — just notice. No fixing</a:t>
+            </a:r>
+          </a:p>
+          <a:p>
+            <a:pPr marL="274320" indent="-274320">
+              <a:spcAft>
+                <a:spcPts val="750"/>
+              </a:spcAft>
+            </a:pPr>
+            <a:r>
+              <a:rPr sz="2200" b="1" i="0">
+                <a:solidFill>
+                  <a:srgbClr val="97BC62"/>
+                </a:solidFill>
+                <a:latin typeface="Calibri"/>
+              </a:rPr>
+              <a:t>•  </a:t>
+            </a:r>
+            <a:r>
+              <a:rPr sz="2200" b="0" i="0">
+                <a:solidFill>
+                  <a:srgbClr val="222B22"/>
+                </a:solidFill>
+                <a:latin typeface="Calibri"/>
+              </a:rPr>
+              <a:t>The Quarterly Pulse goes home tonight — three questions, five minutes, sign it or leave it anonymous</a:t>
+            </a:r>
+          </a:p>
+          <a:p>
+            <a:pPr marL="274320" indent="-274320">
+              <a:spcAft>
+                <a:spcPts val="750"/>
+              </a:spcAft>
+            </a:pPr>
+            <a:r>
+              <a:rPr sz="2200" b="1" i="0">
+                <a:solidFill>
+                  <a:srgbClr val="97BC62"/>
+                </a:solidFill>
+                <a:latin typeface="Calibri"/>
+              </a:rPr>
+              <a:t>•  </a:t>
+            </a:r>
+            <a:r>
+              <a:rPr sz="2200" b="0" i="0">
+                <a:solidFill>
+                  <a:srgbClr val="222B22"/>
+                </a:solidFill>
+                <a:latin typeface="Calibri"/>
+              </a:rPr>
+              <a:t>It comes back to the bin at the door at Week 7</a:t>
+            </a:r>
+          </a:p>
+        </p:txBody>
+      </p:sp>
+      <p:sp>
+        <p:nvSpPr>
+          <p:cNvPr id="90" name="SlideNum"/>
+          <p:cNvSpPr txBox="1"/>
+          <p:nvPr/>
+        </p:nvSpPr>
+        <p:spPr>
+          <a:xfrm>
+            <a:off x="11384280" y="6446520"/>
+            <a:ext cx="640080" cy="292608"/>
+          </a:xfrm>
+          <a:prstGeom prst="rect">
+            <a:avLst/>
+          </a:prstGeom>
+          <a:noFill/>
+        </p:spPr>
+        <p:txBody>
+          <a:bodyPr wrap="none" lIns="0" tIns="0" rIns="45720" bIns="0" anchor="ctr"/>
+          <a:lstStyle/>
+          <a:p>
+            <a:pPr algn="r"/>
+            <a:r>
+              <a:t>80</a:t>
+            </a:r>
+            <a:endParaRPr sz="1000" b="1">
+              <a:solidFill>
+                <a:srgbClr val="7A8A6E"/>
+              </a:solidFill>
+              <a:latin typeface="Calibri"/>
+            </a:endParaRPr>
+          </a:p>
+        </p:txBody>
+      </p:sp>
+      <p:pic>
+        <p:nvPicPr>
+          <p:cNvPr id="33" name="Picture 33" descr="seedling - what grows between Wednesdays"/>
+          <p:cNvPicPr>
+            <a:picLocks noChangeAspect="1"/>
+          </p:cNvPicPr>
+          <p:nvPr/>
+        </p:nvPicPr>
+        <p:blipFill>
+          <a:blip r:embed="rId3"/>
+          <a:stretch>
+            <a:fillRect/>
+          </a:stretch>
+        </p:blipFill>
+        <p:spPr>
+          <a:xfrm>
+            <a:off x="8103612" y="1463040"/>
+            <a:ext cx="3262379" cy="4892040"/>
+          </a:xfrm>
+          <a:prstGeom prst="rect">
+            <a:avLst/>
+          </a:prstGeom>
+          <a:ln w="76200">
+            <a:solidFill>
+              <a:srgbClr val="FFFFFF"/>
+            </a:solidFill>
+          </a:ln>
+          <a:effectLst>
+            <a:outerShdw blurRad="63500" dist="25400" dir="5400000" rotWithShape="0">
+              <a:srgbClr val="000000">
+                <a:alpha val="35000"/>
+              </a:srgbClr>
+            </a:outerShdw>
+          </a:effectLst>
+        </p:spPr>
+      </p:pic>
+    </p:spTree>
+  </p:cSld>
+  <p:clrMapOvr>
+    <a:masterClrMapping/>
+  </p:clrMapOvr>
+</p:sld>
+</file>
+
+<file path=ppt/slides/slide13.xml><?xml version="1.0" encoding="utf-8"?>
+<p:sld xmlns:a="http://schemas.openxmlformats.org/drawingml/2006/main" xmlns:r="http://schemas.openxmlformats.org/officeDocument/2006/relationships" xmlns:p="http://schemas.openxmlformats.org/presentationml/2006/main">
+  <p:cSld>
+    <p:spTree>
+      <p:nvGrpSpPr>
+        <p:cNvPr id="1" name=""/>
+        <p:cNvGrpSpPr/>
+        <p:nvPr/>
+      </p:nvGrpSpPr>
+      <p:grpSpPr>
+        <a:xfrm>
+          <a:off x="0" y="0"/>
+          <a:ext cx="0" cy="0"/>
+          <a:chOff x="0" y="0"/>
+          <a:chExt cx="0" cy="0"/>
+        </a:xfrm>
+      </p:grpSpPr>
+      <p:sp>
+        <p:nvSpPr>
+          <p:cNvPr id="2" name="Rectangle 1"/>
+          <p:cNvSpPr/>
+          <p:nvPr/>
+        </p:nvSpPr>
+        <p:spPr>
+          <a:xfrm>
+            <a:off x="0" y="0"/>
+            <a:ext cx="12191695" cy="6858000"/>
+          </a:xfrm>
+          <a:prstGeom prst="rect">
+            <a:avLst/>
+          </a:prstGeom>
+          <a:solidFill>
+            <a:srgbClr val="FFFFFF"/>
+          </a:solidFill>
+          <a:ln>
+            <a:noFill/>
+          </a:ln>
+        </p:spPr>
+        <p:txBody>
+          <a:bodyPr/>
+          <a:lstStyle/>
+          <a:p>
+            <a:endParaRPr/>
+          </a:p>
+        </p:txBody>
+      </p:sp>
+      <p:sp>
+        <p:nvSpPr>
+          <p:cNvPr id="3" name="TextBox 2"/>
+          <p:cNvSpPr txBox="1"/>
+          <p:nvPr/>
+        </p:nvSpPr>
+        <p:spPr>
+          <a:xfrm>
+            <a:off x="822960" y="502920"/>
+            <a:ext cx="10515600" cy="822960"/>
+          </a:xfrm>
+          <a:prstGeom prst="rect">
+            <a:avLst/>
+          </a:prstGeom>
+          <a:noFill/>
+        </p:spPr>
+        <p:txBody>
+          <a:bodyPr wrap="square">
+            <a:spAutoFit/>
+          </a:bodyPr>
+          <a:lstStyle/>
+          <a:p>
+            <a:pPr algn="l">
+              <a:spcAft>
+                <a:spcPts val="600"/>
+              </a:spcAft>
+            </a:pPr>
+            <a:r>
+              <a:rPr sz="2800" b="1" i="0">
+                <a:solidFill>
+                  <a:srgbClr val="2C5F2D"/>
+                </a:solidFill>
+                <a:latin typeface="Cambria"/>
+              </a:rPr>
+              <a:t>Three Questions, Carried Home</a:t>
+            </a:r>
+          </a:p>
+        </p:txBody>
+      </p:sp>
+      <p:sp>
+        <p:nvSpPr>
+          <p:cNvPr id="90" name="SlideNum"/>
+          <p:cNvSpPr txBox="1"/>
+          <p:nvPr/>
+        </p:nvSpPr>
+        <p:spPr>
+          <a:xfrm>
+            <a:off x="11384280" y="6446520"/>
+            <a:ext cx="640080" cy="292608"/>
+          </a:xfrm>
+          <a:prstGeom prst="rect">
+            <a:avLst/>
+          </a:prstGeom>
+          <a:noFill/>
+        </p:spPr>
+        <p:txBody>
+          <a:bodyPr wrap="none" lIns="0" tIns="0" rIns="45720" bIns="0" anchor="ctr"/>
+          <a:lstStyle/>
+          <a:p>
+            <a:pPr algn="r"/>
+            <a:r>
+              <a:t>82</a:t>
+            </a:r>
+            <a:endParaRPr sz="1000" b="1">
+              <a:solidFill>
+                <a:srgbClr val="7A8A6E"/>
+              </a:solidFill>
+              <a:latin typeface="Calibri"/>
+            </a:endParaRPr>
+          </a:p>
+        </p:txBody>
+      </p:sp>
+      <p:sp>
+        <p:nvSpPr>
+          <p:cNvPr id="290" name="RoomQuestion"/>
+          <p:cNvSpPr txBox="1"/>
+          <p:nvPr/>
+        </p:nvSpPr>
+        <p:spPr>
+          <a:xfrm>
+            <a:off x="822960" y="1417320"/>
+            <a:ext cx="10515600" cy="5029200"/>
+          </a:xfrm>
+          <a:prstGeom prst="rect">
+            <a:avLst/>
+          </a:prstGeom>
+          <a:noFill/>
+        </p:spPr>
+        <p:txBody>
+          <a:bodyPr wrap="square"/>
+          <a:lstStyle/>
+          <a:p>
+            <a:pPr algn="l">
+              <a:spcAft>
+                <a:spcPts val="1300"/>
+              </a:spcAft>
+            </a:pPr>
+            <a:r>
+              <a:rPr sz="1900" b="0" i="0">
+                <a:solidFill>
+                  <a:srgbClr val="222B22"/>
+                </a:solidFill>
+                <a:latin typeface="Calibri"/>
+              </a:rPr>
+              <a:t>Every week we close the same way — the leader’s reflection, then the room’s. Tonight closes a whole quarter, so the same questions come home for all of us:</a:t>
+            </a:r>
+          </a:p>
+          <a:p>
+            <a:pPr algn="l">
+              <a:spcAft>
+                <a:spcPts val="1100"/>
+              </a:spcAft>
+            </a:pPr>
+            <a:r>
+              <a:rPr sz="2400" b="1" i="0">
+                <a:solidFill>
+                  <a:srgbClr val="97BC62"/>
+                </a:solidFill>
+                <a:latin typeface="Calibri"/>
+              </a:rPr>
+              <a:t>1   </a:t>
+            </a:r>
+            <a:r>
+              <a:rPr sz="2400" b="0" i="0">
+                <a:solidFill>
+                  <a:srgbClr val="222B22"/>
+                </a:solidFill>
+                <a:latin typeface="Calibri"/>
+              </a:rPr>
+              <a:t>What’s working well that we ought to keep doing next quarter?</a:t>
+            </a:r>
+          </a:p>
+          <a:p>
+            <a:pPr algn="l">
+              <a:spcAft>
+                <a:spcPts val="1100"/>
+              </a:spcAft>
+            </a:pPr>
+            <a:r>
+              <a:rPr sz="2400" b="1" i="0">
+                <a:solidFill>
+                  <a:srgbClr val="97BC62"/>
+                </a:solidFill>
+                <a:latin typeface="Calibri"/>
+              </a:rPr>
+              <a:t>2   </a:t>
+            </a:r>
+            <a:r>
+              <a:rPr sz="2400" b="0" i="0">
+                <a:solidFill>
+                  <a:srgbClr val="222B22"/>
+                </a:solidFill>
+                <a:latin typeface="Calibri"/>
+              </a:rPr>
+              <a:t>What could we do differently that would make things even better?</a:t>
+            </a:r>
+          </a:p>
+          <a:p>
+            <a:pPr algn="l">
+              <a:spcAft>
+                <a:spcPts val="1100"/>
+              </a:spcAft>
+            </a:pPr>
+            <a:r>
+              <a:rPr sz="2400" b="1" i="0">
+                <a:solidFill>
+                  <a:srgbClr val="97BC62"/>
+                </a:solidFill>
+                <a:latin typeface="Calibri"/>
+              </a:rPr>
+              <a:t>3   </a:t>
+            </a:r>
+            <a:r>
+              <a:rPr sz="2400" b="0" i="0">
+                <a:solidFill>
+                  <a:srgbClr val="222B22"/>
+                </a:solidFill>
+                <a:latin typeface="Calibri"/>
+              </a:rPr>
+              <a:t>What would you tell somebody else about what this group is like?</a:t>
+            </a:r>
+          </a:p>
+          <a:p>
+            <a:pPr algn="l">
+              <a:spcBef>
+                <a:spcPts val="1300"/>
+              </a:spcBef>
+              <a:spcAft>
+                <a:spcPts val="1000"/>
+              </a:spcAft>
+            </a:pPr>
+            <a:r>
+              <a:rPr sz="1600" b="0" i="1">
+                <a:solidFill>
+                  <a:srgbClr val="222B22"/>
+                </a:solidFill>
+                <a:latin typeface="Calibri"/>
+              </a:rPr>
+              <a:t>No paper. Nothing to prepare. The group, never any one person. First night back, we talk.</a:t>
+            </a:r>
+          </a:p>
+        </p:txBody>
+      </p:sp>
+    </p:spTree>
+  </p:cSld>
+  <p:clrMapOvr>
+    <a:masterClrMapping/>
+  </p:clrMapOvr>
+</p:sld>
+</file>
+
+<file path=ppt/slides/slide14.xml><?xml version="1.0" encoding="utf-8"?>
+<p:sld xmlns:a="http://schemas.openxmlformats.org/drawingml/2006/main" xmlns:r="http://schemas.openxmlformats.org/officeDocument/2006/relationships" xmlns:p="http://schemas.openxmlformats.org/presentationml/2006/main">
+  <p:cSld>
+    <p:spTree>
+      <p:nvGrpSpPr>
+        <p:cNvPr id="1" name=""/>
+        <p:cNvGrpSpPr/>
+        <p:nvPr/>
+      </p:nvGrpSpPr>
+      <p:grpSpPr>
+        <a:xfrm>
+          <a:off x="0" y="0"/>
+          <a:ext cx="0" cy="0"/>
+          <a:chOff x="0" y="0"/>
+          <a:chExt cx="0" cy="0"/>
+        </a:xfrm>
+      </p:grpSpPr>
+      <p:sp>
+        <p:nvSpPr>
+          <p:cNvPr id="2" name="Rectangle 1"/>
+          <p:cNvSpPr/>
+          <p:nvPr/>
+        </p:nvSpPr>
+        <p:spPr>
+          <a:xfrm>
+            <a:off x="0" y="0"/>
+            <a:ext cx="12191695" cy="6858000"/>
+          </a:xfrm>
+          <a:prstGeom prst="rect">
+            <a:avLst/>
+          </a:prstGeom>
+          <a:solidFill>
+            <a:srgbClr val="FFFFFF"/>
+          </a:solidFill>
+          <a:ln>
+            <a:noFill/>
+          </a:ln>
+        </p:spPr>
+        <p:txBody>
+          <a:bodyPr/>
+          <a:lstStyle/>
+          <a:p>
+            <a:endParaRPr/>
+          </a:p>
+        </p:txBody>
+      </p:sp>
+      <p:sp>
+        <p:nvSpPr>
+          <p:cNvPr id="3" name="TextBox 2"/>
+          <p:cNvSpPr txBox="1"/>
+          <p:nvPr/>
+        </p:nvSpPr>
+        <p:spPr>
+          <a:xfrm>
+            <a:off x="822960" y="502920"/>
+            <a:ext cx="10515600" cy="822960"/>
+          </a:xfrm>
+          <a:prstGeom prst="rect">
+            <a:avLst/>
+          </a:prstGeom>
+          <a:noFill/>
+        </p:spPr>
+        <p:txBody>
+          <a:bodyPr wrap="square">
+            <a:spAutoFit/>
+          </a:bodyPr>
+          <a:lstStyle/>
+          <a:p>
+            <a:pPr algn="l">
+              <a:spcAft>
+                <a:spcPts val="600"/>
+              </a:spcAft>
+            </a:pPr>
+            <a:r>
+              <a:rPr sz="2800" b="1" i="0">
+                <a:solidFill>
+                  <a:srgbClr val="2C5F2D"/>
+                </a:solidFill>
+                <a:latin typeface="Cambria"/>
+              </a:rPr>
+              <a:t>The Leader Feedback Round</a:t>
+            </a:r>
+          </a:p>
+        </p:txBody>
+      </p:sp>
+      <p:sp>
+        <p:nvSpPr>
+          <p:cNvPr id="4" name="TextBox 4"/>
+          <p:cNvSpPr txBox="1"/>
+          <p:nvPr/>
+        </p:nvSpPr>
+        <p:spPr>
+          <a:xfrm>
+            <a:off x="822960" y="1554480"/>
+            <a:ext cx="6675120" cy="4892040"/>
+          </a:xfrm>
+          <a:prstGeom prst="rect">
+            <a:avLst/>
+          </a:prstGeom>
+          <a:noFill/>
+        </p:spPr>
+        <p:txBody>
+          <a:bodyPr wrap="square" lIns="91440" tIns="91440" rIns="91440" bIns="91440"/>
+          <a:lstStyle/>
+          <a:p>
+            <a:pPr marL="274320" indent="-274320">
+              <a:spcAft>
+                <a:spcPts val="900"/>
+              </a:spcAft>
+            </a:pPr>
+            <a:r>
+              <a:rPr sz="2800" b="1" i="0">
+                <a:solidFill>
+                  <a:srgbClr val="97BC62"/>
+                </a:solidFill>
+                <a:latin typeface="Calibri"/>
+              </a:rPr>
+              <a:t>•  </a:t>
+            </a:r>
+            <a:r>
+              <a:rPr sz="2800" b="0" i="0">
+                <a:solidFill>
+                  <a:srgbClr val="222B22"/>
+                </a:solidFill>
+                <a:latin typeface="Calibri"/>
+              </a:rPr>
+              <a:t>Two rounds, same as every session — the container holder first, then the content presenter: three things each</a:t>
+            </a:r>
+          </a:p>
+          <a:p>
+            <a:pPr marL="685800" indent="-274320">
+              <a:spcAft>
+                <a:spcPts val="700"/>
+              </a:spcAft>
+            </a:pPr>
+            <a:r>
+              <a:rPr sz="2000" b="1" i="0">
+                <a:solidFill>
+                  <a:srgbClr val="97BC62"/>
+                </a:solidFill>
+                <a:latin typeface="Calibri"/>
+              </a:rPr>
+              <a:t>–  </a:t>
+            </a:r>
+            <a:r>
+              <a:rPr sz="2000" b="0" i="1">
+                <a:solidFill>
+                  <a:srgbClr val="222B22"/>
+                </a:solidFill>
+                <a:latin typeface="Calibri"/>
+              </a:rPr>
+              <a:t>“What I think went well tonight: ______”</a:t>
+            </a:r>
+          </a:p>
+          <a:p>
+            <a:pPr marL="685800" indent="-274320">
+              <a:spcAft>
+                <a:spcPts val="700"/>
+              </a:spcAft>
+            </a:pPr>
+            <a:r>
+              <a:rPr sz="2000" b="1" i="0">
+                <a:solidFill>
+                  <a:srgbClr val="97BC62"/>
+                </a:solidFill>
+                <a:latin typeface="Calibri"/>
+              </a:rPr>
+              <a:t>–  </a:t>
+            </a:r>
+            <a:r>
+              <a:rPr sz="2000" b="0" i="1">
+                <a:solidFill>
+                  <a:srgbClr val="222B22"/>
+                </a:solidFill>
+                <a:latin typeface="Calibri"/>
+              </a:rPr>
+              <a:t>“What I’d do differently next time: ______”</a:t>
+            </a:r>
+          </a:p>
+          <a:p>
+            <a:pPr marL="685800" indent="-274320">
+              <a:spcAft>
+                <a:spcPts val="700"/>
+              </a:spcAft>
+            </a:pPr>
+            <a:r>
+              <a:rPr sz="2000" b="1" i="0">
+                <a:solidFill>
+                  <a:srgbClr val="97BC62"/>
+                </a:solidFill>
+                <a:latin typeface="Calibri"/>
+              </a:rPr>
+              <a:t>–  </a:t>
+            </a:r>
+            <a:r>
+              <a:rPr sz="2000" b="0" i="1">
+                <a:solidFill>
+                  <a:srgbClr val="222B22"/>
+                </a:solidFill>
+                <a:latin typeface="Calibri"/>
+              </a:rPr>
+              <a:t>“If I were to teach tonight’s process to someone, I would tell them: ______”</a:t>
+            </a:r>
+          </a:p>
+          <a:p>
+            <a:pPr marL="274320" indent="-274320">
+              <a:spcAft>
+                <a:spcPts val="900"/>
+              </a:spcAft>
+            </a:pPr>
+            <a:r>
+              <a:rPr sz="2800" b="1" i="0">
+                <a:solidFill>
+                  <a:srgbClr val="97BC62"/>
+                </a:solidFill>
+                <a:latin typeface="Calibri"/>
+              </a:rPr>
+              <a:t>•  </a:t>
+            </a:r>
+            <a:r>
+              <a:rPr sz="2800" b="0" i="0">
+                <a:solidFill>
+                  <a:srgbClr val="222B22"/>
+                </a:solidFill>
+                <a:latin typeface="Calibri"/>
+              </a:rPr>
+              <a:t>Then the room — the same two questions about tonight</a:t>
+            </a:r>
+          </a:p>
+          <a:p>
+            <a:pPr marL="274320" indent="-274320">
+              <a:spcAft>
+                <a:spcPts val="900"/>
+              </a:spcAft>
+            </a:pPr>
+            <a:r>
+              <a:rPr sz="2800" b="1" i="0">
+                <a:solidFill>
+                  <a:srgbClr val="97BC62"/>
+                </a:solidFill>
+                <a:latin typeface="Calibri"/>
+              </a:rPr>
+              <a:t>•  </a:t>
+            </a:r>
+            <a:r>
+              <a:rPr sz="2800" b="0" i="0">
+                <a:solidFill>
+                  <a:srgbClr val="222B22"/>
+                </a:solidFill>
+                <a:latin typeface="Calibri"/>
+              </a:rPr>
+              <a:t>The leaders receive without defending — “thank you” is the whole response</a:t>
+            </a:r>
+          </a:p>
+        </p:txBody>
+      </p:sp>
+      <p:sp>
+        <p:nvSpPr>
+          <p:cNvPr id="90" name="SlideNum"/>
+          <p:cNvSpPr txBox="1"/>
+          <p:nvPr/>
+        </p:nvSpPr>
+        <p:spPr>
+          <a:xfrm>
+            <a:off x="11384280" y="6446520"/>
+            <a:ext cx="640080" cy="292608"/>
+          </a:xfrm>
+          <a:prstGeom prst="rect">
+            <a:avLst/>
+          </a:prstGeom>
+          <a:noFill/>
+        </p:spPr>
+        <p:txBody>
+          <a:bodyPr wrap="none" lIns="0" tIns="0" rIns="45720" bIns="0" anchor="ctr"/>
+          <a:lstStyle/>
+          <a:p>
+            <a:pPr algn="r"/>
+            <a:r>
+              <a:t>83</a:t>
+            </a:r>
+            <a:endParaRPr sz="1000" b="1">
+              <a:solidFill>
+                <a:srgbClr val="7A8A6E"/>
+              </a:solidFill>
+              <a:latin typeface="Calibri"/>
+            </a:endParaRPr>
+          </a:p>
+        </p:txBody>
+      </p:sp>
+      <p:pic>
+        <p:nvPicPr>
+          <p:cNvPr id="33" name="Picture 33" descr="compass on the trail - the weekly bearing check"/>
+          <p:cNvPicPr>
+            <a:picLocks noChangeAspect="1"/>
+          </p:cNvPicPr>
+          <p:nvPr/>
+        </p:nvPicPr>
+        <p:blipFill>
+          <a:blip r:embed="rId3"/>
+          <a:stretch>
+            <a:fillRect/>
+          </a:stretch>
+        </p:blipFill>
+        <p:spPr>
+          <a:xfrm>
+            <a:off x="8106160" y="1463040"/>
+            <a:ext cx="3259831" cy="4892040"/>
+          </a:xfrm>
+          <a:prstGeom prst="rect">
+            <a:avLst/>
+          </a:prstGeom>
+          <a:ln w="76200">
+            <a:solidFill>
+              <a:srgbClr val="FFFFFF"/>
+            </a:solidFill>
+          </a:ln>
+          <a:effectLst>
+            <a:outerShdw blurRad="63500" dist="25400" dir="5400000" rotWithShape="0">
+              <a:srgbClr val="000000">
+                <a:alpha val="35000"/>
+              </a:srgbClr>
+            </a:outerShdw>
+          </a:effectLst>
+        </p:spPr>
+      </p:pic>
+    </p:spTree>
+  </p:cSld>
+  <p:clrMapOvr>
+    <a:masterClrMapping/>
+  </p:clrMapOvr>
+</p:sld>
+</file>
+
+<file path=ppt/slides/slide15.xml><?xml version="1.0" encoding="utf-8"?>
+<p:sld xmlns:a="http://schemas.openxmlformats.org/drawingml/2006/main" xmlns:r="http://schemas.openxmlformats.org/officeDocument/2006/relationships" xmlns:p="http://schemas.openxmlformats.org/presentationml/2006/main">
+  <p:cSld>
+    <p:spTree>
+      <p:nvGrpSpPr>
+        <p:cNvPr id="1" name=""/>
+        <p:cNvGrpSpPr/>
+        <p:nvPr/>
+      </p:nvGrpSpPr>
+      <p:grpSpPr>
+        <a:xfrm>
+          <a:off x="0" y="0"/>
+          <a:ext cx="0" cy="0"/>
+          <a:chOff x="0" y="0"/>
+          <a:chExt cx="0" cy="0"/>
+        </a:xfrm>
+      </p:grpSpPr>
+      <p:sp>
+        <p:nvSpPr>
+          <p:cNvPr id="2" name="Rectangle 1"/>
+          <p:cNvSpPr/>
+          <p:nvPr/>
+        </p:nvSpPr>
+        <p:spPr>
+          <a:xfrm>
+            <a:off x="0" y="0"/>
+            <a:ext cx="12191695" cy="6858000"/>
+          </a:xfrm>
+          <a:prstGeom prst="rect">
+            <a:avLst/>
+          </a:prstGeom>
+          <a:solidFill>
+            <a:srgbClr val="FFFFFF"/>
+          </a:solidFill>
+          <a:ln>
+            <a:noFill/>
+          </a:ln>
+        </p:spPr>
+        <p:txBody>
+          <a:bodyPr/>
+          <a:lstStyle/>
+          <a:p>
+            <a:endParaRPr/>
+          </a:p>
+        </p:txBody>
+      </p:sp>
+      <p:sp>
+        <p:nvSpPr>
+          <p:cNvPr id="3" name="TextBox 2"/>
+          <p:cNvSpPr txBox="1"/>
+          <p:nvPr/>
+        </p:nvSpPr>
+        <p:spPr>
+          <a:xfrm>
+            <a:off x="822960" y="502920"/>
+            <a:ext cx="10515600" cy="822960"/>
+          </a:xfrm>
+          <a:prstGeom prst="rect">
+            <a:avLst/>
+          </a:prstGeom>
+          <a:noFill/>
+        </p:spPr>
+        <p:txBody>
+          <a:bodyPr wrap="square">
+            <a:spAutoFit/>
+          </a:bodyPr>
+          <a:lstStyle/>
+          <a:p>
+            <a:pPr algn="l">
+              <a:spcAft>
+                <a:spcPts val="600"/>
+              </a:spcAft>
+            </a:pPr>
+            <a:r>
+              <a:rPr sz="2800" b="1" i="0">
+                <a:solidFill>
+                  <a:srgbClr val="2C5F2D"/>
+                </a:solidFill>
+                <a:latin typeface="Cambria"/>
+              </a:rPr>
+              <a:t>Closing the Container + Aaronic Blessing</a:t>
+            </a:r>
+          </a:p>
+        </p:txBody>
+      </p:sp>
+      <p:sp>
+        <p:nvSpPr>
+          <p:cNvPr id="4" name="TextBox 4"/>
+          <p:cNvSpPr txBox="1"/>
+          <p:nvPr/>
+        </p:nvSpPr>
+        <p:spPr>
+          <a:xfrm>
+            <a:off x="822960" y="1600200"/>
+            <a:ext cx="5669280" cy="4572000"/>
+          </a:xfrm>
+          <a:prstGeom prst="rect">
+            <a:avLst/>
+          </a:prstGeom>
+          <a:noFill/>
+        </p:spPr>
+        <p:txBody>
+          <a:bodyPr wrap="square" lIns="91440" tIns="91440" rIns="91440" bIns="91440"/>
+          <a:lstStyle/>
+          <a:p>
+            <a:pPr marL="274320" indent="-274320">
+              <a:spcAft>
+                <a:spcPts val="900"/>
+              </a:spcAft>
+            </a:pPr>
+            <a:r>
+              <a:rPr sz="2200" b="1" i="0">
+                <a:solidFill>
+                  <a:srgbClr val="97BC62"/>
+                </a:solidFill>
+                <a:latin typeface="Calibri"/>
+              </a:rPr>
+              <a:t>•  </a:t>
+            </a:r>
+            <a:r>
+              <a:rPr sz="2200" b="0" i="0">
+                <a:solidFill>
+                  <a:srgbClr val="222B22"/>
+                </a:solidFill>
+                <a:latin typeface="Calibri"/>
+              </a:rPr>
+              <a:t>We close the way we opened — the container, six steps:</a:t>
+            </a:r>
+          </a:p>
+          <a:p>
+            <a:pPr marL="685800" indent="-274320">
+              <a:spcAft>
+                <a:spcPts val="700"/>
+              </a:spcAft>
+            </a:pPr>
+            <a:r>
+              <a:rPr sz="2000" b="1" i="0">
+                <a:solidFill>
+                  <a:srgbClr val="97BC62"/>
+                </a:solidFill>
+                <a:latin typeface="Calibri"/>
+              </a:rPr>
+              <a:t>1   </a:t>
+            </a:r>
+            <a:r>
+              <a:rPr sz="2000" b="0" i="0">
+                <a:solidFill>
+                  <a:srgbClr val="222B22"/>
+                </a:solidFill>
+                <a:latin typeface="Calibri"/>
+              </a:rPr>
+              <a:t>Stand again — same circle, same posture as the open</a:t>
+            </a:r>
+          </a:p>
+          <a:p>
+            <a:pPr marL="685800" indent="-274320">
+              <a:spcAft>
+                <a:spcPts val="700"/>
+              </a:spcAft>
+            </a:pPr>
+            <a:r>
+              <a:rPr sz="2000" b="1" i="0">
+                <a:solidFill>
+                  <a:srgbClr val="97BC62"/>
+                </a:solidFill>
+                <a:latin typeface="Calibri"/>
+              </a:rPr>
+              <a:t>2   </a:t>
+            </a:r>
+            <a:r>
+              <a:rPr sz="2000" b="0" i="0">
+                <a:solidFill>
+                  <a:srgbClr val="222B22"/>
+                </a:solidFill>
+                <a:latin typeface="Calibri"/>
+              </a:rPr>
+              <a:t>One-word landing — compare it to your opening word</a:t>
+            </a:r>
+          </a:p>
+          <a:p>
+            <a:pPr marL="685800" indent="-274320">
+              <a:spcAft>
+                <a:spcPts val="700"/>
+              </a:spcAft>
+            </a:pPr>
+            <a:r>
+              <a:rPr sz="2000" b="1" i="0">
+                <a:solidFill>
+                  <a:srgbClr val="97BC62"/>
+                </a:solidFill>
+                <a:latin typeface="Calibri"/>
+              </a:rPr>
+              <a:t>3   </a:t>
+            </a:r>
+            <a:r>
+              <a:rPr sz="2000" b="0" i="0">
+                <a:solidFill>
+                  <a:srgbClr val="222B22"/>
+                </a:solidFill>
+                <a:latin typeface="Calibri"/>
+              </a:rPr>
+              <a:t>The one thing you are taking from tonight</a:t>
+            </a:r>
+          </a:p>
+          <a:p>
+            <a:pPr marL="685800" indent="-274320">
+              <a:spcAft>
+                <a:spcPts val="700"/>
+              </a:spcAft>
+            </a:pPr>
+            <a:r>
+              <a:rPr sz="2000" b="1" i="0">
+                <a:solidFill>
+                  <a:srgbClr val="97BC62"/>
+                </a:solidFill>
+                <a:latin typeface="Calibri"/>
+              </a:rPr>
+              <a:t>4   </a:t>
+            </a:r>
+            <a:r>
+              <a:rPr sz="2000" b="0" i="0">
+                <a:solidFill>
+                  <a:srgbClr val="222B22"/>
+                </a:solidFill>
+                <a:latin typeface="Calibri"/>
+              </a:rPr>
+              <a:t>The one practice — committed aloud, or modified to one you will actually keep</a:t>
+            </a:r>
+          </a:p>
+          <a:p>
+            <a:pPr marL="685800" indent="-274320">
+              <a:spcAft>
+                <a:spcPts val="700"/>
+              </a:spcAft>
+            </a:pPr>
+            <a:r>
+              <a:rPr sz="2000" b="1" i="0">
+                <a:solidFill>
+                  <a:srgbClr val="97BC62"/>
+                </a:solidFill>
+                <a:latin typeface="Calibri"/>
+              </a:rPr>
+              <a:t>5   </a:t>
+            </a:r>
+            <a:r>
+              <a:rPr sz="2000" b="0" i="0">
+                <a:solidFill>
+                  <a:srgbClr val="222B22"/>
+                </a:solidFill>
+                <a:latin typeface="Calibri"/>
+              </a:rPr>
+              <a:t>Blessings — specific, witnessed, short</a:t>
+            </a:r>
+          </a:p>
+          <a:p>
+            <a:pPr marL="685800" indent="-274320">
+              <a:spcAft>
+                <a:spcPts val="700"/>
+              </a:spcAft>
+            </a:pPr>
+            <a:r>
+              <a:rPr sz="2000" b="1" i="0">
+                <a:solidFill>
+                  <a:srgbClr val="97BC62"/>
+                </a:solidFill>
+                <a:latin typeface="Calibri"/>
+              </a:rPr>
+              <a:t>6   </a:t>
+            </a:r>
+            <a:r>
+              <a:rPr sz="2000" b="0" i="0">
+                <a:solidFill>
+                  <a:srgbClr val="222B22"/>
+                </a:solidFill>
+                <a:latin typeface="Calibri"/>
+              </a:rPr>
+              <a:t>Closing prayer — and the Aaronic blessing, spoken over each other, face to face</a:t>
+            </a:r>
+          </a:p>
+        </p:txBody>
+      </p:sp>
+      <p:sp>
+        <p:nvSpPr>
+          <p:cNvPr id="6" name="TextBox 6"/>
+          <p:cNvSpPr txBox="1"/>
+          <p:nvPr/>
+        </p:nvSpPr>
+        <p:spPr>
+          <a:xfrm>
+            <a:off x="6766560" y="1737360"/>
+            <a:ext cx="4663440" cy="2926080"/>
+          </a:xfrm>
+          <a:prstGeom prst="rect">
+            <a:avLst/>
+          </a:prstGeom>
+          <a:solidFill>
+            <a:srgbClr val="F1F6EC"/>
+          </a:solidFill>
+        </p:spPr>
+        <p:txBody>
+          <a:bodyPr wrap="square" lIns="91440" tIns="91440" rIns="91440" bIns="91440" anchor="ctr"/>
+          <a:lstStyle/>
+          <a:p>
+            <a:pPr>
+              <a:spcAft>
+                <a:spcPts val="900"/>
+              </a:spcAft>
+            </a:pPr>
+            <a:r>
+              <a:rPr sz="1200" b="1" i="0">
+                <a:solidFill>
+                  <a:srgbClr val="97BC62"/>
+                </a:solidFill>
+                <a:latin typeface="Calibri"/>
+              </a:rPr>
+              <a:t>THE AARONIC BLESSING — NUMBERS 6:24–26</a:t>
+            </a:r>
+          </a:p>
+          <a:p>
+            <a:pPr>
+              <a:spcAft>
+                <a:spcPts val="600"/>
+              </a:spcAft>
+            </a:pPr>
+            <a:r>
+              <a:rPr sz="2400" b="0" i="1">
+                <a:solidFill>
+                  <a:srgbClr val="222B22"/>
+                </a:solidFill>
+                <a:latin typeface="Cambria"/>
+              </a:rPr>
+              <a:t>“The Lord bless you and keep you;</a:t>
+            </a:r>
+          </a:p>
+          <a:p>
+            <a:pPr>
+              <a:spcAft>
+                <a:spcPts val="600"/>
+              </a:spcAft>
+            </a:pPr>
+            <a:r>
+              <a:rPr sz="2400" b="0" i="1">
+                <a:solidFill>
+                  <a:srgbClr val="222B22"/>
+                </a:solidFill>
+                <a:latin typeface="Cambria"/>
+              </a:rPr>
+              <a:t>the Lord make his face to shine upon you, and be gracious to you;</a:t>
+            </a:r>
+          </a:p>
+          <a:p>
+            <a:pPr>
+              <a:spcAft>
+                <a:spcPts val="600"/>
+              </a:spcAft>
+            </a:pPr>
+            <a:r>
+              <a:rPr sz="2400" b="0" i="1">
+                <a:solidFill>
+                  <a:srgbClr val="222B22"/>
+                </a:solidFill>
+                <a:latin typeface="Cambria"/>
+              </a:rPr>
+              <a:t>the Lord lift up his countenance upon you, and give you peace.”</a:t>
+            </a:r>
+          </a:p>
+        </p:txBody>
+      </p:sp>
+      <p:sp>
+        <p:nvSpPr>
+          <p:cNvPr id="90" name="SlideNum"/>
+          <p:cNvSpPr txBox="1"/>
+          <p:nvPr/>
+        </p:nvSpPr>
+        <p:spPr>
+          <a:xfrm>
+            <a:off x="11384280" y="6446520"/>
+            <a:ext cx="640080" cy="292608"/>
+          </a:xfrm>
+          <a:prstGeom prst="rect">
+            <a:avLst/>
+          </a:prstGeom>
+          <a:noFill/>
+        </p:spPr>
+        <p:txBody>
+          <a:bodyPr wrap="none" lIns="0" tIns="0" rIns="45720" bIns="0" anchor="ctr"/>
+          <a:lstStyle/>
+          <a:p>
+            <a:pPr algn="r"/>
+            <a:r>
+              <a:t>84</a:t>
+            </a:r>
+            <a:endParaRPr sz="1000" b="1">
+              <a:solidFill>
+                <a:srgbClr val="7A8A6E"/>
+              </a:solidFill>
+              <a:latin typeface="Calibri"/>
+            </a:endParaRPr>
+          </a:p>
+        </p:txBody>
+      </p:sp>
+    </p:spTree>
+  </p:cSld>
+  <p:clrMapOvr>
+    <a:masterClrMapping/>
+  </p:clrMapOvr>
+</p:sld>
+</file>
+
+<file path=ppt/slides/slide16.xml><?xml version="1.0" encoding="utf-8"?>
+<p:sld xmlns:a="http://schemas.openxmlformats.org/drawingml/2006/main" xmlns:r="http://schemas.openxmlformats.org/officeDocument/2006/relationships" xmlns:p="http://schemas.openxmlformats.org/presentationml/2006/main">
+  <p:cSld>
+    <p:spTree>
+      <p:nvGrpSpPr>
+        <p:cNvPr id="1" name=""/>
+        <p:cNvGrpSpPr/>
+        <p:nvPr/>
+      </p:nvGrpSpPr>
+      <p:grpSpPr>
+        <a:xfrm>
+          <a:off x="0" y="0"/>
+          <a:ext cx="0" cy="0"/>
+          <a:chOff x="0" y="0"/>
+          <a:chExt cx="0" cy="0"/>
+        </a:xfrm>
+      </p:grpSpPr>
+      <p:sp>
+        <p:nvSpPr>
+          <p:cNvPr id="2" name="Rectangle 1"/>
+          <p:cNvSpPr/>
+          <p:nvPr/>
+        </p:nvSpPr>
+        <p:spPr>
+          <a:xfrm>
+            <a:off x="0" y="0"/>
+            <a:ext cx="12191695" cy="6858000"/>
+          </a:xfrm>
+          <a:prstGeom prst="rect">
+            <a:avLst/>
+          </a:prstGeom>
+          <a:solidFill>
+            <a:srgbClr val="2C5F2D"/>
+          </a:solidFill>
+          <a:ln>
+            <a:noFill/>
+          </a:ln>
+          <a:effectLst/>
+        </p:spPr>
+        <p:style>
+          <a:lnRef idx="1">
+            <a:schemeClr val="accent1"/>
+          </a:lnRef>
+          <a:fillRef idx="3">
+            <a:schemeClr val="accent1"/>
+          </a:fillRef>
+          <a:effectRef idx="2">
+            <a:schemeClr val="accent1"/>
+          </a:effectRef>
+          <a:fontRef idx="minor">
+            <a:schemeClr val="lt1"/>
+          </a:fontRef>
+        </p:style>
+        <p:txBody>
+          <a:bodyPr rtlCol="0" anchor="ctr"/>
+          <a:lstStyle/>
+          <a:p>
+            <a:pPr algn="ctr"/>
+            <a:endParaRPr/>
+          </a:p>
+        </p:txBody>
+      </p:sp>
+      <p:sp>
+        <p:nvSpPr>
+          <p:cNvPr id="3" name="TextBox 2"/>
+          <p:cNvSpPr txBox="1"/>
+          <p:nvPr/>
+        </p:nvSpPr>
+        <p:spPr>
+          <a:xfrm>
+            <a:off x="1097280" y="2286000"/>
+            <a:ext cx="9966960" cy="2194560"/>
+          </a:xfrm>
+          <a:prstGeom prst="rect">
+            <a:avLst/>
+          </a:prstGeom>
+          <a:noFill/>
+        </p:spPr>
+        <p:txBody>
+          <a:bodyPr wrap="square">
+            <a:spAutoFit/>
+          </a:bodyPr>
+          <a:lstStyle/>
+          <a:p>
+            <a:pPr algn="l">
+              <a:spcAft>
+                <a:spcPts val="600"/>
+              </a:spcAft>
+            </a:pPr>
+            <a:r>
+              <a:rPr sz="1800" b="1" i="0">
+                <a:solidFill>
+                  <a:srgbClr val="97BC62"/>
+                </a:solidFill>
+                <a:latin typeface="Calibri"/>
+              </a:rPr>
+              <a:t>Quarter 2</a:t>
+            </a:r>
+          </a:p>
+          <a:p>
+            <a:pPr algn="l">
+              <a:spcAft>
+                <a:spcPts val="600"/>
+              </a:spcAft>
+            </a:pPr>
+            <a:r>
+              <a:rPr sz="4000" b="1" i="0">
+                <a:solidFill>
+                  <a:srgbClr val="FFFFFF"/>
+                </a:solidFill>
+                <a:latin typeface="Cambria"/>
+              </a:rPr>
+              <a:t>Connect with God</a:t>
+            </a:r>
+          </a:p>
+          <a:p>
+            <a:pPr algn="l">
+              <a:spcAft>
+                <a:spcPts val="600"/>
+              </a:spcAft>
+            </a:pPr>
+            <a:r>
+              <a:rPr sz="1800" b="0" i="1">
+                <a:solidFill>
+                  <a:srgbClr val="E4EFDA"/>
+                </a:solidFill>
+                <a:latin typeface="Calibri"/>
+              </a:rPr>
+              <a:t>Weeks 7–11  ·  Five Wednesdays · PROAPT, the Garden, Any Doubts? · ends at the year’s midpoint</a:t>
+            </a:r>
+          </a:p>
+        </p:txBody>
+      </p:sp>
+      <p:sp>
+        <p:nvSpPr>
+          <p:cNvPr id="90" name="SlideNum"/>
+          <p:cNvSpPr txBox="1"/>
+          <p:nvPr/>
+        </p:nvSpPr>
+        <p:spPr>
+          <a:xfrm>
+            <a:off x="11384280" y="6446520"/>
+            <a:ext cx="640080" cy="292608"/>
+          </a:xfrm>
+          <a:prstGeom prst="rect">
+            <a:avLst/>
+          </a:prstGeom>
+          <a:noFill/>
+        </p:spPr>
+        <p:txBody>
+          <a:bodyPr wrap="none" lIns="0" tIns="0" rIns="45720" bIns="0" anchor="ctr"/>
+          <a:lstStyle/>
+          <a:p>
+            <a:pPr algn="r"/>
+            <a:r>
+              <a:t>85</a:t>
+            </a:r>
+            <a:endParaRPr sz="1000" b="1">
+              <a:solidFill>
+                <a:srgbClr val="F1F6EC"/>
+              </a:solidFill>
+              <a:latin typeface="Calibri"/>
+            </a:endParaRPr>
+          </a:p>
+        </p:txBody>
+      </p:sp>
+    </p:spTree>
+  </p:cSld>
+  <p:clrMapOvr>
+    <a:masterClrMapping/>
+  </p:clrMapOvr>
+</p:sld>
+</file>
+
+<file path=ppt/slides/slide17.xml><?xml version="1.0" encoding="utf-8"?>
+<p:sld xmlns:a="http://schemas.openxmlformats.org/drawingml/2006/main" xmlns:p="http://schemas.openxmlformats.org/presentationml/2006/main" xmlns:r="http://schemas.openxmlformats.org/officeDocument/2006/relationships">
+  <p:cSld>
+    <p:spTree>
+      <p:nvGrpSpPr>
+        <p:cNvPr id="1" name=""/>
+        <p:cNvGrpSpPr/>
+        <p:nvPr/>
+      </p:nvGrpSpPr>
+      <p:grpSpPr/>
+      <p:sp>
+        <p:nvSpPr>
+          <p:cNvPr id="2" name="Rectangle 1"/>
+          <p:cNvSpPr/>
+          <p:nvPr/>
+        </p:nvSpPr>
+        <p:spPr>
+          <a:xfrm>
+            <a:off x="0" y="0"/>
+            <a:ext cx="12192000" cy="6858000"/>
+          </a:xfrm>
+          <a:prstGeom prst="rect">
+            <a:avLst/>
+          </a:prstGeom>
+          <a:solidFill>
+            <a:srgbClr val="FFFFFF"/>
+          </a:solidFill>
+          <a:ln>
+            <a:noFill/>
+          </a:ln>
+          <a:effectLst/>
+        </p:spPr>
+        <p:style>
+          <a:lnRef idx="1">
+            <a:schemeClr val="accent1"/>
+          </a:lnRef>
+          <a:fillRef idx="3">
+            <a:schemeClr val="accent1"/>
+          </a:fillRef>
+          <a:effectRef idx="2">
+            <a:schemeClr val="accent1"/>
+          </a:effectRef>
+          <a:fontRef idx="minor">
+            <a:schemeClr val="lt1"/>
+          </a:fontRef>
+        </p:style>
+        <p:txBody>
+          <a:bodyPr rtlCol="0" anchor="ctr"/>
+          <a:lstStyle/>
+          <a:p>
+            <a:pPr algn="ctr"/>
+          </a:p>
+        </p:txBody>
+      </p:sp>
+      <p:sp>
+        <p:nvSpPr>
+          <p:cNvPr id="3" name="TextBox 2"/>
+          <p:cNvSpPr txBox="1"/>
+          <p:nvPr/>
+        </p:nvSpPr>
+        <p:spPr>
+          <a:xfrm>
+            <a:off x="822960" y="502920"/>
+            <a:ext cx="10515600" cy="822960"/>
+          </a:xfrm>
+          <a:prstGeom prst="rect">
+            <a:avLst/>
+          </a:prstGeom>
+          <a:noFill/>
+        </p:spPr>
+        <p:txBody>
+          <a:bodyPr wrap="square">
+            <a:spAutoFit/>
+          </a:bodyPr>
+          <a:lstStyle/>
+          <a:p>
+            <a:r>
+              <a:rPr sz="2800" b="1">
+                <a:solidFill>
+                  <a:srgbClr val="2C5F2D"/>
+                </a:solidFill>
+                <a:latin typeface="Cambria"/>
+              </a:rPr>
+              <a:t>Where We Are — the Four Connects</a:t>
+            </a:r>
+          </a:p>
+        </p:txBody>
+      </p:sp>
+      <p:pic>
+        <p:nvPicPr>
+          <p:cNvPr id="4" name="Picture 3" descr="four-connects.png"/>
+          <p:cNvPicPr>
+            <a:picLocks noChangeAspect="1"/>
+          </p:cNvPicPr>
+          <p:nvPr/>
+        </p:nvPicPr>
+        <p:blipFill>
+          <a:blip r:embed="rId2"/>
+          <a:stretch>
+            <a:fillRect/>
+          </a:stretch>
+        </p:blipFill>
+        <p:spPr>
+          <a:xfrm>
+            <a:off x="932688" y="1645920"/>
+            <a:ext cx="10332720" cy="3708663"/>
+          </a:xfrm>
+          <a:prstGeom prst="rect">
+            <a:avLst/>
+          </a:prstGeom>
+        </p:spPr>
+      </p:pic>
+      <p:sp>
+        <p:nvSpPr>
+          <p:cNvPr id="5" name="TextBox 4"/>
+          <p:cNvSpPr txBox="1"/>
+          <p:nvPr/>
+        </p:nvSpPr>
+        <p:spPr>
+          <a:xfrm>
+            <a:off x="822960" y="5623560"/>
+            <a:ext cx="10515600" cy="914400"/>
+          </a:xfrm>
+          <a:prstGeom prst="rect">
+            <a:avLst/>
+          </a:prstGeom>
+          <a:noFill/>
+        </p:spPr>
+        <p:txBody>
+          <a:bodyPr wrap="square">
+            <a:spAutoFit/>
+          </a:bodyPr>
+          <a:lstStyle/>
+          <a:p>
+            <a:r>
+              <a:rPr sz="1800" b="0">
+                <a:solidFill>
+                  <a:srgbClr val="222B22"/>
+                </a:solidFill>
+                <a:latin typeface="Calibri"/>
+              </a:rPr>
+              <a:t>Session 6 stands deeper in the second box — </a:t>
+            </a:r>
+            <a:r>
+              <a:rPr sz="1800" b="1">
+                <a:solidFill>
+                  <a:srgbClr val="2C5F2D"/>
+                </a:solidFill>
+                <a:latin typeface="Calibri"/>
+              </a:rPr>
+              <a:t>Connect with Others</a:t>
+            </a:r>
+            <a:r>
+              <a:rPr sz="1800" b="0">
+                <a:solidFill>
+                  <a:srgbClr val="222B22"/>
+                </a:solidFill>
+                <a:latin typeface="Calibri"/>
+              </a:rPr>
+              <a:t>. Each connection makes the next one real (Matt. 22:37–40).</a:t>
+            </a:r>
+          </a:p>
+        </p:txBody>
+      </p:sp>
+      <p:sp>
+        <p:nvSpPr>
+          <p:cNvPr id="90" name="SlideNum"/>
+          <p:cNvSpPr txBox="1"/>
+          <p:nvPr/>
+        </p:nvSpPr>
+        <p:spPr>
+          <a:xfrm>
+            <a:off x="11384280" y="6446520"/>
+            <a:ext cx="640080" cy="292608"/>
+          </a:xfrm>
+          <a:prstGeom prst="rect">
+            <a:avLst/>
+          </a:prstGeom>
+          <a:noFill/>
+        </p:spPr>
+        <p:txBody>
+          <a:bodyPr wrap="none" lIns="0" tIns="0" rIns="45720" bIns="0" anchor="ctr"/>
+          <a:lstStyle/>
+          <a:p>
+            <a:pPr algn="r"/>
+            <a:r>
+              <a:t>71a</a:t>
+            </a:r>
+            <a:endParaRPr sz="1000" b="1">
+              <a:solidFill>
+                <a:srgbClr val="7A8A6E"/>
+              </a:solidFill>
+              <a:latin typeface="Calibri"/>
+            </a:endParaRPr>
+          </a:p>
+        </p:txBody>
+      </p:sp>
+    </p:spTree>
+  </p:cSld>
+  <p:clrMapOvr>
+    <a:masterClrMapping/>
+  </p:clrMapOvr>
+</p:sld>
+</file>
+
+<file path=ppt/slides/slide18.xml><?xml version="1.0" encoding="utf-8"?>
+<p:sld xmlns:a="http://schemas.openxmlformats.org/drawingml/2006/main" xmlns:p="http://schemas.openxmlformats.org/presentationml/2006/main" xmlns:r="http://schemas.openxmlformats.org/officeDocument/2006/relationships">
+  <p:cSld>
+    <p:spTree>
+      <p:nvGrpSpPr>
+        <p:cNvPr id="1" name=""/>
+        <p:cNvGrpSpPr/>
+        <p:nvPr/>
+      </p:nvGrpSpPr>
+      <p:grpSpPr/>
+      <p:sp>
+        <p:nvSpPr>
+          <p:cNvPr id="2" name="Rectangle 1"/>
+          <p:cNvSpPr/>
+          <p:nvPr/>
+        </p:nvSpPr>
+        <p:spPr>
+          <a:xfrm>
+            <a:off x="0" y="0"/>
+            <a:ext cx="12192000" cy="6858000"/>
+          </a:xfrm>
+          <a:prstGeom prst="rect">
+            <a:avLst/>
+          </a:prstGeom>
+          <a:solidFill>
+            <a:srgbClr val="FFFFFF"/>
+          </a:solidFill>
+          <a:ln>
+            <a:noFill/>
+          </a:ln>
+          <a:effectLst/>
+        </p:spPr>
+        <p:style>
+          <a:lnRef idx="1">
+            <a:schemeClr val="accent1"/>
+          </a:lnRef>
+          <a:fillRef idx="3">
+            <a:schemeClr val="accent1"/>
+          </a:fillRef>
+          <a:effectRef idx="2">
+            <a:schemeClr val="accent1"/>
+          </a:effectRef>
+          <a:fontRef idx="minor">
+            <a:schemeClr val="lt1"/>
+          </a:fontRef>
+        </p:style>
+        <p:txBody>
+          <a:bodyPr rtlCol="0" anchor="ctr"/>
+          <a:lstStyle/>
+          <a:p>
+            <a:pPr algn="ctr"/>
+          </a:p>
+        </p:txBody>
+      </p:sp>
+      <p:sp>
+        <p:nvSpPr>
+          <p:cNvPr id="3" name="TextBox 2"/>
+          <p:cNvSpPr txBox="1"/>
+          <p:nvPr/>
+        </p:nvSpPr>
+        <p:spPr>
+          <a:xfrm>
+            <a:off x="822960" y="502920"/>
+            <a:ext cx="10515600" cy="822960"/>
+          </a:xfrm>
+          <a:prstGeom prst="rect">
+            <a:avLst/>
+          </a:prstGeom>
+          <a:noFill/>
+        </p:spPr>
+        <p:txBody>
+          <a:bodyPr wrap="square">
+            <a:spAutoFit/>
+          </a:bodyPr>
+          <a:lstStyle/>
+          <a:p>
+            <a:r>
+              <a:rPr sz="2800" b="1">
+                <a:solidFill>
+                  <a:srgbClr val="2C5F2D"/>
+                </a:solidFill>
+                <a:latin typeface="Cambria"/>
+              </a:rPr>
+              <a:t>The Take-Home Sheet — the Daily Rhythm</a:t>
+            </a:r>
+          </a:p>
+        </p:txBody>
+      </p:sp>
+      <p:pic>
+        <p:nvPicPr>
+          <p:cNvPr id="4" name="Picture 3" descr="s6_part1.png"/>
+          <p:cNvPicPr>
+            <a:picLocks noChangeAspect="1"/>
+          </p:cNvPicPr>
+          <p:nvPr/>
+        </p:nvPicPr>
+        <p:blipFill>
+          <a:blip r:embed="rId2"/>
+          <a:stretch>
+            <a:fillRect/>
+          </a:stretch>
+        </p:blipFill>
+        <p:spPr>
+          <a:xfrm>
+            <a:off x="1798167" y="1463040"/>
+            <a:ext cx="8595360" cy="4039819"/>
+          </a:xfrm>
+          <a:prstGeom prst="rect">
+            <a:avLst/>
+          </a:prstGeom>
+          <a:ln w="12700">
+            <a:solidFill>
+              <a:srgbClr val="C8C8C8"/>
+            </a:solidFill>
+          </a:ln>
+        </p:spPr>
+      </p:pic>
+      <p:sp>
+        <p:nvSpPr>
+          <p:cNvPr id="5" name="TextBox 4"/>
+          <p:cNvSpPr txBox="1"/>
+          <p:nvPr/>
+        </p:nvSpPr>
+        <p:spPr>
+          <a:xfrm>
+            <a:off x="822960" y="6355080"/>
+            <a:ext cx="10515600" cy="411480"/>
+          </a:xfrm>
+          <a:prstGeom prst="rect">
+            <a:avLst/>
+          </a:prstGeom>
+          <a:noFill/>
+        </p:spPr>
+        <p:txBody>
+          <a:bodyPr wrap="square">
+            <a:spAutoFit/>
+          </a:bodyPr>
+          <a:lstStyle/>
+          <a:p>
+            <a:r>
+              <a:rPr sz="1400" i="1">
+                <a:solidFill>
+                  <a:srgbClr val="595959"/>
+                </a:solidFill>
+                <a:latin typeface="Calibri"/>
+              </a:rPr>
+              <a:t>Handed out now — this is the sheet in your hands.</a:t>
+            </a:r>
+          </a:p>
+        </p:txBody>
+      </p:sp>
+      <p:sp>
+        <p:nvSpPr>
+          <p:cNvPr id="90" name="SlideNum"/>
+          <p:cNvSpPr txBox="1"/>
+          <p:nvPr/>
+        </p:nvSpPr>
+        <p:spPr>
+          <a:xfrm>
+            <a:off x="11384280" y="6446520"/>
+            <a:ext cx="640080" cy="292608"/>
+          </a:xfrm>
+          <a:prstGeom prst="rect">
+            <a:avLst/>
+          </a:prstGeom>
+          <a:noFill/>
+        </p:spPr>
+        <p:txBody>
+          <a:bodyPr wrap="none" lIns="0" tIns="0" rIns="45720" bIns="0" anchor="ctr"/>
+          <a:lstStyle/>
+          <a:p>
+            <a:pPr algn="r"/>
+            <a:r>
+              <a:t>81</a:t>
+            </a:r>
+            <a:endParaRPr sz="1000" b="1">
+              <a:solidFill>
+                <a:srgbClr val="7A8A6E"/>
+              </a:solidFill>
+              <a:latin typeface="Calibri"/>
+            </a:endParaRPr>
+          </a:p>
+        </p:txBody>
+      </p:sp>
+    </p:spTree>
+  </p:cSld>
+  <p:clrMapOvr>
+    <a:masterClrMapping/>
+  </p:clrMapOvr>
+</p:sld>
+</file>
+
+<file path=ppt/slides/slide19.xml><?xml version="1.0" encoding="utf-8"?>
+<p:sld xmlns:a="http://schemas.openxmlformats.org/drawingml/2006/main" xmlns:p="http://schemas.openxmlformats.org/presentationml/2006/main" xmlns:r="http://schemas.openxmlformats.org/officeDocument/2006/relationships">
+  <p:cSld>
+    <p:spTree>
+      <p:nvGrpSpPr>
+        <p:cNvPr id="1" name=""/>
+        <p:cNvGrpSpPr/>
+        <p:nvPr/>
+      </p:nvGrpSpPr>
+      <p:grpSpPr/>
+      <p:sp>
+        <p:nvSpPr>
+          <p:cNvPr id="2" name="Rectangle 1"/>
+          <p:cNvSpPr/>
+          <p:nvPr/>
+        </p:nvSpPr>
+        <p:spPr>
+          <a:xfrm>
+            <a:off x="0" y="0"/>
+            <a:ext cx="12192000" cy="6858000"/>
+          </a:xfrm>
+          <a:prstGeom prst="rect">
+            <a:avLst/>
+          </a:prstGeom>
+          <a:solidFill>
+            <a:srgbClr val="FFFFFF"/>
+          </a:solidFill>
+          <a:ln>
+            <a:noFill/>
+          </a:ln>
+          <a:effectLst/>
+        </p:spPr>
+        <p:style>
+          <a:lnRef idx="1">
+            <a:schemeClr val="accent1"/>
+          </a:lnRef>
+          <a:fillRef idx="3">
+            <a:schemeClr val="accent1"/>
+          </a:fillRef>
+          <a:effectRef idx="2">
+            <a:schemeClr val="accent1"/>
+          </a:effectRef>
+          <a:fontRef idx="minor">
+            <a:schemeClr val="lt1"/>
+          </a:fontRef>
+        </p:style>
+        <p:txBody>
+          <a:bodyPr rtlCol="0" anchor="ctr"/>
+          <a:lstStyle/>
+          <a:p>
+            <a:pPr algn="ctr"/>
+          </a:p>
+        </p:txBody>
+      </p:sp>
+      <p:sp>
+        <p:nvSpPr>
+          <p:cNvPr id="3" name="TextBox 2"/>
+          <p:cNvSpPr txBox="1"/>
+          <p:nvPr/>
+        </p:nvSpPr>
+        <p:spPr>
+          <a:xfrm>
+            <a:off x="822960" y="502920"/>
+            <a:ext cx="10515600" cy="822960"/>
+          </a:xfrm>
+          <a:prstGeom prst="rect">
+            <a:avLst/>
+          </a:prstGeom>
+          <a:noFill/>
+        </p:spPr>
+        <p:txBody>
+          <a:bodyPr wrap="square">
+            <a:spAutoFit/>
+          </a:bodyPr>
+          <a:lstStyle/>
+          <a:p>
+            <a:r>
+              <a:rPr sz="2800" b="1">
+                <a:solidFill>
+                  <a:srgbClr val="2C5F2D"/>
+                </a:solidFill>
+                <a:latin typeface="Cambria"/>
+              </a:rPr>
+              <a:t>The Take-Home Sheet — the Four Parts</a:t>
+            </a:r>
+          </a:p>
+        </p:txBody>
+      </p:sp>
+      <p:pic>
+        <p:nvPicPr>
+          <p:cNvPr id="4" name="Picture 3" descr="s6_part2.png"/>
+          <p:cNvPicPr>
+            <a:picLocks noChangeAspect="1"/>
+          </p:cNvPicPr>
+          <p:nvPr/>
+        </p:nvPicPr>
+        <p:blipFill>
+          <a:blip r:embed="rId2"/>
+          <a:stretch>
+            <a:fillRect/>
+          </a:stretch>
+        </p:blipFill>
+        <p:spPr>
+          <a:xfrm>
+            <a:off x="2589026" y="1463040"/>
+            <a:ext cx="7013642" cy="4709160"/>
+          </a:xfrm>
+          <a:prstGeom prst="rect">
+            <a:avLst/>
+          </a:prstGeom>
+          <a:ln w="12700">
+            <a:solidFill>
+              <a:srgbClr val="C8C8C8"/>
+            </a:solidFill>
+          </a:ln>
+        </p:spPr>
+      </p:pic>
+      <p:sp>
+        <p:nvSpPr>
+          <p:cNvPr id="5" name="TextBox 4"/>
+          <p:cNvSpPr txBox="1"/>
+          <p:nvPr/>
+        </p:nvSpPr>
+        <p:spPr>
+          <a:xfrm>
+            <a:off x="822960" y="6355080"/>
+            <a:ext cx="10515600" cy="411480"/>
+          </a:xfrm>
+          <a:prstGeom prst="rect">
+            <a:avLst/>
+          </a:prstGeom>
+          <a:noFill/>
+        </p:spPr>
+        <p:txBody>
+          <a:bodyPr wrap="square">
+            <a:spAutoFit/>
+          </a:bodyPr>
+          <a:lstStyle/>
+          <a:p>
+            <a:r>
+              <a:rPr sz="1400" i="1">
+                <a:solidFill>
+                  <a:srgbClr val="595959"/>
+                </a:solidFill>
+                <a:latin typeface="Calibri"/>
+              </a:rPr>
+              <a:t>One practice at a time — and a partner expecting you at the end of week one.</a:t>
+            </a:r>
+          </a:p>
+        </p:txBody>
+      </p:sp>
+      <p:sp>
+        <p:nvSpPr>
+          <p:cNvPr id="90" name="SlideNum"/>
+          <p:cNvSpPr txBox="1"/>
+          <p:nvPr/>
+        </p:nvSpPr>
+        <p:spPr>
+          <a:xfrm>
+            <a:off x="11384280" y="6446520"/>
+            <a:ext cx="640080" cy="292608"/>
+          </a:xfrm>
+          <a:prstGeom prst="rect">
+            <a:avLst/>
+          </a:prstGeom>
+          <a:noFill/>
+        </p:spPr>
+        <p:txBody>
+          <a:bodyPr wrap="none" lIns="0" tIns="0" rIns="45720" bIns="0" anchor="ctr"/>
+          <a:lstStyle/>
+          <a:p>
+            <a:pPr algn="r"/>
+            <a:r>
+              <a:t>81a</a:t>
+            </a:r>
+            <a:endParaRPr sz="1000" b="1">
+              <a:solidFill>
+                <a:srgbClr val="7A8A6E"/>
+              </a:solidFill>
+              <a:latin typeface="Calibri"/>
+            </a:endParaRPr>
+          </a:p>
+        </p:txBody>
+      </p:sp>
+    </p:spTree>
+  </p:cSld>
+  <p:clrMapOvr>
+    <a:masterClrMapping/>
+  </p:clrMapOvr>
+</p:sld>
+</file>
+
+<file path=ppt/slides/slide2.xml><?xml version="1.0" encoding="utf-8"?>
 <p:sld xmlns:a="http://schemas.openxmlformats.org/drawingml/2006/main" xmlns:r="http://schemas.openxmlformats.org/officeDocument/2006/relationships" xmlns:p="http://schemas.openxmlformats.org/presentationml/2006/main">
   <p:cSld>
     <p:spTree>
@@ -5278,7 +7758,7 @@
 </p:sld>
 </file>
 
-<file path=ppt/slides/slide72.xml><?xml version="1.0" encoding="utf-8"?>
+<file path=ppt/slides/slide3.xml><?xml version="1.0" encoding="utf-8"?>
 <p:sld xmlns:a="http://schemas.openxmlformats.org/drawingml/2006/main" xmlns:r="http://schemas.openxmlformats.org/officeDocument/2006/relationships" xmlns:p="http://schemas.openxmlformats.org/presentationml/2006/main">
   <p:cSld>
     <p:spTree>
@@ -5729,7 +8209,7 @@
 </p:sld>
 </file>
 
-<file path=ppt/slides/slide73.xml><?xml version="1.0" encoding="utf-8"?>
+<file path=ppt/slides/slide4.xml><?xml version="1.0" encoding="utf-8"?>
 <p:sld xmlns:a="http://schemas.openxmlformats.org/drawingml/2006/main" xmlns:r="http://schemas.openxmlformats.org/officeDocument/2006/relationships" xmlns:p="http://schemas.openxmlformats.org/presentationml/2006/main">
   <p:cSld>
     <p:spTree>
@@ -6076,7 +8556,7 @@
 </p:sld>
 </file>
 
-<file path=ppt/slides/slide74.xml><?xml version="1.0" encoding="utf-8"?>
+<file path=ppt/slides/slide5.xml><?xml version="1.0" encoding="utf-8"?>
 <p:sld xmlns:a="http://schemas.openxmlformats.org/drawingml/2006/main" xmlns:r="http://schemas.openxmlformats.org/officeDocument/2006/relationships" xmlns:p="http://schemas.openxmlformats.org/presentationml/2006/main">
   <p:cSld>
     <p:spTree>
@@ -6334,7 +8814,7 @@
 </p:sld>
 </file>
 
-<file path=ppt/slides/slide75.xml><?xml version="1.0" encoding="utf-8"?>
+<file path=ppt/slides/slide6.xml><?xml version="1.0" encoding="utf-8"?>
 <p:sld xmlns:a="http://schemas.openxmlformats.org/drawingml/2006/main" xmlns:r="http://schemas.openxmlformats.org/officeDocument/2006/relationships" xmlns:p="http://schemas.openxmlformats.org/presentationml/2006/main">
   <p:cSld>
     <p:spTree>
@@ -6702,7 +9182,7 @@
 </p:sld>
 </file>
 
-<file path=ppt/slides/slide76.xml><?xml version="1.0" encoding="utf-8"?>
+<file path=ppt/slides/slide7.xml><?xml version="1.0" encoding="utf-8"?>
 <p:sld xmlns:a="http://schemas.openxmlformats.org/drawingml/2006/main" xmlns:r="http://schemas.openxmlformats.org/officeDocument/2006/relationships" xmlns:p="http://schemas.openxmlformats.org/presentationml/2006/main">
   <p:cSld>
     <p:spTree>
@@ -6974,7 +9454,7 @@
 </p:sld>
 </file>
 
-<file path=ppt/slides/slide77.xml><?xml version="1.0" encoding="utf-8"?>
+<file path=ppt/slides/slide8.xml><?xml version="1.0" encoding="utf-8"?>
 <p:sld xmlns:a="http://schemas.openxmlformats.org/drawingml/2006/main" xmlns:r="http://schemas.openxmlformats.org/officeDocument/2006/relationships" xmlns:p="http://schemas.openxmlformats.org/presentationml/2006/main">
   <p:cSld>
     <p:spTree>
@@ -7246,7 +9726,7 @@
 </p:sld>
 </file>
 
-<file path=ppt/slides/slide78.xml><?xml version="1.0" encoding="utf-8"?>
+<file path=ppt/slides/slide9.xml><?xml version="1.0" encoding="utf-8"?>
 <p:sld xmlns:a="http://schemas.openxmlformats.org/drawingml/2006/main" xmlns:r="http://schemas.openxmlformats.org/officeDocument/2006/relationships" xmlns:p="http://schemas.openxmlformats.org/presentationml/2006/main">
   <p:cSld>
     <p:spTree>
@@ -7596,1954 +10076,6 @@
           </a:effectLst>
         </p:spPr>
       </p:pic>
-    </p:spTree>
-  </p:cSld>
-  <p:clrMapOvr>
-    <a:masterClrMapping/>
-  </p:clrMapOvr>
-</p:sld>
-</file>
-
-<file path=ppt/slides/slide79.xml><?xml version="1.0" encoding="utf-8"?>
-<p:sld xmlns:a="http://schemas.openxmlformats.org/drawingml/2006/main" xmlns:r="http://schemas.openxmlformats.org/officeDocument/2006/relationships" xmlns:p="http://schemas.openxmlformats.org/presentationml/2006/main">
-  <p:cSld>
-    <p:spTree>
-      <p:nvGrpSpPr>
-        <p:cNvPr id="1" name=""/>
-        <p:cNvGrpSpPr/>
-        <p:nvPr/>
-      </p:nvGrpSpPr>
-      <p:grpSpPr>
-        <a:xfrm>
-          <a:off x="0" y="0"/>
-          <a:ext cx="0" cy="0"/>
-          <a:chOff x="0" y="0"/>
-          <a:chExt cx="0" cy="0"/>
-        </a:xfrm>
-      </p:grpSpPr>
-      <p:sp>
-        <p:nvSpPr>
-          <p:cNvPr id="2" name="Rectangle 1"/>
-          <p:cNvSpPr/>
-          <p:nvPr/>
-        </p:nvSpPr>
-        <p:spPr>
-          <a:xfrm>
-            <a:off x="0" y="0"/>
-            <a:ext cx="12191695" cy="6858000"/>
-          </a:xfrm>
-          <a:prstGeom prst="rect">
-            <a:avLst/>
-          </a:prstGeom>
-          <a:solidFill>
-            <a:srgbClr val="FFFFFF"/>
-          </a:solidFill>
-          <a:ln>
-            <a:noFill/>
-          </a:ln>
-        </p:spPr>
-        <p:txBody>
-          <a:bodyPr/>
-          <a:lstStyle/>
-          <a:p>
-            <a:endParaRPr/>
-          </a:p>
-        </p:txBody>
-      </p:sp>
-      <p:sp>
-        <p:nvSpPr>
-          <p:cNvPr id="3" name="TextBox 2"/>
-          <p:cNvSpPr txBox="1"/>
-          <p:nvPr/>
-        </p:nvSpPr>
-        <p:spPr>
-          <a:xfrm>
-            <a:off x="822960" y="502920"/>
-            <a:ext cx="10515600" cy="822960"/>
-          </a:xfrm>
-          <a:prstGeom prst="rect">
-            <a:avLst/>
-          </a:prstGeom>
-          <a:noFill/>
-        </p:spPr>
-        <p:txBody>
-          <a:bodyPr wrap="square">
-            <a:spAutoFit/>
-          </a:bodyPr>
-          <a:lstStyle/>
-          <a:p>
-            <a:pPr algn="l">
-              <a:spcAft>
-                <a:spcPts val="600"/>
-              </a:spcAft>
-            </a:pPr>
-            <a:r>
-              <a:rPr sz="2800" b="1" i="0">
-                <a:solidFill>
-                  <a:srgbClr val="2C5F2D"/>
-                </a:solidFill>
-                <a:latin typeface="Cambria"/>
-              </a:rPr>
-              <a:t>Merge and Shared Blessing</a:t>
-            </a:r>
-          </a:p>
-        </p:txBody>
-      </p:sp>
-      <p:sp>
-        <p:nvSpPr>
-          <p:cNvPr id="4" name="TextBox 4"/>
-          <p:cNvSpPr txBox="1"/>
-          <p:nvPr/>
-        </p:nvSpPr>
-        <p:spPr>
-          <a:xfrm>
-            <a:off x="822960" y="1554480"/>
-            <a:ext cx="10515600" cy="4892040"/>
-          </a:xfrm>
-          <a:prstGeom prst="rect">
-            <a:avLst/>
-          </a:prstGeom>
-          <a:noFill/>
-        </p:spPr>
-        <p:txBody>
-          <a:bodyPr wrap="square" lIns="91440" tIns="91440" rIns="91440" bIns="91440"/>
-          <a:lstStyle/>
-          <a:p>
-            <a:pPr marL="274320" indent="-274320">
-              <a:spcAft>
-                <a:spcPts val="900"/>
-              </a:spcAft>
-            </a:pPr>
-            <a:r>
-              <a:rPr sz="2800" b="1" i="0">
-                <a:solidFill>
-                  <a:srgbClr val="97BC62"/>
-                </a:solidFill>
-                <a:latin typeface="Calibri"/>
-              </a:rPr>
-              <a:t>•  </a:t>
-            </a:r>
-            <a:r>
-              <a:rPr sz="2800" b="0" i="0">
-                <a:solidFill>
-                  <a:srgbClr val="222B22"/>
-                </a:solidFill>
-                <a:latin typeface="Calibri"/>
-              </a:rPr>
-              <a:t>What happened in your pair stays in your pair</a:t>
-            </a:r>
-          </a:p>
-          <a:p>
-            <a:pPr marL="274320" indent="-274320">
-              <a:spcAft>
-                <a:spcPts val="900"/>
-              </a:spcAft>
-            </a:pPr>
-            <a:r>
-              <a:rPr sz="2800" b="1" i="0">
-                <a:solidFill>
-                  <a:srgbClr val="97BC62"/>
-                </a:solidFill>
-                <a:latin typeface="Calibri"/>
-              </a:rPr>
-              <a:t>•  </a:t>
-            </a:r>
-            <a:r>
-              <a:rPr sz="2800" b="0" i="0">
-                <a:solidFill>
-                  <a:srgbClr val="222B22"/>
-                </a:solidFill>
-                <a:latin typeface="Calibri"/>
-              </a:rPr>
-              <a:t>“One word about what tonight was like in your body. ‘Heavy.’ ‘Lighter.’ ‘Held.’ ‘Tender.’ ‘Surprised.’” — an arranged parent starts</a:t>
-            </a:r>
-          </a:p>
-          <a:p>
-            <a:pPr marL="274320" indent="-274320">
-              <a:spcAft>
-                <a:spcPts val="900"/>
-              </a:spcAft>
-            </a:pPr>
-            <a:r>
-              <a:rPr sz="2800" b="1" i="0">
-                <a:solidFill>
-                  <a:srgbClr val="97BC62"/>
-                </a:solidFill>
-                <a:latin typeface="Calibri"/>
-              </a:rPr>
-              <a:t>•  </a:t>
-            </a:r>
-            <a:r>
-              <a:rPr sz="2800" b="0" i="0">
-                <a:solidFill>
-                  <a:srgbClr val="222B22"/>
-                </a:solidFill>
-                <a:latin typeface="Calibri"/>
-              </a:rPr>
-              <a:t>Then one shared blessing of restoration over the whole room — “Hands up if you want”</a:t>
-            </a:r>
-          </a:p>
-          <a:p>
-            <a:pPr marL="274320" indent="-274320">
-              <a:spcAft>
-                <a:spcPts val="900"/>
-              </a:spcAft>
-            </a:pPr>
-            <a:r>
-              <a:rPr sz="2800" b="1" i="0">
-                <a:solidFill>
-                  <a:srgbClr val="97BC62"/>
-                </a:solidFill>
-                <a:latin typeface="Calibri"/>
-              </a:rPr>
-              <a:t>•  </a:t>
-            </a:r>
-            <a:r>
-              <a:rPr sz="2800" b="0" i="0">
-                <a:solidFill>
-                  <a:srgbClr val="222B22"/>
-                </a:solidFill>
-                <a:latin typeface="Calibri"/>
-              </a:rPr>
-              <a:t>“We pray restoration into every place that was named... Holy Spirit, walk these brothers and sisters home.”</a:t>
-            </a:r>
-          </a:p>
-        </p:txBody>
-      </p:sp>
-      <p:sp>
-        <p:nvSpPr>
-          <p:cNvPr id="90" name="SlideNum"/>
-          <p:cNvSpPr txBox="1"/>
-          <p:nvPr/>
-        </p:nvSpPr>
-        <p:spPr>
-          <a:xfrm>
-            <a:off x="11384280" y="6446520"/>
-            <a:ext cx="640080" cy="292608"/>
-          </a:xfrm>
-          <a:prstGeom prst="rect">
-            <a:avLst/>
-          </a:prstGeom>
-          <a:noFill/>
-        </p:spPr>
-        <p:txBody>
-          <a:bodyPr wrap="none" lIns="0" tIns="0" rIns="45720" bIns="0" anchor="ctr"/>
-          <a:lstStyle/>
-          <a:p>
-            <a:pPr algn="r"/>
-            <a:r>
-              <a:t>79</a:t>
-            </a:r>
-            <a:endParaRPr sz="1000" b="1">
-              <a:solidFill>
-                <a:srgbClr val="7A8A6E"/>
-              </a:solidFill>
-              <a:latin typeface="Calibri"/>
-            </a:endParaRPr>
-          </a:p>
-        </p:txBody>
-      </p:sp>
-    </p:spTree>
-  </p:cSld>
-  <p:clrMapOvr>
-    <a:masterClrMapping/>
-  </p:clrMapOvr>
-</p:sld>
-</file>
-
-<file path=ppt/slides/slide80.xml><?xml version="1.0" encoding="utf-8"?>
-<p:sld xmlns:a="http://schemas.openxmlformats.org/drawingml/2006/main" xmlns:r="http://schemas.openxmlformats.org/officeDocument/2006/relationships" xmlns:p="http://schemas.openxmlformats.org/presentationml/2006/main">
-  <p:cSld>
-    <p:spTree>
-      <p:nvGrpSpPr>
-        <p:cNvPr id="1" name=""/>
-        <p:cNvGrpSpPr/>
-        <p:nvPr/>
-      </p:nvGrpSpPr>
-      <p:grpSpPr>
-        <a:xfrm>
-          <a:off x="0" y="0"/>
-          <a:ext cx="0" cy="0"/>
-          <a:chOff x="0" y="0"/>
-          <a:chExt cx="0" cy="0"/>
-        </a:xfrm>
-      </p:grpSpPr>
-      <p:sp>
-        <p:nvSpPr>
-          <p:cNvPr id="2" name="Rectangle 1"/>
-          <p:cNvSpPr/>
-          <p:nvPr/>
-        </p:nvSpPr>
-        <p:spPr>
-          <a:xfrm>
-            <a:off x="0" y="0"/>
-            <a:ext cx="12191695" cy="6858000"/>
-          </a:xfrm>
-          <a:prstGeom prst="rect">
-            <a:avLst/>
-          </a:prstGeom>
-          <a:solidFill>
-            <a:srgbClr val="FFFFFF"/>
-          </a:solidFill>
-          <a:ln>
-            <a:noFill/>
-          </a:ln>
-        </p:spPr>
-        <p:txBody>
-          <a:bodyPr/>
-          <a:lstStyle/>
-          <a:p>
-            <a:endParaRPr/>
-          </a:p>
-        </p:txBody>
-      </p:sp>
-      <p:sp>
-        <p:nvSpPr>
-          <p:cNvPr id="3" name="TextBox 2"/>
-          <p:cNvSpPr txBox="1"/>
-          <p:nvPr/>
-        </p:nvSpPr>
-        <p:spPr>
-          <a:xfrm>
-            <a:off x="822960" y="502920"/>
-            <a:ext cx="10515600" cy="822960"/>
-          </a:xfrm>
-          <a:prstGeom prst="rect">
-            <a:avLst/>
-          </a:prstGeom>
-          <a:noFill/>
-        </p:spPr>
-        <p:txBody>
-          <a:bodyPr wrap="square">
-            <a:spAutoFit/>
-          </a:bodyPr>
-          <a:lstStyle/>
-          <a:p>
-            <a:pPr algn="l">
-              <a:spcAft>
-                <a:spcPts val="600"/>
-              </a:spcAft>
-            </a:pPr>
-            <a:r>
-              <a:rPr sz="2800" b="1" i="0">
-                <a:solidFill>
-                  <a:srgbClr val="2C5F2D"/>
-                </a:solidFill>
-                <a:latin typeface="Cambria"/>
-              </a:rPr>
-              <a:t>Homework — Two Weeks, Four Parts — the Five-Minute Examen</a:t>
-            </a:r>
-          </a:p>
-        </p:txBody>
-      </p:sp>
-      <p:sp>
-        <p:nvSpPr>
-          <p:cNvPr id="4" name="TextBox 4"/>
-          <p:cNvSpPr txBox="1"/>
-          <p:nvPr/>
-        </p:nvSpPr>
-        <p:spPr>
-          <a:xfrm>
-            <a:off x="822960" y="1554480"/>
-            <a:ext cx="6675120" cy="4892040"/>
-          </a:xfrm>
-          <a:prstGeom prst="rect">
-            <a:avLst/>
-          </a:prstGeom>
-          <a:noFill/>
-        </p:spPr>
-        <p:txBody>
-          <a:bodyPr wrap="square" lIns="91440" tIns="91440" rIns="91440" bIns="91440"/>
-          <a:lstStyle/>
-          <a:p>
-            <a:pPr marL="274320" indent="-274320">
-              <a:spcAft>
-                <a:spcPts val="750"/>
-              </a:spcAft>
-            </a:pPr>
-            <a:r>
-              <a:rPr sz="2200" b="1" i="0">
-                <a:solidFill>
-                  <a:srgbClr val="97BC62"/>
-                </a:solidFill>
-                <a:latin typeface="Calibri"/>
-              </a:rPr>
-              <a:t>•  </a:t>
-            </a:r>
-            <a:r>
-              <a:rPr sz="2200" b="0" i="0">
-                <a:solidFill>
-                  <a:srgbClr val="222B22"/>
-                </a:solidFill>
-                <a:latin typeface="Calibri"/>
-              </a:rPr>
-              <a:t>The Five-Minute Examen — five minutes with God each evening, before bed, carried through the quarter break</a:t>
-            </a:r>
-          </a:p>
-          <a:p>
-            <a:pPr marL="342900" indent="-342900">
-              <a:spcAft>
-                <a:spcPts val="750"/>
-              </a:spcAft>
-            </a:pPr>
-            <a:r>
-              <a:rPr sz="2200" b="1" i="0">
-                <a:solidFill>
-                  <a:srgbClr val="97BC62"/>
-                </a:solidFill>
-                <a:latin typeface="Calibri"/>
-              </a:rPr>
-              <a:t>1   </a:t>
-            </a:r>
-            <a:r>
-              <a:rPr sz="2200" b="0" i="0">
-                <a:solidFill>
-                  <a:srgbClr val="222B22"/>
-                </a:solidFill>
-                <a:latin typeface="Calibri"/>
-              </a:rPr>
-              <a:t>Thank Him for one specific thing from the day</a:t>
-            </a:r>
-          </a:p>
-          <a:p>
-            <a:pPr marL="342900" indent="-342900">
-              <a:spcAft>
-                <a:spcPts val="750"/>
-              </a:spcAft>
-            </a:pPr>
-            <a:r>
-              <a:rPr sz="2200" b="1" i="0">
-                <a:solidFill>
-                  <a:srgbClr val="97BC62"/>
-                </a:solidFill>
-                <a:latin typeface="Calibri"/>
-              </a:rPr>
-              <a:t>2   </a:t>
-            </a:r>
-            <a:r>
-              <a:rPr sz="2200" b="0" i="0">
-                <a:solidFill>
-                  <a:srgbClr val="222B22"/>
-                </a:solidFill>
-                <a:latin typeface="Calibri"/>
-              </a:rPr>
-              <a:t>Notice one place where you saw God moving</a:t>
-            </a:r>
-          </a:p>
-          <a:p>
-            <a:pPr marL="342900" indent="-342900">
-              <a:spcAft>
-                <a:spcPts val="750"/>
-              </a:spcAft>
-            </a:pPr>
-            <a:r>
-              <a:rPr sz="2200" b="1" i="0">
-                <a:solidFill>
-                  <a:srgbClr val="97BC62"/>
-                </a:solidFill>
-                <a:latin typeface="Calibri"/>
-              </a:rPr>
-              <a:t>3   </a:t>
-            </a:r>
-            <a:r>
-              <a:rPr sz="2200" b="0" i="0">
-                <a:solidFill>
-                  <a:srgbClr val="222B22"/>
-                </a:solidFill>
-                <a:latin typeface="Calibri"/>
-              </a:rPr>
-              <a:t>Ask Him about one place where you walked in less honesty than you wanted to today — just notice. No fixing</a:t>
-            </a:r>
-          </a:p>
-          <a:p>
-            <a:pPr marL="274320" indent="-274320">
-              <a:spcAft>
-                <a:spcPts val="750"/>
-              </a:spcAft>
-            </a:pPr>
-            <a:r>
-              <a:rPr sz="2200" b="1" i="0">
-                <a:solidFill>
-                  <a:srgbClr val="97BC62"/>
-                </a:solidFill>
-                <a:latin typeface="Calibri"/>
-              </a:rPr>
-              <a:t>•  </a:t>
-            </a:r>
-            <a:r>
-              <a:rPr sz="2200" b="0" i="0">
-                <a:solidFill>
-                  <a:srgbClr val="222B22"/>
-                </a:solidFill>
-                <a:latin typeface="Calibri"/>
-              </a:rPr>
-              <a:t>The Quarterly Pulse goes home tonight — three questions, five minutes, sign it or leave it anonymous</a:t>
-            </a:r>
-          </a:p>
-          <a:p>
-            <a:pPr marL="274320" indent="-274320">
-              <a:spcAft>
-                <a:spcPts val="750"/>
-              </a:spcAft>
-            </a:pPr>
-            <a:r>
-              <a:rPr sz="2200" b="1" i="0">
-                <a:solidFill>
-                  <a:srgbClr val="97BC62"/>
-                </a:solidFill>
-                <a:latin typeface="Calibri"/>
-              </a:rPr>
-              <a:t>•  </a:t>
-            </a:r>
-            <a:r>
-              <a:rPr sz="2200" b="0" i="0">
-                <a:solidFill>
-                  <a:srgbClr val="222B22"/>
-                </a:solidFill>
-                <a:latin typeface="Calibri"/>
-              </a:rPr>
-              <a:t>It comes back to the bin at the door at Week 7</a:t>
-            </a:r>
-          </a:p>
-        </p:txBody>
-      </p:sp>
-      <p:sp>
-        <p:nvSpPr>
-          <p:cNvPr id="90" name="SlideNum"/>
-          <p:cNvSpPr txBox="1"/>
-          <p:nvPr/>
-        </p:nvSpPr>
-        <p:spPr>
-          <a:xfrm>
-            <a:off x="11384280" y="6446520"/>
-            <a:ext cx="640080" cy="292608"/>
-          </a:xfrm>
-          <a:prstGeom prst="rect">
-            <a:avLst/>
-          </a:prstGeom>
-          <a:noFill/>
-        </p:spPr>
-        <p:txBody>
-          <a:bodyPr wrap="none" lIns="0" tIns="0" rIns="45720" bIns="0" anchor="ctr"/>
-          <a:lstStyle/>
-          <a:p>
-            <a:pPr algn="r"/>
-            <a:r>
-              <a:t>80</a:t>
-            </a:r>
-            <a:endParaRPr sz="1000" b="1">
-              <a:solidFill>
-                <a:srgbClr val="7A8A6E"/>
-              </a:solidFill>
-              <a:latin typeface="Calibri"/>
-            </a:endParaRPr>
-          </a:p>
-        </p:txBody>
-      </p:sp>
-      <p:pic>
-        <p:nvPicPr>
-          <p:cNvPr id="33" name="Picture 33" descr="seedling - what grows between Wednesdays"/>
-          <p:cNvPicPr>
-            <a:picLocks noChangeAspect="1"/>
-          </p:cNvPicPr>
-          <p:nvPr/>
-        </p:nvPicPr>
-        <p:blipFill>
-          <a:blip r:embed="rId3"/>
-          <a:stretch>
-            <a:fillRect/>
-          </a:stretch>
-        </p:blipFill>
-        <p:spPr>
-          <a:xfrm>
-            <a:off x="8103612" y="1463040"/>
-            <a:ext cx="3262379" cy="4892040"/>
-          </a:xfrm>
-          <a:prstGeom prst="rect">
-            <a:avLst/>
-          </a:prstGeom>
-          <a:ln w="76200">
-            <a:solidFill>
-              <a:srgbClr val="FFFFFF"/>
-            </a:solidFill>
-          </a:ln>
-          <a:effectLst>
-            <a:outerShdw blurRad="63500" dist="25400" dir="5400000" rotWithShape="0">
-              <a:srgbClr val="000000">
-                <a:alpha val="35000"/>
-              </a:srgbClr>
-            </a:outerShdw>
-          </a:effectLst>
-        </p:spPr>
-      </p:pic>
-    </p:spTree>
-  </p:cSld>
-  <p:clrMapOvr>
-    <a:masterClrMapping/>
-  </p:clrMapOvr>
-</p:sld>
-</file>
-
-<file path=ppt/slides/slide81.xml><?xml version="1.0" encoding="utf-8"?>
-<p:sld xmlns:a="http://schemas.openxmlformats.org/drawingml/2006/main" xmlns:r="http://schemas.openxmlformats.org/officeDocument/2006/relationships" xmlns:p="http://schemas.openxmlformats.org/presentationml/2006/main">
-  <p:cSld>
-    <p:spTree>
-      <p:nvGrpSpPr>
-        <p:cNvPr id="1" name=""/>
-        <p:cNvGrpSpPr/>
-        <p:nvPr/>
-      </p:nvGrpSpPr>
-      <p:grpSpPr>
-        <a:xfrm>
-          <a:off x="0" y="0"/>
-          <a:ext cx="0" cy="0"/>
-          <a:chOff x="0" y="0"/>
-          <a:chExt cx="0" cy="0"/>
-        </a:xfrm>
-      </p:grpSpPr>
-      <p:sp>
-        <p:nvSpPr>
-          <p:cNvPr id="2" name="Rectangle 1"/>
-          <p:cNvSpPr/>
-          <p:nvPr/>
-        </p:nvSpPr>
-        <p:spPr>
-          <a:xfrm>
-            <a:off x="0" y="0"/>
-            <a:ext cx="12191695" cy="6858000"/>
-          </a:xfrm>
-          <a:prstGeom prst="rect">
-            <a:avLst/>
-          </a:prstGeom>
-          <a:solidFill>
-            <a:srgbClr val="FFFFFF"/>
-          </a:solidFill>
-          <a:ln>
-            <a:noFill/>
-          </a:ln>
-        </p:spPr>
-        <p:txBody>
-          <a:bodyPr/>
-          <a:lstStyle/>
-          <a:p>
-            <a:endParaRPr/>
-          </a:p>
-        </p:txBody>
-      </p:sp>
-      <p:sp>
-        <p:nvSpPr>
-          <p:cNvPr id="3" name="TextBox 2"/>
-          <p:cNvSpPr txBox="1"/>
-          <p:nvPr/>
-        </p:nvSpPr>
-        <p:spPr>
-          <a:xfrm>
-            <a:off x="822960" y="502920"/>
-            <a:ext cx="10515600" cy="822960"/>
-          </a:xfrm>
-          <a:prstGeom prst="rect">
-            <a:avLst/>
-          </a:prstGeom>
-          <a:noFill/>
-        </p:spPr>
-        <p:txBody>
-          <a:bodyPr wrap="square">
-            <a:spAutoFit/>
-          </a:bodyPr>
-          <a:lstStyle/>
-          <a:p>
-            <a:pPr algn="l">
-              <a:spcAft>
-                <a:spcPts val="600"/>
-              </a:spcAft>
-            </a:pPr>
-            <a:r>
-              <a:rPr sz="2800" b="1" i="0">
-                <a:solidFill>
-                  <a:srgbClr val="2C5F2D"/>
-                </a:solidFill>
-                <a:latin typeface="Cambria"/>
-              </a:rPr>
-              <a:t>Your Take-Home Card — This Session’s Practice</a:t>
-            </a:r>
-          </a:p>
-        </p:txBody>
-      </p:sp>
-      <p:sp>
-        <p:nvSpPr>
-          <p:cNvPr id="90" name="SlideNum"/>
-          <p:cNvSpPr txBox="1"/>
-          <p:nvPr/>
-        </p:nvSpPr>
-        <p:spPr>
-          <a:xfrm>
-            <a:off x="11384280" y="6446520"/>
-            <a:ext cx="640080" cy="292608"/>
-          </a:xfrm>
-          <a:prstGeom prst="rect">
-            <a:avLst/>
-          </a:prstGeom>
-          <a:noFill/>
-        </p:spPr>
-        <p:txBody>
-          <a:bodyPr wrap="none" lIns="0" tIns="0" rIns="45720" bIns="0" anchor="ctr"/>
-          <a:lstStyle/>
-          <a:p>
-            <a:pPr algn="r"/>
-            <a:r>
-              <a:t>81</a:t>
-            </a:r>
-            <a:endParaRPr sz="1000" b="1">
-              <a:solidFill>
-                <a:srgbClr val="7A8A6E"/>
-              </a:solidFill>
-              <a:latin typeface="Calibri"/>
-            </a:endParaRPr>
-          </a:p>
-        </p:txBody>
-      </p:sp>
-      <p:pic>
-        <p:nvPicPr>
-          <p:cNvPr id="270" name="CardImage" descr="the Week 6 check-off card, as handed out"/>
-          <p:cNvPicPr>
-            <a:picLocks noChangeAspect="1"/>
-          </p:cNvPicPr>
-          <p:nvPr/>
-        </p:nvPicPr>
-        <p:blipFill>
-          <a:blip r:embed="rId3"/>
-          <a:stretch>
-            <a:fillRect/>
-          </a:stretch>
-        </p:blipFill>
-        <p:spPr>
-          <a:xfrm>
-            <a:off x="1339945" y="1554480"/>
-            <a:ext cx="9511803" cy="4480560"/>
-          </a:xfrm>
-          <a:prstGeom prst="rect">
-            <a:avLst/>
-          </a:prstGeom>
-          <a:ln w="76200">
-            <a:solidFill>
-              <a:srgbClr val="FFFFFF"/>
-            </a:solidFill>
-          </a:ln>
-          <a:effectLst>
-            <a:outerShdw blurRad="63500" dist="25400" dir="5400000" rotWithShape="0">
-              <a:srgbClr val="000000">
-                <a:alpha val="35000"/>
-              </a:srgbClr>
-            </a:outerShdw>
-          </a:effectLst>
-        </p:spPr>
-      </p:pic>
-      <p:sp>
-        <p:nvSpPr>
-          <p:cNvPr id="271" name="Caption"/>
-          <p:cNvSpPr txBox="1"/>
-          <p:nvPr/>
-        </p:nvSpPr>
-        <p:spPr>
-          <a:xfrm>
-            <a:off x="822960" y="6217920"/>
-            <a:ext cx="10515600" cy="457200"/>
-          </a:xfrm>
-          <a:prstGeom prst="rect">
-            <a:avLst/>
-          </a:prstGeom>
-          <a:noFill/>
-        </p:spPr>
-        <p:txBody>
-          <a:bodyPr wrap="square"/>
-          <a:lstStyle/>
-          <a:p>
-            <a:pPr algn="ctr"/>
-            <a:r>
-              <a:rPr sz="1800" b="0" i="1">
-                <a:solidFill>
-                  <a:srgbClr val="222B22"/>
-                </a:solidFill>
-                <a:latin typeface="Calibri"/>
-              </a:rPr>
-              <a:t>Handed out now — fridge, mirror, journal pocket.</a:t>
-            </a:r>
-          </a:p>
-        </p:txBody>
-      </p:sp>
-    </p:spTree>
-  </p:cSld>
-  <p:clrMapOvr>
-    <a:masterClrMapping/>
-  </p:clrMapOvr>
-</p:sld>
-</file>
-
-<file path=ppt/slides/slide82.xml><?xml version="1.0" encoding="utf-8"?>
-<p:sld xmlns:a="http://schemas.openxmlformats.org/drawingml/2006/main" xmlns:r="http://schemas.openxmlformats.org/officeDocument/2006/relationships" xmlns:p="http://schemas.openxmlformats.org/presentationml/2006/main">
-  <p:cSld>
-    <p:spTree>
-      <p:nvGrpSpPr>
-        <p:cNvPr id="1" name=""/>
-        <p:cNvGrpSpPr/>
-        <p:nvPr/>
-      </p:nvGrpSpPr>
-      <p:grpSpPr>
-        <a:xfrm>
-          <a:off x="0" y="0"/>
-          <a:ext cx="0" cy="0"/>
-          <a:chOff x="0" y="0"/>
-          <a:chExt cx="0" cy="0"/>
-        </a:xfrm>
-      </p:grpSpPr>
-      <p:sp>
-        <p:nvSpPr>
-          <p:cNvPr id="2" name="Rectangle 1"/>
-          <p:cNvSpPr/>
-          <p:nvPr/>
-        </p:nvSpPr>
-        <p:spPr>
-          <a:xfrm>
-            <a:off x="0" y="0"/>
-            <a:ext cx="12191695" cy="6858000"/>
-          </a:xfrm>
-          <a:prstGeom prst="rect">
-            <a:avLst/>
-          </a:prstGeom>
-          <a:solidFill>
-            <a:srgbClr val="FFFFFF"/>
-          </a:solidFill>
-          <a:ln>
-            <a:noFill/>
-          </a:ln>
-        </p:spPr>
-        <p:txBody>
-          <a:bodyPr/>
-          <a:lstStyle/>
-          <a:p>
-            <a:endParaRPr/>
-          </a:p>
-        </p:txBody>
-      </p:sp>
-      <p:sp>
-        <p:nvSpPr>
-          <p:cNvPr id="3" name="TextBox 2"/>
-          <p:cNvSpPr txBox="1"/>
-          <p:nvPr/>
-        </p:nvSpPr>
-        <p:spPr>
-          <a:xfrm>
-            <a:off x="822960" y="502920"/>
-            <a:ext cx="10515600" cy="822960"/>
-          </a:xfrm>
-          <a:prstGeom prst="rect">
-            <a:avLst/>
-          </a:prstGeom>
-          <a:noFill/>
-        </p:spPr>
-        <p:txBody>
-          <a:bodyPr wrap="square">
-            <a:spAutoFit/>
-          </a:bodyPr>
-          <a:lstStyle/>
-          <a:p>
-            <a:pPr algn="l">
-              <a:spcAft>
-                <a:spcPts val="600"/>
-              </a:spcAft>
-            </a:pPr>
-            <a:r>
-              <a:rPr sz="2800" b="1" i="0">
-                <a:solidFill>
-                  <a:srgbClr val="2C5F2D"/>
-                </a:solidFill>
-                <a:latin typeface="Cambria"/>
-              </a:rPr>
-              <a:t>Three Questions, Carried Home</a:t>
-            </a:r>
-          </a:p>
-        </p:txBody>
-      </p:sp>
-      <p:sp>
-        <p:nvSpPr>
-          <p:cNvPr id="90" name="SlideNum"/>
-          <p:cNvSpPr txBox="1"/>
-          <p:nvPr/>
-        </p:nvSpPr>
-        <p:spPr>
-          <a:xfrm>
-            <a:off x="11384280" y="6446520"/>
-            <a:ext cx="640080" cy="292608"/>
-          </a:xfrm>
-          <a:prstGeom prst="rect">
-            <a:avLst/>
-          </a:prstGeom>
-          <a:noFill/>
-        </p:spPr>
-        <p:txBody>
-          <a:bodyPr wrap="none" lIns="0" tIns="0" rIns="45720" bIns="0" anchor="ctr"/>
-          <a:lstStyle/>
-          <a:p>
-            <a:pPr algn="r"/>
-            <a:r>
-              <a:t>82</a:t>
-            </a:r>
-            <a:endParaRPr sz="1000" b="1">
-              <a:solidFill>
-                <a:srgbClr val="7A8A6E"/>
-              </a:solidFill>
-              <a:latin typeface="Calibri"/>
-            </a:endParaRPr>
-          </a:p>
-        </p:txBody>
-      </p:sp>
-      <p:sp>
-        <p:nvSpPr>
-          <p:cNvPr id="290" name="RoomQuestion"/>
-          <p:cNvSpPr txBox="1"/>
-          <p:nvPr/>
-        </p:nvSpPr>
-        <p:spPr>
-          <a:xfrm>
-            <a:off x="822960" y="1417320"/>
-            <a:ext cx="10515600" cy="5029200"/>
-          </a:xfrm>
-          <a:prstGeom prst="rect">
-            <a:avLst/>
-          </a:prstGeom>
-          <a:noFill/>
-        </p:spPr>
-        <p:txBody>
-          <a:bodyPr wrap="square"/>
-          <a:lstStyle/>
-          <a:p>
-            <a:pPr algn="l">
-              <a:spcAft>
-                <a:spcPts val="1300"/>
-              </a:spcAft>
-            </a:pPr>
-            <a:r>
-              <a:rPr sz="1900" b="0" i="0">
-                <a:solidFill>
-                  <a:srgbClr val="222B22"/>
-                </a:solidFill>
-                <a:latin typeface="Calibri"/>
-              </a:rPr>
-              <a:t>Every week we close the same way — the leader’s reflection, then the room’s. Tonight closes a whole quarter, so the same questions come home for all of us:</a:t>
-            </a:r>
-          </a:p>
-          <a:p>
-            <a:pPr algn="l">
-              <a:spcAft>
-                <a:spcPts val="1100"/>
-              </a:spcAft>
-            </a:pPr>
-            <a:r>
-              <a:rPr sz="2400" b="1" i="0">
-                <a:solidFill>
-                  <a:srgbClr val="97BC62"/>
-                </a:solidFill>
-                <a:latin typeface="Calibri"/>
-              </a:rPr>
-              <a:t>1   </a:t>
-            </a:r>
-            <a:r>
-              <a:rPr sz="2400" b="0" i="0">
-                <a:solidFill>
-                  <a:srgbClr val="222B22"/>
-                </a:solidFill>
-                <a:latin typeface="Calibri"/>
-              </a:rPr>
-              <a:t>What’s working well that we ought to keep doing next quarter?</a:t>
-            </a:r>
-          </a:p>
-          <a:p>
-            <a:pPr algn="l">
-              <a:spcAft>
-                <a:spcPts val="1100"/>
-              </a:spcAft>
-            </a:pPr>
-            <a:r>
-              <a:rPr sz="2400" b="1" i="0">
-                <a:solidFill>
-                  <a:srgbClr val="97BC62"/>
-                </a:solidFill>
-                <a:latin typeface="Calibri"/>
-              </a:rPr>
-              <a:t>2   </a:t>
-            </a:r>
-            <a:r>
-              <a:rPr sz="2400" b="0" i="0">
-                <a:solidFill>
-                  <a:srgbClr val="222B22"/>
-                </a:solidFill>
-                <a:latin typeface="Calibri"/>
-              </a:rPr>
-              <a:t>What could we do differently that would make things even better?</a:t>
-            </a:r>
-          </a:p>
-          <a:p>
-            <a:pPr algn="l">
-              <a:spcAft>
-                <a:spcPts val="1100"/>
-              </a:spcAft>
-            </a:pPr>
-            <a:r>
-              <a:rPr sz="2400" b="1" i="0">
-                <a:solidFill>
-                  <a:srgbClr val="97BC62"/>
-                </a:solidFill>
-                <a:latin typeface="Calibri"/>
-              </a:rPr>
-              <a:t>3   </a:t>
-            </a:r>
-            <a:r>
-              <a:rPr sz="2400" b="0" i="0">
-                <a:solidFill>
-                  <a:srgbClr val="222B22"/>
-                </a:solidFill>
-                <a:latin typeface="Calibri"/>
-              </a:rPr>
-              <a:t>What would you tell somebody else about what this group is like?</a:t>
-            </a:r>
-          </a:p>
-          <a:p>
-            <a:pPr algn="l">
-              <a:spcBef>
-                <a:spcPts val="1300"/>
-              </a:spcBef>
-              <a:spcAft>
-                <a:spcPts val="1000"/>
-              </a:spcAft>
-            </a:pPr>
-            <a:r>
-              <a:rPr sz="1600" b="0" i="1">
-                <a:solidFill>
-                  <a:srgbClr val="222B22"/>
-                </a:solidFill>
-                <a:latin typeface="Calibri"/>
-              </a:rPr>
-              <a:t>No paper. Nothing to prepare. The group, never any one person. First night back, we talk.</a:t>
-            </a:r>
-          </a:p>
-        </p:txBody>
-      </p:sp>
-    </p:spTree>
-  </p:cSld>
-  <p:clrMapOvr>
-    <a:masterClrMapping/>
-  </p:clrMapOvr>
-</p:sld>
-</file>
-
-<file path=ppt/slides/slide83.xml><?xml version="1.0" encoding="utf-8"?>
-<p:sld xmlns:a="http://schemas.openxmlformats.org/drawingml/2006/main" xmlns:r="http://schemas.openxmlformats.org/officeDocument/2006/relationships" xmlns:p="http://schemas.openxmlformats.org/presentationml/2006/main">
-  <p:cSld>
-    <p:spTree>
-      <p:nvGrpSpPr>
-        <p:cNvPr id="1" name=""/>
-        <p:cNvGrpSpPr/>
-        <p:nvPr/>
-      </p:nvGrpSpPr>
-      <p:grpSpPr>
-        <a:xfrm>
-          <a:off x="0" y="0"/>
-          <a:ext cx="0" cy="0"/>
-          <a:chOff x="0" y="0"/>
-          <a:chExt cx="0" cy="0"/>
-        </a:xfrm>
-      </p:grpSpPr>
-      <p:sp>
-        <p:nvSpPr>
-          <p:cNvPr id="2" name="Rectangle 1"/>
-          <p:cNvSpPr/>
-          <p:nvPr/>
-        </p:nvSpPr>
-        <p:spPr>
-          <a:xfrm>
-            <a:off x="0" y="0"/>
-            <a:ext cx="12191695" cy="6858000"/>
-          </a:xfrm>
-          <a:prstGeom prst="rect">
-            <a:avLst/>
-          </a:prstGeom>
-          <a:solidFill>
-            <a:srgbClr val="FFFFFF"/>
-          </a:solidFill>
-          <a:ln>
-            <a:noFill/>
-          </a:ln>
-        </p:spPr>
-        <p:txBody>
-          <a:bodyPr/>
-          <a:lstStyle/>
-          <a:p>
-            <a:endParaRPr/>
-          </a:p>
-        </p:txBody>
-      </p:sp>
-      <p:sp>
-        <p:nvSpPr>
-          <p:cNvPr id="3" name="TextBox 2"/>
-          <p:cNvSpPr txBox="1"/>
-          <p:nvPr/>
-        </p:nvSpPr>
-        <p:spPr>
-          <a:xfrm>
-            <a:off x="822960" y="502920"/>
-            <a:ext cx="10515600" cy="822960"/>
-          </a:xfrm>
-          <a:prstGeom prst="rect">
-            <a:avLst/>
-          </a:prstGeom>
-          <a:noFill/>
-        </p:spPr>
-        <p:txBody>
-          <a:bodyPr wrap="square">
-            <a:spAutoFit/>
-          </a:bodyPr>
-          <a:lstStyle/>
-          <a:p>
-            <a:pPr algn="l">
-              <a:spcAft>
-                <a:spcPts val="600"/>
-              </a:spcAft>
-            </a:pPr>
-            <a:r>
-              <a:rPr sz="2800" b="1" i="0">
-                <a:solidFill>
-                  <a:srgbClr val="2C5F2D"/>
-                </a:solidFill>
-                <a:latin typeface="Cambria"/>
-              </a:rPr>
-              <a:t>The Leader Feedback Round</a:t>
-            </a:r>
-          </a:p>
-        </p:txBody>
-      </p:sp>
-      <p:sp>
-        <p:nvSpPr>
-          <p:cNvPr id="4" name="TextBox 4"/>
-          <p:cNvSpPr txBox="1"/>
-          <p:nvPr/>
-        </p:nvSpPr>
-        <p:spPr>
-          <a:xfrm>
-            <a:off x="822960" y="1554480"/>
-            <a:ext cx="6675120" cy="4892040"/>
-          </a:xfrm>
-          <a:prstGeom prst="rect">
-            <a:avLst/>
-          </a:prstGeom>
-          <a:noFill/>
-        </p:spPr>
-        <p:txBody>
-          <a:bodyPr wrap="square" lIns="91440" tIns="91440" rIns="91440" bIns="91440"/>
-          <a:lstStyle/>
-          <a:p>
-            <a:pPr marL="274320" indent="-274320">
-              <a:spcAft>
-                <a:spcPts val="900"/>
-              </a:spcAft>
-            </a:pPr>
-            <a:r>
-              <a:rPr sz="2800" b="1" i="0">
-                <a:solidFill>
-                  <a:srgbClr val="97BC62"/>
-                </a:solidFill>
-                <a:latin typeface="Calibri"/>
-              </a:rPr>
-              <a:t>•  </a:t>
-            </a:r>
-            <a:r>
-              <a:rPr sz="2800" b="0" i="0">
-                <a:solidFill>
-                  <a:srgbClr val="222B22"/>
-                </a:solidFill>
-                <a:latin typeface="Calibri"/>
-              </a:rPr>
-              <a:t>Two rounds, same as every session — the container holder first, then the content presenter: three things each</a:t>
-            </a:r>
-          </a:p>
-          <a:p>
-            <a:pPr marL="685800" indent="-274320">
-              <a:spcAft>
-                <a:spcPts val="700"/>
-              </a:spcAft>
-            </a:pPr>
-            <a:r>
-              <a:rPr sz="2000" b="1" i="0">
-                <a:solidFill>
-                  <a:srgbClr val="97BC62"/>
-                </a:solidFill>
-                <a:latin typeface="Calibri"/>
-              </a:rPr>
-              <a:t>–  </a:t>
-            </a:r>
-            <a:r>
-              <a:rPr sz="2000" b="0" i="1">
-                <a:solidFill>
-                  <a:srgbClr val="222B22"/>
-                </a:solidFill>
-                <a:latin typeface="Calibri"/>
-              </a:rPr>
-              <a:t>“What I think went well tonight: ______”</a:t>
-            </a:r>
-          </a:p>
-          <a:p>
-            <a:pPr marL="685800" indent="-274320">
-              <a:spcAft>
-                <a:spcPts val="700"/>
-              </a:spcAft>
-            </a:pPr>
-            <a:r>
-              <a:rPr sz="2000" b="1" i="0">
-                <a:solidFill>
-                  <a:srgbClr val="97BC62"/>
-                </a:solidFill>
-                <a:latin typeface="Calibri"/>
-              </a:rPr>
-              <a:t>–  </a:t>
-            </a:r>
-            <a:r>
-              <a:rPr sz="2000" b="0" i="1">
-                <a:solidFill>
-                  <a:srgbClr val="222B22"/>
-                </a:solidFill>
-                <a:latin typeface="Calibri"/>
-              </a:rPr>
-              <a:t>“What I’d do differently next time: ______”</a:t>
-            </a:r>
-          </a:p>
-          <a:p>
-            <a:pPr marL="685800" indent="-274320">
-              <a:spcAft>
-                <a:spcPts val="700"/>
-              </a:spcAft>
-            </a:pPr>
-            <a:r>
-              <a:rPr sz="2000" b="1" i="0">
-                <a:solidFill>
-                  <a:srgbClr val="97BC62"/>
-                </a:solidFill>
-                <a:latin typeface="Calibri"/>
-              </a:rPr>
-              <a:t>–  </a:t>
-            </a:r>
-            <a:r>
-              <a:rPr sz="2000" b="0" i="1">
-                <a:solidFill>
-                  <a:srgbClr val="222B22"/>
-                </a:solidFill>
-                <a:latin typeface="Calibri"/>
-              </a:rPr>
-              <a:t>“If I were to teach tonight’s process to someone, I would tell them: ______”</a:t>
-            </a:r>
-          </a:p>
-          <a:p>
-            <a:pPr marL="274320" indent="-274320">
-              <a:spcAft>
-                <a:spcPts val="900"/>
-              </a:spcAft>
-            </a:pPr>
-            <a:r>
-              <a:rPr sz="2800" b="1" i="0">
-                <a:solidFill>
-                  <a:srgbClr val="97BC62"/>
-                </a:solidFill>
-                <a:latin typeface="Calibri"/>
-              </a:rPr>
-              <a:t>•  </a:t>
-            </a:r>
-            <a:r>
-              <a:rPr sz="2800" b="0" i="0">
-                <a:solidFill>
-                  <a:srgbClr val="222B22"/>
-                </a:solidFill>
-                <a:latin typeface="Calibri"/>
-              </a:rPr>
-              <a:t>Then the room — the same two questions about tonight</a:t>
-            </a:r>
-          </a:p>
-          <a:p>
-            <a:pPr marL="274320" indent="-274320">
-              <a:spcAft>
-                <a:spcPts val="900"/>
-              </a:spcAft>
-            </a:pPr>
-            <a:r>
-              <a:rPr sz="2800" b="1" i="0">
-                <a:solidFill>
-                  <a:srgbClr val="97BC62"/>
-                </a:solidFill>
-                <a:latin typeface="Calibri"/>
-              </a:rPr>
-              <a:t>•  </a:t>
-            </a:r>
-            <a:r>
-              <a:rPr sz="2800" b="0" i="0">
-                <a:solidFill>
-                  <a:srgbClr val="222B22"/>
-                </a:solidFill>
-                <a:latin typeface="Calibri"/>
-              </a:rPr>
-              <a:t>The leaders receive without defending — “thank you” is the whole response</a:t>
-            </a:r>
-          </a:p>
-        </p:txBody>
-      </p:sp>
-      <p:sp>
-        <p:nvSpPr>
-          <p:cNvPr id="90" name="SlideNum"/>
-          <p:cNvSpPr txBox="1"/>
-          <p:nvPr/>
-        </p:nvSpPr>
-        <p:spPr>
-          <a:xfrm>
-            <a:off x="11384280" y="6446520"/>
-            <a:ext cx="640080" cy="292608"/>
-          </a:xfrm>
-          <a:prstGeom prst="rect">
-            <a:avLst/>
-          </a:prstGeom>
-          <a:noFill/>
-        </p:spPr>
-        <p:txBody>
-          <a:bodyPr wrap="none" lIns="0" tIns="0" rIns="45720" bIns="0" anchor="ctr"/>
-          <a:lstStyle/>
-          <a:p>
-            <a:pPr algn="r"/>
-            <a:r>
-              <a:t>83</a:t>
-            </a:r>
-            <a:endParaRPr sz="1000" b="1">
-              <a:solidFill>
-                <a:srgbClr val="7A8A6E"/>
-              </a:solidFill>
-              <a:latin typeface="Calibri"/>
-            </a:endParaRPr>
-          </a:p>
-        </p:txBody>
-      </p:sp>
-      <p:pic>
-        <p:nvPicPr>
-          <p:cNvPr id="33" name="Picture 33" descr="compass on the trail - the weekly bearing check"/>
-          <p:cNvPicPr>
-            <a:picLocks noChangeAspect="1"/>
-          </p:cNvPicPr>
-          <p:nvPr/>
-        </p:nvPicPr>
-        <p:blipFill>
-          <a:blip r:embed="rId3"/>
-          <a:stretch>
-            <a:fillRect/>
-          </a:stretch>
-        </p:blipFill>
-        <p:spPr>
-          <a:xfrm>
-            <a:off x="8106160" y="1463040"/>
-            <a:ext cx="3259831" cy="4892040"/>
-          </a:xfrm>
-          <a:prstGeom prst="rect">
-            <a:avLst/>
-          </a:prstGeom>
-          <a:ln w="76200">
-            <a:solidFill>
-              <a:srgbClr val="FFFFFF"/>
-            </a:solidFill>
-          </a:ln>
-          <a:effectLst>
-            <a:outerShdw blurRad="63500" dist="25400" dir="5400000" rotWithShape="0">
-              <a:srgbClr val="000000">
-                <a:alpha val="35000"/>
-              </a:srgbClr>
-            </a:outerShdw>
-          </a:effectLst>
-        </p:spPr>
-      </p:pic>
-    </p:spTree>
-  </p:cSld>
-  <p:clrMapOvr>
-    <a:masterClrMapping/>
-  </p:clrMapOvr>
-</p:sld>
-</file>
-
-<file path=ppt/slides/slide84.xml><?xml version="1.0" encoding="utf-8"?>
-<p:sld xmlns:a="http://schemas.openxmlformats.org/drawingml/2006/main" xmlns:r="http://schemas.openxmlformats.org/officeDocument/2006/relationships" xmlns:p="http://schemas.openxmlformats.org/presentationml/2006/main">
-  <p:cSld>
-    <p:spTree>
-      <p:nvGrpSpPr>
-        <p:cNvPr id="1" name=""/>
-        <p:cNvGrpSpPr/>
-        <p:nvPr/>
-      </p:nvGrpSpPr>
-      <p:grpSpPr>
-        <a:xfrm>
-          <a:off x="0" y="0"/>
-          <a:ext cx="0" cy="0"/>
-          <a:chOff x="0" y="0"/>
-          <a:chExt cx="0" cy="0"/>
-        </a:xfrm>
-      </p:grpSpPr>
-      <p:sp>
-        <p:nvSpPr>
-          <p:cNvPr id="2" name="Rectangle 1"/>
-          <p:cNvSpPr/>
-          <p:nvPr/>
-        </p:nvSpPr>
-        <p:spPr>
-          <a:xfrm>
-            <a:off x="0" y="0"/>
-            <a:ext cx="12191695" cy="6858000"/>
-          </a:xfrm>
-          <a:prstGeom prst="rect">
-            <a:avLst/>
-          </a:prstGeom>
-          <a:solidFill>
-            <a:srgbClr val="FFFFFF"/>
-          </a:solidFill>
-          <a:ln>
-            <a:noFill/>
-          </a:ln>
-        </p:spPr>
-        <p:txBody>
-          <a:bodyPr/>
-          <a:lstStyle/>
-          <a:p>
-            <a:endParaRPr/>
-          </a:p>
-        </p:txBody>
-      </p:sp>
-      <p:sp>
-        <p:nvSpPr>
-          <p:cNvPr id="3" name="TextBox 2"/>
-          <p:cNvSpPr txBox="1"/>
-          <p:nvPr/>
-        </p:nvSpPr>
-        <p:spPr>
-          <a:xfrm>
-            <a:off x="822960" y="502920"/>
-            <a:ext cx="10515600" cy="822960"/>
-          </a:xfrm>
-          <a:prstGeom prst="rect">
-            <a:avLst/>
-          </a:prstGeom>
-          <a:noFill/>
-        </p:spPr>
-        <p:txBody>
-          <a:bodyPr wrap="square">
-            <a:spAutoFit/>
-          </a:bodyPr>
-          <a:lstStyle/>
-          <a:p>
-            <a:pPr algn="l">
-              <a:spcAft>
-                <a:spcPts val="600"/>
-              </a:spcAft>
-            </a:pPr>
-            <a:r>
-              <a:rPr sz="2800" b="1" i="0">
-                <a:solidFill>
-                  <a:srgbClr val="2C5F2D"/>
-                </a:solidFill>
-                <a:latin typeface="Cambria"/>
-              </a:rPr>
-              <a:t>Closing the Container + Aaronic Blessing</a:t>
-            </a:r>
-          </a:p>
-        </p:txBody>
-      </p:sp>
-      <p:sp>
-        <p:nvSpPr>
-          <p:cNvPr id="4" name="TextBox 4"/>
-          <p:cNvSpPr txBox="1"/>
-          <p:nvPr/>
-        </p:nvSpPr>
-        <p:spPr>
-          <a:xfrm>
-            <a:off x="822960" y="1600200"/>
-            <a:ext cx="5669280" cy="4572000"/>
-          </a:xfrm>
-          <a:prstGeom prst="rect">
-            <a:avLst/>
-          </a:prstGeom>
-          <a:noFill/>
-        </p:spPr>
-        <p:txBody>
-          <a:bodyPr wrap="square" lIns="91440" tIns="91440" rIns="91440" bIns="91440"/>
-          <a:lstStyle/>
-          <a:p>
-            <a:pPr marL="274320" indent="-274320">
-              <a:spcAft>
-                <a:spcPts val="900"/>
-              </a:spcAft>
-            </a:pPr>
-            <a:r>
-              <a:rPr sz="2200" b="1" i="0">
-                <a:solidFill>
-                  <a:srgbClr val="97BC62"/>
-                </a:solidFill>
-                <a:latin typeface="Calibri"/>
-              </a:rPr>
-              <a:t>•  </a:t>
-            </a:r>
-            <a:r>
-              <a:rPr sz="2200" b="0" i="0">
-                <a:solidFill>
-                  <a:srgbClr val="222B22"/>
-                </a:solidFill>
-                <a:latin typeface="Calibri"/>
-              </a:rPr>
-              <a:t>We close the way we opened — the container, six steps:</a:t>
-            </a:r>
-          </a:p>
-          <a:p>
-            <a:pPr marL="685800" indent="-274320">
-              <a:spcAft>
-                <a:spcPts val="700"/>
-              </a:spcAft>
-            </a:pPr>
-            <a:r>
-              <a:rPr sz="2000" b="1" i="0">
-                <a:solidFill>
-                  <a:srgbClr val="97BC62"/>
-                </a:solidFill>
-                <a:latin typeface="Calibri"/>
-              </a:rPr>
-              <a:t>1   </a:t>
-            </a:r>
-            <a:r>
-              <a:rPr sz="2000" b="0" i="0">
-                <a:solidFill>
-                  <a:srgbClr val="222B22"/>
-                </a:solidFill>
-                <a:latin typeface="Calibri"/>
-              </a:rPr>
-              <a:t>Stand again — same circle, same posture as the open</a:t>
-            </a:r>
-          </a:p>
-          <a:p>
-            <a:pPr marL="685800" indent="-274320">
-              <a:spcAft>
-                <a:spcPts val="700"/>
-              </a:spcAft>
-            </a:pPr>
-            <a:r>
-              <a:rPr sz="2000" b="1" i="0">
-                <a:solidFill>
-                  <a:srgbClr val="97BC62"/>
-                </a:solidFill>
-                <a:latin typeface="Calibri"/>
-              </a:rPr>
-              <a:t>2   </a:t>
-            </a:r>
-            <a:r>
-              <a:rPr sz="2000" b="0" i="0">
-                <a:solidFill>
-                  <a:srgbClr val="222B22"/>
-                </a:solidFill>
-                <a:latin typeface="Calibri"/>
-              </a:rPr>
-              <a:t>One-word landing — compare it to your opening word</a:t>
-            </a:r>
-          </a:p>
-          <a:p>
-            <a:pPr marL="685800" indent="-274320">
-              <a:spcAft>
-                <a:spcPts val="700"/>
-              </a:spcAft>
-            </a:pPr>
-            <a:r>
-              <a:rPr sz="2000" b="1" i="0">
-                <a:solidFill>
-                  <a:srgbClr val="97BC62"/>
-                </a:solidFill>
-                <a:latin typeface="Calibri"/>
-              </a:rPr>
-              <a:t>3   </a:t>
-            </a:r>
-            <a:r>
-              <a:rPr sz="2000" b="0" i="0">
-                <a:solidFill>
-                  <a:srgbClr val="222B22"/>
-                </a:solidFill>
-                <a:latin typeface="Calibri"/>
-              </a:rPr>
-              <a:t>The one thing you are taking from tonight</a:t>
-            </a:r>
-          </a:p>
-          <a:p>
-            <a:pPr marL="685800" indent="-274320">
-              <a:spcAft>
-                <a:spcPts val="700"/>
-              </a:spcAft>
-            </a:pPr>
-            <a:r>
-              <a:rPr sz="2000" b="1" i="0">
-                <a:solidFill>
-                  <a:srgbClr val="97BC62"/>
-                </a:solidFill>
-                <a:latin typeface="Calibri"/>
-              </a:rPr>
-              <a:t>4   </a:t>
-            </a:r>
-            <a:r>
-              <a:rPr sz="2000" b="0" i="0">
-                <a:solidFill>
-                  <a:srgbClr val="222B22"/>
-                </a:solidFill>
-                <a:latin typeface="Calibri"/>
-              </a:rPr>
-              <a:t>The one practice — committed aloud, or modified to one you will actually keep</a:t>
-            </a:r>
-          </a:p>
-          <a:p>
-            <a:pPr marL="685800" indent="-274320">
-              <a:spcAft>
-                <a:spcPts val="700"/>
-              </a:spcAft>
-            </a:pPr>
-            <a:r>
-              <a:rPr sz="2000" b="1" i="0">
-                <a:solidFill>
-                  <a:srgbClr val="97BC62"/>
-                </a:solidFill>
-                <a:latin typeface="Calibri"/>
-              </a:rPr>
-              <a:t>5   </a:t>
-            </a:r>
-            <a:r>
-              <a:rPr sz="2000" b="0" i="0">
-                <a:solidFill>
-                  <a:srgbClr val="222B22"/>
-                </a:solidFill>
-                <a:latin typeface="Calibri"/>
-              </a:rPr>
-              <a:t>Blessings — specific, witnessed, short</a:t>
-            </a:r>
-          </a:p>
-          <a:p>
-            <a:pPr marL="685800" indent="-274320">
-              <a:spcAft>
-                <a:spcPts val="700"/>
-              </a:spcAft>
-            </a:pPr>
-            <a:r>
-              <a:rPr sz="2000" b="1" i="0">
-                <a:solidFill>
-                  <a:srgbClr val="97BC62"/>
-                </a:solidFill>
-                <a:latin typeface="Calibri"/>
-              </a:rPr>
-              <a:t>6   </a:t>
-            </a:r>
-            <a:r>
-              <a:rPr sz="2000" b="0" i="0">
-                <a:solidFill>
-                  <a:srgbClr val="222B22"/>
-                </a:solidFill>
-                <a:latin typeface="Calibri"/>
-              </a:rPr>
-              <a:t>Closing prayer — and the Aaronic blessing, spoken over each other, face to face</a:t>
-            </a:r>
-          </a:p>
-        </p:txBody>
-      </p:sp>
-      <p:sp>
-        <p:nvSpPr>
-          <p:cNvPr id="6" name="TextBox 6"/>
-          <p:cNvSpPr txBox="1"/>
-          <p:nvPr/>
-        </p:nvSpPr>
-        <p:spPr>
-          <a:xfrm>
-            <a:off x="6766560" y="1737360"/>
-            <a:ext cx="4663440" cy="2926080"/>
-          </a:xfrm>
-          <a:prstGeom prst="rect">
-            <a:avLst/>
-          </a:prstGeom>
-          <a:solidFill>
-            <a:srgbClr val="F1F6EC"/>
-          </a:solidFill>
-        </p:spPr>
-        <p:txBody>
-          <a:bodyPr wrap="square" lIns="91440" tIns="91440" rIns="91440" bIns="91440" anchor="ctr"/>
-          <a:lstStyle/>
-          <a:p>
-            <a:pPr>
-              <a:spcAft>
-                <a:spcPts val="900"/>
-              </a:spcAft>
-            </a:pPr>
-            <a:r>
-              <a:rPr sz="1200" b="1" i="0">
-                <a:solidFill>
-                  <a:srgbClr val="97BC62"/>
-                </a:solidFill>
-                <a:latin typeface="Calibri"/>
-              </a:rPr>
-              <a:t>THE AARONIC BLESSING — NUMBERS 6:24–26</a:t>
-            </a:r>
-          </a:p>
-          <a:p>
-            <a:pPr>
-              <a:spcAft>
-                <a:spcPts val="600"/>
-              </a:spcAft>
-            </a:pPr>
-            <a:r>
-              <a:rPr sz="2400" b="0" i="1">
-                <a:solidFill>
-                  <a:srgbClr val="222B22"/>
-                </a:solidFill>
-                <a:latin typeface="Cambria"/>
-              </a:rPr>
-              <a:t>“The Lord bless you and keep you;</a:t>
-            </a:r>
-          </a:p>
-          <a:p>
-            <a:pPr>
-              <a:spcAft>
-                <a:spcPts val="600"/>
-              </a:spcAft>
-            </a:pPr>
-            <a:r>
-              <a:rPr sz="2400" b="0" i="1">
-                <a:solidFill>
-                  <a:srgbClr val="222B22"/>
-                </a:solidFill>
-                <a:latin typeface="Cambria"/>
-              </a:rPr>
-              <a:t>the Lord make his face to shine upon you, and be gracious to you;</a:t>
-            </a:r>
-          </a:p>
-          <a:p>
-            <a:pPr>
-              <a:spcAft>
-                <a:spcPts val="600"/>
-              </a:spcAft>
-            </a:pPr>
-            <a:r>
-              <a:rPr sz="2400" b="0" i="1">
-                <a:solidFill>
-                  <a:srgbClr val="222B22"/>
-                </a:solidFill>
-                <a:latin typeface="Cambria"/>
-              </a:rPr>
-              <a:t>the Lord lift up his countenance upon you, and give you peace.”</a:t>
-            </a:r>
-          </a:p>
-        </p:txBody>
-      </p:sp>
-      <p:sp>
-        <p:nvSpPr>
-          <p:cNvPr id="90" name="SlideNum"/>
-          <p:cNvSpPr txBox="1"/>
-          <p:nvPr/>
-        </p:nvSpPr>
-        <p:spPr>
-          <a:xfrm>
-            <a:off x="11384280" y="6446520"/>
-            <a:ext cx="640080" cy="292608"/>
-          </a:xfrm>
-          <a:prstGeom prst="rect">
-            <a:avLst/>
-          </a:prstGeom>
-          <a:noFill/>
-        </p:spPr>
-        <p:txBody>
-          <a:bodyPr wrap="none" lIns="0" tIns="0" rIns="45720" bIns="0" anchor="ctr"/>
-          <a:lstStyle/>
-          <a:p>
-            <a:pPr algn="r"/>
-            <a:r>
-              <a:t>84</a:t>
-            </a:r>
-            <a:endParaRPr sz="1000" b="1">
-              <a:solidFill>
-                <a:srgbClr val="7A8A6E"/>
-              </a:solidFill>
-              <a:latin typeface="Calibri"/>
-            </a:endParaRPr>
-          </a:p>
-        </p:txBody>
-      </p:sp>
-    </p:spTree>
-  </p:cSld>
-  <p:clrMapOvr>
-    <a:masterClrMapping/>
-  </p:clrMapOvr>
-</p:sld>
-</file>
-
-<file path=ppt/slides/slide85.xml><?xml version="1.0" encoding="utf-8"?>
-<p:sld xmlns:a="http://schemas.openxmlformats.org/drawingml/2006/main" xmlns:r="http://schemas.openxmlformats.org/officeDocument/2006/relationships" xmlns:p="http://schemas.openxmlformats.org/presentationml/2006/main">
-  <p:cSld>
-    <p:spTree>
-      <p:nvGrpSpPr>
-        <p:cNvPr id="1" name=""/>
-        <p:cNvGrpSpPr/>
-        <p:nvPr/>
-      </p:nvGrpSpPr>
-      <p:grpSpPr>
-        <a:xfrm>
-          <a:off x="0" y="0"/>
-          <a:ext cx="0" cy="0"/>
-          <a:chOff x="0" y="0"/>
-          <a:chExt cx="0" cy="0"/>
-        </a:xfrm>
-      </p:grpSpPr>
-      <p:sp>
-        <p:nvSpPr>
-          <p:cNvPr id="2" name="Rectangle 1"/>
-          <p:cNvSpPr/>
-          <p:nvPr/>
-        </p:nvSpPr>
-        <p:spPr>
-          <a:xfrm>
-            <a:off x="0" y="0"/>
-            <a:ext cx="12191695" cy="6858000"/>
-          </a:xfrm>
-          <a:prstGeom prst="rect">
-            <a:avLst/>
-          </a:prstGeom>
-          <a:solidFill>
-            <a:srgbClr val="2C5F2D"/>
-          </a:solidFill>
-          <a:ln>
-            <a:noFill/>
-          </a:ln>
-          <a:effectLst/>
-        </p:spPr>
-        <p:style>
-          <a:lnRef idx="1">
-            <a:schemeClr val="accent1"/>
-          </a:lnRef>
-          <a:fillRef idx="3">
-            <a:schemeClr val="accent1"/>
-          </a:fillRef>
-          <a:effectRef idx="2">
-            <a:schemeClr val="accent1"/>
-          </a:effectRef>
-          <a:fontRef idx="minor">
-            <a:schemeClr val="lt1"/>
-          </a:fontRef>
-        </p:style>
-        <p:txBody>
-          <a:bodyPr rtlCol="0" anchor="ctr"/>
-          <a:lstStyle/>
-          <a:p>
-            <a:pPr algn="ctr"/>
-            <a:endParaRPr/>
-          </a:p>
-        </p:txBody>
-      </p:sp>
-      <p:sp>
-        <p:nvSpPr>
-          <p:cNvPr id="3" name="TextBox 2"/>
-          <p:cNvSpPr txBox="1"/>
-          <p:nvPr/>
-        </p:nvSpPr>
-        <p:spPr>
-          <a:xfrm>
-            <a:off x="1097280" y="2286000"/>
-            <a:ext cx="9966960" cy="2194560"/>
-          </a:xfrm>
-          <a:prstGeom prst="rect">
-            <a:avLst/>
-          </a:prstGeom>
-          <a:noFill/>
-        </p:spPr>
-        <p:txBody>
-          <a:bodyPr wrap="square">
-            <a:spAutoFit/>
-          </a:bodyPr>
-          <a:lstStyle/>
-          <a:p>
-            <a:pPr algn="l">
-              <a:spcAft>
-                <a:spcPts val="600"/>
-              </a:spcAft>
-            </a:pPr>
-            <a:r>
-              <a:rPr sz="1800" b="1" i="0">
-                <a:solidFill>
-                  <a:srgbClr val="97BC62"/>
-                </a:solidFill>
-                <a:latin typeface="Calibri"/>
-              </a:rPr>
-              <a:t>Quarter 2</a:t>
-            </a:r>
-          </a:p>
-          <a:p>
-            <a:pPr algn="l">
-              <a:spcAft>
-                <a:spcPts val="600"/>
-              </a:spcAft>
-            </a:pPr>
-            <a:r>
-              <a:rPr sz="4000" b="1" i="0">
-                <a:solidFill>
-                  <a:srgbClr val="FFFFFF"/>
-                </a:solidFill>
-                <a:latin typeface="Cambria"/>
-              </a:rPr>
-              <a:t>Connect with God</a:t>
-            </a:r>
-          </a:p>
-          <a:p>
-            <a:pPr algn="l">
-              <a:spcAft>
-                <a:spcPts val="600"/>
-              </a:spcAft>
-            </a:pPr>
-            <a:r>
-              <a:rPr sz="1800" b="0" i="1">
-                <a:solidFill>
-                  <a:srgbClr val="E4EFDA"/>
-                </a:solidFill>
-                <a:latin typeface="Calibri"/>
-              </a:rPr>
-              <a:t>Weeks 7–11  ·  Five Wednesdays · PROAPT, the Garden, Any Doubts? · ends at the year’s midpoint</a:t>
-            </a:r>
-          </a:p>
-        </p:txBody>
-      </p:sp>
-      <p:sp>
-        <p:nvSpPr>
-          <p:cNvPr id="90" name="SlideNum"/>
-          <p:cNvSpPr txBox="1"/>
-          <p:nvPr/>
-        </p:nvSpPr>
-        <p:spPr>
-          <a:xfrm>
-            <a:off x="11384280" y="6446520"/>
-            <a:ext cx="640080" cy="292608"/>
-          </a:xfrm>
-          <a:prstGeom prst="rect">
-            <a:avLst/>
-          </a:prstGeom>
-          <a:noFill/>
-        </p:spPr>
-        <p:txBody>
-          <a:bodyPr wrap="none" lIns="0" tIns="0" rIns="45720" bIns="0" anchor="ctr"/>
-          <a:lstStyle/>
-          <a:p>
-            <a:pPr algn="r"/>
-            <a:r>
-              <a:t>85</a:t>
-            </a:r>
-            <a:endParaRPr sz="1000" b="1">
-              <a:solidFill>
-                <a:srgbClr val="F1F6EC"/>
-              </a:solidFill>
-              <a:latin typeface="Calibri"/>
-            </a:endParaRPr>
-          </a:p>
-        </p:txBody>
-      </p:sp>
     </p:spTree>
   </p:cSld>
   <p:clrMapOvr>

--- a/_implementation-notes/evening-series/FotH Evening Session 6 Slides DRAFT v1.pptx
+++ b/_implementation-notes/evening-series/FotH Evening Session 6 Slides DRAFT v1.pptx
@@ -5247,6 +5247,364 @@
                 </a:solidFill>
                 <a:latin typeface="Cambria"/>
               </a:rPr>
+              <a:t>Confession and Restoration in pairs</a:t>
+            </a:r>
+          </a:p>
+        </p:txBody>
+      </p:sp>
+      <p:sp>
+        <p:nvSpPr>
+          <p:cNvPr id="4" name="TextBox 4"/>
+          <p:cNvSpPr txBox="1"/>
+          <p:nvPr/>
+        </p:nvSpPr>
+        <p:spPr>
+          <a:xfrm>
+            <a:off x="822960" y="1554480"/>
+            <a:ext cx="6675120" cy="4892040"/>
+          </a:xfrm>
+          <a:prstGeom prst="rect">
+            <a:avLst/>
+          </a:prstGeom>
+          <a:noFill/>
+        </p:spPr>
+        <p:txBody>
+          <a:bodyPr wrap="square" lIns="91440" tIns="91440" rIns="91440" bIns="91440"/>
+          <a:lstStyle/>
+          <a:p>
+            <a:pPr marL="274320" indent="-274320">
+              <a:spcAft>
+                <a:spcPts val="750"/>
+              </a:spcAft>
+            </a:pPr>
+            <a:r>
+              <a:rPr sz="2000" b="1" i="0">
+                <a:solidFill>
+                  <a:srgbClr val="97BC62"/>
+                </a:solidFill>
+                <a:latin typeface="Calibri"/>
+              </a:rPr>
+              <a:t>•  </a:t>
+            </a:r>
+            <a:r>
+              <a:rPr sz="2000" b="0" i="0">
+                <a:solidFill>
+                  <a:srgbClr val="222B22"/>
+                </a:solidFill>
+                <a:latin typeface="Calibri"/>
+              </a:rPr>
+              <a:t>Ninety seconds of silence to settle in — the silence is part of the practice</a:t>
+            </a:r>
+          </a:p>
+          <a:p>
+            <a:pPr marL="342900" indent="-342900">
+              <a:spcAft>
+                <a:spcPts val="750"/>
+              </a:spcAft>
+            </a:pPr>
+            <a:r>
+              <a:rPr sz="2000" b="1" i="0">
+                <a:solidFill>
+                  <a:srgbClr val="97BC62"/>
+                </a:solidFill>
+                <a:latin typeface="Calibri"/>
+              </a:rPr>
+              <a:t>1   </a:t>
+            </a:r>
+            <a:r>
+              <a:rPr sz="2000" b="0" i="0">
+                <a:solidFill>
+                  <a:srgbClr val="222B22"/>
+                </a:solidFill>
+                <a:latin typeface="Calibri"/>
+              </a:rPr>
+              <a:t>The leadsanion goes first — names one place, receives a blessing</a:t>
+            </a:r>
+          </a:p>
+          <a:p>
+            <a:pPr marL="342900" indent="-342900">
+              <a:spcAft>
+                <a:spcPts val="750"/>
+              </a:spcAft>
+            </a:pPr>
+            <a:r>
+              <a:rPr sz="2000" b="1" i="0">
+                <a:solidFill>
+                  <a:srgbClr val="97BC62"/>
+                </a:solidFill>
+                <a:latin typeface="Calibri"/>
+              </a:rPr>
+              <a:t>2   </a:t>
+            </a:r>
+            <a:r>
+              <a:rPr sz="2000" b="0" i="0">
+                <a:solidFill>
+                  <a:srgbClr val="222B22"/>
+                </a:solidFill>
+                <a:latin typeface="Calibri"/>
+              </a:rPr>
+              <a:t>The parents next — the arranged parent opens; own struggles only, within the rails</a:t>
+            </a:r>
+          </a:p>
+          <a:p>
+            <a:pPr marL="342900" indent="-342900">
+              <a:spcAft>
+                <a:spcPts val="750"/>
+              </a:spcAft>
+            </a:pPr>
+            <a:r>
+              <a:rPr sz="2000" b="1" i="0">
+                <a:solidFill>
+                  <a:srgbClr val="97BC62"/>
+                </a:solidFill>
+                <a:latin typeface="Calibri"/>
+              </a:rPr>
+              <a:t>3   </a:t>
+            </a:r>
+            <a:r>
+              <a:rPr sz="2000" b="0" i="0">
+                <a:solidFill>
+                  <a:srgbClr val="222B22"/>
+                </a:solidFill>
+                <a:latin typeface="Calibri"/>
+              </a:rPr>
+              <a:t>The teens — each names one place at whatever depth they choose. Pass is real, honored without a flicker</a:t>
+            </a:r>
+          </a:p>
+          <a:p>
+            <a:pPr marL="274320" indent="-274320">
+              <a:spcAft>
+                <a:spcPts val="750"/>
+              </a:spcAft>
+            </a:pPr>
+            <a:r>
+              <a:rPr sz="2000" b="1" i="0">
+                <a:solidFill>
+                  <a:srgbClr val="97BC62"/>
+                </a:solidFill>
+                <a:latin typeface="Calibri"/>
+              </a:rPr>
+              <a:t>•  </a:t>
+            </a:r>
+            <a:r>
+              <a:rPr sz="2000" b="0" i="0">
+                <a:solidFill>
+                  <a:srgbClr val="222B22"/>
+                </a:solidFill>
+                <a:latin typeface="Calibri"/>
+              </a:rPr>
+              <a:t>The form: “The place where I want to walk in greater honesty before God is ______.”</a:t>
+            </a:r>
+          </a:p>
+          <a:p>
+            <a:pPr marL="274320" indent="-274320">
+              <a:spcAft>
+                <a:spcPts val="750"/>
+              </a:spcAft>
+            </a:pPr>
+            <a:r>
+              <a:rPr sz="2000" b="1" i="0">
+                <a:solidFill>
+                  <a:srgbClr val="97BC62"/>
+                </a:solidFill>
+                <a:latin typeface="Calibri"/>
+              </a:rPr>
+              <a:t>•  </a:t>
+            </a:r>
+            <a:r>
+              <a:rPr sz="2000" b="0" i="0">
+                <a:solidFill>
+                  <a:srgbClr val="222B22"/>
+                </a:solidFill>
+                <a:latin typeface="Calibri"/>
+              </a:rPr>
+              <a:t>After each naming, a brief specific blessing — a teen blessing their own parent is one of the best things this night can produce</a:t>
+            </a:r>
+          </a:p>
+          <a:p>
+            <a:pPr marL="274320" indent="-274320">
+              <a:spcAft>
+                <a:spcPts val="750"/>
+              </a:spcAft>
+            </a:pPr>
+            <a:r>
+              <a:rPr sz="2000" b="1" i="0">
+                <a:solidFill>
+                  <a:srgbClr val="97BC62"/>
+                </a:solidFill>
+                <a:latin typeface="Calibri"/>
+              </a:rPr>
+              <a:t>•  </a:t>
+            </a:r>
+            <a:r>
+              <a:rPr sz="2000" b="0" i="0">
+                <a:solidFill>
+                  <a:srgbClr val="222B22"/>
+                </a:solidFill>
+                <a:latin typeface="Calibri"/>
+              </a:rPr>
+              <a:t>Closing silence — “We have named real things tonight. Let’s sit with what was said.”</a:t>
+            </a:r>
+          </a:p>
+        </p:txBody>
+      </p:sp>
+      <p:sp>
+        <p:nvSpPr>
+          <p:cNvPr id="90" name="SlideNum"/>
+          <p:cNvSpPr txBox="1"/>
+          <p:nvPr/>
+        </p:nvSpPr>
+        <p:spPr>
+          <a:xfrm>
+            <a:off x="11384280" y="6446520"/>
+            <a:ext cx="640080" cy="292608"/>
+          </a:xfrm>
+          <a:prstGeom prst="rect">
+            <a:avLst/>
+          </a:prstGeom>
+          <a:noFill/>
+        </p:spPr>
+        <p:txBody>
+          <a:bodyPr wrap="none" lIns="0" tIns="0" rIns="45720" bIns="0" anchor="ctr"/>
+          <a:lstStyle/>
+          <a:p>
+            <a:pPr algn="r"/>
+            <a:r>
+              <a:t>78</a:t>
+            </a:r>
+            <a:endParaRPr sz="1000" b="1">
+              <a:solidFill>
+                <a:srgbClr val="7A8A6E"/>
+              </a:solidFill>
+              <a:latin typeface="Calibri"/>
+            </a:endParaRPr>
+          </a:p>
+        </p:txBody>
+      </p:sp>
+      <p:pic>
+        <p:nvPicPr>
+          <p:cNvPr id="30" name="Picture 30" descr="clear sunlit water over stones"/>
+          <p:cNvPicPr>
+            <a:picLocks noChangeAspect="1"/>
+          </p:cNvPicPr>
+          <p:nvPr/>
+        </p:nvPicPr>
+        <p:blipFill>
+          <a:blip r:embed="rId3"/>
+          <a:stretch>
+            <a:fillRect/>
+          </a:stretch>
+        </p:blipFill>
+        <p:spPr>
+          <a:xfrm>
+            <a:off x="8076095" y="1463040"/>
+            <a:ext cx="3289896" cy="4892040"/>
+          </a:xfrm>
+          <a:prstGeom prst="rect">
+            <a:avLst/>
+          </a:prstGeom>
+          <a:ln w="76200">
+            <a:solidFill>
+              <a:srgbClr val="FFFFFF"/>
+            </a:solidFill>
+          </a:ln>
+          <a:effectLst>
+            <a:outerShdw blurRad="63500" dist="25400" dir="5400000" rotWithShape="0">
+              <a:srgbClr val="000000">
+                <a:alpha val="35000"/>
+              </a:srgbClr>
+            </a:outerShdw>
+          </a:effectLst>
+        </p:spPr>
+      </p:pic>
+    </p:spTree>
+  </p:cSld>
+  <p:clrMapOvr>
+    <a:masterClrMapping/>
+  </p:clrMapOvr>
+</p:sld>
+</file>
+
+<file path=ppt/slides/slide11.xml><?xml version="1.0" encoding="utf-8"?>
+<p:sld xmlns:a="http://schemas.openxmlformats.org/drawingml/2006/main" xmlns:r="http://schemas.openxmlformats.org/officeDocument/2006/relationships" xmlns:p="http://schemas.openxmlformats.org/presentationml/2006/main">
+  <p:cSld>
+    <p:spTree>
+      <p:nvGrpSpPr>
+        <p:cNvPr id="1" name=""/>
+        <p:cNvGrpSpPr/>
+        <p:nvPr/>
+      </p:nvGrpSpPr>
+      <p:grpSpPr>
+        <a:xfrm>
+          <a:off x="0" y="0"/>
+          <a:ext cx="0" cy="0"/>
+          <a:chOff x="0" y="0"/>
+          <a:chExt cx="0" cy="0"/>
+        </a:xfrm>
+      </p:grpSpPr>
+      <p:sp>
+        <p:nvSpPr>
+          <p:cNvPr id="2" name="Rectangle 1"/>
+          <p:cNvSpPr/>
+          <p:nvPr/>
+        </p:nvSpPr>
+        <p:spPr>
+          <a:xfrm>
+            <a:off x="0" y="0"/>
+            <a:ext cx="12191695" cy="6858000"/>
+          </a:xfrm>
+          <a:prstGeom prst="rect">
+            <a:avLst/>
+          </a:prstGeom>
+          <a:solidFill>
+            <a:srgbClr val="FFFFFF"/>
+          </a:solidFill>
+          <a:ln>
+            <a:noFill/>
+          </a:ln>
+        </p:spPr>
+        <p:txBody>
+          <a:bodyPr/>
+          <a:lstStyle/>
+          <a:p>
+            <a:endParaRPr/>
+          </a:p>
+        </p:txBody>
+      </p:sp>
+      <p:sp>
+        <p:nvSpPr>
+          <p:cNvPr id="3" name="TextBox 2"/>
+          <p:cNvSpPr txBox="1"/>
+          <p:nvPr/>
+        </p:nvSpPr>
+        <p:spPr>
+          <a:xfrm>
+            <a:off x="822960" y="502920"/>
+            <a:ext cx="10515600" cy="822960"/>
+          </a:xfrm>
+          <a:prstGeom prst="rect">
+            <a:avLst/>
+          </a:prstGeom>
+          <a:noFill/>
+        </p:spPr>
+        <p:txBody>
+          <a:bodyPr wrap="square">
+            <a:spAutoFit/>
+          </a:bodyPr>
+          <a:lstStyle/>
+          <a:p>
+            <a:pPr algn="l">
+              <a:spcAft>
+                <a:spcPts val="600"/>
+              </a:spcAft>
+            </a:pPr>
+            <a:r>
+              <a:rPr sz="2800" b="1" i="0">
+                <a:solidFill>
+                  <a:srgbClr val="2C5F2D"/>
+                </a:solidFill>
+                <a:latin typeface="Cambria"/>
+              </a:rPr>
               <a:t>Merge and Shared Blessing</a:t>
             </a:r>
           </a:p>
@@ -5414,7 +5772,7 @@
 </p:sld>
 </file>
 
-<file path=ppt/slides/slide11.xml><?xml version="1.0" encoding="utf-8"?>
+<file path=ppt/slides/slide12.xml><?xml version="1.0" encoding="utf-8"?>
 <p:sld xmlns:a="http://schemas.openxmlformats.org/drawingml/2006/main" xmlns:r="http://schemas.openxmlformats.org/officeDocument/2006/relationships" xmlns:p="http://schemas.openxmlformats.org/presentationml/2006/main">
   <p:cSld>
     <p:spTree>
@@ -5748,6 +6106,390 @@
 </file>
 
 <file path=ppt/slides/slide13.xml><?xml version="1.0" encoding="utf-8"?>
+<p:sld xmlns:a="http://schemas.openxmlformats.org/drawingml/2006/main" xmlns:p="http://schemas.openxmlformats.org/presentationml/2006/main" xmlns:r="http://schemas.openxmlformats.org/officeDocument/2006/relationships">
+  <p:cSld>
+    <p:spTree>
+      <p:nvGrpSpPr>
+        <p:cNvPr id="1" name=""/>
+        <p:cNvGrpSpPr/>
+        <p:nvPr/>
+      </p:nvGrpSpPr>
+      <p:grpSpPr/>
+      <p:sp>
+        <p:nvSpPr>
+          <p:cNvPr id="2" name="Rectangle 1"/>
+          <p:cNvSpPr/>
+          <p:nvPr/>
+        </p:nvSpPr>
+        <p:spPr>
+          <a:xfrm>
+            <a:off x="0" y="0"/>
+            <a:ext cx="12192000" cy="6858000"/>
+          </a:xfrm>
+          <a:prstGeom prst="rect">
+            <a:avLst/>
+          </a:prstGeom>
+          <a:solidFill>
+            <a:srgbClr val="FFFFFF"/>
+          </a:solidFill>
+          <a:ln>
+            <a:noFill/>
+          </a:ln>
+          <a:effectLst/>
+        </p:spPr>
+        <p:style>
+          <a:lnRef idx="1">
+            <a:schemeClr val="accent1"/>
+          </a:lnRef>
+          <a:fillRef idx="3">
+            <a:schemeClr val="accent1"/>
+          </a:fillRef>
+          <a:effectRef idx="2">
+            <a:schemeClr val="accent1"/>
+          </a:effectRef>
+          <a:fontRef idx="minor">
+            <a:schemeClr val="lt1"/>
+          </a:fontRef>
+        </p:style>
+        <p:txBody>
+          <a:bodyPr rtlCol="0" anchor="ctr"/>
+          <a:lstStyle/>
+          <a:p>
+            <a:pPr algn="ctr"/>
+          </a:p>
+        </p:txBody>
+      </p:sp>
+      <p:sp>
+        <p:nvSpPr>
+          <p:cNvPr id="3" name="TextBox 2"/>
+          <p:cNvSpPr txBox="1"/>
+          <p:nvPr/>
+        </p:nvSpPr>
+        <p:spPr>
+          <a:xfrm>
+            <a:off x="822960" y="502920"/>
+            <a:ext cx="10515600" cy="822960"/>
+          </a:xfrm>
+          <a:prstGeom prst="rect">
+            <a:avLst/>
+          </a:prstGeom>
+          <a:noFill/>
+        </p:spPr>
+        <p:txBody>
+          <a:bodyPr wrap="square">
+            <a:spAutoFit/>
+          </a:bodyPr>
+          <a:lstStyle/>
+          <a:p>
+            <a:r>
+              <a:rPr sz="2800" b="1">
+                <a:solidFill>
+                  <a:srgbClr val="2C5F2D"/>
+                </a:solidFill>
+                <a:latin typeface="Cambria"/>
+              </a:rPr>
+              <a:t>The Take-Home Sheet — the Daily Rhythm</a:t>
+            </a:r>
+          </a:p>
+        </p:txBody>
+      </p:sp>
+      <p:pic>
+        <p:nvPicPr>
+          <p:cNvPr id="4" name="Picture 3" descr="s6_part1.png"/>
+          <p:cNvPicPr>
+            <a:picLocks noChangeAspect="1"/>
+          </p:cNvPicPr>
+          <p:nvPr/>
+        </p:nvPicPr>
+        <p:blipFill>
+          <a:blip r:embed="rId2"/>
+          <a:stretch>
+            <a:fillRect/>
+          </a:stretch>
+        </p:blipFill>
+        <p:spPr>
+          <a:xfrm>
+            <a:off x="1798167" y="1463040"/>
+            <a:ext cx="8595360" cy="4039819"/>
+          </a:xfrm>
+          <a:prstGeom prst="rect">
+            <a:avLst/>
+          </a:prstGeom>
+          <a:ln w="12700">
+            <a:solidFill>
+              <a:srgbClr val="C8C8C8"/>
+            </a:solidFill>
+          </a:ln>
+        </p:spPr>
+      </p:pic>
+      <p:sp>
+        <p:nvSpPr>
+          <p:cNvPr id="5" name="TextBox 4"/>
+          <p:cNvSpPr txBox="1"/>
+          <p:nvPr/>
+        </p:nvSpPr>
+        <p:spPr>
+          <a:xfrm>
+            <a:off x="822960" y="6355080"/>
+            <a:ext cx="10515600" cy="411480"/>
+          </a:xfrm>
+          <a:prstGeom prst="rect">
+            <a:avLst/>
+          </a:prstGeom>
+          <a:noFill/>
+        </p:spPr>
+        <p:txBody>
+          <a:bodyPr wrap="square">
+            <a:spAutoFit/>
+          </a:bodyPr>
+          <a:lstStyle/>
+          <a:p>
+            <a:r>
+              <a:rPr sz="1400" i="1">
+                <a:solidFill>
+                  <a:srgbClr val="595959"/>
+                </a:solidFill>
+                <a:latin typeface="Calibri"/>
+              </a:rPr>
+              <a:t>Handed out now — this is the sheet in your hands.</a:t>
+            </a:r>
+          </a:p>
+        </p:txBody>
+      </p:sp>
+      <p:sp>
+        <p:nvSpPr>
+          <p:cNvPr id="90" name="SlideNum"/>
+          <p:cNvSpPr txBox="1"/>
+          <p:nvPr/>
+        </p:nvSpPr>
+        <p:spPr>
+          <a:xfrm>
+            <a:off x="11384280" y="6446520"/>
+            <a:ext cx="640080" cy="292608"/>
+          </a:xfrm>
+          <a:prstGeom prst="rect">
+            <a:avLst/>
+          </a:prstGeom>
+          <a:noFill/>
+        </p:spPr>
+        <p:txBody>
+          <a:bodyPr wrap="none" lIns="0" tIns="0" rIns="45720" bIns="0" anchor="ctr"/>
+          <a:lstStyle/>
+          <a:p>
+            <a:pPr algn="r"/>
+            <a:r>
+              <a:t>81</a:t>
+            </a:r>
+            <a:endParaRPr sz="1000" b="1">
+              <a:solidFill>
+                <a:srgbClr val="7A8A6E"/>
+              </a:solidFill>
+              <a:latin typeface="Calibri"/>
+            </a:endParaRPr>
+          </a:p>
+        </p:txBody>
+      </p:sp>
+    </p:spTree>
+  </p:cSld>
+  <p:clrMapOvr>
+    <a:masterClrMapping/>
+  </p:clrMapOvr>
+</p:sld>
+</file>
+
+<file path=ppt/slides/slide14.xml><?xml version="1.0" encoding="utf-8"?>
+<p:sld xmlns:a="http://schemas.openxmlformats.org/drawingml/2006/main" xmlns:p="http://schemas.openxmlformats.org/presentationml/2006/main" xmlns:r="http://schemas.openxmlformats.org/officeDocument/2006/relationships">
+  <p:cSld>
+    <p:spTree>
+      <p:nvGrpSpPr>
+        <p:cNvPr id="1" name=""/>
+        <p:cNvGrpSpPr/>
+        <p:nvPr/>
+      </p:nvGrpSpPr>
+      <p:grpSpPr/>
+      <p:sp>
+        <p:nvSpPr>
+          <p:cNvPr id="2" name="Rectangle 1"/>
+          <p:cNvSpPr/>
+          <p:nvPr/>
+        </p:nvSpPr>
+        <p:spPr>
+          <a:xfrm>
+            <a:off x="0" y="0"/>
+            <a:ext cx="12192000" cy="6858000"/>
+          </a:xfrm>
+          <a:prstGeom prst="rect">
+            <a:avLst/>
+          </a:prstGeom>
+          <a:solidFill>
+            <a:srgbClr val="FFFFFF"/>
+          </a:solidFill>
+          <a:ln>
+            <a:noFill/>
+          </a:ln>
+          <a:effectLst/>
+        </p:spPr>
+        <p:style>
+          <a:lnRef idx="1">
+            <a:schemeClr val="accent1"/>
+          </a:lnRef>
+          <a:fillRef idx="3">
+            <a:schemeClr val="accent1"/>
+          </a:fillRef>
+          <a:effectRef idx="2">
+            <a:schemeClr val="accent1"/>
+          </a:effectRef>
+          <a:fontRef idx="minor">
+            <a:schemeClr val="lt1"/>
+          </a:fontRef>
+        </p:style>
+        <p:txBody>
+          <a:bodyPr rtlCol="0" anchor="ctr"/>
+          <a:lstStyle/>
+          <a:p>
+            <a:pPr algn="ctr"/>
+          </a:p>
+        </p:txBody>
+      </p:sp>
+      <p:sp>
+        <p:nvSpPr>
+          <p:cNvPr id="3" name="TextBox 2"/>
+          <p:cNvSpPr txBox="1"/>
+          <p:nvPr/>
+        </p:nvSpPr>
+        <p:spPr>
+          <a:xfrm>
+            <a:off x="822960" y="502920"/>
+            <a:ext cx="10515600" cy="822960"/>
+          </a:xfrm>
+          <a:prstGeom prst="rect">
+            <a:avLst/>
+          </a:prstGeom>
+          <a:noFill/>
+        </p:spPr>
+        <p:txBody>
+          <a:bodyPr wrap="square">
+            <a:spAutoFit/>
+          </a:bodyPr>
+          <a:lstStyle/>
+          <a:p>
+            <a:r>
+              <a:rPr sz="2800" b="1">
+                <a:solidFill>
+                  <a:srgbClr val="2C5F2D"/>
+                </a:solidFill>
+                <a:latin typeface="Cambria"/>
+              </a:rPr>
+              <a:t>The Take-Home Sheet — the Four Parts</a:t>
+            </a:r>
+          </a:p>
+        </p:txBody>
+      </p:sp>
+      <p:pic>
+        <p:nvPicPr>
+          <p:cNvPr id="4" name="Picture 3" descr="s6_part2.png"/>
+          <p:cNvPicPr>
+            <a:picLocks noChangeAspect="1"/>
+          </p:cNvPicPr>
+          <p:nvPr/>
+        </p:nvPicPr>
+        <p:blipFill>
+          <a:blip r:embed="rId2"/>
+          <a:stretch>
+            <a:fillRect/>
+          </a:stretch>
+        </p:blipFill>
+        <p:spPr>
+          <a:xfrm>
+            <a:off x="2589026" y="1463040"/>
+            <a:ext cx="7013642" cy="4709160"/>
+          </a:xfrm>
+          <a:prstGeom prst="rect">
+            <a:avLst/>
+          </a:prstGeom>
+          <a:ln w="12700">
+            <a:solidFill>
+              <a:srgbClr val="C8C8C8"/>
+            </a:solidFill>
+          </a:ln>
+        </p:spPr>
+      </p:pic>
+      <p:sp>
+        <p:nvSpPr>
+          <p:cNvPr id="5" name="TextBox 4"/>
+          <p:cNvSpPr txBox="1"/>
+          <p:nvPr/>
+        </p:nvSpPr>
+        <p:spPr>
+          <a:xfrm>
+            <a:off x="822960" y="6355080"/>
+            <a:ext cx="10515600" cy="411480"/>
+          </a:xfrm>
+          <a:prstGeom prst="rect">
+            <a:avLst/>
+          </a:prstGeom>
+          <a:noFill/>
+        </p:spPr>
+        <p:txBody>
+          <a:bodyPr wrap="square">
+            <a:spAutoFit/>
+          </a:bodyPr>
+          <a:lstStyle/>
+          <a:p>
+            <a:r>
+              <a:rPr sz="1400" i="1">
+                <a:solidFill>
+                  <a:srgbClr val="595959"/>
+                </a:solidFill>
+                <a:latin typeface="Calibri"/>
+              </a:rPr>
+              <a:t>One practice at a time — and a partner expecting you at the end of week one.</a:t>
+            </a:r>
+          </a:p>
+        </p:txBody>
+      </p:sp>
+      <p:sp>
+        <p:nvSpPr>
+          <p:cNvPr id="90" name="SlideNum"/>
+          <p:cNvSpPr txBox="1"/>
+          <p:nvPr/>
+        </p:nvSpPr>
+        <p:spPr>
+          <a:xfrm>
+            <a:off x="11384280" y="6446520"/>
+            <a:ext cx="640080" cy="292608"/>
+          </a:xfrm>
+          <a:prstGeom prst="rect">
+            <a:avLst/>
+          </a:prstGeom>
+          <a:noFill/>
+        </p:spPr>
+        <p:txBody>
+          <a:bodyPr wrap="none" lIns="0" tIns="0" rIns="45720" bIns="0" anchor="ctr"/>
+          <a:lstStyle/>
+          <a:p>
+            <a:pPr algn="r"/>
+            <a:r>
+              <a:t>81a</a:t>
+            </a:r>
+            <a:endParaRPr sz="1000" b="1">
+              <a:solidFill>
+                <a:srgbClr val="7A8A6E"/>
+              </a:solidFill>
+              <a:latin typeface="Calibri"/>
+            </a:endParaRPr>
+          </a:p>
+        </p:txBody>
+      </p:sp>
+    </p:spTree>
+  </p:cSld>
+  <p:clrMapOvr>
+    <a:masterClrMapping/>
+  </p:clrMapOvr>
+</p:sld>
+</file>
+
+<file path=ppt/slides/slide15.xml><?xml version="1.0" encoding="utf-8"?>
 <p:sld xmlns:a="http://schemas.openxmlformats.org/drawingml/2006/main" xmlns:r="http://schemas.openxmlformats.org/officeDocument/2006/relationships" xmlns:p="http://schemas.openxmlformats.org/presentationml/2006/main">
   <p:cSld>
     <p:spTree>
@@ -6004,7 +6746,7 @@
 </p:sld>
 </file>
 
-<file path=ppt/slides/slide14.xml><?xml version="1.0" encoding="utf-8"?>
+<file path=ppt/slides/slide16.xml><?xml version="1.0" encoding="utf-8"?>
 <p:sld xmlns:a="http://schemas.openxmlformats.org/drawingml/2006/main" xmlns:r="http://schemas.openxmlformats.org/officeDocument/2006/relationships" xmlns:p="http://schemas.openxmlformats.org/presentationml/2006/main">
   <p:cSld>
     <p:spTree>
@@ -6337,7 +7079,7 @@
 </p:sld>
 </file>
 
-<file path=ppt/slides/slide15.xml><?xml version="1.0" encoding="utf-8"?>
+<file path=ppt/slides/slide17.xml><?xml version="1.0" encoding="utf-8"?>
 <p:sld xmlns:a="http://schemas.openxmlformats.org/drawingml/2006/main" xmlns:r="http://schemas.openxmlformats.org/officeDocument/2006/relationships" xmlns:p="http://schemas.openxmlformats.org/presentationml/2006/main">
   <p:cSld>
     <p:spTree>
@@ -6746,7 +7488,7 @@
 </p:sld>
 </file>
 
-<file path=ppt/slides/slide16.xml><?xml version="1.0" encoding="utf-8"?>
+<file path=ppt/slides/slide18.xml><?xml version="1.0" encoding="utf-8"?>
 <p:sld xmlns:a="http://schemas.openxmlformats.org/drawingml/2006/main" xmlns:r="http://schemas.openxmlformats.org/officeDocument/2006/relationships" xmlns:p="http://schemas.openxmlformats.org/presentationml/2006/main">
   <p:cSld>
     <p:spTree>
@@ -6906,595 +7648,6 @@
             <a:endParaRPr sz="1000" b="1">
               <a:solidFill>
                 <a:srgbClr val="F1F6EC"/>
-              </a:solidFill>
-              <a:latin typeface="Calibri"/>
-            </a:endParaRPr>
-          </a:p>
-        </p:txBody>
-      </p:sp>
-    </p:spTree>
-  </p:cSld>
-  <p:clrMapOvr>
-    <a:masterClrMapping/>
-  </p:clrMapOvr>
-</p:sld>
-</file>
-
-<file path=ppt/slides/slide17.xml><?xml version="1.0" encoding="utf-8"?>
-<p:sld xmlns:a="http://schemas.openxmlformats.org/drawingml/2006/main" xmlns:p="http://schemas.openxmlformats.org/presentationml/2006/main" xmlns:r="http://schemas.openxmlformats.org/officeDocument/2006/relationships">
-  <p:cSld>
-    <p:spTree>
-      <p:nvGrpSpPr>
-        <p:cNvPr id="1" name=""/>
-        <p:cNvGrpSpPr/>
-        <p:nvPr/>
-      </p:nvGrpSpPr>
-      <p:grpSpPr/>
-      <p:sp>
-        <p:nvSpPr>
-          <p:cNvPr id="2" name="Rectangle 1"/>
-          <p:cNvSpPr/>
-          <p:nvPr/>
-        </p:nvSpPr>
-        <p:spPr>
-          <a:xfrm>
-            <a:off x="0" y="0"/>
-            <a:ext cx="12192000" cy="6858000"/>
-          </a:xfrm>
-          <a:prstGeom prst="rect">
-            <a:avLst/>
-          </a:prstGeom>
-          <a:solidFill>
-            <a:srgbClr val="FFFFFF"/>
-          </a:solidFill>
-          <a:ln>
-            <a:noFill/>
-          </a:ln>
-          <a:effectLst/>
-        </p:spPr>
-        <p:style>
-          <a:lnRef idx="1">
-            <a:schemeClr val="accent1"/>
-          </a:lnRef>
-          <a:fillRef idx="3">
-            <a:schemeClr val="accent1"/>
-          </a:fillRef>
-          <a:effectRef idx="2">
-            <a:schemeClr val="accent1"/>
-          </a:effectRef>
-          <a:fontRef idx="minor">
-            <a:schemeClr val="lt1"/>
-          </a:fontRef>
-        </p:style>
-        <p:txBody>
-          <a:bodyPr rtlCol="0" anchor="ctr"/>
-          <a:lstStyle/>
-          <a:p>
-            <a:pPr algn="ctr"/>
-          </a:p>
-        </p:txBody>
-      </p:sp>
-      <p:sp>
-        <p:nvSpPr>
-          <p:cNvPr id="3" name="TextBox 2"/>
-          <p:cNvSpPr txBox="1"/>
-          <p:nvPr/>
-        </p:nvSpPr>
-        <p:spPr>
-          <a:xfrm>
-            <a:off x="822960" y="502920"/>
-            <a:ext cx="10515600" cy="822960"/>
-          </a:xfrm>
-          <a:prstGeom prst="rect">
-            <a:avLst/>
-          </a:prstGeom>
-          <a:noFill/>
-        </p:spPr>
-        <p:txBody>
-          <a:bodyPr wrap="square">
-            <a:spAutoFit/>
-          </a:bodyPr>
-          <a:lstStyle/>
-          <a:p>
-            <a:r>
-              <a:rPr sz="2800" b="1">
-                <a:solidFill>
-                  <a:srgbClr val="2C5F2D"/>
-                </a:solidFill>
-                <a:latin typeface="Cambria"/>
-              </a:rPr>
-              <a:t>Where We Are — the Four Connects</a:t>
-            </a:r>
-          </a:p>
-        </p:txBody>
-      </p:sp>
-      <p:pic>
-        <p:nvPicPr>
-          <p:cNvPr id="4" name="Picture 3" descr="four-connects.png"/>
-          <p:cNvPicPr>
-            <a:picLocks noChangeAspect="1"/>
-          </p:cNvPicPr>
-          <p:nvPr/>
-        </p:nvPicPr>
-        <p:blipFill>
-          <a:blip r:embed="rId2"/>
-          <a:stretch>
-            <a:fillRect/>
-          </a:stretch>
-        </p:blipFill>
-        <p:spPr>
-          <a:xfrm>
-            <a:off x="932688" y="1645920"/>
-            <a:ext cx="10332720" cy="3708663"/>
-          </a:xfrm>
-          <a:prstGeom prst="rect">
-            <a:avLst/>
-          </a:prstGeom>
-        </p:spPr>
-      </p:pic>
-      <p:sp>
-        <p:nvSpPr>
-          <p:cNvPr id="5" name="TextBox 4"/>
-          <p:cNvSpPr txBox="1"/>
-          <p:nvPr/>
-        </p:nvSpPr>
-        <p:spPr>
-          <a:xfrm>
-            <a:off x="822960" y="5623560"/>
-            <a:ext cx="10515600" cy="914400"/>
-          </a:xfrm>
-          <a:prstGeom prst="rect">
-            <a:avLst/>
-          </a:prstGeom>
-          <a:noFill/>
-        </p:spPr>
-        <p:txBody>
-          <a:bodyPr wrap="square">
-            <a:spAutoFit/>
-          </a:bodyPr>
-          <a:lstStyle/>
-          <a:p>
-            <a:r>
-              <a:rPr sz="1800" b="0">
-                <a:solidFill>
-                  <a:srgbClr val="222B22"/>
-                </a:solidFill>
-                <a:latin typeface="Calibri"/>
-              </a:rPr>
-              <a:t>Session 6 stands deeper in the second box — </a:t>
-            </a:r>
-            <a:r>
-              <a:rPr sz="1800" b="1">
-                <a:solidFill>
-                  <a:srgbClr val="2C5F2D"/>
-                </a:solidFill>
-                <a:latin typeface="Calibri"/>
-              </a:rPr>
-              <a:t>Connect with Others</a:t>
-            </a:r>
-            <a:r>
-              <a:rPr sz="1800" b="0">
-                <a:solidFill>
-                  <a:srgbClr val="222B22"/>
-                </a:solidFill>
-                <a:latin typeface="Calibri"/>
-              </a:rPr>
-              <a:t>. Each connection makes the next one real (Matt. 22:37–40).</a:t>
-            </a:r>
-          </a:p>
-        </p:txBody>
-      </p:sp>
-      <p:sp>
-        <p:nvSpPr>
-          <p:cNvPr id="90" name="SlideNum"/>
-          <p:cNvSpPr txBox="1"/>
-          <p:nvPr/>
-        </p:nvSpPr>
-        <p:spPr>
-          <a:xfrm>
-            <a:off x="11384280" y="6446520"/>
-            <a:ext cx="640080" cy="292608"/>
-          </a:xfrm>
-          <a:prstGeom prst="rect">
-            <a:avLst/>
-          </a:prstGeom>
-          <a:noFill/>
-        </p:spPr>
-        <p:txBody>
-          <a:bodyPr wrap="none" lIns="0" tIns="0" rIns="45720" bIns="0" anchor="ctr"/>
-          <a:lstStyle/>
-          <a:p>
-            <a:pPr algn="r"/>
-            <a:r>
-              <a:t>71a</a:t>
-            </a:r>
-            <a:endParaRPr sz="1000" b="1">
-              <a:solidFill>
-                <a:srgbClr val="7A8A6E"/>
-              </a:solidFill>
-              <a:latin typeface="Calibri"/>
-            </a:endParaRPr>
-          </a:p>
-        </p:txBody>
-      </p:sp>
-    </p:spTree>
-  </p:cSld>
-  <p:clrMapOvr>
-    <a:masterClrMapping/>
-  </p:clrMapOvr>
-</p:sld>
-</file>
-
-<file path=ppt/slides/slide18.xml><?xml version="1.0" encoding="utf-8"?>
-<p:sld xmlns:a="http://schemas.openxmlformats.org/drawingml/2006/main" xmlns:p="http://schemas.openxmlformats.org/presentationml/2006/main" xmlns:r="http://schemas.openxmlformats.org/officeDocument/2006/relationships">
-  <p:cSld>
-    <p:spTree>
-      <p:nvGrpSpPr>
-        <p:cNvPr id="1" name=""/>
-        <p:cNvGrpSpPr/>
-        <p:nvPr/>
-      </p:nvGrpSpPr>
-      <p:grpSpPr/>
-      <p:sp>
-        <p:nvSpPr>
-          <p:cNvPr id="2" name="Rectangle 1"/>
-          <p:cNvSpPr/>
-          <p:nvPr/>
-        </p:nvSpPr>
-        <p:spPr>
-          <a:xfrm>
-            <a:off x="0" y="0"/>
-            <a:ext cx="12192000" cy="6858000"/>
-          </a:xfrm>
-          <a:prstGeom prst="rect">
-            <a:avLst/>
-          </a:prstGeom>
-          <a:solidFill>
-            <a:srgbClr val="FFFFFF"/>
-          </a:solidFill>
-          <a:ln>
-            <a:noFill/>
-          </a:ln>
-          <a:effectLst/>
-        </p:spPr>
-        <p:style>
-          <a:lnRef idx="1">
-            <a:schemeClr val="accent1"/>
-          </a:lnRef>
-          <a:fillRef idx="3">
-            <a:schemeClr val="accent1"/>
-          </a:fillRef>
-          <a:effectRef idx="2">
-            <a:schemeClr val="accent1"/>
-          </a:effectRef>
-          <a:fontRef idx="minor">
-            <a:schemeClr val="lt1"/>
-          </a:fontRef>
-        </p:style>
-        <p:txBody>
-          <a:bodyPr rtlCol="0" anchor="ctr"/>
-          <a:lstStyle/>
-          <a:p>
-            <a:pPr algn="ctr"/>
-          </a:p>
-        </p:txBody>
-      </p:sp>
-      <p:sp>
-        <p:nvSpPr>
-          <p:cNvPr id="3" name="TextBox 2"/>
-          <p:cNvSpPr txBox="1"/>
-          <p:nvPr/>
-        </p:nvSpPr>
-        <p:spPr>
-          <a:xfrm>
-            <a:off x="822960" y="502920"/>
-            <a:ext cx="10515600" cy="822960"/>
-          </a:xfrm>
-          <a:prstGeom prst="rect">
-            <a:avLst/>
-          </a:prstGeom>
-          <a:noFill/>
-        </p:spPr>
-        <p:txBody>
-          <a:bodyPr wrap="square">
-            <a:spAutoFit/>
-          </a:bodyPr>
-          <a:lstStyle/>
-          <a:p>
-            <a:r>
-              <a:rPr sz="2800" b="1">
-                <a:solidFill>
-                  <a:srgbClr val="2C5F2D"/>
-                </a:solidFill>
-                <a:latin typeface="Cambria"/>
-              </a:rPr>
-              <a:t>The Take-Home Sheet — the Daily Rhythm</a:t>
-            </a:r>
-          </a:p>
-        </p:txBody>
-      </p:sp>
-      <p:pic>
-        <p:nvPicPr>
-          <p:cNvPr id="4" name="Picture 3" descr="s6_part1.png"/>
-          <p:cNvPicPr>
-            <a:picLocks noChangeAspect="1"/>
-          </p:cNvPicPr>
-          <p:nvPr/>
-        </p:nvPicPr>
-        <p:blipFill>
-          <a:blip r:embed="rId2"/>
-          <a:stretch>
-            <a:fillRect/>
-          </a:stretch>
-        </p:blipFill>
-        <p:spPr>
-          <a:xfrm>
-            <a:off x="1798167" y="1463040"/>
-            <a:ext cx="8595360" cy="4039819"/>
-          </a:xfrm>
-          <a:prstGeom prst="rect">
-            <a:avLst/>
-          </a:prstGeom>
-          <a:ln w="12700">
-            <a:solidFill>
-              <a:srgbClr val="C8C8C8"/>
-            </a:solidFill>
-          </a:ln>
-        </p:spPr>
-      </p:pic>
-      <p:sp>
-        <p:nvSpPr>
-          <p:cNvPr id="5" name="TextBox 4"/>
-          <p:cNvSpPr txBox="1"/>
-          <p:nvPr/>
-        </p:nvSpPr>
-        <p:spPr>
-          <a:xfrm>
-            <a:off x="822960" y="6355080"/>
-            <a:ext cx="10515600" cy="411480"/>
-          </a:xfrm>
-          <a:prstGeom prst="rect">
-            <a:avLst/>
-          </a:prstGeom>
-          <a:noFill/>
-        </p:spPr>
-        <p:txBody>
-          <a:bodyPr wrap="square">
-            <a:spAutoFit/>
-          </a:bodyPr>
-          <a:lstStyle/>
-          <a:p>
-            <a:r>
-              <a:rPr sz="1400" i="1">
-                <a:solidFill>
-                  <a:srgbClr val="595959"/>
-                </a:solidFill>
-                <a:latin typeface="Calibri"/>
-              </a:rPr>
-              <a:t>Handed out now — this is the sheet in your hands.</a:t>
-            </a:r>
-          </a:p>
-        </p:txBody>
-      </p:sp>
-      <p:sp>
-        <p:nvSpPr>
-          <p:cNvPr id="90" name="SlideNum"/>
-          <p:cNvSpPr txBox="1"/>
-          <p:nvPr/>
-        </p:nvSpPr>
-        <p:spPr>
-          <a:xfrm>
-            <a:off x="11384280" y="6446520"/>
-            <a:ext cx="640080" cy="292608"/>
-          </a:xfrm>
-          <a:prstGeom prst="rect">
-            <a:avLst/>
-          </a:prstGeom>
-          <a:noFill/>
-        </p:spPr>
-        <p:txBody>
-          <a:bodyPr wrap="none" lIns="0" tIns="0" rIns="45720" bIns="0" anchor="ctr"/>
-          <a:lstStyle/>
-          <a:p>
-            <a:pPr algn="r"/>
-            <a:r>
-              <a:t>81</a:t>
-            </a:r>
-            <a:endParaRPr sz="1000" b="1">
-              <a:solidFill>
-                <a:srgbClr val="7A8A6E"/>
-              </a:solidFill>
-              <a:latin typeface="Calibri"/>
-            </a:endParaRPr>
-          </a:p>
-        </p:txBody>
-      </p:sp>
-    </p:spTree>
-  </p:cSld>
-  <p:clrMapOvr>
-    <a:masterClrMapping/>
-  </p:clrMapOvr>
-</p:sld>
-</file>
-
-<file path=ppt/slides/slide19.xml><?xml version="1.0" encoding="utf-8"?>
-<p:sld xmlns:a="http://schemas.openxmlformats.org/drawingml/2006/main" xmlns:p="http://schemas.openxmlformats.org/presentationml/2006/main" xmlns:r="http://schemas.openxmlformats.org/officeDocument/2006/relationships">
-  <p:cSld>
-    <p:spTree>
-      <p:nvGrpSpPr>
-        <p:cNvPr id="1" name=""/>
-        <p:cNvGrpSpPr/>
-        <p:nvPr/>
-      </p:nvGrpSpPr>
-      <p:grpSpPr/>
-      <p:sp>
-        <p:nvSpPr>
-          <p:cNvPr id="2" name="Rectangle 1"/>
-          <p:cNvSpPr/>
-          <p:nvPr/>
-        </p:nvSpPr>
-        <p:spPr>
-          <a:xfrm>
-            <a:off x="0" y="0"/>
-            <a:ext cx="12192000" cy="6858000"/>
-          </a:xfrm>
-          <a:prstGeom prst="rect">
-            <a:avLst/>
-          </a:prstGeom>
-          <a:solidFill>
-            <a:srgbClr val="FFFFFF"/>
-          </a:solidFill>
-          <a:ln>
-            <a:noFill/>
-          </a:ln>
-          <a:effectLst/>
-        </p:spPr>
-        <p:style>
-          <a:lnRef idx="1">
-            <a:schemeClr val="accent1"/>
-          </a:lnRef>
-          <a:fillRef idx="3">
-            <a:schemeClr val="accent1"/>
-          </a:fillRef>
-          <a:effectRef idx="2">
-            <a:schemeClr val="accent1"/>
-          </a:effectRef>
-          <a:fontRef idx="minor">
-            <a:schemeClr val="lt1"/>
-          </a:fontRef>
-        </p:style>
-        <p:txBody>
-          <a:bodyPr rtlCol="0" anchor="ctr"/>
-          <a:lstStyle/>
-          <a:p>
-            <a:pPr algn="ctr"/>
-          </a:p>
-        </p:txBody>
-      </p:sp>
-      <p:sp>
-        <p:nvSpPr>
-          <p:cNvPr id="3" name="TextBox 2"/>
-          <p:cNvSpPr txBox="1"/>
-          <p:nvPr/>
-        </p:nvSpPr>
-        <p:spPr>
-          <a:xfrm>
-            <a:off x="822960" y="502920"/>
-            <a:ext cx="10515600" cy="822960"/>
-          </a:xfrm>
-          <a:prstGeom prst="rect">
-            <a:avLst/>
-          </a:prstGeom>
-          <a:noFill/>
-        </p:spPr>
-        <p:txBody>
-          <a:bodyPr wrap="square">
-            <a:spAutoFit/>
-          </a:bodyPr>
-          <a:lstStyle/>
-          <a:p>
-            <a:r>
-              <a:rPr sz="2800" b="1">
-                <a:solidFill>
-                  <a:srgbClr val="2C5F2D"/>
-                </a:solidFill>
-                <a:latin typeface="Cambria"/>
-              </a:rPr>
-              <a:t>The Take-Home Sheet — the Four Parts</a:t>
-            </a:r>
-          </a:p>
-        </p:txBody>
-      </p:sp>
-      <p:pic>
-        <p:nvPicPr>
-          <p:cNvPr id="4" name="Picture 3" descr="s6_part2.png"/>
-          <p:cNvPicPr>
-            <a:picLocks noChangeAspect="1"/>
-          </p:cNvPicPr>
-          <p:nvPr/>
-        </p:nvPicPr>
-        <p:blipFill>
-          <a:blip r:embed="rId2"/>
-          <a:stretch>
-            <a:fillRect/>
-          </a:stretch>
-        </p:blipFill>
-        <p:spPr>
-          <a:xfrm>
-            <a:off x="2589026" y="1463040"/>
-            <a:ext cx="7013642" cy="4709160"/>
-          </a:xfrm>
-          <a:prstGeom prst="rect">
-            <a:avLst/>
-          </a:prstGeom>
-          <a:ln w="12700">
-            <a:solidFill>
-              <a:srgbClr val="C8C8C8"/>
-            </a:solidFill>
-          </a:ln>
-        </p:spPr>
-      </p:pic>
-      <p:sp>
-        <p:nvSpPr>
-          <p:cNvPr id="5" name="TextBox 4"/>
-          <p:cNvSpPr txBox="1"/>
-          <p:nvPr/>
-        </p:nvSpPr>
-        <p:spPr>
-          <a:xfrm>
-            <a:off x="822960" y="6355080"/>
-            <a:ext cx="10515600" cy="411480"/>
-          </a:xfrm>
-          <a:prstGeom prst="rect">
-            <a:avLst/>
-          </a:prstGeom>
-          <a:noFill/>
-        </p:spPr>
-        <p:txBody>
-          <a:bodyPr wrap="square">
-            <a:spAutoFit/>
-          </a:bodyPr>
-          <a:lstStyle/>
-          <a:p>
-            <a:r>
-              <a:rPr sz="1400" i="1">
-                <a:solidFill>
-                  <a:srgbClr val="595959"/>
-                </a:solidFill>
-                <a:latin typeface="Calibri"/>
-              </a:rPr>
-              <a:t>One practice at a time — and a partner expecting you at the end of week one.</a:t>
-            </a:r>
-          </a:p>
-        </p:txBody>
-      </p:sp>
-      <p:sp>
-        <p:nvSpPr>
-          <p:cNvPr id="90" name="SlideNum"/>
-          <p:cNvSpPr txBox="1"/>
-          <p:nvPr/>
-        </p:nvSpPr>
-        <p:spPr>
-          <a:xfrm>
-            <a:off x="11384280" y="6446520"/>
-            <a:ext cx="640080" cy="292608"/>
-          </a:xfrm>
-          <a:prstGeom prst="rect">
-            <a:avLst/>
-          </a:prstGeom>
-          <a:noFill/>
-        </p:spPr>
-        <p:txBody>
-          <a:bodyPr wrap="none" lIns="0" tIns="0" rIns="45720" bIns="0" anchor="ctr"/>
-          <a:lstStyle/>
-          <a:p>
-            <a:pPr algn="r"/>
-            <a:r>
-              <a:t>81a</a:t>
-            </a:r>
-            <a:endParaRPr sz="1000" b="1">
-              <a:solidFill>
-                <a:srgbClr val="7A8A6E"/>
               </a:solidFill>
               <a:latin typeface="Calibri"/>
             </a:endParaRPr>
@@ -7759,6 +7912,211 @@
 </file>
 
 <file path=ppt/slides/slide3.xml><?xml version="1.0" encoding="utf-8"?>
+<p:sld xmlns:a="http://schemas.openxmlformats.org/drawingml/2006/main" xmlns:p="http://schemas.openxmlformats.org/presentationml/2006/main" xmlns:r="http://schemas.openxmlformats.org/officeDocument/2006/relationships">
+  <p:cSld>
+    <p:spTree>
+      <p:nvGrpSpPr>
+        <p:cNvPr id="1" name=""/>
+        <p:cNvGrpSpPr/>
+        <p:nvPr/>
+      </p:nvGrpSpPr>
+      <p:grpSpPr/>
+      <p:sp>
+        <p:nvSpPr>
+          <p:cNvPr id="2" name="Rectangle 1"/>
+          <p:cNvSpPr/>
+          <p:nvPr/>
+        </p:nvSpPr>
+        <p:spPr>
+          <a:xfrm>
+            <a:off x="0" y="0"/>
+            <a:ext cx="12192000" cy="6858000"/>
+          </a:xfrm>
+          <a:prstGeom prst="rect">
+            <a:avLst/>
+          </a:prstGeom>
+          <a:solidFill>
+            <a:srgbClr val="FFFFFF"/>
+          </a:solidFill>
+          <a:ln>
+            <a:noFill/>
+          </a:ln>
+          <a:effectLst/>
+        </p:spPr>
+        <p:style>
+          <a:lnRef idx="1">
+            <a:schemeClr val="accent1"/>
+          </a:lnRef>
+          <a:fillRef idx="3">
+            <a:schemeClr val="accent1"/>
+          </a:fillRef>
+          <a:effectRef idx="2">
+            <a:schemeClr val="accent1"/>
+          </a:effectRef>
+          <a:fontRef idx="minor">
+            <a:schemeClr val="lt1"/>
+          </a:fontRef>
+        </p:style>
+        <p:txBody>
+          <a:bodyPr rtlCol="0" anchor="ctr"/>
+          <a:lstStyle/>
+          <a:p>
+            <a:pPr algn="ctr"/>
+          </a:p>
+        </p:txBody>
+      </p:sp>
+      <p:sp>
+        <p:nvSpPr>
+          <p:cNvPr id="3" name="TextBox 2"/>
+          <p:cNvSpPr txBox="1"/>
+          <p:nvPr/>
+        </p:nvSpPr>
+        <p:spPr>
+          <a:xfrm>
+            <a:off x="822960" y="502920"/>
+            <a:ext cx="10515600" cy="822960"/>
+          </a:xfrm>
+          <a:prstGeom prst="rect">
+            <a:avLst/>
+          </a:prstGeom>
+          <a:noFill/>
+        </p:spPr>
+        <p:txBody>
+          <a:bodyPr wrap="square">
+            <a:spAutoFit/>
+          </a:bodyPr>
+          <a:lstStyle/>
+          <a:p>
+            <a:r>
+              <a:rPr sz="2800" b="1">
+                <a:solidFill>
+                  <a:srgbClr val="2C5F2D"/>
+                </a:solidFill>
+                <a:latin typeface="Cambria"/>
+              </a:rPr>
+              <a:t>Where We Are — the Four Connects</a:t>
+            </a:r>
+          </a:p>
+        </p:txBody>
+      </p:sp>
+      <p:sp>
+        <p:nvSpPr>
+          <p:cNvPr id="5" name="TextBox 4"/>
+          <p:cNvSpPr txBox="1"/>
+          <p:nvPr/>
+        </p:nvSpPr>
+        <p:spPr>
+          <a:xfrm>
+            <a:off x="822960" y="5623560"/>
+            <a:ext cx="10515600" cy="914400"/>
+          </a:xfrm>
+          <a:prstGeom prst="rect">
+            <a:avLst/>
+          </a:prstGeom>
+          <a:noFill/>
+        </p:spPr>
+        <p:txBody>
+          <a:bodyPr wrap="square">
+            <a:spAutoFit/>
+          </a:bodyPr>
+          <a:lstStyle/>
+          <a:p>
+            <a:r>
+              <a:rPr sz="1800" b="0">
+                <a:solidFill>
+                  <a:srgbClr val="222B22"/>
+                </a:solidFill>
+                <a:latin typeface="Calibri"/>
+              </a:rPr>
+              <a:t>Session 6 stands deeper in the second box — </a:t>
+            </a:r>
+            <a:r>
+              <a:rPr sz="1800" b="1">
+                <a:solidFill>
+                  <a:srgbClr val="2C5F2D"/>
+                </a:solidFill>
+                <a:latin typeface="Calibri"/>
+              </a:rPr>
+              <a:t>Connect with Others</a:t>
+            </a:r>
+            <a:r>
+              <a:rPr sz="1800" b="0">
+                <a:solidFill>
+                  <a:srgbClr val="222B22"/>
+                </a:solidFill>
+                <a:latin typeface="Calibri"/>
+              </a:rPr>
+              <a:t>. Each connection makes the next one real (Matt. 22:37–40).</a:t>
+            </a:r>
+          </a:p>
+        </p:txBody>
+      </p:sp>
+      <p:sp>
+        <p:nvSpPr>
+          <p:cNvPr id="90" name="SlideNum"/>
+          <p:cNvSpPr txBox="1"/>
+          <p:nvPr/>
+        </p:nvSpPr>
+        <p:spPr>
+          <a:xfrm>
+            <a:off x="11384280" y="6446520"/>
+            <a:ext cx="640080" cy="292608"/>
+          </a:xfrm>
+          <a:prstGeom prst="rect">
+            <a:avLst/>
+          </a:prstGeom>
+          <a:noFill/>
+        </p:spPr>
+        <p:txBody>
+          <a:bodyPr wrap="none" lIns="0" tIns="0" rIns="45720" bIns="0" anchor="ctr"/>
+          <a:lstStyle/>
+          <a:p>
+            <a:pPr algn="r"/>
+            <a:r>
+              <a:t>71a</a:t>
+            </a:r>
+            <a:endParaRPr sz="1000" b="1">
+              <a:solidFill>
+                <a:srgbClr val="7A8A6E"/>
+              </a:solidFill>
+              <a:latin typeface="Calibri"/>
+            </a:endParaRPr>
+          </a:p>
+        </p:txBody>
+      </p:sp>
+      <p:pic>
+        <p:nvPicPr>
+          <p:cNvPr id="91" name="Picture 90" descr="four-connects.png"/>
+          <p:cNvPicPr>
+            <a:picLocks noChangeAspect="1"/>
+          </p:cNvPicPr>
+          <p:nvPr/>
+        </p:nvPicPr>
+        <p:blipFill>
+          <a:blip r:embed="rId4"/>
+          <a:stretch>
+            <a:fillRect/>
+          </a:stretch>
+        </p:blipFill>
+        <p:spPr>
+          <a:xfrm>
+            <a:off x="932688" y="1645920"/>
+            <a:ext cx="10332720" cy="3708663"/>
+          </a:xfrm>
+          <a:prstGeom prst="rect">
+            <a:avLst/>
+          </a:prstGeom>
+        </p:spPr>
+      </p:pic>
+    </p:spTree>
+  </p:cSld>
+  <p:clrMapOvr>
+    <a:masterClrMapping/>
+  </p:clrMapOvr>
+</p:sld>
+</file>
+
+<file path=ppt/slides/slide4.xml><?xml version="1.0" encoding="utf-8"?>
 <p:sld xmlns:a="http://schemas.openxmlformats.org/drawingml/2006/main" xmlns:r="http://schemas.openxmlformats.org/officeDocument/2006/relationships" xmlns:p="http://schemas.openxmlformats.org/presentationml/2006/main">
   <p:cSld>
     <p:spTree>
@@ -8209,7 +8567,7 @@
 </p:sld>
 </file>
 
-<file path=ppt/slides/slide4.xml><?xml version="1.0" encoding="utf-8"?>
+<file path=ppt/slides/slide5.xml><?xml version="1.0" encoding="utf-8"?>
 <p:sld xmlns:a="http://schemas.openxmlformats.org/drawingml/2006/main" xmlns:r="http://schemas.openxmlformats.org/officeDocument/2006/relationships" xmlns:p="http://schemas.openxmlformats.org/presentationml/2006/main">
   <p:cSld>
     <p:spTree>
@@ -8556,7 +8914,7 @@
 </p:sld>
 </file>
 
-<file path=ppt/slides/slide5.xml><?xml version="1.0" encoding="utf-8"?>
+<file path=ppt/slides/slide6.xml><?xml version="1.0" encoding="utf-8"?>
 <p:sld xmlns:a="http://schemas.openxmlformats.org/drawingml/2006/main" xmlns:r="http://schemas.openxmlformats.org/officeDocument/2006/relationships" xmlns:p="http://schemas.openxmlformats.org/presentationml/2006/main">
   <p:cSld>
     <p:spTree>
@@ -8814,374 +9172,6 @@
 </p:sld>
 </file>
 
-<file path=ppt/slides/slide6.xml><?xml version="1.0" encoding="utf-8"?>
-<p:sld xmlns:a="http://schemas.openxmlformats.org/drawingml/2006/main" xmlns:r="http://schemas.openxmlformats.org/officeDocument/2006/relationships" xmlns:p="http://schemas.openxmlformats.org/presentationml/2006/main">
-  <p:cSld>
-    <p:spTree>
-      <p:nvGrpSpPr>
-        <p:cNvPr id="1" name=""/>
-        <p:cNvGrpSpPr/>
-        <p:nvPr/>
-      </p:nvGrpSpPr>
-      <p:grpSpPr>
-        <a:xfrm>
-          <a:off x="0" y="0"/>
-          <a:ext cx="0" cy="0"/>
-          <a:chOff x="0" y="0"/>
-          <a:chExt cx="0" cy="0"/>
-        </a:xfrm>
-      </p:grpSpPr>
-      <p:sp>
-        <p:nvSpPr>
-          <p:cNvPr id="2" name="Rectangle 1"/>
-          <p:cNvSpPr/>
-          <p:nvPr/>
-        </p:nvSpPr>
-        <p:spPr>
-          <a:xfrm>
-            <a:off x="0" y="0"/>
-            <a:ext cx="12191695" cy="6858000"/>
-          </a:xfrm>
-          <a:prstGeom prst="rect">
-            <a:avLst/>
-          </a:prstGeom>
-          <a:solidFill>
-            <a:srgbClr val="FFFFFF"/>
-          </a:solidFill>
-          <a:ln>
-            <a:noFill/>
-          </a:ln>
-        </p:spPr>
-        <p:txBody>
-          <a:bodyPr/>
-          <a:lstStyle/>
-          <a:p>
-            <a:endParaRPr/>
-          </a:p>
-        </p:txBody>
-      </p:sp>
-      <p:sp>
-        <p:nvSpPr>
-          <p:cNvPr id="3" name="TextBox 2"/>
-          <p:cNvSpPr txBox="1"/>
-          <p:nvPr/>
-        </p:nvSpPr>
-        <p:spPr>
-          <a:xfrm>
-            <a:off x="822960" y="502920"/>
-            <a:ext cx="10515600" cy="822960"/>
-          </a:xfrm>
-          <a:prstGeom prst="rect">
-            <a:avLst/>
-          </a:prstGeom>
-          <a:noFill/>
-        </p:spPr>
-        <p:txBody>
-          <a:bodyPr wrap="square">
-            <a:spAutoFit/>
-          </a:bodyPr>
-          <a:lstStyle/>
-          <a:p>
-            <a:pPr algn="l">
-              <a:spcAft>
-                <a:spcPts val="600"/>
-              </a:spcAft>
-            </a:pPr>
-            <a:r>
-              <a:rPr sz="2800" b="1" i="0">
-                <a:solidFill>
-                  <a:srgbClr val="2C5F2D"/>
-                </a:solidFill>
-                <a:latin typeface="Cambria"/>
-              </a:rPr>
-              <a:t>Confession as Architecture</a:t>
-            </a:r>
-          </a:p>
-        </p:txBody>
-      </p:sp>
-      <p:sp>
-        <p:nvSpPr>
-          <p:cNvPr id="4" name="TextBox 4"/>
-          <p:cNvSpPr txBox="1"/>
-          <p:nvPr/>
-        </p:nvSpPr>
-        <p:spPr>
-          <a:xfrm>
-            <a:off x="822960" y="1600200"/>
-            <a:ext cx="5669280" cy="4572000"/>
-          </a:xfrm>
-          <a:prstGeom prst="rect">
-            <a:avLst/>
-          </a:prstGeom>
-          <a:noFill/>
-        </p:spPr>
-        <p:txBody>
-          <a:bodyPr wrap="square" lIns="91440" tIns="91440" rIns="91440" bIns="91440"/>
-          <a:lstStyle/>
-          <a:p>
-            <a:pPr marL="274320" indent="-274320">
-              <a:spcAft>
-                <a:spcPts val="650"/>
-              </a:spcAft>
-            </a:pPr>
-            <a:r>
-              <a:rPr sz="1800" b="1" i="0">
-                <a:solidFill>
-                  <a:srgbClr val="97BC62"/>
-                </a:solidFill>
-                <a:latin typeface="Calibri"/>
-              </a:rPr>
-              <a:t>•  </a:t>
-            </a:r>
-            <a:r>
-              <a:rPr sz="1800" b="0" i="0">
-                <a:solidFill>
-                  <a:srgbClr val="222B22"/>
-                </a:solidFill>
-                <a:latin typeface="Calibri"/>
-              </a:rPr>
-              <a:t>Two verses, two angles — 1 John 1:9 is vertical: confession to God, with full assurance. James 5:16 is horizontal: confession to one another, for healing</a:t>
-            </a:r>
-          </a:p>
-          <a:p>
-            <a:pPr marL="274320" indent="-274320">
-              <a:spcAft>
-                <a:spcPts val="650"/>
-              </a:spcAft>
-            </a:pPr>
-            <a:r>
-              <a:rPr sz="1800" b="1" i="0">
-                <a:solidFill>
-                  <a:srgbClr val="97BC62"/>
-                </a:solidFill>
-                <a:latin typeface="Calibri"/>
-              </a:rPr>
-              <a:t>•  </a:t>
-            </a:r>
-            <a:r>
-              <a:rPr sz="1800" b="0" i="0">
-                <a:solidFill>
-                  <a:srgbClr val="222B22"/>
-                </a:solidFill>
-                <a:latin typeface="Calibri"/>
-              </a:rPr>
-              <a:t>Most Christians live in 1 John 1:9 and never enter James 5:16. Tonight we enter it carefully and at age</a:t>
-            </a:r>
-          </a:p>
-          <a:p>
-            <a:pPr marL="274320" indent="-274320">
-              <a:spcAft>
-                <a:spcPts val="650"/>
-              </a:spcAft>
-            </a:pPr>
-            <a:r>
-              <a:rPr sz="1800" b="1" i="0">
-                <a:solidFill>
-                  <a:srgbClr val="97BC62"/>
-                </a:solidFill>
-                <a:latin typeface="Calibri"/>
-              </a:rPr>
-              <a:t>•  </a:t>
-            </a:r>
-            <a:r>
-              <a:rPr sz="1800" b="0" i="0">
-                <a:solidFill>
-                  <a:srgbClr val="222B22"/>
-                </a:solidFill>
-                <a:latin typeface="Calibri"/>
-              </a:rPr>
-              <a:t>Patterns we hide from each other tend to keep their grip — bringing them into the light, in front of trusted people, is part of what breaks it</a:t>
-            </a:r>
-          </a:p>
-          <a:p>
-            <a:pPr marL="274320" indent="-274320">
-              <a:spcAft>
-                <a:spcPts val="650"/>
-              </a:spcAft>
-            </a:pPr>
-            <a:r>
-              <a:rPr sz="1800" b="1" i="0">
-                <a:solidFill>
-                  <a:srgbClr val="97BC62"/>
-                </a:solidFill>
-                <a:latin typeface="Calibri"/>
-              </a:rPr>
-              <a:t>•  </a:t>
-            </a:r>
-            <a:r>
-              <a:rPr sz="1800" b="0" i="0">
-                <a:solidFill>
-                  <a:srgbClr val="222B22"/>
-                </a:solidFill>
-                <a:latin typeface="Calibri"/>
-              </a:rPr>
-              <a:t>Not detailed sin disclosure — each person names ONE place where they want to walk in greater honesty: the place, the pattern, the pull</a:t>
-            </a:r>
-          </a:p>
-          <a:p>
-            <a:pPr marL="274320" indent="-274320">
-              <a:spcAft>
-                <a:spcPts val="650"/>
-              </a:spcAft>
-            </a:pPr>
-            <a:r>
-              <a:rPr sz="1800" b="1" i="0">
-                <a:solidFill>
-                  <a:srgbClr val="97BC62"/>
-                </a:solidFill>
-                <a:latin typeface="Calibri"/>
-              </a:rPr>
-              <a:t>•  </a:t>
-            </a:r>
-            <a:r>
-              <a:rPr sz="1800" b="0" i="0">
-                <a:solidFill>
-                  <a:srgbClr val="222B22"/>
-                </a:solidFill>
-                <a:latin typeface="Calibri"/>
-              </a:rPr>
-              <a:t>The parents go first in every pair — the older generation owes the younger the demonstration</a:t>
-            </a:r>
-          </a:p>
-          <a:p>
-            <a:pPr marL="274320" indent="-274320">
-              <a:spcAft>
-                <a:spcPts val="650"/>
-              </a:spcAft>
-            </a:pPr>
-            <a:r>
-              <a:rPr sz="1800" b="1" i="0">
-                <a:solidFill>
-                  <a:srgbClr val="97BC62"/>
-                </a:solidFill>
-                <a:latin typeface="Calibri"/>
-              </a:rPr>
-              <a:t>•  </a:t>
-            </a:r>
-            <a:r>
-              <a:rPr sz="1800" b="0" i="0">
-                <a:solidFill>
-                  <a:srgbClr val="222B22"/>
-                </a:solidFill>
-                <a:latin typeface="Calibri"/>
-              </a:rPr>
-              <a:t>After each naming, the circle speaks a specific blessing of restoration — about three minutes per person</a:t>
-            </a:r>
-          </a:p>
-        </p:txBody>
-      </p:sp>
-      <p:sp>
-        <p:nvSpPr>
-          <p:cNvPr id="6" name="TextBox 6"/>
-          <p:cNvSpPr txBox="1"/>
-          <p:nvPr/>
-        </p:nvSpPr>
-        <p:spPr>
-          <a:xfrm>
-            <a:off x="6766560" y="1737360"/>
-            <a:ext cx="4663440" cy="3694176"/>
-          </a:xfrm>
-          <a:prstGeom prst="rect">
-            <a:avLst/>
-          </a:prstGeom>
-          <a:solidFill>
-            <a:srgbClr val="F1F6EC"/>
-          </a:solidFill>
-        </p:spPr>
-        <p:txBody>
-          <a:bodyPr wrap="square" lIns="91440" tIns="91440" rIns="91440" bIns="91440" anchor="ctr"/>
-          <a:lstStyle/>
-          <a:p>
-            <a:pPr>
-              <a:spcAft>
-                <a:spcPts val="900"/>
-              </a:spcAft>
-            </a:pPr>
-            <a:r>
-              <a:rPr sz="1200" b="1" i="0">
-                <a:solidFill>
-                  <a:srgbClr val="97BC62"/>
-                </a:solidFill>
-                <a:latin typeface="Calibri"/>
-              </a:rPr>
-              <a:t>JAMES 5:16 · 1 JOHN 1:9</a:t>
-            </a:r>
-          </a:p>
-          <a:p>
-            <a:pPr>
-              <a:spcAft>
-                <a:spcPts val="600"/>
-              </a:spcAft>
-            </a:pPr>
-            <a:r>
-              <a:rPr sz="2400" b="0" i="1">
-                <a:solidFill>
-                  <a:srgbClr val="222B22"/>
-                </a:solidFill>
-                <a:latin typeface="Cambria"/>
-              </a:rPr>
-              <a:t>“Therefore, confess your sins to one another and pray for one another, that you may be healed. The prayer of a righteous person has great power as it is working.”</a:t>
-            </a:r>
-          </a:p>
-          <a:p>
-            <a:pPr>
-              <a:spcAft>
-                <a:spcPts val="600"/>
-              </a:spcAft>
-            </a:pPr>
-            <a:r>
-              <a:rPr sz="2400" b="0" i="1">
-                <a:solidFill>
-                  <a:srgbClr val="222B22"/>
-                </a:solidFill>
-                <a:latin typeface="Cambria"/>
-              </a:rPr>
-              <a:t>“If we confess our sins, he is faithful and just to forgive us our sins and to cleanse us from all unrighteousness.”</a:t>
-            </a:r>
-          </a:p>
-        </p:txBody>
-      </p:sp>
-      <p:sp>
-        <p:nvSpPr>
-          <p:cNvPr id="90" name="SlideNum"/>
-          <p:cNvSpPr txBox="1"/>
-          <p:nvPr/>
-        </p:nvSpPr>
-        <p:spPr>
-          <a:xfrm>
-            <a:off x="11384280" y="6446520"/>
-            <a:ext cx="640080" cy="292608"/>
-          </a:xfrm>
-          <a:prstGeom prst="rect">
-            <a:avLst/>
-          </a:prstGeom>
-          <a:noFill/>
-        </p:spPr>
-        <p:txBody>
-          <a:bodyPr wrap="none" lIns="0" tIns="0" rIns="45720" bIns="0" anchor="ctr"/>
-          <a:lstStyle/>
-          <a:p>
-            <a:pPr algn="r"/>
-            <a:r>
-              <a:t>75</a:t>
-            </a:r>
-            <a:endParaRPr sz="1000" b="1">
-              <a:solidFill>
-                <a:srgbClr val="7A8A6E"/>
-              </a:solidFill>
-              <a:latin typeface="Calibri"/>
-            </a:endParaRPr>
-          </a:p>
-        </p:txBody>
-      </p:sp>
-    </p:spTree>
-  </p:cSld>
-  <p:clrMapOvr>
-    <a:masterClrMapping/>
-  </p:clrMapOvr>
-</p:sld>
-</file>
-
 <file path=ppt/slides/slide7.xml><?xml version="1.0" encoding="utf-8"?>
 <p:sld xmlns:a="http://schemas.openxmlformats.org/drawingml/2006/main" xmlns:r="http://schemas.openxmlformats.org/officeDocument/2006/relationships" xmlns:p="http://schemas.openxmlformats.org/presentationml/2006/main">
   <p:cSld>
@@ -9262,7 +9252,7 @@
                 </a:solidFill>
                 <a:latin typeface="Cambria"/>
               </a:rPr>
-              <a:t>Companion Demo</a:t>
+              <a:t>Confession as Architecture</a:t>
             </a:r>
           </a:p>
         </p:txBody>
@@ -9275,8 +9265,8 @@
         </p:nvSpPr>
         <p:spPr>
           <a:xfrm>
-            <a:off x="822960" y="1554480"/>
-            <a:ext cx="10515600" cy="4892040"/>
+            <a:off x="822960" y="1600200"/>
+            <a:ext cx="5669280" cy="4572000"/>
           </a:xfrm>
           <a:prstGeom prst="rect">
             <a:avLst/>
@@ -9289,11 +9279,11 @@
           <a:p>
             <a:pPr marL="274320" indent="-274320">
               <a:spcAft>
-                <a:spcPts val="900"/>
+                <a:spcPts val="650"/>
               </a:spcAft>
             </a:pPr>
             <a:r>
-              <a:rPr sz="2400" b="1" i="0">
+              <a:rPr sz="1800" b="1" i="0">
                 <a:solidFill>
                   <a:srgbClr val="97BC62"/>
                 </a:solidFill>
@@ -9302,113 +9292,209 @@
               <a:t>•  </a:t>
             </a:r>
             <a:r>
-              <a:rPr sz="2400" b="0" i="0">
+              <a:rPr sz="1800" b="0" i="0">
                 <a:solidFill>
                   <a:srgbClr val="222B22"/>
                 </a:solidFill>
                 <a:latin typeface="Calibri"/>
               </a:rPr>
-              <a:t>The Lead Companion does the practice in front of the whole room — this sets the depth and the form</a:t>
+              <a:t>Two verses, two angles — 1 John 1:9 is vertical: confession to God, with full assurance. James 5:16 is horizontal: confession to one another, for healing</a:t>
             </a:r>
           </a:p>
           <a:p>
             <a:pPr marL="274320" indent="-274320">
+              <a:spcAft>
+                <a:spcPts val="650"/>
+              </a:spcAft>
+            </a:pPr>
+            <a:r>
+              <a:rPr sz="1800" b="1" i="0">
+                <a:solidFill>
+                  <a:srgbClr val="97BC62"/>
+                </a:solidFill>
+                <a:latin typeface="Calibri"/>
+              </a:rPr>
+              <a:t>•  </a:t>
+            </a:r>
+            <a:r>
+              <a:rPr sz="1800" b="0" i="0">
+                <a:solidFill>
+                  <a:srgbClr val="222B22"/>
+                </a:solidFill>
+                <a:latin typeface="Calibri"/>
+              </a:rPr>
+              <a:t>Most Christians live in 1 John 1:9 and never enter James 5:16. Tonight we enter it carefully and at age</a:t>
+            </a:r>
+          </a:p>
+          <a:p>
+            <a:pPr marL="274320" indent="-274320">
+              <a:spcAft>
+                <a:spcPts val="650"/>
+              </a:spcAft>
+            </a:pPr>
+            <a:r>
+              <a:rPr sz="1800" b="1" i="0">
+                <a:solidFill>
+                  <a:srgbClr val="97BC62"/>
+                </a:solidFill>
+                <a:latin typeface="Calibri"/>
+              </a:rPr>
+              <a:t>•  </a:t>
+            </a:r>
+            <a:r>
+              <a:rPr sz="1800" b="0" i="0">
+                <a:solidFill>
+                  <a:srgbClr val="222B22"/>
+                </a:solidFill>
+                <a:latin typeface="Calibri"/>
+              </a:rPr>
+              <a:t>Patterns we hide from each other tend to keep their grip — bringing them into the light, in front of trusted people, is part of what breaks it</a:t>
+            </a:r>
+          </a:p>
+          <a:p>
+            <a:pPr marL="274320" indent="-274320">
+              <a:spcAft>
+                <a:spcPts val="650"/>
+              </a:spcAft>
+            </a:pPr>
+            <a:r>
+              <a:rPr sz="1800" b="1" i="0">
+                <a:solidFill>
+                  <a:srgbClr val="97BC62"/>
+                </a:solidFill>
+                <a:latin typeface="Calibri"/>
+              </a:rPr>
+              <a:t>•  </a:t>
+            </a:r>
+            <a:r>
+              <a:rPr sz="1800" b="0" i="0">
+                <a:solidFill>
+                  <a:srgbClr val="222B22"/>
+                </a:solidFill>
+                <a:latin typeface="Calibri"/>
+              </a:rPr>
+              <a:t>Not detailed sin disclosure — each person names ONE place where they want to walk in greater honesty: the place, the pattern, the pull</a:t>
+            </a:r>
+          </a:p>
+          <a:p>
+            <a:pPr marL="274320" indent="-274320">
+              <a:spcAft>
+                <a:spcPts val="650"/>
+              </a:spcAft>
+            </a:pPr>
+            <a:r>
+              <a:rPr sz="1800" b="1" i="0">
+                <a:solidFill>
+                  <a:srgbClr val="97BC62"/>
+                </a:solidFill>
+                <a:latin typeface="Calibri"/>
+              </a:rPr>
+              <a:t>•  </a:t>
+            </a:r>
+            <a:r>
+              <a:rPr sz="1800" b="0" i="0">
+                <a:solidFill>
+                  <a:srgbClr val="222B22"/>
+                </a:solidFill>
+                <a:latin typeface="Calibri"/>
+              </a:rPr>
+              <a:t>The parents go first in every pair — the older generation owes the younger the demonstration</a:t>
+            </a:r>
+          </a:p>
+          <a:p>
+            <a:pPr marL="274320" indent="-274320">
+              <a:spcAft>
+                <a:spcPts val="650"/>
+              </a:spcAft>
+            </a:pPr>
+            <a:r>
+              <a:rPr sz="1800" b="1" i="0">
+                <a:solidFill>
+                  <a:srgbClr val="97BC62"/>
+                </a:solidFill>
+                <a:latin typeface="Calibri"/>
+              </a:rPr>
+              <a:t>•  </a:t>
+            </a:r>
+            <a:r>
+              <a:rPr sz="1800" b="0" i="0">
+                <a:solidFill>
+                  <a:srgbClr val="222B22"/>
+                </a:solidFill>
+                <a:latin typeface="Calibri"/>
+              </a:rPr>
+              <a:t>After each naming, the circle speaks a specific blessing of restoration — about three minutes per person</a:t>
+            </a:r>
+          </a:p>
+        </p:txBody>
+      </p:sp>
+      <p:sp>
+        <p:nvSpPr>
+          <p:cNvPr id="6" name="TextBox 6"/>
+          <p:cNvSpPr txBox="1"/>
+          <p:nvPr/>
+        </p:nvSpPr>
+        <p:spPr>
+          <a:xfrm>
+            <a:off x="6766560" y="1737360"/>
+            <a:ext cx="4663440" cy="3694176"/>
+          </a:xfrm>
+          <a:prstGeom prst="rect">
+            <a:avLst/>
+          </a:prstGeom>
+          <a:solidFill>
+            <a:srgbClr val="F1F6EC"/>
+          </a:solidFill>
+        </p:spPr>
+        <p:txBody>
+          <a:bodyPr wrap="square" lIns="91440" tIns="91440" rIns="91440" bIns="91440" anchor="ctr"/>
+          <a:lstStyle/>
+          <a:p>
+            <a:pPr>
               <a:spcAft>
                 <a:spcPts val="900"/>
               </a:spcAft>
             </a:pPr>
             <a:r>
-              <a:rPr sz="2400" b="1" i="0">
+              <a:rPr sz="1200" b="1" i="0">
                 <a:solidFill>
                   <a:srgbClr val="97BC62"/>
                 </a:solidFill>
                 <a:latin typeface="Calibri"/>
               </a:rPr>
-              <a:t>•  </a:t>
-            </a:r>
-            <a:r>
-              <a:rPr sz="2400" b="0" i="0">
-                <a:solidFill>
-                  <a:srgbClr val="222B22"/>
-                </a:solidFill>
-                <a:latin typeface="Calibri"/>
-              </a:rPr>
-              <a:t>One sentence: “The place where I want to walk in greater honesty is ______.” Real but not graphic</a:t>
-            </a:r>
-          </a:p>
-          <a:p>
-            <a:pPr marL="274320" indent="-274320">
+              <a:t>JAMES 5:16 · 1 JOHN 1:9</a:t>
+            </a:r>
+          </a:p>
+          <a:p>
+            <a:pPr>
               <a:spcAft>
-                <a:spcPts val="900"/>
+                <a:spcPts val="600"/>
               </a:spcAft>
             </a:pPr>
             <a:r>
-              <a:rPr sz="2400" b="1" i="0">
-                <a:solidFill>
-                  <a:srgbClr val="97BC62"/>
-                </a:solidFill>
-                <a:latin typeface="Calibri"/>
-              </a:rPr>
-              <a:t>•  </a:t>
-            </a:r>
-            <a:r>
-              <a:rPr sz="2400" b="0" i="0">
+              <a:rPr sz="2400" b="0" i="1">
                 <a:solidFill>
                   <a:srgbClr val="222B22"/>
                 </a:solidFill>
-                <a:latin typeface="Calibri"/>
-              </a:rPr>
-              <a:t>Pause. A pre-arranged Co-Companion speaks a brief blessing of restoration back</a:t>
-            </a:r>
-          </a:p>
-          <a:p>
-            <a:pPr marL="274320" indent="-274320">
+                <a:latin typeface="Cambria"/>
+              </a:rPr>
+              <a:t>“Therefore, confess your sins to one another and pray for one another, that you may be healed. The prayer of a righteous person has great power as it is working.”</a:t>
+            </a:r>
+          </a:p>
+          <a:p>
+            <a:pPr>
               <a:spcAft>
-                <a:spcPts val="900"/>
+                <a:spcPts val="600"/>
               </a:spcAft>
             </a:pPr>
             <a:r>
-              <a:rPr sz="2400" b="1" i="0">
-                <a:solidFill>
-                  <a:srgbClr val="97BC62"/>
-                </a:solidFill>
-                <a:latin typeface="Calibri"/>
-              </a:rPr>
-              <a:t>•  </a:t>
-            </a:r>
-            <a:r>
-              <a:rPr sz="2400" b="0" i="0">
+              <a:rPr sz="2400" b="0" i="1">
                 <a:solidFill>
                   <a:srgbClr val="222B22"/>
                 </a:solidFill>
-                <a:latin typeface="Calibri"/>
-              </a:rPr>
-              <a:t>Receive it — no deflecting, no joking, no minimizing. “Thank you.”</a:t>
-            </a:r>
-          </a:p>
-          <a:p>
-            <a:pPr marL="274320" indent="-274320">
-              <a:spcAft>
-                <a:spcPts val="900"/>
-              </a:spcAft>
-            </a:pPr>
-            <a:r>
-              <a:rPr sz="2400" b="1" i="0">
-                <a:solidFill>
-                  <a:srgbClr val="97BC62"/>
-                </a:solidFill>
-                <a:latin typeface="Calibri"/>
-              </a:rPr>
-              <a:t>•  </a:t>
-            </a:r>
-            <a:r>
-              <a:rPr sz="2400" b="0" i="0">
-                <a:solidFill>
-                  <a:srgbClr val="222B22"/>
-                </a:solidFill>
-                <a:latin typeface="Calibri"/>
-              </a:rPr>
-              <a:t>“That is the practice. You will do it in your pair — parents first, then teens. Yours doesn’t have to look like mine.”</a:t>
+                <a:latin typeface="Cambria"/>
+              </a:rPr>
+              <a:t>“If we confess our sins, he is faithful and just to forgive us our sins and to cleanse us from all unrighteousness.”</a:t>
             </a:r>
           </a:p>
         </p:txBody>
@@ -9435,7 +9521,7 @@
           <a:p>
             <a:pPr algn="r"/>
             <a:r>
-              <a:t>76</a:t>
+              <a:t>75</a:t>
             </a:r>
             <a:endParaRPr sz="1000" b="1">
               <a:solidFill>
@@ -9534,7 +9620,7 @@
                 </a:solidFill>
                 <a:latin typeface="Cambria"/>
               </a:rPr>
-              <a:t>Bridge to the Split</a:t>
+              <a:t>Companion Demo</a:t>
             </a:r>
           </a:p>
         </p:txBody>
@@ -9559,88 +9645,13 @@
           <a:bodyPr wrap="square" lIns="91440" tIns="91440" rIns="91440" bIns="91440"/>
           <a:lstStyle/>
           <a:p>
-            <a:pPr marL="342900" indent="-342900">
-              <a:spcAft>
-                <a:spcPts val="900"/>
-              </a:spcAft>
-            </a:pPr>
-            <a:r>
-              <a:rPr sz="2800" b="1" i="0">
-                <a:solidFill>
-                  <a:srgbClr val="97BC62"/>
-                </a:solidFill>
-                <a:latin typeface="Calibri"/>
-              </a:rPr>
-              <a:t>1   </a:t>
-            </a:r>
-            <a:r>
-              <a:rPr sz="2800" b="0" i="0">
-                <a:solidFill>
-                  <a:srgbClr val="222B22"/>
-                </a:solidFill>
-                <a:latin typeface="Calibri"/>
-              </a:rPr>
-              <a:t>“Take what helps from the prompts. You don’t have to use any of them.”</a:t>
-            </a:r>
-          </a:p>
-          <a:p>
-            <a:pPr marL="342900" indent="-342900">
-              <a:spcAft>
-                <a:spcPts val="900"/>
-              </a:spcAft>
-            </a:pPr>
-            <a:r>
-              <a:rPr sz="2800" b="1" i="0">
-                <a:solidFill>
-                  <a:srgbClr val="97BC62"/>
-                </a:solidFill>
-                <a:latin typeface="Calibri"/>
-              </a:rPr>
-              <a:t>2   </a:t>
-            </a:r>
-            <a:r>
-              <a:rPr sz="2800" b="0" i="0">
-                <a:solidFill>
-                  <a:srgbClr val="222B22"/>
-                </a:solidFill>
-                <a:latin typeface="Calibri"/>
-              </a:rPr>
-              <a:t>The blessing card — specific, short, witnessed: “In the name of Jesus, we pray restoration over...”</a:t>
-            </a:r>
-          </a:p>
-          <a:p>
-            <a:pPr marL="342900" indent="-342900">
-              <a:spcAft>
-                <a:spcPts val="900"/>
-              </a:spcAft>
-            </a:pPr>
-            <a:r>
-              <a:rPr sz="2800" b="1" i="0">
-                <a:solidFill>
-                  <a:srgbClr val="97BC62"/>
-                </a:solidFill>
-                <a:latin typeface="Calibri"/>
-              </a:rPr>
-              <a:t>3   </a:t>
-            </a:r>
-            <a:r>
-              <a:rPr sz="2800" b="0" i="0">
-                <a:solidFill>
-                  <a:srgbClr val="222B22"/>
-                </a:solidFill>
-                <a:latin typeface="Calibri"/>
-              </a:rPr>
-              <a:t>“The container holds. Nothing leaves the pair. Not even back to the main room. Especially this week.”</a:t>
-            </a:r>
-          </a:p>
-          <a:p>
             <a:pPr marL="274320" indent="-274320">
               <a:spcAft>
                 <a:spcPts val="900"/>
               </a:spcAft>
             </a:pPr>
             <a:r>
-              <a:rPr sz="2800" b="1" i="0">
+              <a:rPr sz="2400" b="1" i="0">
                 <a:solidFill>
                   <a:srgbClr val="97BC62"/>
                 </a:solidFill>
@@ -9649,13 +9660,13 @@
               <a:t>•  </a:t>
             </a:r>
             <a:r>
-              <a:rPr sz="2800" b="0" i="0">
+              <a:rPr sz="2400" b="0" i="0">
                 <a:solidFill>
                   <a:srgbClr val="222B22"/>
                 </a:solidFill>
                 <a:latin typeface="Calibri"/>
               </a:rPr>
-              <a:t>The order holds too: your Companion first, then the parents, then the teens</a:t>
+              <a:t>The Lead Companion does the practice in front of the whole room — this sets the depth and the form</a:t>
             </a:r>
           </a:p>
           <a:p>
@@ -9665,7 +9676,7 @@
               </a:spcAft>
             </a:pPr>
             <a:r>
-              <a:rPr sz="2800" b="1" i="0">
+              <a:rPr sz="2400" b="1" i="0">
                 <a:solidFill>
                   <a:srgbClr val="97BC62"/>
                 </a:solidFill>
@@ -9674,13 +9685,88 @@
               <a:t>•  </a:t>
             </a:r>
             <a:r>
-              <a:rPr sz="2800" b="0" i="0">
+              <a:rPr sz="2400" b="0" i="0">
                 <a:solidFill>
                   <a:srgbClr val="222B22"/>
                 </a:solidFill>
                 <a:latin typeface="Calibri"/>
               </a:rPr>
-              <a:t>“Teens — your depth is yours, and pass is always allowed.”</a:t>
+              <a:t>One sentence: “The place where I want to walk in greater honesty is ______.” Real but not graphic</a:t>
+            </a:r>
+          </a:p>
+          <a:p>
+            <a:pPr marL="274320" indent="-274320">
+              <a:spcAft>
+                <a:spcPts val="900"/>
+              </a:spcAft>
+            </a:pPr>
+            <a:r>
+              <a:rPr sz="2400" b="1" i="0">
+                <a:solidFill>
+                  <a:srgbClr val="97BC62"/>
+                </a:solidFill>
+                <a:latin typeface="Calibri"/>
+              </a:rPr>
+              <a:t>•  </a:t>
+            </a:r>
+            <a:r>
+              <a:rPr sz="2400" b="0" i="0">
+                <a:solidFill>
+                  <a:srgbClr val="222B22"/>
+                </a:solidFill>
+                <a:latin typeface="Calibri"/>
+              </a:rPr>
+              <a:t>Pause. A pre-arranged Co-Companion speaks a brief blessing of restoration back</a:t>
+            </a:r>
+          </a:p>
+          <a:p>
+            <a:pPr marL="274320" indent="-274320">
+              <a:spcAft>
+                <a:spcPts val="900"/>
+              </a:spcAft>
+            </a:pPr>
+            <a:r>
+              <a:rPr sz="2400" b="1" i="0">
+                <a:solidFill>
+                  <a:srgbClr val="97BC62"/>
+                </a:solidFill>
+                <a:latin typeface="Calibri"/>
+              </a:rPr>
+              <a:t>•  </a:t>
+            </a:r>
+            <a:r>
+              <a:rPr sz="2400" b="0" i="0">
+                <a:solidFill>
+                  <a:srgbClr val="222B22"/>
+                </a:solidFill>
+                <a:latin typeface="Calibri"/>
+              </a:rPr>
+              <a:t>Receive it — no deflecting, no joking, no minimizing. “Thank you.”</a:t>
+            </a:r>
+          </a:p>
+          <a:p>
+            <a:pPr marL="274320" indent="-274320">
+              <a:spcAft>
+                <a:spcPts val="900"/>
+              </a:spcAft>
+            </a:pPr>
+            <a:r>
+              <a:rPr sz="2400" b="1" i="0">
+                <a:solidFill>
+                  <a:srgbClr val="97BC62"/>
+                </a:solidFill>
+                <a:latin typeface="Calibri"/>
+              </a:rPr>
+              <a:t>•  </a:t>
+            </a:r>
+            <a:r>
+              <a:rPr sz="2400" b="0" i="0">
+                <a:solidFill>
+                  <a:srgbClr val="222B22"/>
+                </a:solidFill>
+                <a:latin typeface="Calibri"/>
+              </a:rPr>
+              <a:t>“That is the practice. You will do it in your pair — parents first, then teens. Yours doesn’t have to look like mine.”</a:t>
             </a:r>
           </a:p>
         </p:txBody>
@@ -9707,7 +9793,7 @@
           <a:p>
             <a:pPr algn="r"/>
             <a:r>
-              <a:t>77</a:t>
+              <a:t>76</a:t>
             </a:r>
             <a:endParaRPr sz="1000" b="1">
               <a:solidFill>
@@ -9806,7 +9892,7 @@
                 </a:solidFill>
                 <a:latin typeface="Cambria"/>
               </a:rPr>
-              <a:t>Confession and Restoration in pairs</a:t>
+              <a:t>Bridge to the Split</a:t>
             </a:r>
           </a:p>
         </p:txBody>
@@ -9820,7 +9906,7 @@
         <p:spPr>
           <a:xfrm>
             <a:off x="822960" y="1554480"/>
-            <a:ext cx="6675120" cy="4892040"/>
+            <a:ext cx="10515600" cy="4892040"/>
           </a:xfrm>
           <a:prstGeom prst="rect">
             <a:avLst/>
@@ -9831,13 +9917,88 @@
           <a:bodyPr wrap="square" lIns="91440" tIns="91440" rIns="91440" bIns="91440"/>
           <a:lstStyle/>
           <a:p>
+            <a:pPr marL="342900" indent="-342900">
+              <a:spcAft>
+                <a:spcPts val="900"/>
+              </a:spcAft>
+            </a:pPr>
+            <a:r>
+              <a:rPr sz="2800" b="1" i="0">
+                <a:solidFill>
+                  <a:srgbClr val="97BC62"/>
+                </a:solidFill>
+                <a:latin typeface="Calibri"/>
+              </a:rPr>
+              <a:t>1   </a:t>
+            </a:r>
+            <a:r>
+              <a:rPr sz="2800" b="0" i="0">
+                <a:solidFill>
+                  <a:srgbClr val="222B22"/>
+                </a:solidFill>
+                <a:latin typeface="Calibri"/>
+              </a:rPr>
+              <a:t>“Take what helps from the prompts. You don’t have to use any of them.”</a:t>
+            </a:r>
+          </a:p>
+          <a:p>
+            <a:pPr marL="342900" indent="-342900">
+              <a:spcAft>
+                <a:spcPts val="900"/>
+              </a:spcAft>
+            </a:pPr>
+            <a:r>
+              <a:rPr sz="2800" b="1" i="0">
+                <a:solidFill>
+                  <a:srgbClr val="97BC62"/>
+                </a:solidFill>
+                <a:latin typeface="Calibri"/>
+              </a:rPr>
+              <a:t>2   </a:t>
+            </a:r>
+            <a:r>
+              <a:rPr sz="2800" b="0" i="0">
+                <a:solidFill>
+                  <a:srgbClr val="222B22"/>
+                </a:solidFill>
+                <a:latin typeface="Calibri"/>
+              </a:rPr>
+              <a:t>The blessing card — specific, short, witnessed: “In the name of Jesus, we pray restoration over...”</a:t>
+            </a:r>
+          </a:p>
+          <a:p>
+            <a:pPr marL="342900" indent="-342900">
+              <a:spcAft>
+                <a:spcPts val="900"/>
+              </a:spcAft>
+            </a:pPr>
+            <a:r>
+              <a:rPr sz="2800" b="1" i="0">
+                <a:solidFill>
+                  <a:srgbClr val="97BC62"/>
+                </a:solidFill>
+                <a:latin typeface="Calibri"/>
+              </a:rPr>
+              <a:t>3   </a:t>
+            </a:r>
+            <a:r>
+              <a:rPr sz="2800" b="0" i="0">
+                <a:solidFill>
+                  <a:srgbClr val="222B22"/>
+                </a:solidFill>
+                <a:latin typeface="Calibri"/>
+              </a:rPr>
+              <a:t>“The container holds. Nothing leaves the pair. Not even back to the main room. Especially this week.”</a:t>
+            </a:r>
+          </a:p>
+          <a:p>
             <a:pPr marL="274320" indent="-274320">
               <a:spcAft>
-                <a:spcPts val="750"/>
+                <a:spcPts val="900"/>
               </a:spcAft>
             </a:pPr>
             <a:r>
-              <a:rPr sz="2000" b="1" i="0">
+              <a:rPr sz="2800" b="1" i="0">
                 <a:solidFill>
                   <a:srgbClr val="97BC62"/>
                 </a:solidFill>
@@ -9846,163 +10007,38 @@
               <a:t>•  </a:t>
             </a:r>
             <a:r>
-              <a:rPr sz="2000" b="0" i="0">
+              <a:rPr sz="2800" b="0" i="0">
                 <a:solidFill>
                   <a:srgbClr val="222B22"/>
                 </a:solidFill>
                 <a:latin typeface="Calibri"/>
               </a:rPr>
-              <a:t>Ninety seconds of silence to settle in — the silence is part of the practice</a:t>
-            </a:r>
-          </a:p>
-          <a:p>
-            <a:pPr marL="342900" indent="-342900">
+              <a:t>The order holds too: your Companion first, then the parents, then the teens</a:t>
+            </a:r>
+          </a:p>
+          <a:p>
+            <a:pPr marL="274320" indent="-274320">
               <a:spcAft>
-                <a:spcPts val="750"/>
+                <a:spcPts val="900"/>
               </a:spcAft>
             </a:pPr>
             <a:r>
-              <a:rPr sz="2000" b="1" i="0">
+              <a:rPr sz="2800" b="1" i="0">
                 <a:solidFill>
                   <a:srgbClr val="97BC62"/>
                 </a:solidFill>
                 <a:latin typeface="Calibri"/>
               </a:rPr>
-              <a:t>1   </a:t>
-            </a:r>
-            <a:r>
-              <a:rPr sz="2000" b="0" i="0">
+              <a:t>•  </a:t>
+            </a:r>
+            <a:r>
+              <a:rPr sz="2800" b="0" i="0">
                 <a:solidFill>
                   <a:srgbClr val="222B22"/>
                 </a:solidFill>
                 <a:latin typeface="Calibri"/>
               </a:rPr>
-              <a:t>The leadsanion goes first — names one place, receives a blessing</a:t>
-            </a:r>
-          </a:p>
-          <a:p>
-            <a:pPr marL="342900" indent="-342900">
-              <a:spcAft>
-                <a:spcPts val="750"/>
-              </a:spcAft>
-            </a:pPr>
-            <a:r>
-              <a:rPr sz="2000" b="1" i="0">
-                <a:solidFill>
-                  <a:srgbClr val="97BC62"/>
-                </a:solidFill>
-                <a:latin typeface="Calibri"/>
-              </a:rPr>
-              <a:t>2   </a:t>
-            </a:r>
-            <a:r>
-              <a:rPr sz="2000" b="0" i="0">
-                <a:solidFill>
-                  <a:srgbClr val="222B22"/>
-                </a:solidFill>
-                <a:latin typeface="Calibri"/>
-              </a:rPr>
-              <a:t>The parents next — the arranged parent opens; own struggles only, within the rails</a:t>
-            </a:r>
-          </a:p>
-          <a:p>
-            <a:pPr marL="342900" indent="-342900">
-              <a:spcAft>
-                <a:spcPts val="750"/>
-              </a:spcAft>
-            </a:pPr>
-            <a:r>
-              <a:rPr sz="2000" b="1" i="0">
-                <a:solidFill>
-                  <a:srgbClr val="97BC62"/>
-                </a:solidFill>
-                <a:latin typeface="Calibri"/>
-              </a:rPr>
-              <a:t>3   </a:t>
-            </a:r>
-            <a:r>
-              <a:rPr sz="2000" b="0" i="0">
-                <a:solidFill>
-                  <a:srgbClr val="222B22"/>
-                </a:solidFill>
-                <a:latin typeface="Calibri"/>
-              </a:rPr>
-              <a:t>The teens — each names one place at whatever depth they choose. Pass is real, honored without a flicker</a:t>
-            </a:r>
-          </a:p>
-          <a:p>
-            <a:pPr marL="274320" indent="-274320">
-              <a:spcAft>
-                <a:spcPts val="750"/>
-              </a:spcAft>
-            </a:pPr>
-            <a:r>
-              <a:rPr sz="2000" b="1" i="0">
-                <a:solidFill>
-                  <a:srgbClr val="97BC62"/>
-                </a:solidFill>
-                <a:latin typeface="Calibri"/>
-              </a:rPr>
-              <a:t>•  </a:t>
-            </a:r>
-            <a:r>
-              <a:rPr sz="2000" b="0" i="0">
-                <a:solidFill>
-                  <a:srgbClr val="222B22"/>
-                </a:solidFill>
-                <a:latin typeface="Calibri"/>
-              </a:rPr>
-              <a:t>The form: “The place where I want to walk in greater honesty before God is ______.”</a:t>
-            </a:r>
-          </a:p>
-          <a:p>
-            <a:pPr marL="274320" indent="-274320">
-              <a:spcAft>
-                <a:spcPts val="750"/>
-              </a:spcAft>
-            </a:pPr>
-            <a:r>
-              <a:rPr sz="2000" b="1" i="0">
-                <a:solidFill>
-                  <a:srgbClr val="97BC62"/>
-                </a:solidFill>
-                <a:latin typeface="Calibri"/>
-              </a:rPr>
-              <a:t>•  </a:t>
-            </a:r>
-            <a:r>
-              <a:rPr sz="2000" b="0" i="0">
-                <a:solidFill>
-                  <a:srgbClr val="222B22"/>
-                </a:solidFill>
-                <a:latin typeface="Calibri"/>
-              </a:rPr>
-              <a:t>After each naming, a brief specific blessing — a teen blessing their own parent is one of the best things this night can produce</a:t>
-            </a:r>
-          </a:p>
-          <a:p>
-            <a:pPr marL="274320" indent="-274320">
-              <a:spcAft>
-                <a:spcPts val="750"/>
-              </a:spcAft>
-            </a:pPr>
-            <a:r>
-              <a:rPr sz="2000" b="1" i="0">
-                <a:solidFill>
-                  <a:srgbClr val="97BC62"/>
-                </a:solidFill>
-                <a:latin typeface="Calibri"/>
-              </a:rPr>
-              <a:t>•  </a:t>
-            </a:r>
-            <a:r>
-              <a:rPr sz="2000" b="0" i="0">
-                <a:solidFill>
-                  <a:srgbClr val="222B22"/>
-                </a:solidFill>
-                <a:latin typeface="Calibri"/>
-              </a:rPr>
-              <a:t>Closing silence — “We have named real things tonight. Let’s sit with what was said.”</a:t>
+              <a:t>“Teens — your depth is yours, and pass is always allowed.”</a:t>
             </a:r>
           </a:p>
         </p:txBody>
@@ -10029,7 +10065,7 @@
           <a:p>
             <a:pPr algn="r"/>
             <a:r>
-              <a:t>78</a:t>
+              <a:t>77</a:t>
             </a:r>
             <a:endParaRPr sz="1000" b="1">
               <a:solidFill>
@@ -10040,42 +10076,6 @@
           </a:p>
         </p:txBody>
       </p:sp>
-      <p:pic>
-        <p:nvPicPr>
-          <p:cNvPr id="30" name="Picture 30" descr="clear sunlit water over stones"/>
-          <p:cNvPicPr>
-            <a:picLocks noChangeAspect="1"/>
-          </p:cNvPicPr>
-          <p:nvPr/>
-        </p:nvPicPr>
-        <p:blipFill>
-          <a:blip r:embed="rId3"/>
-          <a:stretch>
-            <a:fillRect/>
-          </a:stretch>
-        </p:blipFill>
-        <p:spPr>
-          <a:xfrm>
-            <a:off x="8076095" y="1463040"/>
-            <a:ext cx="3289896" cy="4892040"/>
-          </a:xfrm>
-          <a:prstGeom prst="rect">
-            <a:avLst/>
-          </a:prstGeom>
-          <a:ln w="76200">
-            <a:solidFill>
-              <a:srgbClr val="FFFFFF"/>
-            </a:solidFill>
-          </a:ln>
-          <a:effectLst>
-            <a:outerShdw blurRad="63500" dist="25400" dir="5400000" rotWithShape="0">
-              <a:srgbClr val="000000">
-                <a:alpha val="35000"/>
-              </a:srgbClr>
-            </a:outerShdw>
-          </a:effectLst>
-        </p:spPr>
-      </p:pic>
     </p:spTree>
   </p:cSld>
   <p:clrMapOvr>

--- a/_implementation-notes/evening-series/FotH Evening Session 6 Slides DRAFT v1.pptx
+++ b/_implementation-notes/evening-series/FotH Evening Session 6 Slides DRAFT v1.pptx
@@ -8093,7 +8093,7 @@
           <p:nvPr/>
         </p:nvPicPr>
         <p:blipFill>
-          <a:blip r:embed="rId4"/>
+          <a:blip r:embed="rId5"/>
           <a:stretch>
             <a:fillRect/>
           </a:stretch>

--- a/_implementation-notes/evening-series/FotH Evening Session 6 Slides DRAFT v1.pptx
+++ b/_implementation-notes/evening-series/FotH Evening Session 6 Slides DRAFT v1.pptx
@@ -5470,7 +5470,7 @@
           <a:p>
             <a:pPr algn="r"/>
             <a:r>
-              <a:t>78</a:t>
+              <a:t>89</a:t>
             </a:r>
             <a:endParaRPr sz="1000" b="1">
               <a:solidFill>
@@ -5753,7 +5753,7 @@
           <a:p>
             <a:pPr algn="r"/>
             <a:r>
-              <a:t>79</a:t>
+              <a:t>90</a:t>
             </a:r>
             <a:endParaRPr sz="1000" b="1">
               <a:solidFill>
@@ -6050,7 +6050,7 @@
           <a:p>
             <a:pPr algn="r"/>
             <a:r>
-              <a:t>80</a:t>
+              <a:t>91</a:t>
             </a:r>
             <a:endParaRPr sz="1000" b="1">
               <a:solidFill>
@@ -6278,7 +6278,7 @@
           <a:p>
             <a:pPr algn="r"/>
             <a:r>
-              <a:t>81</a:t>
+              <a:t>92</a:t>
             </a:r>
             <a:endParaRPr sz="1000" b="1">
               <a:solidFill>
@@ -6470,7 +6470,7 @@
           <a:p>
             <a:pPr algn="r"/>
             <a:r>
-              <a:t>81a</a:t>
+              <a:t>93</a:t>
             </a:r>
             <a:endParaRPr sz="1000" b="1">
               <a:solidFill>
@@ -6596,7 +6596,7 @@
           <a:p>
             <a:pPr algn="r"/>
             <a:r>
-              <a:t>82</a:t>
+              <a:t>94</a:t>
             </a:r>
             <a:endParaRPr sz="1000" b="1">
               <a:solidFill>
@@ -7024,7 +7024,7 @@
           <a:p>
             <a:pPr algn="r"/>
             <a:r>
-              <a:t>83</a:t>
+              <a:t>95</a:t>
             </a:r>
             <a:endParaRPr sz="1000" b="1">
               <a:solidFill>
@@ -7469,7 +7469,7 @@
           <a:p>
             <a:pPr algn="r"/>
             <a:r>
-              <a:t>84</a:t>
+              <a:t>96</a:t>
             </a:r>
             <a:endParaRPr sz="1000" b="1">
               <a:solidFill>
@@ -7643,7 +7643,7 @@
           <a:p>
             <a:pPr algn="r"/>
             <a:r>
-              <a:t>85</a:t>
+              <a:t>97</a:t>
             </a:r>
             <a:endParaRPr sz="1000" b="1">
               <a:solidFill>
@@ -7892,7 +7892,7 @@
           <a:p>
             <a:pPr algn="r"/>
             <a:r>
-              <a:t>71</a:t>
+              <a:t>81</a:t>
             </a:r>
             <a:endParaRPr sz="1000" b="1">
               <a:solidFill>
@@ -8073,7 +8073,7 @@
           <a:p>
             <a:pPr algn="r"/>
             <a:r>
-              <a:t>71a</a:t>
+              <a:t>82</a:t>
             </a:r>
             <a:endParaRPr sz="1000" b="1">
               <a:solidFill>
@@ -8512,7 +8512,7 @@
           <a:p>
             <a:pPr algn="r"/>
             <a:r>
-              <a:t>72</a:t>
+              <a:t>83</a:t>
             </a:r>
             <a:endParaRPr sz="1000" b="1">
               <a:solidFill>
@@ -8895,7 +8895,7 @@
           <a:p>
             <a:pPr algn="r"/>
             <a:r>
-              <a:t>73</a:t>
+              <a:t>84</a:t>
             </a:r>
             <a:endParaRPr sz="1000" b="1">
               <a:solidFill>
@@ -9117,7 +9117,7 @@
           <a:p>
             <a:pPr algn="r"/>
             <a:r>
-              <a:t>74</a:t>
+              <a:t>85</a:t>
             </a:r>
             <a:endParaRPr sz="1000" b="1">
               <a:solidFill>
@@ -9521,7 +9521,7 @@
           <a:p>
             <a:pPr algn="r"/>
             <a:r>
-              <a:t>75</a:t>
+              <a:t>86</a:t>
             </a:r>
             <a:endParaRPr sz="1000" b="1">
               <a:solidFill>
@@ -9793,7 +9793,7 @@
           <a:p>
             <a:pPr algn="r"/>
             <a:r>
-              <a:t>76</a:t>
+              <a:t>87</a:t>
             </a:r>
             <a:endParaRPr sz="1000" b="1">
               <a:solidFill>
@@ -10065,7 +10065,7 @@
           <a:p>
             <a:pPr algn="r"/>
             <a:r>
-              <a:t>77</a:t>
+              <a:t>88</a:t>
             </a:r>
             <a:endParaRPr sz="1000" b="1">
               <a:solidFill>

--- a/_implementation-notes/evening-series/FotH Evening Session 6 Slides DRAFT v1.pptx
+++ b/_implementation-notes/evening-series/FotH Evening Session 6 Slides DRAFT v1.pptx
@@ -8093,7 +8093,7 @@
           <p:nvPr/>
         </p:nvPicPr>
         <p:blipFill>
-          <a:blip r:embed="rId5"/>
+          <a:blip r:embed="rId6"/>
           <a:stretch>
             <a:fillRect/>
           </a:stretch>

--- a/_implementation-notes/evening-series/FotH Evening Session 6 Slides DRAFT v1.pptx
+++ b/_implementation-notes/evening-series/FotH Evening Session 6 Slides DRAFT v1.pptx
@@ -1350,43 +1350,36 @@
           <a:lstStyle/>
           <a:p>
             <a:r>
-              <a:rPr lang="en-US" sz="1200"/>
               <a:t>S6 · 7:33–7:39 · LEAD: CONTENT PRESENTER</a:t>
             </a:r>
           </a:p>
           <a:p>
             <a:r>
-              <a:rPr lang="en-US" sz="1200"/>
               <a:t>BEATS:</a:t>
             </a:r>
           </a:p>
           <a:p>
             <a:r>
-              <a:rPr lang="en-US" sz="1200"/>
-              <a:t>1. Stand; eye contact across the room. 'The place where I want to walk in greater honesty is ___.' One place, specific, real but not graphic.</a:t>
-            </a:r>
-          </a:p>
-          <a:p>
-            <a:r>
-              <a:rPr lang="en-US" sz="1200"/>
+              <a:t>1. Stand; eye contact across the room. Offer the sample pattern first so nobody has to invent the form: a worked example of the naming and of the blessing back (on the slide). 'The place where I want to walk in greater honesty is ___.' One place, specific, real but not graphic.</a:t>
+            </a:r>
+          </a:p>
+          <a:p>
+            <a:r>
               <a:t>2. Pause; a PRE-ARRANGED Co-Companion speaks the three-sentence blessing back.</a:t>
             </a:r>
           </a:p>
           <a:p>
             <a:r>
-              <a:rPr lang="en-US" sz="1200"/>
               <a:t>3. Receive it — no deflecting, no joking, no minimizing. 'Thank you.' Sit down.</a:t>
             </a:r>
           </a:p>
           <a:p>
             <a:r>
-              <a:rPr lang="en-US" sz="1200"/>
               <a:t>4. Close: 'That is the practice. Parents first, then teens. Yours doesn't have to look like mine. Three minutes per person.'</a:t>
             </a:r>
           </a:p>
           <a:p>
             <a:r>
-              <a:rPr lang="en-US" sz="1200"/>
               <a:t>SUB: The demo is the leader's own material. Name YOUR one real place, written and rehearsed this week — never borrow the founder's — and arrange your blessing-giver before the session.</a:t>
             </a:r>
           </a:p>
@@ -1658,32 +1651,27 @@
           <a:lstStyle/>
           <a:p>
             <a:r>
-              <a:rPr lang="en-US" sz="1200"/>
               <a:t>S6 · 8:20–8:24 · LEAD: CONTENT PRESENTER</a:t>
             </a:r>
           </a:p>
           <a:p>
             <a:r>
-              <a:rPr lang="en-US" sz="1200"/>
               <a:t>BEATS:</a:t>
             </a:r>
           </a:p>
           <a:p>
             <a:r>
-              <a:rPr lang="en-US" sz="1200"/>
               <a:t>1. Parent Co-Companion leads. Five-Minute Examen each evening: thank Him for one specific thing; notice one place you saw God moving; ask Him about one place you walked in less honesty than you wanted today.</a:t>
             </a:r>
           </a:p>
           <a:p>
             <a:r>
-              <a:rPr lang="en-US" sz="1200"/>
-              <a:t>2. No fixing — just notice; the Spirit does the work. Carried through the quarter break.</a:t>
-            </a:r>
-          </a:p>
-          <a:p>
-            <a:r>
-              <a:rPr lang="en-US" sz="1200"/>
-              <a:t>3. Quarterly Pulse (H6.3) goes home today: three questions, five minutes, signed or anonymous — back in the bin at the Week 7 door.</a:t>
+              <a:t>2. No fixing — just notice; the Spirit does the work. Carried through the two weeks; the daily morning and evening questions continue.</a:t>
+            </a:r>
+          </a:p>
+          <a:p>
+            <a:r>
+              <a:t>3. (Current-condition walk: no quarter break and no paper Pulse — the three reflection questions ride home as a thinking point, next slide but two.)</a:t>
             </a:r>
           </a:p>
         </p:txBody>
@@ -1729,38 +1717,27 @@
           <a:lstStyle/>
           <a:p>
             <a:r>
-              <a:rPr lang="en-US" sz="1200"/>
               <a:t>S6 · 8:20–8:24 · LEAD: CONTENT PRESENTER</a:t>
             </a:r>
           </a:p>
           <a:p>
             <a:r>
-              <a:rPr lang="en-US" sz="1200"/>
               <a:t>BEATS:</a:t>
             </a:r>
           </a:p>
           <a:p>
             <a:r>
-              <a:rPr lang="en-US" sz="1200"/>
-              <a:t>1. After the Examen and the Pulse: 'three questions go home tonight — no paper, no deadline, nothing to prepare.' Frame it as the round the room already knows, grown one size: the leader's questions, asked of all of us.</a:t>
-            </a:r>
-          </a:p>
-          <a:p>
-            <a:r>
-              <a:rPr lang="en-US" sz="1200"/>
-              <a:t>2. Read the three slowly. Then the runway for the quiet ones: 'some of you think best in the quiet — that's why they go home two weeks early.'</a:t>
-            </a:r>
-          </a:p>
-          <a:p>
-            <a:r>
-              <a:rPr lang="en-US" sz="1200"/>
-              <a:t>GUARD: the group, never any one person — said warmly, once. An offer, never an assignment; the journal's Week 6 page carries the questions for anyone who wants to write toward them.</a:t>
-            </a:r>
-          </a:p>
-          <a:p>
-            <a:r>
-              <a:rPr lang="en-US" sz="1200"/>
-              <a:t>ADVANCE CUE: after 'first night back, we talk.'</a:t>
+              <a:t>1. After the Examen: 'three questions ride home tonight — no paper, no deadline, nothing to prepare. Just something to think on.'</a:t>
+            </a:r>
+          </a:p>
+          <a:p>
+            <a:r>
+              <a:t>2. Read the three slowly. Then the runway for the quiet ones: 'some of you think best in the quiet — that's why they go home two weeks.'</a:t>
+            </a:r>
+          </a:p>
+          <a:p>
+            <a:r>
+              <a:t>3. Frame it as the round the room already knows, grown one size: the leader's questions, asked of all of us — about the group, never any one person. Next evening, we talk.</a:t>
             </a:r>
           </a:p>
         </p:txBody>
@@ -5318,7 +5295,7 @@
                 </a:solidFill>
                 <a:latin typeface="Calibri"/>
               </a:rPr>
-              <a:t>The leadsanion goes first — names one place, receives a blessing</a:t>
+              <a:t>The Lead Companion goes first — names one place, receives a blessing</a:t>
             </a:r>
           </a:p>
           <a:p>
@@ -5898,7 +5875,7 @@
                 </a:solidFill>
                 <a:latin typeface="Calibri"/>
               </a:rPr>
-              <a:t>The Five-Minute Examen — five minutes with God each evening, before bed, carried through the quarter break</a:t>
+              <a:t>The Five-Minute Examen — five minutes with God each evening, before bed, carried through the two weeks</a:t>
             </a:r>
           </a:p>
           <a:p>
@@ -5974,56 +5951,6 @@
                 <a:latin typeface="Calibri"/>
               </a:rPr>
               <a:t>Ask Him about one place where you walked in less honesty than you wanted to today — just notice. No fixing</a:t>
-            </a:r>
-          </a:p>
-          <a:p>
-            <a:pPr marL="274320" indent="-274320">
-              <a:spcAft>
-                <a:spcPts val="750"/>
-              </a:spcAft>
-            </a:pPr>
-            <a:r>
-              <a:rPr sz="2200" b="1" i="0">
-                <a:solidFill>
-                  <a:srgbClr val="97BC62"/>
-                </a:solidFill>
-                <a:latin typeface="Calibri"/>
-              </a:rPr>
-              <a:t>•  </a:t>
-            </a:r>
-            <a:r>
-              <a:rPr sz="2200" b="0" i="0">
-                <a:solidFill>
-                  <a:srgbClr val="222B22"/>
-                </a:solidFill>
-                <a:latin typeface="Calibri"/>
-              </a:rPr>
-              <a:t>The Quarterly Pulse goes home tonight — three questions, five minutes, sign it or leave it anonymous</a:t>
-            </a:r>
-          </a:p>
-          <a:p>
-            <a:pPr marL="274320" indent="-274320">
-              <a:spcAft>
-                <a:spcPts val="750"/>
-              </a:spcAft>
-            </a:pPr>
-            <a:r>
-              <a:rPr sz="2200" b="1" i="0">
-                <a:solidFill>
-                  <a:srgbClr val="97BC62"/>
-                </a:solidFill>
-                <a:latin typeface="Calibri"/>
-              </a:rPr>
-              <a:t>•  </a:t>
-            </a:r>
-            <a:r>
-              <a:rPr sz="2200" b="0" i="0">
-                <a:solidFill>
-                  <a:srgbClr val="222B22"/>
-                </a:solidFill>
-                <a:latin typeface="Calibri"/>
-              </a:rPr>
-              <a:t>It comes back to the bin at the door at Week 7</a:t>
             </a:r>
           </a:p>
         </p:txBody>
@@ -6193,9 +6120,76 @@
           </a:p>
         </p:txBody>
       </p:sp>
+      <p:sp>
+        <p:nvSpPr>
+          <p:cNvPr id="5" name="TextBox 4"/>
+          <p:cNvSpPr txBox="1"/>
+          <p:nvPr/>
+        </p:nvSpPr>
+        <p:spPr>
+          <a:xfrm>
+            <a:off x="822960" y="6355080"/>
+            <a:ext cx="10515600" cy="411480"/>
+          </a:xfrm>
+          <a:prstGeom prst="rect">
+            <a:avLst/>
+          </a:prstGeom>
+          <a:noFill/>
+        </p:spPr>
+        <p:txBody>
+          <a:bodyPr wrap="square">
+            <a:spAutoFit/>
+          </a:bodyPr>
+          <a:lstStyle/>
+          <a:p>
+            <a:r>
+              <a:rPr sz="1400" i="1">
+                <a:solidFill>
+                  <a:srgbClr val="595959"/>
+                </a:solidFill>
+                <a:latin typeface="Calibri"/>
+              </a:rPr>
+              <a:t>Handed out now — this is the sheet in your hands.</a:t>
+            </a:r>
+          </a:p>
+        </p:txBody>
+      </p:sp>
+      <p:sp>
+        <p:nvSpPr>
+          <p:cNvPr id="90" name="SlideNum"/>
+          <p:cNvSpPr txBox="1"/>
+          <p:nvPr/>
+        </p:nvSpPr>
+        <p:spPr>
+          <a:xfrm>
+            <a:off x="11384280" y="6446520"/>
+            <a:ext cx="640080" cy="292608"/>
+          </a:xfrm>
+          <a:prstGeom prst="rect">
+            <a:avLst/>
+          </a:prstGeom>
+          <a:noFill/>
+        </p:spPr>
+        <p:txBody>
+          <a:bodyPr wrap="none" lIns="0" tIns="0" rIns="45720" bIns="0" anchor="ctr"/>
+          <a:lstStyle/>
+          <a:p>
+            <a:pPr algn="r"/>
+            <a:r>
+              <a:t>92</a:t>
+            </a:r>
+            <a:endParaRPr sz="1000" b="1">
+              <a:solidFill>
+                <a:srgbClr val="7A8A6E"/>
+              </a:solidFill>
+              <a:latin typeface="Calibri"/>
+            </a:endParaRPr>
+          </a:p>
+        </p:txBody>
+      </p:sp>
       <p:pic>
         <p:nvPicPr>
-          <p:cNvPr id="4" name="Picture 3" descr="s6_part1.png"/>
+          <p:cNvPr id="91" name="Picture 90" descr="image.png"/>
           <p:cNvPicPr>
             <a:picLocks noChangeAspect="1"/>
           </p:cNvPicPr>
@@ -6222,73 +6216,6 @@
           </a:ln>
         </p:spPr>
       </p:pic>
-      <p:sp>
-        <p:nvSpPr>
-          <p:cNvPr id="5" name="TextBox 4"/>
-          <p:cNvSpPr txBox="1"/>
-          <p:nvPr/>
-        </p:nvSpPr>
-        <p:spPr>
-          <a:xfrm>
-            <a:off x="822960" y="6355080"/>
-            <a:ext cx="10515600" cy="411480"/>
-          </a:xfrm>
-          <a:prstGeom prst="rect">
-            <a:avLst/>
-          </a:prstGeom>
-          <a:noFill/>
-        </p:spPr>
-        <p:txBody>
-          <a:bodyPr wrap="square">
-            <a:spAutoFit/>
-          </a:bodyPr>
-          <a:lstStyle/>
-          <a:p>
-            <a:r>
-              <a:rPr sz="1400" i="1">
-                <a:solidFill>
-                  <a:srgbClr val="595959"/>
-                </a:solidFill>
-                <a:latin typeface="Calibri"/>
-              </a:rPr>
-              <a:t>Handed out now — this is the sheet in your hands.</a:t>
-            </a:r>
-          </a:p>
-        </p:txBody>
-      </p:sp>
-      <p:sp>
-        <p:nvSpPr>
-          <p:cNvPr id="90" name="SlideNum"/>
-          <p:cNvSpPr txBox="1"/>
-          <p:nvPr/>
-        </p:nvSpPr>
-        <p:spPr>
-          <a:xfrm>
-            <a:off x="11384280" y="6446520"/>
-            <a:ext cx="640080" cy="292608"/>
-          </a:xfrm>
-          <a:prstGeom prst="rect">
-            <a:avLst/>
-          </a:prstGeom>
-          <a:noFill/>
-        </p:spPr>
-        <p:txBody>
-          <a:bodyPr wrap="none" lIns="0" tIns="0" rIns="45720" bIns="0" anchor="ctr"/>
-          <a:lstStyle/>
-          <a:p>
-            <a:pPr algn="r"/>
-            <a:r>
-              <a:t>92</a:t>
-            </a:r>
-            <a:endParaRPr sz="1000" b="1">
-              <a:solidFill>
-                <a:srgbClr val="7A8A6E"/>
-              </a:solidFill>
-              <a:latin typeface="Calibri"/>
-            </a:endParaRPr>
-          </a:p>
-        </p:txBody>
-      </p:sp>
     </p:spTree>
   </p:cSld>
   <p:clrMapOvr>
@@ -6385,16 +6312,83 @@
           </a:p>
         </p:txBody>
       </p:sp>
+      <p:sp>
+        <p:nvSpPr>
+          <p:cNvPr id="5" name="TextBox 4"/>
+          <p:cNvSpPr txBox="1"/>
+          <p:nvPr/>
+        </p:nvSpPr>
+        <p:spPr>
+          <a:xfrm>
+            <a:off x="822960" y="6355080"/>
+            <a:ext cx="10515600" cy="411480"/>
+          </a:xfrm>
+          <a:prstGeom prst="rect">
+            <a:avLst/>
+          </a:prstGeom>
+          <a:noFill/>
+        </p:spPr>
+        <p:txBody>
+          <a:bodyPr wrap="square">
+            <a:spAutoFit/>
+          </a:bodyPr>
+          <a:lstStyle/>
+          <a:p>
+            <a:r>
+              <a:rPr sz="1400" i="1">
+                <a:solidFill>
+                  <a:srgbClr val="595959"/>
+                </a:solidFill>
+                <a:latin typeface="Calibri"/>
+              </a:rPr>
+              <a:t>One practice at a time — and a partner expecting you at the end of week one.</a:t>
+            </a:r>
+          </a:p>
+        </p:txBody>
+      </p:sp>
+      <p:sp>
+        <p:nvSpPr>
+          <p:cNvPr id="90" name="SlideNum"/>
+          <p:cNvSpPr txBox="1"/>
+          <p:nvPr/>
+        </p:nvSpPr>
+        <p:spPr>
+          <a:xfrm>
+            <a:off x="11384280" y="6446520"/>
+            <a:ext cx="640080" cy="292608"/>
+          </a:xfrm>
+          <a:prstGeom prst="rect">
+            <a:avLst/>
+          </a:prstGeom>
+          <a:noFill/>
+        </p:spPr>
+        <p:txBody>
+          <a:bodyPr wrap="none" lIns="0" tIns="0" rIns="45720" bIns="0" anchor="ctr"/>
+          <a:lstStyle/>
+          <a:p>
+            <a:pPr algn="r"/>
+            <a:r>
+              <a:t>93</a:t>
+            </a:r>
+            <a:endParaRPr sz="1000" b="1">
+              <a:solidFill>
+                <a:srgbClr val="7A8A6E"/>
+              </a:solidFill>
+              <a:latin typeface="Calibri"/>
+            </a:endParaRPr>
+          </a:p>
+        </p:txBody>
+      </p:sp>
       <p:pic>
         <p:nvPicPr>
-          <p:cNvPr id="4" name="Picture 3" descr="s6_part2.png"/>
+          <p:cNvPr id="91" name="Picture 90" descr="s6_part2.png"/>
           <p:cNvPicPr>
             <a:picLocks noChangeAspect="1"/>
           </p:cNvPicPr>
           <p:nvPr/>
         </p:nvPicPr>
         <p:blipFill>
-          <a:blip r:embed="rId2"/>
+          <a:blip r:embed="rId4"/>
           <a:stretch>
             <a:fillRect/>
           </a:stretch>
@@ -6402,7 +6396,7 @@
         <p:spPr>
           <a:xfrm>
             <a:off x="2589026" y="1463040"/>
-            <a:ext cx="7013642" cy="4709160"/>
+            <a:ext cx="7013642" cy="3897581"/>
           </a:xfrm>
           <a:prstGeom prst="rect">
             <a:avLst/>
@@ -6414,73 +6408,6 @@
           </a:ln>
         </p:spPr>
       </p:pic>
-      <p:sp>
-        <p:nvSpPr>
-          <p:cNvPr id="5" name="TextBox 4"/>
-          <p:cNvSpPr txBox="1"/>
-          <p:nvPr/>
-        </p:nvSpPr>
-        <p:spPr>
-          <a:xfrm>
-            <a:off x="822960" y="6355080"/>
-            <a:ext cx="10515600" cy="411480"/>
-          </a:xfrm>
-          <a:prstGeom prst="rect">
-            <a:avLst/>
-          </a:prstGeom>
-          <a:noFill/>
-        </p:spPr>
-        <p:txBody>
-          <a:bodyPr wrap="square">
-            <a:spAutoFit/>
-          </a:bodyPr>
-          <a:lstStyle/>
-          <a:p>
-            <a:r>
-              <a:rPr sz="1400" i="1">
-                <a:solidFill>
-                  <a:srgbClr val="595959"/>
-                </a:solidFill>
-                <a:latin typeface="Calibri"/>
-              </a:rPr>
-              <a:t>One practice at a time — and a partner expecting you at the end of week one.</a:t>
-            </a:r>
-          </a:p>
-        </p:txBody>
-      </p:sp>
-      <p:sp>
-        <p:nvSpPr>
-          <p:cNvPr id="90" name="SlideNum"/>
-          <p:cNvSpPr txBox="1"/>
-          <p:nvPr/>
-        </p:nvSpPr>
-        <p:spPr>
-          <a:xfrm>
-            <a:off x="11384280" y="6446520"/>
-            <a:ext cx="640080" cy="292608"/>
-          </a:xfrm>
-          <a:prstGeom prst="rect">
-            <a:avLst/>
-          </a:prstGeom>
-          <a:noFill/>
-        </p:spPr>
-        <p:txBody>
-          <a:bodyPr wrap="none" lIns="0" tIns="0" rIns="45720" bIns="0" anchor="ctr"/>
-          <a:lstStyle/>
-          <a:p>
-            <a:pPr algn="r"/>
-            <a:r>
-              <a:t>93</a:t>
-            </a:r>
-            <a:endParaRPr sz="1000" b="1">
-              <a:solidFill>
-                <a:srgbClr val="7A8A6E"/>
-              </a:solidFill>
-              <a:latin typeface="Calibri"/>
-            </a:endParaRPr>
-          </a:p>
-        </p:txBody>
-      </p:sp>
     </p:spTree>
   </p:cSld>
   <p:clrMapOvr>
@@ -6639,7 +6566,7 @@
                 </a:solidFill>
                 <a:latin typeface="Calibri"/>
               </a:rPr>
-              <a:t>Every week we close the same way — the leader’s reflection, then the room’s. Tonight closes a whole quarter, so the same questions come home for all of us:</a:t>
+              <a:t>Every week we close the same way — the leader’s reflection, then the room’s. Tonight the same questions ride home with all of us — not a survey, just something to think on:</a:t>
             </a:r>
           </a:p>
           <a:p>
@@ -6664,7 +6591,7 @@
                 </a:solidFill>
                 <a:latin typeface="Calibri"/>
               </a:rPr>
-              <a:t>What’s working well that we ought to keep doing next quarter?</a:t>
+              <a:t>What’s working well that we ought to keep doing?</a:t>
             </a:r>
           </a:p>
           <a:p>
@@ -6733,7 +6660,7 @@
                 </a:solidFill>
                 <a:latin typeface="Calibri"/>
               </a:rPr>
-              <a:t>No paper. Nothing to prepare. The group, never any one person. First night back, we talk.</a:t>
+              <a:t>No paper. Nothing to prepare. The group, never any one person. Next evening, we talk.</a:t>
             </a:r>
           </a:p>
         </p:txBody>
@@ -9692,6 +9619,31 @@
                 <a:latin typeface="Calibri"/>
               </a:rPr>
               <a:t>One sentence: “The place where I want to walk in greater honesty is ______.” Real but not graphic</a:t>
+            </a:r>
+          </a:p>
+          <a:p>
+            <a:pPr marL="274320" indent="-274320">
+              <a:spcAft>
+                <a:spcPts val="900"/>
+              </a:spcAft>
+            </a:pPr>
+            <a:r>
+              <a:rPr sz="2400" b="1" i="0">
+                <a:solidFill>
+                  <a:srgbClr val="97BC62"/>
+                </a:solidFill>
+                <a:latin typeface="Calibri"/>
+              </a:rPr>
+              <a:t>•  </a:t>
+            </a:r>
+            <a:r>
+              <a:rPr sz="2400" b="0" i="0">
+                <a:solidFill>
+                  <a:srgbClr val="222B22"/>
+                </a:solidFill>
+                <a:latin typeface="Calibri"/>
+              </a:rPr>
+              <a:t>For example: “The place where I want to walk in greater honesty is how I speak about people who aren’t in the room.” — and the blessing back: “What I bless in you is the courage it took to name that. May God meet you there.”</a:t>
             </a:r>
           </a:p>
           <a:p>

--- a/_implementation-notes/evening-series/FotH Evening Session 6 Slides DRAFT v1.pptx
+++ b/_implementation-notes/evening-series/FotH Evening Session 6 Slides DRAFT v1.pptx
@@ -1925,14 +1925,12 @@
           <a:lstStyle/>
           <a:p>
             <a:r>
-              <a:rPr lang="en-US" sz="1200"/>
               <a:t>QUARTER 2 · pre-session · DIVIDER</a:t>
             </a:r>
           </a:p>
           <a:p>
             <a:r>
-              <a:rPr lang="en-US" sz="1200"/>
-              <a:t>On screen as families arrive for the quarter's first evenings. Greet at the door — the slide holds the room.</a:t>
+              <a:t>On screen as families arrive for the quarter's first evening. Greet at the door — the slide holds the room.</a:t>
             </a:r>
           </a:p>
         </p:txBody>
@@ -7543,7 +7541,7 @@
                 </a:solidFill>
                 <a:latin typeface="Calibri"/>
               </a:rPr>
-              <a:t>Weeks 7–11  ·  Five Wednesdays · PROAPT, the Garden, Any Doubts? · ends at the year’s midpoint</a:t>
+              <a:t>Sessions 7–8 · 9–10 · 11  —  three evenings, every other Tuesday · PROAPT, the Garden, Any Doubts?</a:t>
             </a:r>
           </a:p>
         </p:txBody>

--- a/_implementation-notes/evening-series/FotH Evening Session 6 Slides DRAFT v1.pptx
+++ b/_implementation-notes/evening-series/FotH Evening Session 6 Slides DRAFT v1.pptx
@@ -1581,7 +1581,7 @@
           <a:p>
             <a:r>
               <a:rPr lang="en-US" sz="1200"/>
-              <a:t>S6 · 8:16–8:20 · LEAD: CONTENT PRESENTER</a:t>
+              <a:t>S6 · 8:16–8:20 · LEAD: CONTAINER HOLDER</a:t>
             </a:r>
           </a:p>
           <a:p>

--- a/_implementation-notes/evening-series/FotH Evening Session 6 Slides DRAFT v1.pptx
+++ b/_implementation-notes/evening-series/FotH Evening Session 6 Slides DRAFT v1.pptx
@@ -1522,7 +1522,7 @@
           <a:p>
             <a:r>
               <a:rPr lang="en-US" sz="1200"/>
-              <a:t>3. Pace: three minutes per person; a three-family pair runs 2.5 from the start, not discovered at 5:03. Never skip anyone — compress before you cut.</a:t>
+              <a:t>3. Pace: three minutes per person; a three-family pair runs 2.5 from the start, not discovered at 8:00. Never skip anyone — compress before you cut.</a:t>
             </a:r>
           </a:p>
           <a:p>

--- a/_implementation-notes/evening-series/FotH Evening Session 6 Slides DRAFT v1.pptx
+++ b/_implementation-notes/evening-series/FotH Evening Session 6 Slides DRAFT v1.pptx
@@ -1510,13 +1510,13 @@
           <a:p>
             <a:r>
               <a:rPr lang="en-US" sz="1200"/>
-              <a:t>1. The Companion opens with ninety seconds of silence, then goes first (3 min) and receives the pre-assigned blessing.</a:t>
+              <a:t>1. Ninety seconds of silence to settle — the silence is part of the practice.</a:t>
             </a:r>
           </a:p>
           <a:p>
             <a:r>
               <a:rPr lang="en-US" sz="1200"/>
-              <a:t>2. Parents next, arranged parent opening, within the rails; then the teens at their own depth — pass honored without a flicker. A teen blessing their own parent is one of the best things this night produces.</a:t>
+              <a:t>2. The parent goes first in every pair (3 min), own struggles only, within the rails; then the teens at their own depth — pass honored without a flicker. A teen blessing their own parent is one of the best things this night produces.</a:t>
             </a:r>
           </a:p>
           <a:p>
@@ -5293,7 +5293,7 @@
                 </a:solidFill>
                 <a:latin typeface="Calibri"/>
               </a:rPr>
-              <a:t>The Lead Companion goes first — names one place, receives a blessing</a:t>
+              <a:t>The parents go first in every pair — own struggles only, within the rails</a:t>
             </a:r>
           </a:p>
           <a:p>
@@ -5310,31 +5310,6 @@
                 <a:latin typeface="Calibri"/>
               </a:rPr>
               <a:t>2   </a:t>
-            </a:r>
-            <a:r>
-              <a:rPr sz="2000" b="0" i="0">
-                <a:solidFill>
-                  <a:srgbClr val="222B22"/>
-                </a:solidFill>
-                <a:latin typeface="Calibri"/>
-              </a:rPr>
-              <a:t>The parents next — the arranged parent opens; own struggles only, within the rails</a:t>
-            </a:r>
-          </a:p>
-          <a:p>
-            <a:pPr marL="342900" indent="-342900">
-              <a:spcAft>
-                <a:spcPts val="750"/>
-              </a:spcAft>
-            </a:pPr>
-            <a:r>
-              <a:rPr sz="2000" b="1" i="0">
-                <a:solidFill>
-                  <a:srgbClr val="97BC62"/>
-                </a:solidFill>
-                <a:latin typeface="Calibri"/>
-              </a:rPr>
-              <a:t>3   </a:t>
             </a:r>
             <a:r>
               <a:rPr sz="2000" b="0" i="0">
@@ -5701,7 +5676,7 @@
                 </a:solidFill>
                 <a:latin typeface="Calibri"/>
               </a:rPr>
-              <a:t>“We pray restoration into every place that was named... Holy Spirit, walk these brothers and sisters home.”</a:t>
+              <a:t>“We pray restoration into every place that was named... Holy Spirit, walk my brothers and sisters home.”</a:t>
             </a:r>
           </a:p>
         </p:txBody>
@@ -8160,7 +8135,7 @@
         </p:spPr>
         <p:txBody>
           <a:bodyPr wrap="square">
-            <a:spAutoFit/>
+            <a:normAutofit fontScale="77000" lnSpcReduction="10000"/>
           </a:bodyPr>
           <a:lstStyle/>
           <a:p>
@@ -9348,7 +9323,7 @@
                 </a:solidFill>
                 <a:latin typeface="Calibri"/>
               </a:rPr>
-              <a:t>After each naming, the circle speaks a specific blessing of restoration — about three minutes per person</a:t>
+              <a:t>After each naming, the pair speaks a specific blessing of restoration — about three minutes per person</a:t>
             </a:r>
           </a:p>
         </p:txBody>
@@ -9567,7 +9542,9 @@
           <a:noFill/>
         </p:spPr>
         <p:txBody>
-          <a:bodyPr wrap="square" lIns="91440" tIns="91440" rIns="91440" bIns="91440"/>
+          <a:bodyPr wrap="square" lIns="91440" tIns="91440" rIns="91440" bIns="91440">
+            <a:normAutofit fontScale="80000" lnSpcReduction="10000"/>
+          </a:bodyPr>
           <a:lstStyle/>
           <a:p>
             <a:pPr marL="274320" indent="-274320">
@@ -9667,6 +9644,31 @@
                 <a:latin typeface="Calibri"/>
               </a:rPr>
               <a:t>Pause. A pre-arranged Co-Companion speaks a brief blessing of restoration back</a:t>
+            </a:r>
+          </a:p>
+          <a:p>
+            <a:pPr marL="274320" indent="-274320">
+              <a:spcAft>
+                <a:spcPts val="900"/>
+              </a:spcAft>
+            </a:pPr>
+            <a:r>
+              <a:rPr sz="2400" b="1" i="0">
+                <a:solidFill>
+                  <a:srgbClr val="97BC62"/>
+                </a:solidFill>
+                <a:latin typeface="Calibri"/>
+              </a:rPr>
+              <a:t>•  </a:t>
+            </a:r>
+            <a:r>
+              <a:rPr sz="2400" b="0" i="0">
+                <a:solidFill>
+                  <a:srgbClr val="222B22"/>
+                </a:solidFill>
+                <a:latin typeface="Calibri"/>
+              </a:rPr>
+              <a:t>For example: “In the name of Jesus, we pray restoration over the place you named — may its grip break, and may honesty grow where it held.”</a:t>
             </a:r>
           </a:p>
           <a:p>
@@ -9963,7 +9965,7 @@
                 </a:solidFill>
                 <a:latin typeface="Calibri"/>
               </a:rPr>
-              <a:t>The order holds too: your Companion first, then the parents, then the teens</a:t>
+              <a:t>The order holds in every pair: the parent first, then the teens</a:t>
             </a:r>
           </a:p>
           <a:p>

--- a/_implementation-notes/evening-series/FotH Evening Session 6 Slides DRAFT v1.pptx
+++ b/_implementation-notes/evening-series/FotH Evening Session 6 Slides DRAFT v1.pptx
@@ -1068,7 +1068,7 @@
           <a:p>
             <a:r>
               <a:rPr lang="en-US" sz="1200"/>
-              <a:t>2. Shape: open, check-in, 13-minute teaching, YOUR demo, bridge, 33-minute pair practice (Companion, then parents, then teens), merge and shared blessing, Examen plus Quarterly Pulse, feedback, close. Quarter 1 ends today.</a:t>
+              <a:t>2. Shape: open, check-in, 13-minute teaching, YOUR demo, bridge, 33-minute pair practice (Companion, then parents, then teens), merge and shared blessing, Examen plus the three questions carried home, feedback, close. Quarter 1 ends today.</a:t>
             </a:r>
           </a:p>
           <a:p>
@@ -1671,7 +1671,7 @@
           </a:p>
           <a:p>
             <a:r>
-              <a:t>3. (Current-condition walk: no quarter break and no paper Pulse — the three reflection questions ride home as a thinking point, next slide but two.)</a:t>
+              <a:t>3. The three reflection questions ride home as a thinking point — next slide but two.</a:t>
             </a:r>
           </a:p>
         </p:txBody>
@@ -1873,7 +1873,7 @@
           <a:p>
             <a:r>
               <a:rPr lang="en-US" sz="1200"/>
-              <a:t>3. Aaronic blessing. 'Go gently. Today closes the quarter — carry the Examen through the break; bring the Pulse back to the Week 7 door.'</a:t>
+              <a:t>3. Aaronic blessing. 'Go gently. Today closes the quarter — carry the Examen through the two weeks, and bring the three questions with you; next evening, we talk.'</a:t>
             </a:r>
           </a:p>
           <a:p>

--- a/_implementation-notes/evening-series/FotH Evening Session 6 Slides DRAFT v1.pptx
+++ b/_implementation-notes/evening-series/FotH Evening Session 6 Slides DRAFT v1.pptx
@@ -15,6 +15,7 @@
     <p:sldId id="371" r:id="rId74"/>
     <p:sldId id="372" r:id="rId75"/>
     <p:sldId id="373" r:id="rId76"/>
+    <p:sldId id="553" r:id="rId24"/>
     <p:sldId id="374" r:id="rId77"/>
     <p:sldId id="375" r:id="rId78"/>
     <p:sldId id="376" r:id="rId79"/>
@@ -755,6 +756,97 @@
 </p:notes>
 </file>
 
+<file path=ppt/notesSlides/notesSlide16.xml><?xml version="1.0" encoding="utf-8"?>
+<p:notes xmlns:a="http://schemas.openxmlformats.org/drawingml/2006/main" xmlns:p="http://schemas.openxmlformats.org/presentationml/2006/main" xmlns:r="http://schemas.openxmlformats.org/officeDocument/2006/relationships">
+  <p:cSld>
+    <p:spTree>
+      <p:nvGrpSpPr>
+        <p:cNvPr id="1" name=""/>
+        <p:cNvGrpSpPr/>
+        <p:nvPr/>
+      </p:nvGrpSpPr>
+      <p:grpSpPr>
+        <a:xfrm>
+          <a:off x="0" y="0"/>
+          <a:ext cx="0" cy="0"/>
+          <a:chOff x="0" y="0"/>
+          <a:chExt cx="0" cy="0"/>
+        </a:xfrm>
+      </p:grpSpPr>
+      <p:sp>
+        <p:nvSpPr>
+          <p:cNvPr id="2" name="Notes Placeholder 1"/>
+          <p:cNvSpPr>
+            <a:spLocks noGrp="1"/>
+          </p:cNvSpPr>
+          <p:nvPr>
+            <p:ph type="body" idx="1"/>
+          </p:nvPr>
+        </p:nvSpPr>
+        <p:spPr/>
+        <p:txBody>
+          <a:bodyPr/>
+          <a:lstStyle/>
+          <a:p>
+            <a:r>
+              <a:t>S6 · 7:31–7:37 · LEAD: CONTENT PRESENTER · CENTRAL — the groups depend on this slide</a:t>
+            </a:r>
+          </a:p>
+          <a:p>
+            <a:r>
+              <a:t>BEATS:</a:t>
+            </a:r>
+          </a:p>
+          <a:p>
+            <a:r>
+              <a:t>1. This is what each of us will name tonight, so go slowly. Three words; only the first is required.</a:t>
+            </a:r>
+          </a:p>
+          <a:p>
+            <a:r>
+              <a:t>2. The place: where in my life I want to walk in greater honesty — a relationship, a setting, a part of my day; where growth has stalled. Places sound like: the way I treat my brother; the faith I perform; the resentment I keep feeding; fear winning over trust.</a:t>
+            </a:r>
+          </a:p>
+          <a:p>
+            <a:r>
+              <a:t>3. The pattern: how it keeps going — not one incident but the habit, the one I have stopped expecting to change.</a:t>
+            </a:r>
+          </a:p>
+          <a:p>
+            <a:r>
+              <a:t>4. The pull: what draws me back — the want or the fear underneath; what I keep yielding to.</a:t>
+            </a:r>
+          </a:p>
+          <a:p>
+            <a:r>
+              <a:t>5. Walk the example on the slide through all three, out loud, so the room hears how the three fit together.</a:t>
+            </a:r>
+          </a:p>
+          <a:p>
+            <a:r>
+              <a:t>6. Then the two lines that make it safe: naming the place is enough — the pattern and the pull are yours to add or keep; and what is never named here — details, anyone else's part, anything about someone in this room.</a:t>
+            </a:r>
+          </a:p>
+          <a:p>
+            <a:r>
+              <a:t>CUES: Ask 'Questions about the three words?' and wait. Get it clear here, not in the groups. If the groups stay in this room, leave the practice slide up — it carries the three words too.</a:t>
+            </a:r>
+          </a:p>
+          <a:p>
+            <a:r>
+              <a:t>GUARD: The second of the three required framings — not specific sins: the place, the pattern, the pull.</a:t>
+            </a:r>
+          </a:p>
+        </p:txBody>
+      </p:sp>
+    </p:spTree>
+  </p:cSld>
+  <p:clrMapOvr>
+    <a:masterClrMapping/>
+  </p:clrMapOvr>
+</p:notes>
+</file>
+
 <file path=ppt/notesSlides/notesSlide17.xml><?xml version="1.0" encoding="utf-8"?>
 <p:notes xmlns:a="http://schemas.openxmlformats.org/drawingml/2006/main" xmlns:p="http://schemas.openxmlformats.org/presentationml/2006/main" xmlns:r="http://schemas.openxmlformats.org/officeDocument/2006/relationships">
   <p:cSld>
@@ -1049,37 +1141,31 @@
           <a:lstStyle/>
           <a:p>
             <a:r>
-              <a:rPr lang="en-US" sz="1200"/>
               <a:t>S6 · 7:00–8:30 · LEAD: BOTH LEADERS</a:t>
             </a:r>
           </a:p>
           <a:p>
             <a:r>
-              <a:rPr lang="en-US" sz="1200"/>
               <a:t>BEATS:</a:t>
             </a:r>
           </a:p>
           <a:p>
             <a:r>
-              <a:rPr lang="en-US" sz="1200"/>
               <a:t>1. Confession-and-restoration night — second-highest-risk after Weeks 3–4. Section 6 re-read beforehand; backup on call 6:30–11:00; tissues in every space.</a:t>
             </a:r>
           </a:p>
           <a:p>
             <a:r>
-              <a:rPr lang="en-US" sz="1200"/>
-              <a:t>2. Shape: open, check-in, 13-minute teaching, YOUR demo, bridge, 33-minute pair practice (Companion, then parents, then teens), merge and shared blessing, Examen plus the three questions carried home, feedback, close. Quarter 1 ends today.</a:t>
-            </a:r>
-          </a:p>
-          <a:p>
-            <a:r>
-              <a:rPr lang="en-US" sz="1200"/>
+              <a:t>2. Shape: open, check-in, twelve minutes of teaching (the architecture, then the place, the pattern, the pull), YOUR demo, bridge, 33-minute practice in small groups — by gender by default, pairs or one circle by your judgement (Companion, then parents, then teens), merge and shared blessing, Examen plus the three questions carried home, feedback, close. Quarter 1 ends today.</a:t>
+            </a:r>
+          </a:p>
+          <a:p>
+            <a:r>
               <a:t>3. Every parent was pre-briefed this week: own struggles, yes; the marriage's raw material, no; anything about the teen, never without asking the teen privately first.</a:t>
             </a:r>
           </a:p>
           <a:p>
             <a:r>
-              <a:rPr lang="en-US" sz="1200"/>
               <a:t>GUARD: Frame it three times before the split: not specific sins — the place, the pattern, the pull.</a:t>
             </a:r>
           </a:p>
@@ -1267,44 +1353,32 @@
           <a:lstStyle/>
           <a:p>
             <a:r>
-              <a:rPr lang="en-US" sz="1200"/>
-              <a:t>S6 · 7:25–7:33 · LEAD: CONTENT PRESENTER</a:t>
-            </a:r>
-          </a:p>
-          <a:p>
-            <a:r>
-              <a:rPr lang="en-US" sz="1200"/>
+              <a:t>S6 · 7:25–7:31 · LEAD: CONTENT PRESENTER</a:t>
+            </a:r>
+          </a:p>
+          <a:p>
+            <a:r>
               <a:t>BEATS:</a:t>
             </a:r>
           </a:p>
           <a:p>
             <a:r>
-              <a:rPr lang="en-US" sz="1200"/>
               <a:t>1. Read James 5:16 and 1 John 1:9 aloud, slowly, from the physical Bible.</a:t>
             </a:r>
           </a:p>
           <a:p>
             <a:r>
-              <a:rPr lang="en-US" sz="1200"/>
               <a:t>2. Two angles: 1 John is vertical, with full assurance — the cross secured it (1 John 1:7); James is horizontal, in community, for healing. Most Christians never enter James 5:16; today we do, carefully and at age.</a:t>
             </a:r>
           </a:p>
           <a:p>
             <a:r>
-              <a:rPr lang="en-US" sz="1200"/>
-              <a:t>3. Give the examples of a 'place': the fear-over-trust pattern, the way I treat my brother, the performed faith, the resentment I keep feeding.</a:t>
-            </a:r>
-          </a:p>
-          <a:p>
-            <a:r>
-              <a:rPr lang="en-US" sz="1200"/>
-              <a:t>4. Say the parents-first rationale plainly: the older generation owes the younger the demonstration — a teen should never be asked to be braver than their parents were three minutes earlier.</a:t>
-            </a:r>
-          </a:p>
-          <a:p>
-            <a:r>
-              <a:rPr lang="en-US" sz="1200"/>
-              <a:t>GUARD: Not Catholic-sacramental confession — a Protestant small group doing what James 5:16 says. 'The place, not the details' — this is one of the three required framings; keep count.</a:t>
+              <a:t>3. Say the parents-first rationale plainly: the older generation owes the younger the demonstration — a teen should never be asked to be braver than their parents were three minutes earlier.</a:t>
+            </a:r>
+          </a:p>
+          <a:p>
+            <a:r>
+              <a:t>GUARD: Not Catholic-sacramental confession — a Protestant small group doing what James 5:16 says. 'The place, not the details' — this is one of the three required framings; keep count. The next slide unpacks it.</a:t>
             </a:r>
           </a:p>
         </p:txBody>
@@ -1350,7 +1424,7 @@
           <a:lstStyle/>
           <a:p>
             <a:r>
-              <a:t>S6 · 7:33–7:39 · LEAD: CONTENT PRESENTER</a:t>
+              <a:t>S6 · 7:37–7:42 · LEAD: CONTENT PRESENTER</a:t>
             </a:r>
           </a:p>
           <a:p>
@@ -1426,7 +1500,7 @@
           <a:lstStyle/>
           <a:p>
             <a:r>
-              <a:t>S6 · 7:39–7:40 · LEAD: CONTENT PRESENTER · TRANSITION</a:t>
+              <a:t>S6 · 7:42–7:43 · LEAD: CONTENT PRESENTER · TRANSITION</a:t>
             </a:r>
           </a:p>
           <a:p>
@@ -1436,7 +1510,7 @@
           </a:p>
           <a:p>
             <a:r>
-              <a:t>1. Three things: the prompts are scaffolding — use or ignore; the blessing card has the form — specific, short, witnessed; the container holds — nothing leaves the pair, especially this week.</a:t>
+              <a:t>1. Three things: the prompts are scaffolding — use or ignore; the blessing card has the form — specific, short, witnessed; the container holds — nothing leaves the group, especially this week.</a:t>
             </a:r>
           </a:p>
           <a:p>
@@ -1446,12 +1520,12 @@
           </a:p>
           <a:p>
             <a:r>
-              <a:t>3. Pray and send. Ten or fewer: 'We're staying right here — one circle, same order, same rules.'</a:t>
-            </a:r>
-          </a:p>
-          <a:p>
-            <a:r>
-              <a:t>SMALL ROOM: the split is only necessary if the room is large enough to need it. With six or so, stay one circle — or quick pair work in place, knee to knee. Pair work is also the standing time-recovery lever: a full split-and-merge costs about five minutes.</a:t>
+              <a:t>3. Name the groups and where each meets; pray and send.</a:t>
+            </a:r>
+          </a:p>
+          <a:p>
+            <a:r>
+              <a:t>THE GROUPS: small groups by gender are the default — men and boys together, women and girls together. It was the teen leads' call on 7 October, and it worked better than pairs: each person has more than one witness, and the parents-first order holds inside each group. Pairs, or one circle, are the leaders' judgement for the room that night — its size and makeup, how new people are, who is a guest. Every group has an adult and a named holder who keeps the time and the order; the two-adult rule holds for any teen. A guest joins a group like anyone else and may pass.</a:t>
             </a:r>
           </a:p>
         </p:txBody>
@@ -1497,43 +1571,36 @@
           <a:lstStyle/>
           <a:p>
             <a:r>
-              <a:rPr lang="en-US" sz="1200"/>
-              <a:t>S6 · 7:40–8:16 · LEAD: CONTENT PRESENTER · PAIRS</a:t>
-            </a:r>
-          </a:p>
-          <a:p>
-            <a:r>
-              <a:rPr lang="en-US" sz="1200"/>
+              <a:t>S6 · 7:43–8:16 · LEAD: CONTENT PRESENTER · SMALL GROUPS</a:t>
+            </a:r>
+          </a:p>
+          <a:p>
+            <a:r>
               <a:t>BEATS:</a:t>
             </a:r>
           </a:p>
           <a:p>
             <a:r>
-              <a:rPr lang="en-US" sz="1200"/>
               <a:t>1. Ninety seconds of silence to settle — the silence is part of the practice.</a:t>
             </a:r>
           </a:p>
           <a:p>
             <a:r>
-              <a:rPr lang="en-US" sz="1200"/>
-              <a:t>2. The parent goes first in every pair (3 min), own struggles only, within the rails; then the teens at their own depth — pass honored without a flicker. A teen blessing their own parent is one of the best things this night produces.</a:t>
-            </a:r>
-          </a:p>
-          <a:p>
-            <a:r>
-              <a:rPr lang="en-US" sz="1200"/>
-              <a:t>3. Pace: three minutes per person; a three-family pair runs 2.5 from the start, not discovered at 8:00. Never skip anyone — compress before you cut.</a:t>
-            </a:r>
-          </a:p>
-          <a:p>
-            <a:r>
-              <a:rPr lang="en-US" sz="1200"/>
+              <a:t>2. The parents go first in every group (3 min each), own struggles only, within the rails; then the teens at their own depth — pass honored without a flicker. A teen blessing their own parent is one of the best things this night produces.</a:t>
+            </a:r>
+          </a:p>
+          <a:p>
+            <a:r>
+              <a:t>3. Pace: three minutes per person, with a short blessing after each; a group of five runs about twenty-five minutes, so a group of six or more runs 2.5 from the start, not discovered at 8:00. Never skip anyone — compress before you cut.</a:t>
+            </a:r>
+          </a:p>
+          <a:p>
+            <a:r>
               <a:t>4. Close with one to two minutes of held silence.</a:t>
             </a:r>
           </a:p>
           <a:p>
             <a:r>
-              <a:rPr lang="en-US" sz="1200"/>
               <a:t>GUARD: Detailed sin disclosure gets the gentle redirect — 'the practice is the place, not the details.' A parent drifting past the rails: 'The rest belongs to the 1:1.' Watch the teens' faces during the parents' turns, not the confessing parent — weight received is a Settle Protocol matter; check in before anyone leaves the building.</a:t>
             </a:r>
           </a:p>
@@ -1580,32 +1647,27 @@
           <a:lstStyle/>
           <a:p>
             <a:r>
-              <a:rPr lang="en-US" sz="1200"/>
               <a:t>S6 · 8:16–8:20 · LEAD: CONTAINER HOLDER</a:t>
             </a:r>
           </a:p>
           <a:p>
             <a:r>
-              <a:rPr lang="en-US" sz="1200"/>
               <a:t>BEATS:</a:t>
             </a:r>
           </a:p>
           <a:p>
             <a:r>
-              <a:rPr lang="en-US" sz="1200"/>
               <a:t>1. Settle the room. One word each on what today was like IN YOUR BODY — 'heavy', 'lighter', 'held', 'tender'; the arranged parent starts.</a:t>
             </a:r>
           </a:p>
           <a:p>
             <a:r>
-              <a:rPr lang="en-US" sz="1200"/>
               <a:t>2. Speak the one corporate blessing of restoration over the whole room (script in the plan): real places named, restoration prayed into each, courage carried to evenings morning when the place will still be the place.</a:t>
             </a:r>
           </a:p>
           <a:p>
             <a:r>
-              <a:rPr lang="en-US" sz="1200"/>
-              <a:t>GUARD: Nothing from any pair is asked for or repeated.</a:t>
+              <a:t>GUARD: Nothing from any group is asked for or repeated.</a:t>
             </a:r>
           </a:p>
         </p:txBody>
@@ -1727,7 +1789,7 @@
           </a:p>
           <a:p>
             <a:r>
-              <a:t>1. After the Examen: 'three questions ride home tonight — no paper, no deadline, nothing to prepare. Just something to think on.'</a:t>
+              <a:t>1. After the Examen: 'three questions ride home tonight — they are printed on your Road So Far sheet; no deadline, nothing to prepare. Just something to think on.'</a:t>
             </a:r>
           </a:p>
           <a:p>
@@ -1848,37 +1910,31 @@
           <a:lstStyle/>
           <a:p>
             <a:r>
-              <a:rPr lang="en-US" sz="1200"/>
               <a:t>S6 · 8:28–8:30 · LEAD: CONTAINER HOLDER</a:t>
             </a:r>
           </a:p>
           <a:p>
             <a:r>
-              <a:rPr lang="en-US" sz="1200"/>
               <a:t>BEATS:</a:t>
             </a:r>
           </a:p>
           <a:p>
             <a:r>
-              <a:rPr lang="en-US" sz="1200"/>
-              <a:t>1. 'Today's container is heavier than usual. We hold it tighter than usual.' Nothing leaves the pair.</a:t>
-            </a:r>
-          </a:p>
-          <a:p>
-            <a:r>
-              <a:rPr lang="en-US" sz="1200"/>
+              <a:t>1. 'Today's container is heavier than usual. We hold it tighter than usual.' Nothing leaves the group.</a:t>
+            </a:r>
+          </a:p>
+          <a:p>
+            <a:r>
               <a:t>2. Name the follow-up door: email, text, knock — the team is here.</a:t>
             </a:r>
           </a:p>
           <a:p>
             <a:r>
-              <a:rPr lang="en-US" sz="1200"/>
               <a:t>3. Aaronic blessing. 'Go gently. Today closes the quarter — carry the Examen through the two weeks, and bring the three questions with you; next evening, we talk.'</a:t>
             </a:r>
           </a:p>
           <a:p>
             <a:r>
-              <a:rPr lang="en-US" sz="1200"/>
               <a:t>CUES: Do not pack up — stay accessible at least ten minutes; this night produces door conversations more than any other.</a:t>
             </a:r>
           </a:p>
@@ -5222,7 +5278,229 @@
                 </a:solidFill>
                 <a:latin typeface="Cambria"/>
               </a:rPr>
-              <a:t>Confession and Restoration in pairs</a:t>
+              <a:t>Bridge to the Groups</a:t>
+            </a:r>
+          </a:p>
+        </p:txBody>
+      </p:sp>
+      <p:sp>
+        <p:nvSpPr>
+          <p:cNvPr id="4" name="TextBox 4"/>
+          <p:cNvSpPr txBox="1"/>
+          <p:nvPr/>
+        </p:nvSpPr>
+        <p:spPr>
+          <a:xfrm>
+            <a:off x="822960" y="1554480"/>
+            <a:ext cx="10515600" cy="4892040"/>
+          </a:xfrm>
+          <a:prstGeom prst="rect">
+            <a:avLst/>
+          </a:prstGeom>
+          <a:noFill/>
+        </p:spPr>
+        <p:txBody>
+          <a:bodyPr wrap="square" lIns="91440" tIns="91440" rIns="91440" bIns="91440"/>
+          <a:lstStyle/>
+          <a:p>
+            <a:pPr marL="342900" indent="-342900">
+              <a:spcAft>
+                <a:spcPts val="900"/>
+              </a:spcAft>
+            </a:pPr>
+            <a:r>
+              <a:rPr sz="2800" b="1" i="0">
+                <a:solidFill>
+                  <a:srgbClr val="97BC62"/>
+                </a:solidFill>
+                <a:latin typeface="Calibri"/>
+              </a:rPr>
+              <a:t>1   </a:t>
+            </a:r>
+            <a:r>
+              <a:rPr sz="2800" b="0" i="0">
+                <a:solidFill>
+                  <a:srgbClr val="222B22"/>
+                </a:solidFill>
+                <a:latin typeface="Calibri"/>
+              </a:rPr>
+              <a:t>“Take what helps from the prompts. You don’t have to use any of them.”</a:t>
+            </a:r>
+          </a:p>
+          <a:p>
+            <a:pPr marL="342900" indent="-342900">
+              <a:spcAft>
+                <a:spcPts val="900"/>
+              </a:spcAft>
+            </a:pPr>
+            <a:r>
+              <a:rPr sz="2800" b="1" i="0">
+                <a:solidFill>
+                  <a:srgbClr val="97BC62"/>
+                </a:solidFill>
+                <a:latin typeface="Calibri"/>
+              </a:rPr>
+              <a:t>2   </a:t>
+            </a:r>
+            <a:r>
+              <a:rPr sz="2800" b="0" i="0">
+                <a:solidFill>
+                  <a:srgbClr val="222B22"/>
+                </a:solidFill>
+                <a:latin typeface="Calibri"/>
+              </a:rPr>
+              <a:t>The blessing card — specific, short, witnessed: “In the name of Jesus, we pray restoration over...”</a:t>
+            </a:r>
+          </a:p>
+          <a:p>
+            <a:pPr marL="342900" indent="-342900">
+              <a:spcAft>
+                <a:spcPts val="900"/>
+              </a:spcAft>
+            </a:pPr>
+            <a:r>
+              <a:rPr sz="2800" b="1" i="0">
+                <a:solidFill>
+                  <a:srgbClr val="97BC62"/>
+                </a:solidFill>
+                <a:latin typeface="Calibri"/>
+              </a:rPr>
+              <a:t>3   </a:t>
+            </a:r>
+            <a:r>
+              <a:rPr sz="2800" b="0" i="0">
+                <a:solidFill>
+                  <a:srgbClr val="222B22"/>
+                </a:solidFill>
+                <a:latin typeface="Calibri"/>
+              </a:rPr>
+              <a:t>“The container holds. Nothing leaves the group. Not even back to the main room. Especially this week.”</a:t>
+            </a:r>
+          </a:p>
+        </p:txBody>
+      </p:sp>
+      <p:sp>
+        <p:nvSpPr>
+          <p:cNvPr id="90" name="SlideNum"/>
+          <p:cNvSpPr txBox="1"/>
+          <p:nvPr/>
+        </p:nvSpPr>
+        <p:spPr>
+          <a:xfrm>
+            <a:off x="11384280" y="6446520"/>
+            <a:ext cx="640080" cy="292608"/>
+          </a:xfrm>
+          <a:prstGeom prst="rect">
+            <a:avLst/>
+          </a:prstGeom>
+          <a:noFill/>
+        </p:spPr>
+        <p:txBody>
+          <a:bodyPr wrap="none" lIns="0" tIns="0" rIns="45720" bIns="0" anchor="ctr"/>
+          <a:lstStyle/>
+          <a:p>
+            <a:pPr algn="r"/>
+            <a:r>
+              <a:t>89</a:t>
+            </a:r>
+            <a:endParaRPr sz="1000" b="1">
+              <a:solidFill>
+                <a:srgbClr val="7A8A6E"/>
+              </a:solidFill>
+              <a:latin typeface="Calibri"/>
+            </a:endParaRPr>
+          </a:p>
+        </p:txBody>
+      </p:sp>
+    </p:spTree>
+  </p:cSld>
+  <p:clrMapOvr>
+    <a:masterClrMapping/>
+  </p:clrMapOvr>
+</p:sld>
+</file>
+
+<file path=ppt/slides/slide11.xml><?xml version="1.0" encoding="utf-8"?>
+<p:sld xmlns:a="http://schemas.openxmlformats.org/drawingml/2006/main" xmlns:r="http://schemas.openxmlformats.org/officeDocument/2006/relationships" xmlns:p="http://schemas.openxmlformats.org/presentationml/2006/main">
+  <p:cSld>
+    <p:spTree>
+      <p:nvGrpSpPr>
+        <p:cNvPr id="1" name=""/>
+        <p:cNvGrpSpPr/>
+        <p:nvPr/>
+      </p:nvGrpSpPr>
+      <p:grpSpPr>
+        <a:xfrm>
+          <a:off x="0" y="0"/>
+          <a:ext cx="0" cy="0"/>
+          <a:chOff x="0" y="0"/>
+          <a:chExt cx="0" cy="0"/>
+        </a:xfrm>
+      </p:grpSpPr>
+      <p:sp>
+        <p:nvSpPr>
+          <p:cNvPr id="2" name="Rectangle 1"/>
+          <p:cNvSpPr/>
+          <p:nvPr/>
+        </p:nvSpPr>
+        <p:spPr>
+          <a:xfrm>
+            <a:off x="0" y="0"/>
+            <a:ext cx="12191695" cy="6858000"/>
+          </a:xfrm>
+          <a:prstGeom prst="rect">
+            <a:avLst/>
+          </a:prstGeom>
+          <a:solidFill>
+            <a:srgbClr val="FFFFFF"/>
+          </a:solidFill>
+          <a:ln>
+            <a:noFill/>
+          </a:ln>
+        </p:spPr>
+        <p:txBody>
+          <a:bodyPr/>
+          <a:lstStyle/>
+          <a:p>
+            <a:endParaRPr/>
+          </a:p>
+        </p:txBody>
+      </p:sp>
+      <p:sp>
+        <p:nvSpPr>
+          <p:cNvPr id="3" name="TextBox 2"/>
+          <p:cNvSpPr txBox="1"/>
+          <p:nvPr/>
+        </p:nvSpPr>
+        <p:spPr>
+          <a:xfrm>
+            <a:off x="822960" y="502920"/>
+            <a:ext cx="10515600" cy="822960"/>
+          </a:xfrm>
+          <a:prstGeom prst="rect">
+            <a:avLst/>
+          </a:prstGeom>
+          <a:noFill/>
+        </p:spPr>
+        <p:txBody>
+          <a:bodyPr wrap="square">
+            <a:spAutoFit/>
+          </a:bodyPr>
+          <a:lstStyle/>
+          <a:p>
+            <a:pPr algn="l">
+              <a:spcAft>
+                <a:spcPts val="600"/>
+              </a:spcAft>
+            </a:pPr>
+            <a:r>
+              <a:rPr sz="2800" b="1" i="0">
+                <a:solidFill>
+                  <a:srgbClr val="2C5F2D"/>
+                </a:solidFill>
+                <a:latin typeface="Cambria"/>
+              </a:rPr>
+              <a:t>Confession and Restoration in small groups</a:t>
             </a:r>
           </a:p>
         </p:txBody>
@@ -5293,7 +5571,7 @@
                 </a:solidFill>
                 <a:latin typeface="Calibri"/>
               </a:rPr>
-              <a:t>The parents go first in every pair — own struggles only, within the rails</a:t>
+              <a:t>The parents go first in every group — own struggles only, within the rails</a:t>
             </a:r>
           </a:p>
           <a:p>
@@ -5343,7 +5621,7 @@
                 </a:solidFill>
                 <a:latin typeface="Calibri"/>
               </a:rPr>
-              <a:t>The form: “The place where I want to walk in greater honesty before God is ______.”</a:t>
+              <a:t>The form: “The place where I want to walk in greater honesty before God is ______.” Add the pattern or the pull if you want to</a:t>
             </a:r>
           </a:p>
           <a:p>
@@ -5420,7 +5698,7 @@
           <a:p>
             <a:pPr algn="r"/>
             <a:r>
-              <a:t>89</a:t>
+              <a:t>90</a:t>
             </a:r>
             <a:endParaRPr sz="1000" b="1">
               <a:solidFill>
@@ -5475,253 +5753,6 @@
 </p:sld>
 </file>
 
-<file path=ppt/slides/slide11.xml><?xml version="1.0" encoding="utf-8"?>
-<p:sld xmlns:a="http://schemas.openxmlformats.org/drawingml/2006/main" xmlns:r="http://schemas.openxmlformats.org/officeDocument/2006/relationships" xmlns:p="http://schemas.openxmlformats.org/presentationml/2006/main">
-  <p:cSld>
-    <p:spTree>
-      <p:nvGrpSpPr>
-        <p:cNvPr id="1" name=""/>
-        <p:cNvGrpSpPr/>
-        <p:nvPr/>
-      </p:nvGrpSpPr>
-      <p:grpSpPr>
-        <a:xfrm>
-          <a:off x="0" y="0"/>
-          <a:ext cx="0" cy="0"/>
-          <a:chOff x="0" y="0"/>
-          <a:chExt cx="0" cy="0"/>
-        </a:xfrm>
-      </p:grpSpPr>
-      <p:sp>
-        <p:nvSpPr>
-          <p:cNvPr id="2" name="Rectangle 1"/>
-          <p:cNvSpPr/>
-          <p:nvPr/>
-        </p:nvSpPr>
-        <p:spPr>
-          <a:xfrm>
-            <a:off x="0" y="0"/>
-            <a:ext cx="12191695" cy="6858000"/>
-          </a:xfrm>
-          <a:prstGeom prst="rect">
-            <a:avLst/>
-          </a:prstGeom>
-          <a:solidFill>
-            <a:srgbClr val="FFFFFF"/>
-          </a:solidFill>
-          <a:ln>
-            <a:noFill/>
-          </a:ln>
-        </p:spPr>
-        <p:txBody>
-          <a:bodyPr/>
-          <a:lstStyle/>
-          <a:p>
-            <a:endParaRPr/>
-          </a:p>
-        </p:txBody>
-      </p:sp>
-      <p:sp>
-        <p:nvSpPr>
-          <p:cNvPr id="3" name="TextBox 2"/>
-          <p:cNvSpPr txBox="1"/>
-          <p:nvPr/>
-        </p:nvSpPr>
-        <p:spPr>
-          <a:xfrm>
-            <a:off x="822960" y="502920"/>
-            <a:ext cx="10515600" cy="822960"/>
-          </a:xfrm>
-          <a:prstGeom prst="rect">
-            <a:avLst/>
-          </a:prstGeom>
-          <a:noFill/>
-        </p:spPr>
-        <p:txBody>
-          <a:bodyPr wrap="square">
-            <a:spAutoFit/>
-          </a:bodyPr>
-          <a:lstStyle/>
-          <a:p>
-            <a:pPr algn="l">
-              <a:spcAft>
-                <a:spcPts val="600"/>
-              </a:spcAft>
-            </a:pPr>
-            <a:r>
-              <a:rPr sz="2800" b="1" i="0">
-                <a:solidFill>
-                  <a:srgbClr val="2C5F2D"/>
-                </a:solidFill>
-                <a:latin typeface="Cambria"/>
-              </a:rPr>
-              <a:t>Merge and Shared Blessing</a:t>
-            </a:r>
-          </a:p>
-        </p:txBody>
-      </p:sp>
-      <p:sp>
-        <p:nvSpPr>
-          <p:cNvPr id="4" name="TextBox 4"/>
-          <p:cNvSpPr txBox="1"/>
-          <p:nvPr/>
-        </p:nvSpPr>
-        <p:spPr>
-          <a:xfrm>
-            <a:off x="822960" y="1554480"/>
-            <a:ext cx="10515600" cy="4892040"/>
-          </a:xfrm>
-          <a:prstGeom prst="rect">
-            <a:avLst/>
-          </a:prstGeom>
-          <a:noFill/>
-        </p:spPr>
-        <p:txBody>
-          <a:bodyPr wrap="square" lIns="91440" tIns="91440" rIns="91440" bIns="91440"/>
-          <a:lstStyle/>
-          <a:p>
-            <a:pPr marL="274320" indent="-274320">
-              <a:spcAft>
-                <a:spcPts val="900"/>
-              </a:spcAft>
-            </a:pPr>
-            <a:r>
-              <a:rPr sz="2800" b="1" i="0">
-                <a:solidFill>
-                  <a:srgbClr val="97BC62"/>
-                </a:solidFill>
-                <a:latin typeface="Calibri"/>
-              </a:rPr>
-              <a:t>•  </a:t>
-            </a:r>
-            <a:r>
-              <a:rPr sz="2800" b="0" i="0">
-                <a:solidFill>
-                  <a:srgbClr val="222B22"/>
-                </a:solidFill>
-                <a:latin typeface="Calibri"/>
-              </a:rPr>
-              <a:t>What happened in your pair stays in your pair</a:t>
-            </a:r>
-          </a:p>
-          <a:p>
-            <a:pPr marL="274320" indent="-274320">
-              <a:spcAft>
-                <a:spcPts val="900"/>
-              </a:spcAft>
-            </a:pPr>
-            <a:r>
-              <a:rPr sz="2800" b="1" i="0">
-                <a:solidFill>
-                  <a:srgbClr val="97BC62"/>
-                </a:solidFill>
-                <a:latin typeface="Calibri"/>
-              </a:rPr>
-              <a:t>•  </a:t>
-            </a:r>
-            <a:r>
-              <a:rPr sz="2800" b="0" i="0">
-                <a:solidFill>
-                  <a:srgbClr val="222B22"/>
-                </a:solidFill>
-                <a:latin typeface="Calibri"/>
-              </a:rPr>
-              <a:t>“One word about what tonight was like in your body. ‘Heavy.’ ‘Lighter.’ ‘Held.’ ‘Tender.’ ‘Surprised.’” — an arranged parent starts</a:t>
-            </a:r>
-          </a:p>
-          <a:p>
-            <a:pPr marL="274320" indent="-274320">
-              <a:spcAft>
-                <a:spcPts val="900"/>
-              </a:spcAft>
-            </a:pPr>
-            <a:r>
-              <a:rPr sz="2800" b="1" i="0">
-                <a:solidFill>
-                  <a:srgbClr val="97BC62"/>
-                </a:solidFill>
-                <a:latin typeface="Calibri"/>
-              </a:rPr>
-              <a:t>•  </a:t>
-            </a:r>
-            <a:r>
-              <a:rPr sz="2800" b="0" i="0">
-                <a:solidFill>
-                  <a:srgbClr val="222B22"/>
-                </a:solidFill>
-                <a:latin typeface="Calibri"/>
-              </a:rPr>
-              <a:t>Then one shared blessing of restoration over the whole room — “Hands up if you want”</a:t>
-            </a:r>
-          </a:p>
-          <a:p>
-            <a:pPr marL="274320" indent="-274320">
-              <a:spcAft>
-                <a:spcPts val="900"/>
-              </a:spcAft>
-            </a:pPr>
-            <a:r>
-              <a:rPr sz="2800" b="1" i="0">
-                <a:solidFill>
-                  <a:srgbClr val="97BC62"/>
-                </a:solidFill>
-                <a:latin typeface="Calibri"/>
-              </a:rPr>
-              <a:t>•  </a:t>
-            </a:r>
-            <a:r>
-              <a:rPr sz="2800" b="0" i="0">
-                <a:solidFill>
-                  <a:srgbClr val="222B22"/>
-                </a:solidFill>
-                <a:latin typeface="Calibri"/>
-              </a:rPr>
-              <a:t>“We pray restoration into every place that was named... Holy Spirit, walk my brothers and sisters home.”</a:t>
-            </a:r>
-          </a:p>
-        </p:txBody>
-      </p:sp>
-      <p:sp>
-        <p:nvSpPr>
-          <p:cNvPr id="90" name="SlideNum"/>
-          <p:cNvSpPr txBox="1"/>
-          <p:nvPr/>
-        </p:nvSpPr>
-        <p:spPr>
-          <a:xfrm>
-            <a:off x="11384280" y="6446520"/>
-            <a:ext cx="640080" cy="292608"/>
-          </a:xfrm>
-          <a:prstGeom prst="rect">
-            <a:avLst/>
-          </a:prstGeom>
-          <a:noFill/>
-        </p:spPr>
-        <p:txBody>
-          <a:bodyPr wrap="none" lIns="0" tIns="0" rIns="45720" bIns="0" anchor="ctr"/>
-          <a:lstStyle/>
-          <a:p>
-            <a:pPr algn="r"/>
-            <a:r>
-              <a:t>90</a:t>
-            </a:r>
-            <a:endParaRPr sz="1000" b="1">
-              <a:solidFill>
-                <a:srgbClr val="7A8A6E"/>
-              </a:solidFill>
-              <a:latin typeface="Calibri"/>
-            </a:endParaRPr>
-          </a:p>
-        </p:txBody>
-      </p:sp>
-    </p:spTree>
-  </p:cSld>
-  <p:clrMapOvr>
-    <a:masterClrMapping/>
-  </p:clrMapOvr>
-</p:sld>
-</file>
-
 <file path=ppt/slides/slide12.xml><?xml version="1.0" encoding="utf-8"?>
 <p:sld xmlns:a="http://schemas.openxmlformats.org/drawingml/2006/main" xmlns:r="http://schemas.openxmlformats.org/officeDocument/2006/relationships" xmlns:p="http://schemas.openxmlformats.org/presentationml/2006/main">
   <p:cSld>
@@ -5802,7 +5833,254 @@
                 </a:solidFill>
                 <a:latin typeface="Cambria"/>
               </a:rPr>
-              <a:t>Homework — Two Weeks, Four Parts — the Five-Minute Examen</a:t>
+              <a:t>Merge and Shared Blessing</a:t>
+            </a:r>
+          </a:p>
+        </p:txBody>
+      </p:sp>
+      <p:sp>
+        <p:nvSpPr>
+          <p:cNvPr id="4" name="TextBox 4"/>
+          <p:cNvSpPr txBox="1"/>
+          <p:nvPr/>
+        </p:nvSpPr>
+        <p:spPr>
+          <a:xfrm>
+            <a:off x="822960" y="1554480"/>
+            <a:ext cx="10515600" cy="4892040"/>
+          </a:xfrm>
+          <a:prstGeom prst="rect">
+            <a:avLst/>
+          </a:prstGeom>
+          <a:noFill/>
+        </p:spPr>
+        <p:txBody>
+          <a:bodyPr wrap="square" lIns="91440" tIns="91440" rIns="91440" bIns="91440"/>
+          <a:lstStyle/>
+          <a:p>
+            <a:pPr marL="274320" indent="-274320">
+              <a:spcAft>
+                <a:spcPts val="900"/>
+              </a:spcAft>
+            </a:pPr>
+            <a:r>
+              <a:rPr sz="2800" b="1" i="0">
+                <a:solidFill>
+                  <a:srgbClr val="97BC62"/>
+                </a:solidFill>
+                <a:latin typeface="Calibri"/>
+              </a:rPr>
+              <a:t>•  </a:t>
+            </a:r>
+            <a:r>
+              <a:rPr sz="2800" b="0" i="0">
+                <a:solidFill>
+                  <a:srgbClr val="222B22"/>
+                </a:solidFill>
+                <a:latin typeface="Calibri"/>
+              </a:rPr>
+              <a:t>What happened in your group stays in your group</a:t>
+            </a:r>
+          </a:p>
+          <a:p>
+            <a:pPr marL="274320" indent="-274320">
+              <a:spcAft>
+                <a:spcPts val="900"/>
+              </a:spcAft>
+            </a:pPr>
+            <a:r>
+              <a:rPr sz="2800" b="1" i="0">
+                <a:solidFill>
+                  <a:srgbClr val="97BC62"/>
+                </a:solidFill>
+                <a:latin typeface="Calibri"/>
+              </a:rPr>
+              <a:t>•  </a:t>
+            </a:r>
+            <a:r>
+              <a:rPr sz="2800" b="0" i="0">
+                <a:solidFill>
+                  <a:srgbClr val="222B22"/>
+                </a:solidFill>
+                <a:latin typeface="Calibri"/>
+              </a:rPr>
+              <a:t>“One word about what tonight was like in your body. ‘Heavy.’ ‘Lighter.’ ‘Held.’ ‘Tender.’ ‘Surprised.’” — an arranged parent starts</a:t>
+            </a:r>
+          </a:p>
+          <a:p>
+            <a:pPr marL="274320" indent="-274320">
+              <a:spcAft>
+                <a:spcPts val="900"/>
+              </a:spcAft>
+            </a:pPr>
+            <a:r>
+              <a:rPr sz="2800" b="1" i="0">
+                <a:solidFill>
+                  <a:srgbClr val="97BC62"/>
+                </a:solidFill>
+                <a:latin typeface="Calibri"/>
+              </a:rPr>
+              <a:t>•  </a:t>
+            </a:r>
+            <a:r>
+              <a:rPr sz="2800" b="0" i="0">
+                <a:solidFill>
+                  <a:srgbClr val="222B22"/>
+                </a:solidFill>
+                <a:latin typeface="Calibri"/>
+              </a:rPr>
+              <a:t>Then one shared blessing of restoration over the whole room — “Hands up if you want”</a:t>
+            </a:r>
+          </a:p>
+          <a:p>
+            <a:pPr marL="274320" indent="-274320">
+              <a:spcAft>
+                <a:spcPts val="900"/>
+              </a:spcAft>
+            </a:pPr>
+            <a:r>
+              <a:rPr sz="2800" b="1" i="0">
+                <a:solidFill>
+                  <a:srgbClr val="97BC62"/>
+                </a:solidFill>
+                <a:latin typeface="Calibri"/>
+              </a:rPr>
+              <a:t>•  </a:t>
+            </a:r>
+            <a:r>
+              <a:rPr sz="2800" b="0" i="0">
+                <a:solidFill>
+                  <a:srgbClr val="222B22"/>
+                </a:solidFill>
+                <a:latin typeface="Calibri"/>
+              </a:rPr>
+              <a:t>“We pray restoration into every place that was named... Holy Spirit, walk my brothers and sisters home.”</a:t>
+            </a:r>
+          </a:p>
+        </p:txBody>
+      </p:sp>
+      <p:sp>
+        <p:nvSpPr>
+          <p:cNvPr id="90" name="SlideNum"/>
+          <p:cNvSpPr txBox="1"/>
+          <p:nvPr/>
+        </p:nvSpPr>
+        <p:spPr>
+          <a:xfrm>
+            <a:off x="11384280" y="6446520"/>
+            <a:ext cx="640080" cy="292608"/>
+          </a:xfrm>
+          <a:prstGeom prst="rect">
+            <a:avLst/>
+          </a:prstGeom>
+          <a:noFill/>
+        </p:spPr>
+        <p:txBody>
+          <a:bodyPr wrap="none" lIns="0" tIns="0" rIns="45720" bIns="0" anchor="ctr"/>
+          <a:lstStyle/>
+          <a:p>
+            <a:pPr algn="r"/>
+            <a:r>
+              <a:t>91</a:t>
+            </a:r>
+            <a:endParaRPr sz="1000" b="1">
+              <a:solidFill>
+                <a:srgbClr val="7A8A6E"/>
+              </a:solidFill>
+              <a:latin typeface="Calibri"/>
+            </a:endParaRPr>
+          </a:p>
+        </p:txBody>
+      </p:sp>
+    </p:spTree>
+  </p:cSld>
+  <p:clrMapOvr>
+    <a:masterClrMapping/>
+  </p:clrMapOvr>
+</p:sld>
+</file>
+
+<file path=ppt/slides/slide13.xml><?xml version="1.0" encoding="utf-8"?>
+<p:sld xmlns:a="http://schemas.openxmlformats.org/drawingml/2006/main" xmlns:r="http://schemas.openxmlformats.org/officeDocument/2006/relationships" xmlns:p="http://schemas.openxmlformats.org/presentationml/2006/main">
+  <p:cSld>
+    <p:spTree>
+      <p:nvGrpSpPr>
+        <p:cNvPr id="1" name=""/>
+        <p:cNvGrpSpPr/>
+        <p:nvPr/>
+      </p:nvGrpSpPr>
+      <p:grpSpPr>
+        <a:xfrm>
+          <a:off x="0" y="0"/>
+          <a:ext cx="0" cy="0"/>
+          <a:chOff x="0" y="0"/>
+          <a:chExt cx="0" cy="0"/>
+        </a:xfrm>
+      </p:grpSpPr>
+      <p:sp>
+        <p:nvSpPr>
+          <p:cNvPr id="2" name="Rectangle 1"/>
+          <p:cNvSpPr/>
+          <p:nvPr/>
+        </p:nvSpPr>
+        <p:spPr>
+          <a:xfrm>
+            <a:off x="0" y="0"/>
+            <a:ext cx="12191695" cy="6858000"/>
+          </a:xfrm>
+          <a:prstGeom prst="rect">
+            <a:avLst/>
+          </a:prstGeom>
+          <a:solidFill>
+            <a:srgbClr val="FFFFFF"/>
+          </a:solidFill>
+          <a:ln>
+            <a:noFill/>
+          </a:ln>
+        </p:spPr>
+        <p:txBody>
+          <a:bodyPr/>
+          <a:lstStyle/>
+          <a:p>
+            <a:endParaRPr/>
+          </a:p>
+        </p:txBody>
+      </p:sp>
+      <p:sp>
+        <p:nvSpPr>
+          <p:cNvPr id="3" name="TextBox 2"/>
+          <p:cNvSpPr txBox="1"/>
+          <p:nvPr/>
+        </p:nvSpPr>
+        <p:spPr>
+          <a:xfrm>
+            <a:off x="822960" y="502920"/>
+            <a:ext cx="10515600" cy="822960"/>
+          </a:xfrm>
+          <a:prstGeom prst="rect">
+            <a:avLst/>
+          </a:prstGeom>
+          <a:noFill/>
+        </p:spPr>
+        <p:txBody>
+          <a:bodyPr wrap="square">
+            <a:spAutoFit/>
+          </a:bodyPr>
+          <a:lstStyle/>
+          <a:p>
+            <a:pPr algn="l">
+              <a:spcAft>
+                <a:spcPts val="600"/>
+              </a:spcAft>
+            </a:pPr>
+            <a:r>
+              <a:rPr sz="2800" b="1" i="0">
+                <a:solidFill>
+                  <a:srgbClr val="2C5F2D"/>
+                </a:solidFill>
+                <a:latin typeface="Cambria"/>
+              </a:rPr>
+              <a:t>Homework — the Five-Minute Examen</a:t>
             </a:r>
           </a:p>
         </p:txBody>
@@ -5950,7 +6228,7 @@
           <a:p>
             <a:pPr algn="r"/>
             <a:r>
-              <a:t>91</a:t>
+              <a:t>92</a:t>
             </a:r>
             <a:endParaRPr sz="1000" b="1">
               <a:solidFill>
@@ -6005,7 +6283,7 @@
 </p:sld>
 </file>
 
-<file path=ppt/slides/slide13.xml><?xml version="1.0" encoding="utf-8"?>
+<file path=ppt/slides/slide14.xml><?xml version="1.0" encoding="utf-8"?>
 <p:sld xmlns:a="http://schemas.openxmlformats.org/drawingml/2006/main" xmlns:p="http://schemas.openxmlformats.org/presentationml/2006/main" xmlns:r="http://schemas.openxmlformats.org/officeDocument/2006/relationships">
   <p:cSld>
     <p:spTree>
@@ -6149,7 +6427,7 @@
           <a:p>
             <a:pPr algn="r"/>
             <a:r>
-              <a:t>92</a:t>
+              <a:t>93</a:t>
             </a:r>
             <a:endParaRPr sz="1000" b="1">
               <a:solidFill>
@@ -6197,7 +6475,7 @@
 </p:sld>
 </file>
 
-<file path=ppt/slides/slide14.xml><?xml version="1.0" encoding="utf-8"?>
+<file path=ppt/slides/slide15.xml><?xml version="1.0" encoding="utf-8"?>
 <p:sld xmlns:a="http://schemas.openxmlformats.org/drawingml/2006/main" xmlns:p="http://schemas.openxmlformats.org/presentationml/2006/main" xmlns:r="http://schemas.openxmlformats.org/officeDocument/2006/relationships">
   <p:cSld>
     <p:spTree>
@@ -6341,7 +6619,7 @@
           <a:p>
             <a:pPr algn="r"/>
             <a:r>
-              <a:t>93</a:t>
+              <a:t>94</a:t>
             </a:r>
             <a:endParaRPr sz="1000" b="1">
               <a:solidFill>
@@ -6389,263 +6667,6 @@
 </p:sld>
 </file>
 
-<file path=ppt/slides/slide15.xml><?xml version="1.0" encoding="utf-8"?>
-<p:sld xmlns:a="http://schemas.openxmlformats.org/drawingml/2006/main" xmlns:r="http://schemas.openxmlformats.org/officeDocument/2006/relationships" xmlns:p="http://schemas.openxmlformats.org/presentationml/2006/main">
-  <p:cSld>
-    <p:spTree>
-      <p:nvGrpSpPr>
-        <p:cNvPr id="1" name=""/>
-        <p:cNvGrpSpPr/>
-        <p:nvPr/>
-      </p:nvGrpSpPr>
-      <p:grpSpPr>
-        <a:xfrm>
-          <a:off x="0" y="0"/>
-          <a:ext cx="0" cy="0"/>
-          <a:chOff x="0" y="0"/>
-          <a:chExt cx="0" cy="0"/>
-        </a:xfrm>
-      </p:grpSpPr>
-      <p:sp>
-        <p:nvSpPr>
-          <p:cNvPr id="2" name="Rectangle 1"/>
-          <p:cNvSpPr/>
-          <p:nvPr/>
-        </p:nvSpPr>
-        <p:spPr>
-          <a:xfrm>
-            <a:off x="0" y="0"/>
-            <a:ext cx="12191695" cy="6858000"/>
-          </a:xfrm>
-          <a:prstGeom prst="rect">
-            <a:avLst/>
-          </a:prstGeom>
-          <a:solidFill>
-            <a:srgbClr val="FFFFFF"/>
-          </a:solidFill>
-          <a:ln>
-            <a:noFill/>
-          </a:ln>
-        </p:spPr>
-        <p:txBody>
-          <a:bodyPr/>
-          <a:lstStyle/>
-          <a:p>
-            <a:endParaRPr/>
-          </a:p>
-        </p:txBody>
-      </p:sp>
-      <p:sp>
-        <p:nvSpPr>
-          <p:cNvPr id="3" name="TextBox 2"/>
-          <p:cNvSpPr txBox="1"/>
-          <p:nvPr/>
-        </p:nvSpPr>
-        <p:spPr>
-          <a:xfrm>
-            <a:off x="822960" y="502920"/>
-            <a:ext cx="10515600" cy="822960"/>
-          </a:xfrm>
-          <a:prstGeom prst="rect">
-            <a:avLst/>
-          </a:prstGeom>
-          <a:noFill/>
-        </p:spPr>
-        <p:txBody>
-          <a:bodyPr wrap="square">
-            <a:spAutoFit/>
-          </a:bodyPr>
-          <a:lstStyle/>
-          <a:p>
-            <a:pPr algn="l">
-              <a:spcAft>
-                <a:spcPts val="600"/>
-              </a:spcAft>
-            </a:pPr>
-            <a:r>
-              <a:rPr sz="2800" b="1" i="0">
-                <a:solidFill>
-                  <a:srgbClr val="2C5F2D"/>
-                </a:solidFill>
-                <a:latin typeface="Cambria"/>
-              </a:rPr>
-              <a:t>Three Questions, Carried Home</a:t>
-            </a:r>
-          </a:p>
-        </p:txBody>
-      </p:sp>
-      <p:sp>
-        <p:nvSpPr>
-          <p:cNvPr id="90" name="SlideNum"/>
-          <p:cNvSpPr txBox="1"/>
-          <p:nvPr/>
-        </p:nvSpPr>
-        <p:spPr>
-          <a:xfrm>
-            <a:off x="11384280" y="6446520"/>
-            <a:ext cx="640080" cy="292608"/>
-          </a:xfrm>
-          <a:prstGeom prst="rect">
-            <a:avLst/>
-          </a:prstGeom>
-          <a:noFill/>
-        </p:spPr>
-        <p:txBody>
-          <a:bodyPr wrap="none" lIns="0" tIns="0" rIns="45720" bIns="0" anchor="ctr"/>
-          <a:lstStyle/>
-          <a:p>
-            <a:pPr algn="r"/>
-            <a:r>
-              <a:t>94</a:t>
-            </a:r>
-            <a:endParaRPr sz="1000" b="1">
-              <a:solidFill>
-                <a:srgbClr val="7A8A6E"/>
-              </a:solidFill>
-              <a:latin typeface="Calibri"/>
-            </a:endParaRPr>
-          </a:p>
-        </p:txBody>
-      </p:sp>
-      <p:sp>
-        <p:nvSpPr>
-          <p:cNvPr id="290" name="RoomQuestion"/>
-          <p:cNvSpPr txBox="1"/>
-          <p:nvPr/>
-        </p:nvSpPr>
-        <p:spPr>
-          <a:xfrm>
-            <a:off x="822960" y="1417320"/>
-            <a:ext cx="10515600" cy="5029200"/>
-          </a:xfrm>
-          <a:prstGeom prst="rect">
-            <a:avLst/>
-          </a:prstGeom>
-          <a:noFill/>
-        </p:spPr>
-        <p:txBody>
-          <a:bodyPr wrap="square"/>
-          <a:lstStyle/>
-          <a:p>
-            <a:pPr algn="l">
-              <a:spcAft>
-                <a:spcPts val="1300"/>
-              </a:spcAft>
-            </a:pPr>
-            <a:r>
-              <a:rPr sz="1900" b="0" i="0">
-                <a:solidFill>
-                  <a:srgbClr val="222B22"/>
-                </a:solidFill>
-                <a:latin typeface="Calibri"/>
-              </a:rPr>
-              <a:t>Every week we close the same way — the leader’s reflection, then the room’s. Tonight the same questions ride home with all of us — not a survey, just something to think on:</a:t>
-            </a:r>
-          </a:p>
-          <a:p>
-            <a:pPr algn="l">
-              <a:spcAft>
-                <a:spcPts val="1100"/>
-              </a:spcAft>
-            </a:pPr>
-            <a:r>
-              <a:rPr sz="2400" b="1" i="0">
-                <a:solidFill>
-                  <a:srgbClr val="97BC62"/>
-                </a:solidFill>
-                <a:latin typeface="Calibri"/>
-              </a:rPr>
-              <a:t>1   </a:t>
-            </a:r>
-            <a:r>
-              <a:rPr sz="2400" b="0" i="0">
-                <a:solidFill>
-                  <a:srgbClr val="222B22"/>
-                </a:solidFill>
-                <a:latin typeface="Calibri"/>
-              </a:rPr>
-              <a:t>What’s working well that we ought to keep doing?</a:t>
-            </a:r>
-          </a:p>
-          <a:p>
-            <a:pPr algn="l">
-              <a:spcAft>
-                <a:spcPts val="1100"/>
-              </a:spcAft>
-            </a:pPr>
-            <a:r>
-              <a:rPr sz="2400" b="1" i="0">
-                <a:solidFill>
-                  <a:srgbClr val="97BC62"/>
-                </a:solidFill>
-                <a:latin typeface="Calibri"/>
-              </a:rPr>
-              <a:t>2   </a:t>
-            </a:r>
-            <a:r>
-              <a:rPr sz="2400" b="0" i="0">
-                <a:solidFill>
-                  <a:srgbClr val="222B22"/>
-                </a:solidFill>
-                <a:latin typeface="Calibri"/>
-              </a:rPr>
-              <a:t>What could we do differently that would make things even better?</a:t>
-            </a:r>
-          </a:p>
-          <a:p>
-            <a:pPr algn="l">
-              <a:spcAft>
-                <a:spcPts val="1100"/>
-              </a:spcAft>
-            </a:pPr>
-            <a:r>
-              <a:rPr sz="2400" b="1" i="0">
-                <a:solidFill>
-                  <a:srgbClr val="97BC62"/>
-                </a:solidFill>
-                <a:latin typeface="Calibri"/>
-              </a:rPr>
-              <a:t>3   </a:t>
-            </a:r>
-            <a:r>
-              <a:rPr sz="2400" b="0" i="0">
-                <a:solidFill>
-                  <a:srgbClr val="222B22"/>
-                </a:solidFill>
-                <a:latin typeface="Calibri"/>
-              </a:rPr>
-              <a:t>What would you tell somebody else about what this group is like?</a:t>
-            </a:r>
-          </a:p>
-          <a:p>
-            <a:pPr algn="l">
-              <a:spcBef>
-                <a:spcPts val="1300"/>
-              </a:spcBef>
-              <a:spcAft>
-                <a:spcPts val="1000"/>
-              </a:spcAft>
-            </a:pPr>
-            <a:r>
-              <a:rPr sz="1600" b="0" i="1">
-                <a:solidFill>
-                  <a:srgbClr val="222B22"/>
-                </a:solidFill>
-                <a:latin typeface="Calibri"/>
-              </a:rPr>
-              <a:t>No paper. Nothing to prepare. The group, never any one person. Next evening, we talk.</a:t>
-            </a:r>
-          </a:p>
-        </p:txBody>
-      </p:sp>
-    </p:spTree>
-  </p:cSld>
-  <p:clrMapOvr>
-    <a:masterClrMapping/>
-  </p:clrMapOvr>
-</p:sld>
-</file>
-
 <file path=ppt/slides/slide16.xml><?xml version="1.0" encoding="utf-8"?>
 <p:sld xmlns:a="http://schemas.openxmlformats.org/drawingml/2006/main" xmlns:r="http://schemas.openxmlformats.org/officeDocument/2006/relationships" xmlns:p="http://schemas.openxmlformats.org/presentationml/2006/main">
   <p:cSld>
@@ -6726,6 +6747,263 @@
                 </a:solidFill>
                 <a:latin typeface="Cambria"/>
               </a:rPr>
+              <a:t>Three Questions, Carried Home</a:t>
+            </a:r>
+          </a:p>
+        </p:txBody>
+      </p:sp>
+      <p:sp>
+        <p:nvSpPr>
+          <p:cNvPr id="90" name="SlideNum"/>
+          <p:cNvSpPr txBox="1"/>
+          <p:nvPr/>
+        </p:nvSpPr>
+        <p:spPr>
+          <a:xfrm>
+            <a:off x="11384280" y="6446520"/>
+            <a:ext cx="640080" cy="292608"/>
+          </a:xfrm>
+          <a:prstGeom prst="rect">
+            <a:avLst/>
+          </a:prstGeom>
+          <a:noFill/>
+        </p:spPr>
+        <p:txBody>
+          <a:bodyPr wrap="none" lIns="0" tIns="0" rIns="45720" bIns="0" anchor="ctr"/>
+          <a:lstStyle/>
+          <a:p>
+            <a:pPr algn="r"/>
+            <a:r>
+              <a:t>95</a:t>
+            </a:r>
+            <a:endParaRPr sz="1000" b="1">
+              <a:solidFill>
+                <a:srgbClr val="7A8A6E"/>
+              </a:solidFill>
+              <a:latin typeface="Calibri"/>
+            </a:endParaRPr>
+          </a:p>
+        </p:txBody>
+      </p:sp>
+      <p:sp>
+        <p:nvSpPr>
+          <p:cNvPr id="290" name="RoomQuestion"/>
+          <p:cNvSpPr txBox="1"/>
+          <p:nvPr/>
+        </p:nvSpPr>
+        <p:spPr>
+          <a:xfrm>
+            <a:off x="822960" y="1417320"/>
+            <a:ext cx="10515600" cy="5029200"/>
+          </a:xfrm>
+          <a:prstGeom prst="rect">
+            <a:avLst/>
+          </a:prstGeom>
+          <a:noFill/>
+        </p:spPr>
+        <p:txBody>
+          <a:bodyPr wrap="square"/>
+          <a:lstStyle/>
+          <a:p>
+            <a:pPr algn="l">
+              <a:spcAft>
+                <a:spcPts val="1300"/>
+              </a:spcAft>
+            </a:pPr>
+            <a:r>
+              <a:rPr sz="1900" b="0" i="0">
+                <a:solidFill>
+                  <a:srgbClr val="222B22"/>
+                </a:solidFill>
+                <a:latin typeface="Calibri"/>
+              </a:rPr>
+              <a:t>Every week we close the same way — the leader’s reflection, then the room’s. Tonight the same questions ride home with all of us — not a survey, just something to think on:</a:t>
+            </a:r>
+          </a:p>
+          <a:p>
+            <a:pPr algn="l">
+              <a:spcAft>
+                <a:spcPts val="1100"/>
+              </a:spcAft>
+            </a:pPr>
+            <a:r>
+              <a:rPr sz="2400" b="1" i="0">
+                <a:solidFill>
+                  <a:srgbClr val="97BC62"/>
+                </a:solidFill>
+                <a:latin typeface="Calibri"/>
+              </a:rPr>
+              <a:t>1   </a:t>
+            </a:r>
+            <a:r>
+              <a:rPr sz="2400" b="0" i="0">
+                <a:solidFill>
+                  <a:srgbClr val="222B22"/>
+                </a:solidFill>
+                <a:latin typeface="Calibri"/>
+              </a:rPr>
+              <a:t>What’s working well that we ought to keep doing?</a:t>
+            </a:r>
+          </a:p>
+          <a:p>
+            <a:pPr algn="l">
+              <a:spcAft>
+                <a:spcPts val="1100"/>
+              </a:spcAft>
+            </a:pPr>
+            <a:r>
+              <a:rPr sz="2400" b="1" i="0">
+                <a:solidFill>
+                  <a:srgbClr val="97BC62"/>
+                </a:solidFill>
+                <a:latin typeface="Calibri"/>
+              </a:rPr>
+              <a:t>2   </a:t>
+            </a:r>
+            <a:r>
+              <a:rPr sz="2400" b="0" i="0">
+                <a:solidFill>
+                  <a:srgbClr val="222B22"/>
+                </a:solidFill>
+                <a:latin typeface="Calibri"/>
+              </a:rPr>
+              <a:t>What could we do differently that would make things even better?</a:t>
+            </a:r>
+          </a:p>
+          <a:p>
+            <a:pPr algn="l">
+              <a:spcAft>
+                <a:spcPts val="1100"/>
+              </a:spcAft>
+            </a:pPr>
+            <a:r>
+              <a:rPr sz="2400" b="1" i="0">
+                <a:solidFill>
+                  <a:srgbClr val="97BC62"/>
+                </a:solidFill>
+                <a:latin typeface="Calibri"/>
+              </a:rPr>
+              <a:t>3   </a:t>
+            </a:r>
+            <a:r>
+              <a:rPr sz="2400" b="0" i="0">
+                <a:solidFill>
+                  <a:srgbClr val="222B22"/>
+                </a:solidFill>
+                <a:latin typeface="Calibri"/>
+              </a:rPr>
+              <a:t>What would you tell somebody else about what this group is like?</a:t>
+            </a:r>
+          </a:p>
+          <a:p>
+            <a:pPr algn="l">
+              <a:spcBef>
+                <a:spcPts val="1300"/>
+              </a:spcBef>
+              <a:spcAft>
+                <a:spcPts val="1000"/>
+              </a:spcAft>
+            </a:pPr>
+            <a:r>
+              <a:rPr sz="1600" b="0" i="1">
+                <a:solidFill>
+                  <a:srgbClr val="222B22"/>
+                </a:solidFill>
+                <a:latin typeface="Calibri"/>
+              </a:rPr>
+              <a:t>They are on your Road So Far sheet. Nothing to prepare. The group, never any one person. Next evening, we talk.</a:t>
+            </a:r>
+          </a:p>
+        </p:txBody>
+      </p:sp>
+    </p:spTree>
+  </p:cSld>
+  <p:clrMapOvr>
+    <a:masterClrMapping/>
+  </p:clrMapOvr>
+</p:sld>
+</file>
+
+<file path=ppt/slides/slide17.xml><?xml version="1.0" encoding="utf-8"?>
+<p:sld xmlns:a="http://schemas.openxmlformats.org/drawingml/2006/main" xmlns:r="http://schemas.openxmlformats.org/officeDocument/2006/relationships" xmlns:p="http://schemas.openxmlformats.org/presentationml/2006/main">
+  <p:cSld>
+    <p:spTree>
+      <p:nvGrpSpPr>
+        <p:cNvPr id="1" name=""/>
+        <p:cNvGrpSpPr/>
+        <p:nvPr/>
+      </p:nvGrpSpPr>
+      <p:grpSpPr>
+        <a:xfrm>
+          <a:off x="0" y="0"/>
+          <a:ext cx="0" cy="0"/>
+          <a:chOff x="0" y="0"/>
+          <a:chExt cx="0" cy="0"/>
+        </a:xfrm>
+      </p:grpSpPr>
+      <p:sp>
+        <p:nvSpPr>
+          <p:cNvPr id="2" name="Rectangle 1"/>
+          <p:cNvSpPr/>
+          <p:nvPr/>
+        </p:nvSpPr>
+        <p:spPr>
+          <a:xfrm>
+            <a:off x="0" y="0"/>
+            <a:ext cx="12191695" cy="6858000"/>
+          </a:xfrm>
+          <a:prstGeom prst="rect">
+            <a:avLst/>
+          </a:prstGeom>
+          <a:solidFill>
+            <a:srgbClr val="FFFFFF"/>
+          </a:solidFill>
+          <a:ln>
+            <a:noFill/>
+          </a:ln>
+        </p:spPr>
+        <p:txBody>
+          <a:bodyPr/>
+          <a:lstStyle/>
+          <a:p>
+            <a:endParaRPr/>
+          </a:p>
+        </p:txBody>
+      </p:sp>
+      <p:sp>
+        <p:nvSpPr>
+          <p:cNvPr id="3" name="TextBox 2"/>
+          <p:cNvSpPr txBox="1"/>
+          <p:nvPr/>
+        </p:nvSpPr>
+        <p:spPr>
+          <a:xfrm>
+            <a:off x="822960" y="502920"/>
+            <a:ext cx="10515600" cy="822960"/>
+          </a:xfrm>
+          <a:prstGeom prst="rect">
+            <a:avLst/>
+          </a:prstGeom>
+          <a:noFill/>
+        </p:spPr>
+        <p:txBody>
+          <a:bodyPr wrap="square">
+            <a:spAutoFit/>
+          </a:bodyPr>
+          <a:lstStyle/>
+          <a:p>
+            <a:pPr algn="l">
+              <a:spcAft>
+                <a:spcPts val="600"/>
+              </a:spcAft>
+            </a:pPr>
+            <a:r>
+              <a:rPr sz="2800" b="1" i="0">
+                <a:solidFill>
+                  <a:srgbClr val="2C5F2D"/>
+                </a:solidFill>
+                <a:latin typeface="Cambria"/>
+              </a:rPr>
               <a:t>The Leader Feedback Round</a:t>
             </a:r>
           </a:p>
@@ -6924,7 +7202,7 @@
           <a:p>
             <a:pPr algn="r"/>
             <a:r>
-              <a:t>95</a:t>
+              <a:t>96</a:t>
             </a:r>
             <a:endParaRPr sz="1000" b="1">
               <a:solidFill>
@@ -6979,7 +7257,7 @@
 </p:sld>
 </file>
 
-<file path=ppt/slides/slide17.xml><?xml version="1.0" encoding="utf-8"?>
+<file path=ppt/slides/slide18.xml><?xml version="1.0" encoding="utf-8"?>
 <p:sld xmlns:a="http://schemas.openxmlformats.org/drawingml/2006/main" xmlns:r="http://schemas.openxmlformats.org/officeDocument/2006/relationships" xmlns:p="http://schemas.openxmlformats.org/presentationml/2006/main">
   <p:cSld>
     <p:spTree>
@@ -7369,7 +7647,7 @@
           <a:p>
             <a:pPr algn="r"/>
             <a:r>
-              <a:t>96</a:t>
+              <a:t>97</a:t>
             </a:r>
             <a:endParaRPr sz="1000" b="1">
               <a:solidFill>
@@ -7388,7 +7666,7 @@
 </p:sld>
 </file>
 
-<file path=ppt/slides/slide18.xml><?xml version="1.0" encoding="utf-8"?>
+<file path=ppt/slides/slide19.xml><?xml version="1.0" encoding="utf-8"?>
 <p:sld xmlns:a="http://schemas.openxmlformats.org/drawingml/2006/main" xmlns:r="http://schemas.openxmlformats.org/officeDocument/2006/relationships" xmlns:p="http://schemas.openxmlformats.org/presentationml/2006/main">
   <p:cSld>
     <p:spTree>
@@ -7543,7 +7821,7 @@
           <a:p>
             <a:pPr algn="r"/>
             <a:r>
-              <a:t>97</a:t>
+              <a:t>98</a:t>
             </a:r>
             <a:endParaRPr sz="1000" b="1">
               <a:solidFill>
@@ -8145,7 +8423,7 @@
               </a:spcAft>
             </a:pPr>
             <a:r>
-              <a:rPr sz="2800" b="1">
+              <a:rPr sz="2400" b="1">
                 <a:solidFill>
                   <a:srgbClr val="97BC62"/>
                 </a:solidFill>
@@ -8154,7 +8432,7 @@
               <a:t>1   </a:t>
             </a:r>
             <a:r>
-              <a:rPr sz="2800">
+              <a:rPr sz="2400">
                 <a:solidFill>
                   <a:srgbClr val="222B22"/>
                 </a:solidFill>
@@ -8170,7 +8448,7 @@
               </a:spcAft>
             </a:pPr>
             <a:r>
-              <a:rPr sz="2800" b="1">
+              <a:rPr sz="2400" b="1">
                 <a:solidFill>
                   <a:srgbClr val="97BC62"/>
                 </a:solidFill>
@@ -8179,7 +8457,7 @@
               <a:t>2   </a:t>
             </a:r>
             <a:r>
-              <a:rPr sz="2800">
+              <a:rPr sz="2400">
                 <a:solidFill>
                   <a:srgbClr val="222B22"/>
                 </a:solidFill>
@@ -8195,7 +8473,7 @@
               </a:spcAft>
             </a:pPr>
             <a:r>
-              <a:rPr sz="2800" b="1">
+              <a:rPr sz="2400" b="1">
                 <a:solidFill>
                   <a:srgbClr val="97BC62"/>
                 </a:solidFill>
@@ -8204,7 +8482,7 @@
               <a:t>3   </a:t>
             </a:r>
             <a:r>
-              <a:rPr sz="2800">
+              <a:rPr sz="2400">
                 <a:solidFill>
                   <a:srgbClr val="222B22"/>
                 </a:solidFill>
@@ -8220,7 +8498,7 @@
               </a:spcAft>
             </a:pPr>
             <a:r>
-              <a:rPr sz="2800" b="1">
+              <a:rPr sz="2400" b="1">
                 <a:solidFill>
                   <a:srgbClr val="97BC62"/>
                 </a:solidFill>
@@ -8229,13 +8507,13 @@
               <a:t>4   </a:t>
             </a:r>
             <a:r>
-              <a:rPr sz="2800">
+              <a:rPr sz="2400">
                 <a:solidFill>
                   <a:srgbClr val="222B22"/>
                 </a:solidFill>
                 <a:latin typeface="Calibri"/>
               </a:rPr>
-              <a:t>Companion demo</a:t>
+              <a:t>The place, the pattern, the pull</a:t>
             </a:r>
           </a:p>
           <a:p>
@@ -8245,7 +8523,7 @@
               </a:spcAft>
             </a:pPr>
             <a:r>
-              <a:rPr sz="2800" b="1">
+              <a:rPr sz="2400" b="1">
                 <a:solidFill>
                   <a:srgbClr val="97BC62"/>
                 </a:solidFill>
@@ -8254,13 +8532,13 @@
               <a:t>5   </a:t>
             </a:r>
             <a:r>
-              <a:rPr sz="2800">
+              <a:rPr sz="2400">
                 <a:solidFill>
                   <a:srgbClr val="222B22"/>
                 </a:solidFill>
                 <a:latin typeface="Calibri"/>
               </a:rPr>
-              <a:t>Bridge to the split</a:t>
+              <a:t>Companion demo</a:t>
             </a:r>
           </a:p>
           <a:p>
@@ -8270,7 +8548,7 @@
               </a:spcAft>
             </a:pPr>
             <a:r>
-              <a:rPr sz="2800" b="1">
+              <a:rPr sz="2400" b="1">
                 <a:solidFill>
                   <a:srgbClr val="97BC62"/>
                 </a:solidFill>
@@ -8279,13 +8557,13 @@
               <a:t>6   </a:t>
             </a:r>
             <a:r>
-              <a:rPr sz="2800">
+              <a:rPr sz="2400">
                 <a:solidFill>
                   <a:srgbClr val="222B22"/>
                 </a:solidFill>
                 <a:latin typeface="Calibri"/>
               </a:rPr>
-              <a:t>Confession-and-restoration in pairs</a:t>
+              <a:t>Bridge to the groups</a:t>
             </a:r>
           </a:p>
           <a:p>
@@ -8295,7 +8573,7 @@
               </a:spcAft>
             </a:pPr>
             <a:r>
-              <a:rPr sz="2800" b="1">
+              <a:rPr sz="2400" b="1">
                 <a:solidFill>
                   <a:srgbClr val="97BC62"/>
                 </a:solidFill>
@@ -8304,13 +8582,13 @@
               <a:t>7   </a:t>
             </a:r>
             <a:r>
-              <a:rPr sz="2800">
+              <a:rPr sz="2400">
                 <a:solidFill>
                   <a:srgbClr val="222B22"/>
                 </a:solidFill>
                 <a:latin typeface="Calibri"/>
               </a:rPr>
-              <a:t>Merge and shared blessing</a:t>
+              <a:t>Confession-and-restoration in small groups</a:t>
             </a:r>
           </a:p>
           <a:p>
@@ -8320,7 +8598,7 @@
               </a:spcAft>
             </a:pPr>
             <a:r>
-              <a:rPr sz="2800" b="1">
+              <a:rPr sz="2400" b="1">
                 <a:solidFill>
                   <a:srgbClr val="97BC62"/>
                 </a:solidFill>
@@ -8329,13 +8607,13 @@
               <a:t>8   </a:t>
             </a:r>
             <a:r>
-              <a:rPr sz="2800">
+              <a:rPr sz="2400">
                 <a:solidFill>
                   <a:srgbClr val="222B22"/>
                 </a:solidFill>
                 <a:latin typeface="Calibri"/>
               </a:rPr>
-              <a:t>Between-session practice + the room’s question</a:t>
+              <a:t>Merge and shared blessing</a:t>
             </a:r>
           </a:p>
           <a:p>
@@ -8345,7 +8623,7 @@
               </a:spcAft>
             </a:pPr>
             <a:r>
-              <a:rPr sz="2800" b="1">
+              <a:rPr sz="2400" b="1">
                 <a:solidFill>
                   <a:srgbClr val="97BC62"/>
                 </a:solidFill>
@@ -8354,13 +8632,13 @@
               <a:t>9   </a:t>
             </a:r>
             <a:r>
-              <a:rPr sz="2800">
+              <a:rPr sz="2400">
                 <a:solidFill>
                   <a:srgbClr val="222B22"/>
                 </a:solidFill>
                 <a:latin typeface="Calibri"/>
               </a:rPr>
-              <a:t>The Leader Feedback Round — both leaders</a:t>
+              <a:t>Between-session practice + the room’s question</a:t>
             </a:r>
           </a:p>
           <a:p>
@@ -8370,7 +8648,7 @@
               </a:spcAft>
             </a:pPr>
             <a:r>
-              <a:rPr sz="2800" b="1">
+              <a:rPr sz="2400" b="1">
                 <a:solidFill>
                   <a:srgbClr val="97BC62"/>
                 </a:solidFill>
@@ -8379,7 +8657,32 @@
               <a:t>10   </a:t>
             </a:r>
             <a:r>
-              <a:rPr sz="2800">
+              <a:rPr sz="2400">
+                <a:solidFill>
+                  <a:srgbClr val="222B22"/>
+                </a:solidFill>
+                <a:latin typeface="Calibri"/>
+              </a:rPr>
+              <a:t>The Leader Feedback Round — both leaders</a:t>
+            </a:r>
+          </a:p>
+          <a:p>
+            <a:pPr>
+              <a:spcAft>
+                <a:spcPts val="500"/>
+              </a:spcAft>
+            </a:pPr>
+            <a:r>
+              <a:rPr sz="2400" b="1">
+                <a:solidFill>
+                  <a:srgbClr val="97BC62"/>
+                </a:solidFill>
+                <a:latin typeface="Calibri"/>
+              </a:rPr>
+              <a:t>11   </a:t>
+            </a:r>
+            <a:r>
+              <a:rPr sz="2400">
                 <a:solidFill>
                   <a:srgbClr val="222B22"/>
                 </a:solidFill>
@@ -9298,7 +9601,7 @@
                 </a:solidFill>
                 <a:latin typeface="Calibri"/>
               </a:rPr>
-              <a:t>The parents go first in every pair — the older generation owes the younger the demonstration</a:t>
+              <a:t>The parents go first in every group — the older generation owes the younger the demonstration</a:t>
             </a:r>
           </a:p>
           <a:p>
@@ -9323,7 +9626,7 @@
                 </a:solidFill>
                 <a:latin typeface="Calibri"/>
               </a:rPr>
-              <a:t>After each naming, the pair speaks a specific blessing of restoration — about three minutes per person</a:t>
+              <a:t>After each naming, the group speaks a specific blessing of restoration — about three minutes per person</a:t>
             </a:r>
           </a:p>
         </p:txBody>
@@ -9441,7 +9744,7 @@
 </file>
 
 <file path=ppt/slides/slide8.xml><?xml version="1.0" encoding="utf-8"?>
-<p:sld xmlns:a="http://schemas.openxmlformats.org/drawingml/2006/main" xmlns:r="http://schemas.openxmlformats.org/officeDocument/2006/relationships" xmlns:p="http://schemas.openxmlformats.org/presentationml/2006/main">
+<p:sld xmlns:a="http://schemas.openxmlformats.org/drawingml/2006/main" xmlns:p="http://schemas.openxmlformats.org/presentationml/2006/main" xmlns:r="http://schemas.openxmlformats.org/officeDocument/2006/relationships">
   <p:cSld>
     <p:spTree>
       <p:nvGrpSpPr>
@@ -9449,14 +9752,7 @@
         <p:cNvGrpSpPr/>
         <p:nvPr/>
       </p:nvGrpSpPr>
-      <p:grpSpPr>
-        <a:xfrm>
-          <a:off x="0" y="0"/>
-          <a:ext cx="0" cy="0"/>
-          <a:chOff x="0" y="0"/>
-          <a:chExt cx="0" cy="0"/>
-        </a:xfrm>
-      </p:grpSpPr>
+      <p:grpSpPr/>
       <p:sp>
         <p:nvSpPr>
           <p:cNvPr id="2" name="Rectangle 1"/>
@@ -9520,7 +9816,7 @@
                 </a:solidFill>
                 <a:latin typeface="Cambria"/>
               </a:rPr>
-              <a:t>Companion Demo</a:t>
+              <a:t>The Place, the Pattern, the Pull</a:t>
             </a:r>
           </a:p>
         </p:txBody>
@@ -9542,93 +9838,193 @@
           <a:noFill/>
         </p:spPr>
         <p:txBody>
-          <a:bodyPr wrap="square" lIns="91440" tIns="91440" rIns="91440" bIns="91440">
-            <a:normAutofit fontScale="80000" lnSpcReduction="10000"/>
-          </a:bodyPr>
-          <a:lstStyle/>
+          <a:bodyPr wrap="square" lIns="91440" tIns="91440" rIns="91440" bIns="91440"/>
+          <a:lstStyle/>
+          <a:p>
+            <a:pPr marL="342900" indent="-342900">
+              <a:spcAft>
+                <a:spcPts val="200"/>
+              </a:spcAft>
+            </a:pPr>
+            <a:r>
+              <a:rPr sz="2100" b="1" i="0">
+                <a:solidFill>
+                  <a:srgbClr val="97BC62"/>
+                </a:solidFill>
+                <a:latin typeface="Calibri"/>
+              </a:rPr>
+              <a:t>1   </a:t>
+            </a:r>
+            <a:r>
+              <a:rPr sz="2100" b="1" i="0">
+                <a:solidFill>
+                  <a:srgbClr val="222B22"/>
+                </a:solidFill>
+                <a:latin typeface="Calibri"/>
+              </a:rPr>
+              <a:t>The place</a:t>
+            </a:r>
+            <a:r>
+              <a:rPr sz="2100" b="0" i="0">
+                <a:solidFill>
+                  <a:srgbClr val="222B22"/>
+                </a:solidFill>
+                <a:latin typeface="Calibri"/>
+              </a:rPr>
+              <a:t> — where you want to walk in greater honesty; where growth has stalled</a:t>
+            </a:r>
+          </a:p>
           <a:p>
             <a:pPr marL="274320" indent="-274320">
               <a:spcAft>
-                <a:spcPts val="900"/>
+                <a:spcPts val="600"/>
               </a:spcAft>
             </a:pPr>
             <a:r>
-              <a:rPr sz="2400" b="1" i="0">
+              <a:rPr sz="1800" b="1" i="0">
                 <a:solidFill>
                   <a:srgbClr val="97BC62"/>
                 </a:solidFill>
                 <a:latin typeface="Calibri"/>
               </a:rPr>
-              <a:t>•  </a:t>
-            </a:r>
-            <a:r>
-              <a:rPr sz="2400" b="0" i="0">
+              <a:t>    </a:t>
+            </a:r>
+            <a:r>
+              <a:rPr sz="1800" b="0" i="1">
                 <a:solidFill>
                   <a:srgbClr val="222B22"/>
                 </a:solidFill>
                 <a:latin typeface="Calibri"/>
               </a:rPr>
-              <a:t>The Lead Companion does the practice in front of the whole room — this sets the depth and the form</a:t>
+              <a:t>e.g. how I talk about people who aren’t in the room</a:t>
+            </a:r>
+          </a:p>
+          <a:p>
+            <a:pPr marL="342900" indent="-342900">
+              <a:spcAft>
+                <a:spcPts val="200"/>
+              </a:spcAft>
+            </a:pPr>
+            <a:r>
+              <a:rPr sz="2100" b="1" i="0">
+                <a:solidFill>
+                  <a:srgbClr val="97BC62"/>
+                </a:solidFill>
+                <a:latin typeface="Calibri"/>
+              </a:rPr>
+              <a:t>2   </a:t>
+            </a:r>
+            <a:r>
+              <a:rPr sz="2100" b="1" i="0">
+                <a:solidFill>
+                  <a:srgbClr val="222B22"/>
+                </a:solidFill>
+                <a:latin typeface="Calibri"/>
+              </a:rPr>
+              <a:t>The pattern</a:t>
+            </a:r>
+            <a:r>
+              <a:rPr sz="2100" b="0" i="0">
+                <a:solidFill>
+                  <a:srgbClr val="222B22"/>
+                </a:solidFill>
+                <a:latin typeface="Calibri"/>
+              </a:rPr>
+              <a:t> — how it keeps going: not one time, the habit you’ve stopped expecting to change</a:t>
             </a:r>
           </a:p>
           <a:p>
             <a:pPr marL="274320" indent="-274320">
               <a:spcAft>
-                <a:spcPts val="900"/>
+                <a:spcPts val="600"/>
               </a:spcAft>
             </a:pPr>
             <a:r>
-              <a:rPr sz="2400" b="1" i="0">
+              <a:rPr sz="1800" b="1" i="0">
                 <a:solidFill>
                   <a:srgbClr val="97BC62"/>
                 </a:solidFill>
                 <a:latin typeface="Calibri"/>
               </a:rPr>
-              <a:t>•  </a:t>
-            </a:r>
-            <a:r>
-              <a:rPr sz="2400" b="0" i="0">
+              <a:t>    </a:t>
+            </a:r>
+            <a:r>
+              <a:rPr sz="1800" b="0" i="1">
                 <a:solidFill>
                   <a:srgbClr val="222B22"/>
                 </a:solidFill>
                 <a:latin typeface="Calibri"/>
               </a:rPr>
-              <a:t>One sentence: “The place where I want to walk in greater honesty is ______.” Real but not graphic</a:t>
+              <a:t>e.g. when I feel left out, I get clever at someone’s expense</a:t>
+            </a:r>
+          </a:p>
+          <a:p>
+            <a:pPr marL="342900" indent="-342900">
+              <a:spcAft>
+                <a:spcPts val="200"/>
+              </a:spcAft>
+            </a:pPr>
+            <a:r>
+              <a:rPr sz="2100" b="1" i="0">
+                <a:solidFill>
+                  <a:srgbClr val="97BC62"/>
+                </a:solidFill>
+                <a:latin typeface="Calibri"/>
+              </a:rPr>
+              <a:t>3   </a:t>
+            </a:r>
+            <a:r>
+              <a:rPr sz="2100" b="1" i="0">
+                <a:solidFill>
+                  <a:srgbClr val="222B22"/>
+                </a:solidFill>
+                <a:latin typeface="Calibri"/>
+              </a:rPr>
+              <a:t>The pull</a:t>
+            </a:r>
+            <a:r>
+              <a:rPr sz="2100" b="0" i="0">
+                <a:solidFill>
+                  <a:srgbClr val="222B22"/>
+                </a:solidFill>
+                <a:latin typeface="Calibri"/>
+              </a:rPr>
+              <a:t> — what draws you back: the want or the fear underneath</a:t>
             </a:r>
           </a:p>
           <a:p>
             <a:pPr marL="274320" indent="-274320">
               <a:spcAft>
-                <a:spcPts val="900"/>
+                <a:spcPts val="1200"/>
               </a:spcAft>
             </a:pPr>
             <a:r>
-              <a:rPr sz="2400" b="1" i="0">
+              <a:rPr sz="1800" b="1" i="0">
                 <a:solidFill>
                   <a:srgbClr val="97BC62"/>
                 </a:solidFill>
                 <a:latin typeface="Calibri"/>
               </a:rPr>
-              <a:t>•  </a:t>
-            </a:r>
-            <a:r>
-              <a:rPr sz="2400" b="0" i="0">
+              <a:t>    </a:t>
+            </a:r>
+            <a:r>
+              <a:rPr sz="1800" b="0" i="1">
                 <a:solidFill>
                   <a:srgbClr val="222B22"/>
                 </a:solidFill>
                 <a:latin typeface="Calibri"/>
               </a:rPr>
-              <a:t>For example: “The place where I want to walk in greater honesty is how I speak about people who aren’t in the room.” — and the blessing back: “What I bless in you is the courage it took to name that. May God meet you there.”</a:t>
+              <a:t>e.g. I want to be on the inside</a:t>
             </a:r>
           </a:p>
           <a:p>
             <a:pPr marL="274320" indent="-274320">
               <a:spcAft>
-                <a:spcPts val="900"/>
+                <a:spcPts val="600"/>
               </a:spcAft>
             </a:pPr>
             <a:r>
-              <a:rPr sz="2400" b="1" i="0">
+              <a:rPr sz="2100" b="1" i="0">
                 <a:solidFill>
                   <a:srgbClr val="97BC62"/>
                 </a:solidFill>
@@ -9637,23 +10033,32 @@
               <a:t>•  </a:t>
             </a:r>
             <a:r>
-              <a:rPr sz="2400" b="0" i="0">
+              <a:rPr sz="2100" b="1" i="0">
                 <a:solidFill>
                   <a:srgbClr val="222B22"/>
                 </a:solidFill>
                 <a:latin typeface="Calibri"/>
               </a:rPr>
-              <a:t>Pause. A pre-arranged Co-Companion speaks a brief blessing of restoration back</a:t>
+              <a:t>Naming the place is enough. </a:t>
+            </a:r>
+            <a:r>
+              <a:rPr sz="2100" b="0" i="0">
+                <a:solidFill>
+                  <a:srgbClr val="222B22"/>
+                </a:solidFill>
+                <a:latin typeface="Calibri"/>
+              </a:rPr>
+              <a:t>The pattern and the pull are yours to add — or to keep.</a:t>
             </a:r>
           </a:p>
           <a:p>
             <a:pPr marL="274320" indent="-274320">
               <a:spcAft>
-                <a:spcPts val="900"/>
+                <a:spcPts val="600"/>
               </a:spcAft>
             </a:pPr>
             <a:r>
-              <a:rPr sz="2400" b="1" i="0">
+              <a:rPr sz="2100" b="1" i="0">
                 <a:solidFill>
                   <a:srgbClr val="97BC62"/>
                 </a:solidFill>
@@ -9662,63 +10067,22 @@
               <a:t>•  </a:t>
             </a:r>
             <a:r>
-              <a:rPr sz="2400" b="0" i="0">
+              <a:rPr sz="2100" b="1" i="0">
                 <a:solidFill>
                   <a:srgbClr val="222B22"/>
                 </a:solidFill>
                 <a:latin typeface="Calibri"/>
               </a:rPr>
-              <a:t>For example: “In the name of Jesus, we pray restoration over the place you named — may its grip break, and may honesty grow where it held.”</a:t>
-            </a:r>
-          </a:p>
-          <a:p>
-            <a:pPr marL="274320" indent="-274320">
-              <a:spcAft>
-                <a:spcPts val="900"/>
-              </a:spcAft>
-            </a:pPr>
-            <a:r>
-              <a:rPr sz="2400" b="1" i="0">
-                <a:solidFill>
-                  <a:srgbClr val="97BC62"/>
-                </a:solidFill>
-                <a:latin typeface="Calibri"/>
-              </a:rPr>
-              <a:t>•  </a:t>
-            </a:r>
-            <a:r>
-              <a:rPr sz="2400" b="0" i="0">
+              <a:t>Never named here: </a:t>
+            </a:r>
+            <a:r>
+              <a:rPr sz="2100" b="0" i="0">
                 <a:solidFill>
                   <a:srgbClr val="222B22"/>
                 </a:solidFill>
                 <a:latin typeface="Calibri"/>
               </a:rPr>
-              <a:t>Receive it — no deflecting, no joking, no minimizing. “Thank you.”</a:t>
-            </a:r>
-          </a:p>
-          <a:p>
-            <a:pPr marL="274320" indent="-274320">
-              <a:spcAft>
-                <a:spcPts val="900"/>
-              </a:spcAft>
-            </a:pPr>
-            <a:r>
-              <a:rPr sz="2400" b="1" i="0">
-                <a:solidFill>
-                  <a:srgbClr val="97BC62"/>
-                </a:solidFill>
-                <a:latin typeface="Calibri"/>
-              </a:rPr>
-              <a:t>•  </a:t>
-            </a:r>
-            <a:r>
-              <a:rPr sz="2400" b="0" i="0">
-                <a:solidFill>
-                  <a:srgbClr val="222B22"/>
-                </a:solidFill>
-                <a:latin typeface="Calibri"/>
-              </a:rPr>
-              <a:t>“That is the practice. You will do it in your pair — parents first, then teens. Yours doesn’t have to look like mine.”</a:t>
+              <a:t>the details of what happened, anyone else’s part, anything about someone in this room.</a:t>
             </a:r>
           </a:p>
         </p:txBody>
@@ -9844,7 +10208,7 @@
                 </a:solidFill>
                 <a:latin typeface="Cambria"/>
               </a:rPr>
-              <a:t>Bridge to the Split</a:t>
+              <a:t>Companion Demo</a:t>
             </a:r>
           </a:p>
         </p:txBody>
@@ -9866,83 +10230,10 @@
           <a:noFill/>
         </p:spPr>
         <p:txBody>
-          <a:bodyPr wrap="square" lIns="91440" tIns="91440" rIns="91440" bIns="91440"/>
-          <a:lstStyle/>
-          <a:p>
-            <a:pPr marL="342900" indent="-342900">
-              <a:spcAft>
-                <a:spcPts val="900"/>
-              </a:spcAft>
-            </a:pPr>
-            <a:r>
-              <a:rPr sz="2800" b="1" i="0">
-                <a:solidFill>
-                  <a:srgbClr val="97BC62"/>
-                </a:solidFill>
-                <a:latin typeface="Calibri"/>
-              </a:rPr>
-              <a:t>1   </a:t>
-            </a:r>
-            <a:r>
-              <a:rPr sz="2800" b="0" i="0">
-                <a:solidFill>
-                  <a:srgbClr val="222B22"/>
-                </a:solidFill>
-                <a:latin typeface="Calibri"/>
-              </a:rPr>
-              <a:t>“Take what helps from the prompts. You don’t have to use any of them.”</a:t>
-            </a:r>
-          </a:p>
-          <a:p>
-            <a:pPr marL="342900" indent="-342900">
-              <a:spcAft>
-                <a:spcPts val="900"/>
-              </a:spcAft>
-            </a:pPr>
-            <a:r>
-              <a:rPr sz="2800" b="1" i="0">
-                <a:solidFill>
-                  <a:srgbClr val="97BC62"/>
-                </a:solidFill>
-                <a:latin typeface="Calibri"/>
-              </a:rPr>
-              <a:t>2   </a:t>
-            </a:r>
-            <a:r>
-              <a:rPr sz="2800" b="0" i="0">
-                <a:solidFill>
-                  <a:srgbClr val="222B22"/>
-                </a:solidFill>
-                <a:latin typeface="Calibri"/>
-              </a:rPr>
-              <a:t>The blessing card — specific, short, witnessed: “In the name of Jesus, we pray restoration over...”</a:t>
-            </a:r>
-          </a:p>
-          <a:p>
-            <a:pPr marL="342900" indent="-342900">
-              <a:spcAft>
-                <a:spcPts val="900"/>
-              </a:spcAft>
-            </a:pPr>
-            <a:r>
-              <a:rPr sz="2800" b="1" i="0">
-                <a:solidFill>
-                  <a:srgbClr val="97BC62"/>
-                </a:solidFill>
-                <a:latin typeface="Calibri"/>
-              </a:rPr>
-              <a:t>3   </a:t>
-            </a:r>
-            <a:r>
-              <a:rPr sz="2800" b="0" i="0">
-                <a:solidFill>
-                  <a:srgbClr val="222B22"/>
-                </a:solidFill>
-                <a:latin typeface="Calibri"/>
-              </a:rPr>
-              <a:t>“The container holds. Nothing leaves the pair. Not even back to the main room. Especially this week.”</a:t>
-            </a:r>
-          </a:p>
+          <a:bodyPr wrap="square" lIns="91440" tIns="91440" rIns="91440" bIns="91440">
+            <a:normAutofit fontScale="80000" lnSpcReduction="10000"/>
+          </a:bodyPr>
+          <a:lstStyle/>
           <a:p>
             <a:pPr marL="274320" indent="-274320">
               <a:spcAft>
@@ -9950,7 +10241,7 @@
               </a:spcAft>
             </a:pPr>
             <a:r>
-              <a:rPr sz="2800" b="1" i="0">
+              <a:rPr sz="2400" b="1" i="0">
                 <a:solidFill>
                   <a:srgbClr val="97BC62"/>
                 </a:solidFill>
@@ -9959,13 +10250,13 @@
               <a:t>•  </a:t>
             </a:r>
             <a:r>
-              <a:rPr sz="2800" b="0" i="0">
+              <a:rPr sz="2400" b="0" i="0">
                 <a:solidFill>
                   <a:srgbClr val="222B22"/>
                 </a:solidFill>
                 <a:latin typeface="Calibri"/>
               </a:rPr>
-              <a:t>The order holds in every pair: the parent first, then the teens</a:t>
+              <a:t>The Lead Companion does the practice in front of the whole room — this sets the depth and the form</a:t>
             </a:r>
           </a:p>
           <a:p>
@@ -9975,7 +10266,7 @@
               </a:spcAft>
             </a:pPr>
             <a:r>
-              <a:rPr sz="2800" b="1" i="0">
+              <a:rPr sz="2400" b="1" i="0">
                 <a:solidFill>
                   <a:srgbClr val="97BC62"/>
                 </a:solidFill>
@@ -9984,13 +10275,113 @@
               <a:t>•  </a:t>
             </a:r>
             <a:r>
-              <a:rPr sz="2800" b="0" i="0">
+              <a:rPr sz="2400" b="0" i="0">
                 <a:solidFill>
                   <a:srgbClr val="222B22"/>
                 </a:solidFill>
                 <a:latin typeface="Calibri"/>
               </a:rPr>
-              <a:t>“Teens — your depth is yours, and pass is always allowed.”</a:t>
+              <a:t>For example: “The place where I want to walk in greater honesty is how I speak about people who aren’t in the room.” — and the blessing back: “What I bless in you is the courage it took to name that. May God meet you there.”</a:t>
+            </a:r>
+          </a:p>
+          <a:p>
+            <a:pPr marL="274320" indent="-274320">
+              <a:spcAft>
+                <a:spcPts val="900"/>
+              </a:spcAft>
+            </a:pPr>
+            <a:r>
+              <a:rPr sz="2400" b="1" i="0">
+                <a:solidFill>
+                  <a:srgbClr val="97BC62"/>
+                </a:solidFill>
+                <a:latin typeface="Calibri"/>
+              </a:rPr>
+              <a:t>•  </a:t>
+            </a:r>
+            <a:r>
+              <a:rPr sz="2400" b="0" i="0">
+                <a:solidFill>
+                  <a:srgbClr val="222B22"/>
+                </a:solidFill>
+                <a:latin typeface="Calibri"/>
+              </a:rPr>
+              <a:t>Pause. A pre-arranged Co-Companion speaks a brief blessing of restoration back</a:t>
+            </a:r>
+          </a:p>
+          <a:p>
+            <a:pPr marL="274320" indent="-274320">
+              <a:spcAft>
+                <a:spcPts val="900"/>
+              </a:spcAft>
+            </a:pPr>
+            <a:r>
+              <a:rPr sz="2400" b="1" i="0">
+                <a:solidFill>
+                  <a:srgbClr val="97BC62"/>
+                </a:solidFill>
+                <a:latin typeface="Calibri"/>
+              </a:rPr>
+              <a:t>•  </a:t>
+            </a:r>
+            <a:r>
+              <a:rPr sz="2400" b="0" i="0">
+                <a:solidFill>
+                  <a:srgbClr val="222B22"/>
+                </a:solidFill>
+                <a:latin typeface="Calibri"/>
+              </a:rPr>
+              <a:t>For example: “In the name of Jesus, we pray restoration over the place you named — may its grip break, and may honesty grow where it held.”</a:t>
+            </a:r>
+          </a:p>
+          <a:p>
+            <a:pPr marL="274320" indent="-274320">
+              <a:spcAft>
+                <a:spcPts val="900"/>
+              </a:spcAft>
+            </a:pPr>
+            <a:r>
+              <a:rPr sz="2400" b="1" i="0">
+                <a:solidFill>
+                  <a:srgbClr val="97BC62"/>
+                </a:solidFill>
+                <a:latin typeface="Calibri"/>
+              </a:rPr>
+              <a:t>•  </a:t>
+            </a:r>
+            <a:r>
+              <a:rPr sz="2400" b="0" i="0">
+                <a:solidFill>
+                  <a:srgbClr val="222B22"/>
+                </a:solidFill>
+                <a:latin typeface="Calibri"/>
+              </a:rPr>
+              <a:t>Receive it — no deflecting, no joking, no minimizing. “Thank you.”</a:t>
+            </a:r>
+          </a:p>
+          <a:p>
+            <a:pPr marL="274320" indent="-274320">
+              <a:spcAft>
+                <a:spcPts val="900"/>
+              </a:spcAft>
+            </a:pPr>
+            <a:r>
+              <a:rPr sz="2400" b="1" i="0">
+                <a:solidFill>
+                  <a:srgbClr val="97BC62"/>
+                </a:solidFill>
+                <a:latin typeface="Calibri"/>
+              </a:rPr>
+              <a:t>•  </a:t>
+            </a:r>
+            <a:r>
+              <a:rPr sz="2400" b="0" i="0">
+                <a:solidFill>
+                  <a:srgbClr val="222B22"/>
+                </a:solidFill>
+                <a:latin typeface="Calibri"/>
+              </a:rPr>
+              <a:t>“That is the practice. You will do it in your group — parents first, then teens. Yours doesn’t have to look like mine.”</a:t>
             </a:r>
           </a:p>
         </p:txBody>

--- a/_implementation-notes/evening-series/FotH Evening Session 6 Slides DRAFT v1.pptx
+++ b/_implementation-notes/evening-series/FotH Evening Session 6 Slides DRAFT v1.pptx
@@ -829,6 +829,11 @@
           </a:p>
           <a:p>
             <a:r>
+              <a:t>PRINT: the Session 6 Breakout Card (Leader Notes folder) — one per group and a spare. It carries this slide, the form, the order and a sample blessing, so the groups have the three words in hand when they are away from the screen.</a:t>
+            </a:r>
+          </a:p>
+          <a:p>
+            <a:r>
               <a:t>CUES: Ask 'Questions about the three words?' and wait. Get it clear here, not in the groups. If the groups stay in this room, leave the practice slide up — it carries the three words too.</a:t>
             </a:r>
           </a:p>
@@ -1151,7 +1156,7 @@
           </a:p>
           <a:p>
             <a:r>
-              <a:t>1. Confession-and-restoration night — second-highest-risk after Weeks 3–4. Section 6 re-read beforehand; backup on call 6:30–11:00; tissues in every space.</a:t>
+              <a:t>1. Confession-and-restoration night — second-highest-risk after Weeks 3–4. Section 6 re-read beforehand; backup on call 6:30–11:00; tissues in every space; the Breakout Card printed, one per group and a spare.</a:t>
             </a:r>
           </a:p>
           <a:p>
@@ -1520,7 +1525,7 @@
           </a:p>
           <a:p>
             <a:r>
-              <a:t>3. Name the groups and where each meets; pray and send.</a:t>
+              <a:t>3. Name the groups and where each meets; hand each group's holder a Breakout Card; pray and send.</a:t>
             </a:r>
           </a:p>
           <a:p>

--- a/_implementation-notes/evening-series/FotH Evening Session 6 Slides DRAFT v1.pptx
+++ b/_implementation-notes/evening-series/FotH Evening Session 6 Slides DRAFT v1.pptx
@@ -6644,15 +6644,15 @@
           <p:nvPr/>
         </p:nvPicPr>
         <p:blipFill>
-          <a:blip r:embed="rId4"/>
+          <a:blip r:embed="rId5"/>
           <a:stretch>
             <a:fillRect/>
           </a:stretch>
         </p:blipFill>
         <p:spPr>
           <a:xfrm>
-            <a:off x="2589026" y="1463040"/>
-            <a:ext cx="7013642" cy="3897581"/>
+            <a:off x="3514668" y="1463040"/>
+            <a:ext cx="5162358" cy="3897581"/>
           </a:xfrm>
           <a:prstGeom prst="rect">
             <a:avLst/>

--- a/_implementation-notes/evening-series/FotH Evening Session 6 Slides DRAFT v1.pptx
+++ b/_implementation-notes/evening-series/FotH Evening Session 6 Slides DRAFT v1.pptx
@@ -1943,6 +1943,11 @@
               <a:t>CUES: Do not pack up — stay accessible at least ten minutes; this night produces door conversations more than any other.</a:t>
             </a:r>
           </a:p>
+          <a:p>
+            <a:r>
+              <a:t>BLESSINGS: eyes on the person, not the screen — nothing to read; say what is on your heart for them, specific and short.</a:t>
+            </a:r>
+          </a:p>
         </p:txBody>
       </p:sp>
     </p:spTree>
@@ -7513,7 +7518,7 @@
                 </a:solidFill>
                 <a:latin typeface="Calibri"/>
               </a:rPr>
-              <a:t>Blessings — specific, witnessed, short</a:t>
+              <a:t>Blessings — eyes on the person, not the screen: say what is on your heart for them. Specific, witnessed, short</a:t>
             </a:r>
           </a:p>
           <a:p>

--- a/_implementation-notes/evening-series/FotH Evening Session 6 Slides DRAFT v1.pptx
+++ b/_implementation-notes/evening-series/FotH Evening Session 6 Slides DRAFT v1.pptx
@@ -789,7 +789,7 @@
           <a:lstStyle/>
           <a:p>
             <a:r>
-              <a:t>S6 · 7:31–7:37 · LEAD: CONTENT PRESENTER · CENTRAL — the groups depend on this slide</a:t>
+              <a:t>E5 · 7:31–7:37 · LEAD: CONTENT PRESENTER · CENTRAL — the groups depend on this slide</a:t>
             </a:r>
           </a:p>
           <a:p>
@@ -829,7 +829,7 @@
           </a:p>
           <a:p>
             <a:r>
-              <a:t>PRINT: the Session 6 Breakout Card (Leader Notes folder) — one per group and a spare. It carries this slide, the form, the order and a sample blessing, so the groups have the three words in hand when they are away from the screen.</a:t>
+              <a:t>PRINT: the Evening 5 Breakout Card (Leader Notes folder) — one per group and a spare. It carries this slide, the form, the order and a sample blessing, so the groups have the three words in hand when they are away from the screen.</a:t>
             </a:r>
           </a:p>
           <a:p>
@@ -885,7 +885,7 @@
           <a:lstStyle/>
           <a:p>
             <a:r>
-              <a:t>S6 · WELCOME · LEAD: CONTAINER HOLDER · GROUNDING — every session opens on this map</a:t>
+              <a:t>E5 · WELCOME · LEAD: CONTAINER HOLDER · GROUNDING — every session opens on this map</a:t>
             </a:r>
           </a:p>
           <a:p>
@@ -895,7 +895,7 @@
           </a:p>
           <a:p>
             <a:r>
-              <a:t>1. Locate tonight on the map, plainly: Session 6 stands deeper in the second box — Connect with Others. Each connection makes the next one real (Matt. 22:37–40).</a:t>
+              <a:t>1. Locate tonight on the map, plainly: Evening 5 stands deeper in the second box — Connect with Others. Each connection makes the next one real (Matt. 22:37–40).</a:t>
             </a:r>
           </a:p>
           <a:p>
@@ -956,7 +956,7 @@
           <a:lstStyle/>
           <a:p>
             <a:r>
-              <a:t>S6 · COMMISSIONING · LEAD: CONTENT PRESENTER</a:t>
+              <a:t>E5 · COMMISSIONING · LEAD: CONTENT PRESENTER</a:t>
             </a:r>
           </a:p>
           <a:p>
@@ -1027,7 +1027,7 @@
           <a:lstStyle/>
           <a:p>
             <a:r>
-              <a:t>S6 · COMMISSIONING · LEAD: CONTENT PRESENTER</a:t>
+              <a:t>E5 · COMMISSIONING · LEAD: CONTENT PRESENTER</a:t>
             </a:r>
           </a:p>
           <a:p>
@@ -1093,13 +1093,11 @@
           <a:lstStyle/>
           <a:p>
             <a:r>
-              <a:rPr lang="en-US" sz="1200"/>
-              <a:t>S6 · pre-session · DIVIDER</a:t>
-            </a:r>
-          </a:p>
-          <a:p>
-            <a:r>
-              <a:rPr lang="en-US" sz="1200"/>
+              <a:t>E5 · pre-session · DIVIDER</a:t>
+            </a:r>
+          </a:p>
+          <a:p>
+            <a:r>
               <a:t>On screen through dinner and as the circle forms. Greet at the door — the slide holds the room.</a:t>
             </a:r>
           </a:p>
@@ -1146,7 +1144,7 @@
           <a:lstStyle/>
           <a:p>
             <a:r>
-              <a:t>S6 · 7:00–8:30 · LEAD: BOTH LEADERS</a:t>
+              <a:t>E5 · 7:00–8:30 · LEAD: BOTH LEADERS</a:t>
             </a:r>
           </a:p>
           <a:p>
@@ -1156,7 +1154,7 @@
           </a:p>
           <a:p>
             <a:r>
-              <a:t>1. Confession-and-restoration night — second-highest-risk after Weeks 3–4. Section 6 re-read beforehand; backup on call 6:30–11:00; tissues in every space; the Breakout Card printed, one per group and a spare.</a:t>
+              <a:t>1. Confession-and-restoration night — second-highest-risk after Evening 3. Section 6 re-read beforehand; backup on call 6:30–11:00; tissues in every space; the Breakout Card printed, one per group and a spare.</a:t>
             </a:r>
           </a:p>
           <a:p>
@@ -1217,7 +1215,7 @@
           <a:lstStyle/>
           <a:p>
             <a:r>
-              <a:t>S6 · 7:00–7:08 · LEAD: CONTAINER HOLDER</a:t>
+              <a:t>E5 · 7:00–7:08 · LEAD: CONTAINER HOLDER</a:t>
             </a:r>
           </a:p>
           <a:p>
@@ -1293,25 +1291,21 @@
           <a:lstStyle/>
           <a:p>
             <a:r>
-              <a:rPr lang="en-US" sz="1200"/>
-              <a:t>S6 · 7:08–7:25 · LEAD: CONTAINER HOLDER</a:t>
-            </a:r>
-          </a:p>
-          <a:p>
-            <a:r>
-              <a:rPr lang="en-US" sz="1200"/>
+              <a:t>E5 · 7:08–7:25 · LEAD: CONTAINER HOLDER</a:t>
+            </a:r>
+          </a:p>
+          <a:p>
+            <a:r>
               <a:t>BEATS:</a:t>
             </a:r>
           </a:p>
           <a:p>
             <a:r>
-              <a:rPr lang="en-US" sz="1200"/>
               <a:t>1. Ninety seconds: one sentence on how the one-friendship, one-condition practice landed; the arranged parent starts.</a:t>
             </a:r>
           </a:p>
           <a:p>
             <a:r>
-              <a:rPr lang="en-US" sz="1200"/>
               <a:t>2. Take 2–3 voluntary contributions. Do not ask for more; move on.</a:t>
             </a:r>
           </a:p>
@@ -1358,7 +1352,7 @@
           <a:lstStyle/>
           <a:p>
             <a:r>
-              <a:t>S6 · 7:25–7:31 · LEAD: CONTENT PRESENTER</a:t>
+              <a:t>E5 · 7:25–7:31 · LEAD: CONTENT PRESENTER</a:t>
             </a:r>
           </a:p>
           <a:p>
@@ -1429,7 +1423,7 @@
           <a:lstStyle/>
           <a:p>
             <a:r>
-              <a:t>S6 · 7:37–7:42 · LEAD: CONTENT PRESENTER</a:t>
+              <a:t>E5 · 7:37–7:42 · LEAD: CONTENT PRESENTER</a:t>
             </a:r>
           </a:p>
           <a:p>
@@ -1505,7 +1499,7 @@
           <a:lstStyle/>
           <a:p>
             <a:r>
-              <a:t>S6 · 7:42–7:43 · LEAD: CONTENT PRESENTER · TRANSITION</a:t>
+              <a:t>E5 · 7:42–7:43 · LEAD: CONTENT PRESENTER · TRANSITION</a:t>
             </a:r>
           </a:p>
           <a:p>
@@ -1576,7 +1570,7 @@
           <a:lstStyle/>
           <a:p>
             <a:r>
-              <a:t>S6 · 7:43–8:16 · LEAD: CONTENT PRESENTER · SMALL GROUPS</a:t>
+              <a:t>E5 · 7:43–8:16 · LEAD: CONTENT PRESENTER · SMALL GROUPS</a:t>
             </a:r>
           </a:p>
           <a:p>
@@ -1652,7 +1646,7 @@
           <a:lstStyle/>
           <a:p>
             <a:r>
-              <a:t>S6 · 8:16–8:20 · LEAD: CONTAINER HOLDER</a:t>
+              <a:t>E5 · 8:16–8:20 · LEAD: CONTAINER HOLDER</a:t>
             </a:r>
           </a:p>
           <a:p>
@@ -1718,7 +1712,7 @@
           <a:lstStyle/>
           <a:p>
             <a:r>
-              <a:t>S6 · 8:20–8:24 · LEAD: CONTENT PRESENTER</a:t>
+              <a:t>E5 · 8:20–8:24 · LEAD: CONTENT PRESENTER</a:t>
             </a:r>
           </a:p>
           <a:p>
@@ -1784,7 +1778,7 @@
           <a:lstStyle/>
           <a:p>
             <a:r>
-              <a:t>S6 · 8:20–8:24 · LEAD: CONTENT PRESENTER</a:t>
+              <a:t>E5 · 8:20–8:24 · LEAD: CONTENT PRESENTER</a:t>
             </a:r>
           </a:p>
           <a:p>
@@ -1850,25 +1844,21 @@
           <a:lstStyle/>
           <a:p>
             <a:r>
-              <a:rPr lang="en-US" sz="1200"/>
-              <a:t>S6 · 8:24–8:28 · LEAD: BOTH LEADERS</a:t>
-            </a:r>
-          </a:p>
-          <a:p>
-            <a:r>
-              <a:rPr lang="en-US" sz="1200"/>
+              <a:t>E5 · 8:24–8:28 · LEAD: BOTH LEADERS</a:t>
+            </a:r>
+          </a:p>
+          <a:p>
+            <a:r>
               <a:t>BEATS:</a:t>
             </a:r>
           </a:p>
           <a:p>
             <a:r>
-              <a:rPr lang="en-US" sz="1200"/>
               <a:t>1. Your three things first; then the room's two questions; receive without defending — 'thank you.'</a:t>
             </a:r>
           </a:p>
           <a:p>
             <a:r>
-              <a:rPr lang="en-US" sz="1200"/>
               <a:t>2. On a night this heavy, read the room — a quiet, brief running usually lands better than skipping: the leader asking 'what would you do differently?' minutes after everyone confessed is the same muscle the room just practiced.</a:t>
             </a:r>
           </a:p>
@@ -1915,7 +1905,7 @@
           <a:lstStyle/>
           <a:p>
             <a:r>
-              <a:t>S6 · 8:28–8:30 · LEAD: CONTAINER HOLDER</a:t>
+              <a:t>E5 · 8:28–8:30 · LEAD: CONTAINER HOLDER</a:t>
             </a:r>
           </a:p>
           <a:p>
@@ -7804,7 +7794,7 @@
                 </a:solidFill>
                 <a:latin typeface="Calibri"/>
               </a:rPr>
-              <a:t>Sessions 7–8 · 9–10 · 11  —  three evenings, every other Tuesday · PROAPT, the Garden, Any Doubts?</a:t>
+              <a:t>Evenings 6 · 7 · 8  —  three evenings, every other Tuesday · PROAPT, the Garden, Any Doubts?</a:t>
             </a:r>
           </a:p>
         </p:txBody>
@@ -7982,7 +7972,7 @@
                 </a:solidFill>
                 <a:latin typeface="Calibri"/>
               </a:rPr>
-              <a:t>SESSION 6</a:t>
+              <a:t>EVENING 5</a:t>
             </a:r>
           </a:p>
           <a:p>
@@ -8216,7 +8206,7 @@
                 </a:solidFill>
                 <a:latin typeface="Calibri"/>
               </a:rPr>
-              <a:t>Session 6 stands deeper in the second box — </a:t>
+              <a:t>Evening 5 stands deeper in the second box — </a:t>
             </a:r>
             <a:r>
               <a:rPr sz="1800" b="1">
@@ -8400,7 +8390,7 @@
                 </a:solidFill>
                 <a:latin typeface="Cambria"/>
               </a:rPr>
-              <a:t>Session 6 — Tonight’s Road</a:t>
+              <a:t>Evening 5 — Tonight’s Road</a:t>
             </a:r>
           </a:p>
         </p:txBody>
@@ -9207,7 +9197,7 @@
                 </a:solidFill>
                 <a:latin typeface="Cambria"/>
               </a:rPr>
-              <a:t>Week 5 Check-In</a:t>
+              <a:t>Evening 4 Check-In</a:t>
             </a:r>
           </a:p>
         </p:txBody>

--- a/_implementation-notes/evening-series/FotH Evening Session 6 Slides DRAFT v1.pptx
+++ b/_implementation-notes/evening-series/FotH Evening Session 6 Slides DRAFT v1.pptx
@@ -7794,7 +7794,7 @@
                 </a:solidFill>
                 <a:latin typeface="Calibri"/>
               </a:rPr>
-              <a:t>Evenings 6 · 7 · 8  —  three evenings, every other Tuesday · PROAPT, the Garden, Any Doubts?</a:t>
+              <a:t>Evenings 6 · 7 · 8  —  three evenings, every two weeks · PROAPT, the Garden, Any Doubts?</a:t>
             </a:r>
           </a:p>
         </p:txBody>
